--- a/course/lectures/act-2-delegation-and-control/02-modeling/2-2-Modeling-2-Degrees-of-Semantic-Commitment.pptx
+++ b/course/lectures/act-2-delegation-and-control/02-modeling/2-2-Modeling-2-Degrees-of-Semantic-Commitment.pptx
@@ -9,13 +9,16 @@
     <p:sldId id="257" r:id="rId9"/>
     <p:sldId id="258" r:id="rId10"/>
     <p:sldId id="259" r:id="rId11"/>
+    <p:sldId id="281" r:id="rId33"/>
     <p:sldId id="260" r:id="rId12"/>
     <p:sldId id="261" r:id="rId13"/>
     <p:sldId id="262" r:id="rId14"/>
     <p:sldId id="263" r:id="rId15"/>
+    <p:sldId id="280" r:id="rId32"/>
     <p:sldId id="264" r:id="rId16"/>
     <p:sldId id="265" r:id="rId17"/>
     <p:sldId id="266" r:id="rId18"/>
+    <p:sldId id="279" r:id="rId31"/>
     <p:sldId id="267" r:id="rId19"/>
     <p:sldId id="268" r:id="rId20"/>
     <p:sldId id="269" r:id="rId21"/>
@@ -18339,6 +18342,357 @@
           </a:prstGeom>
         </p:spPr>
       </p:pic>
+    </p:spTree>
+  </p:cSld>
+  <p:clrMapOvr>
+    <a:masterClrMapping/>
+  </p:clrMapOvr>
+</p:sld>
+</file>
+
+<file path=ppt/slides/slide24.xml><?xml version="1.0" encoding="utf-8"?>
+<p:sld xmlns:a="http://schemas.openxmlformats.org/drawingml/2006/main" xmlns:p="http://schemas.openxmlformats.org/presentationml/2006/main" xmlns:r="http://schemas.openxmlformats.org/officeDocument/2006/relationships">
+  <p:cSld>
+    <p:spTree>
+      <p:nvGrpSpPr>
+        <p:cNvPr id="1" name=""/>
+        <p:cNvGrpSpPr/>
+        <p:nvPr/>
+      </p:nvGrpSpPr>
+      <p:grpSpPr/>
+      <p:sp>
+        <p:nvSpPr>
+          <p:cNvPr id="2" name="TextBox 1"/>
+          <p:cNvSpPr txBox="1"/>
+          <p:nvPr/>
+        </p:nvSpPr>
+        <p:spPr>
+          <a:xfrm>
+            <a:off x="685800" y="2176272"/>
+            <a:ext cx="7772400" cy="822960"/>
+          </a:xfrm>
+          <a:prstGeom prst="rect">
+            <a:avLst/>
+          </a:prstGeom>
+          <a:noFill/>
+        </p:spPr>
+        <p:txBody>
+          <a:bodyPr wrap="square">
+            <a:spAutoFit/>
+          </a:bodyPr>
+          <a:lstStyle/>
+          <a:p>
+            <a:r>
+              <a:rPr sz="2000" b="1">
+                <a:solidFill>
+                  <a:srgbClr val="8E6F3E"/>
+                </a:solidFill>
+              </a:rPr>
+              <a:t>SECTION 3  ·  LAB</a:t>
+            </a:r>
+          </a:p>
+        </p:txBody>
+      </p:sp>
+      <p:sp>
+        <p:nvSpPr>
+          <p:cNvPr id="3" name="TextBox 2"/>
+          <p:cNvSpPr txBox="1"/>
+          <p:nvPr/>
+        </p:nvSpPr>
+        <p:spPr>
+          <a:xfrm>
+            <a:off x="685800" y="2633472"/>
+            <a:ext cx="7772400" cy="822960"/>
+          </a:xfrm>
+          <a:prstGeom prst="rect">
+            <a:avLst/>
+          </a:prstGeom>
+          <a:noFill/>
+        </p:spPr>
+        <p:txBody>
+          <a:bodyPr wrap="square">
+            <a:spAutoFit/>
+          </a:bodyPr>
+          <a:lstStyle/>
+          <a:p>
+            <a:r>
+              <a:rPr sz="4000" b="0">
+                <a:solidFill>
+                  <a:srgbClr val="000000"/>
+                </a:solidFill>
+              </a:rPr>
+              <a:t>WORKING WITH SEMANTIC MODELS</a:t>
+            </a:r>
+          </a:p>
+        </p:txBody>
+      </p:sp>
+      <p:sp>
+        <p:nvSpPr>
+          <p:cNvPr id="4" name="TextBox 3"/>
+          <p:cNvSpPr txBox="1"/>
+          <p:nvPr/>
+        </p:nvSpPr>
+        <p:spPr>
+          <a:xfrm>
+            <a:off x="685800" y="3730752"/>
+            <a:ext cx="7772400" cy="822960"/>
+          </a:xfrm>
+          <a:prstGeom prst="rect">
+            <a:avLst/>
+          </a:prstGeom>
+          <a:noFill/>
+        </p:spPr>
+        <p:txBody>
+          <a:bodyPr wrap="square">
+            <a:spAutoFit/>
+          </a:bodyPr>
+          <a:lstStyle/>
+          <a:p>
+            <a:r>
+              <a:rPr sz="2400" b="0">
+                <a:solidFill>
+                  <a:srgbClr val="5C4826"/>
+                </a:solidFill>
+              </a:rPr>
+              <a:t>What is it like to engineer with one?</a:t>
+            </a:r>
+          </a:p>
+        </p:txBody>
+      </p:sp>
+    </p:spTree>
+  </p:cSld>
+  <p:clrMapOvr>
+    <a:masterClrMapping/>
+  </p:clrMapOvr>
+</p:sld>
+</file>
+
+<file path=ppt/slides/slide25.xml><?xml version="1.0" encoding="utf-8"?>
+<p:sld xmlns:a="http://schemas.openxmlformats.org/drawingml/2006/main" xmlns:p="http://schemas.openxmlformats.org/presentationml/2006/main" xmlns:r="http://schemas.openxmlformats.org/officeDocument/2006/relationships">
+  <p:cSld>
+    <p:spTree>
+      <p:nvGrpSpPr>
+        <p:cNvPr id="1" name=""/>
+        <p:cNvGrpSpPr/>
+        <p:nvPr/>
+      </p:nvGrpSpPr>
+      <p:grpSpPr/>
+      <p:sp>
+        <p:nvSpPr>
+          <p:cNvPr id="2" name="TextBox 1"/>
+          <p:cNvSpPr txBox="1"/>
+          <p:nvPr/>
+        </p:nvSpPr>
+        <p:spPr>
+          <a:xfrm>
+            <a:off x="685800" y="2176272"/>
+            <a:ext cx="7772400" cy="822960"/>
+          </a:xfrm>
+          <a:prstGeom prst="rect">
+            <a:avLst/>
+          </a:prstGeom>
+          <a:noFill/>
+        </p:spPr>
+        <p:txBody>
+          <a:bodyPr wrap="square">
+            <a:spAutoFit/>
+          </a:bodyPr>
+          <a:lstStyle/>
+          <a:p>
+            <a:r>
+              <a:rPr sz="2000" b="1">
+                <a:solidFill>
+                  <a:srgbClr val="8E6F3E"/>
+                </a:solidFill>
+              </a:rPr>
+              <a:t>SECTION 2</a:t>
+            </a:r>
+          </a:p>
+        </p:txBody>
+      </p:sp>
+      <p:sp>
+        <p:nvSpPr>
+          <p:cNvPr id="3" name="TextBox 2"/>
+          <p:cNvSpPr txBox="1"/>
+          <p:nvPr/>
+        </p:nvSpPr>
+        <p:spPr>
+          <a:xfrm>
+            <a:off x="685800" y="2633472"/>
+            <a:ext cx="7772400" cy="822960"/>
+          </a:xfrm>
+          <a:prstGeom prst="rect">
+            <a:avLst/>
+          </a:prstGeom>
+          <a:noFill/>
+        </p:spPr>
+        <p:txBody>
+          <a:bodyPr wrap="square">
+            <a:spAutoFit/>
+          </a:bodyPr>
+          <a:lstStyle/>
+          <a:p>
+            <a:r>
+              <a:rPr sz="4000" b="0">
+                <a:solidFill>
+                  <a:srgbClr val="000000"/>
+                </a:solidFill>
+              </a:rPr>
+              <a:t>ENGINEERING WITH SEMANTIC MODELS</a:t>
+            </a:r>
+          </a:p>
+        </p:txBody>
+      </p:sp>
+      <p:sp>
+        <p:nvSpPr>
+          <p:cNvPr id="4" name="TextBox 3"/>
+          <p:cNvSpPr txBox="1"/>
+          <p:nvPr/>
+        </p:nvSpPr>
+        <p:spPr>
+          <a:xfrm>
+            <a:off x="685800" y="3730752"/>
+            <a:ext cx="7772400" cy="822960"/>
+          </a:xfrm>
+          <a:prstGeom prst="rect">
+            <a:avLst/>
+          </a:prstGeom>
+          <a:noFill/>
+        </p:spPr>
+        <p:txBody>
+          <a:bodyPr wrap="square">
+            <a:spAutoFit/>
+          </a:bodyPr>
+          <a:lstStyle/>
+          <a:p>
+            <a:r>
+              <a:rPr sz="2400" b="0">
+                <a:solidFill>
+                  <a:srgbClr val="5C4826"/>
+                </a:solidFill>
+              </a:rPr>
+              <a:t>What can we do because the model carries meaning?</a:t>
+            </a:r>
+          </a:p>
+        </p:txBody>
+      </p:sp>
+    </p:spTree>
+  </p:cSld>
+  <p:clrMapOvr>
+    <a:masterClrMapping/>
+  </p:clrMapOvr>
+</p:sld>
+</file>
+
+<file path=ppt/slides/slide26.xml><?xml version="1.0" encoding="utf-8"?>
+<p:sld xmlns:a="http://schemas.openxmlformats.org/drawingml/2006/main" xmlns:p="http://schemas.openxmlformats.org/presentationml/2006/main" xmlns:r="http://schemas.openxmlformats.org/officeDocument/2006/relationships">
+  <p:cSld>
+    <p:spTree>
+      <p:nvGrpSpPr>
+        <p:cNvPr id="1" name=""/>
+        <p:cNvGrpSpPr/>
+        <p:nvPr/>
+      </p:nvGrpSpPr>
+      <p:grpSpPr/>
+      <p:sp>
+        <p:nvSpPr>
+          <p:cNvPr id="2" name="TextBox 1"/>
+          <p:cNvSpPr txBox="1"/>
+          <p:nvPr/>
+        </p:nvSpPr>
+        <p:spPr>
+          <a:xfrm>
+            <a:off x="685800" y="2176272"/>
+            <a:ext cx="7772400" cy="822960"/>
+          </a:xfrm>
+          <a:prstGeom prst="rect">
+            <a:avLst/>
+          </a:prstGeom>
+          <a:noFill/>
+        </p:spPr>
+        <p:txBody>
+          <a:bodyPr wrap="square">
+            <a:spAutoFit/>
+          </a:bodyPr>
+          <a:lstStyle/>
+          <a:p>
+            <a:r>
+              <a:rPr sz="2000" b="1">
+                <a:solidFill>
+                  <a:srgbClr val="8E6F3E"/>
+                </a:solidFill>
+              </a:rPr>
+              <a:t>SECTION 1</a:t>
+            </a:r>
+          </a:p>
+        </p:txBody>
+      </p:sp>
+      <p:sp>
+        <p:nvSpPr>
+          <p:cNvPr id="3" name="TextBox 2"/>
+          <p:cNvSpPr txBox="1"/>
+          <p:nvPr/>
+        </p:nvSpPr>
+        <p:spPr>
+          <a:xfrm>
+            <a:off x="685800" y="2633472"/>
+            <a:ext cx="7772400" cy="822960"/>
+          </a:xfrm>
+          <a:prstGeom prst="rect">
+            <a:avLst/>
+          </a:prstGeom>
+          <a:noFill/>
+        </p:spPr>
+        <p:txBody>
+          <a:bodyPr wrap="square">
+            <a:spAutoFit/>
+          </a:bodyPr>
+          <a:lstStyle/>
+          <a:p>
+            <a:r>
+              <a:rPr sz="4000" b="0">
+                <a:solidFill>
+                  <a:srgbClr val="000000"/>
+                </a:solidFill>
+              </a:rPr>
+              <a:t>DEGREES OF SEMANTIC COMMITMENT</a:t>
+            </a:r>
+          </a:p>
+        </p:txBody>
+      </p:sp>
+      <p:sp>
+        <p:nvSpPr>
+          <p:cNvPr id="4" name="TextBox 3"/>
+          <p:cNvSpPr txBox="1"/>
+          <p:nvPr/>
+        </p:nvSpPr>
+        <p:spPr>
+          <a:xfrm>
+            <a:off x="685800" y="3730752"/>
+            <a:ext cx="7772400" cy="822960"/>
+          </a:xfrm>
+          <a:prstGeom prst="rect">
+            <a:avLst/>
+          </a:prstGeom>
+          <a:noFill/>
+        </p:spPr>
+        <p:txBody>
+          <a:bodyPr wrap="square">
+            <a:spAutoFit/>
+          </a:bodyPr>
+          <a:lstStyle/>
+          <a:p>
+            <a:r>
+              <a:rPr sz="2400" b="0">
+                <a:solidFill>
+                  <a:srgbClr val="5C4826"/>
+                </a:solidFill>
+              </a:rPr>
+              <a:t>How much meaning does the representation carry?</a:t>
+            </a:r>
+          </a:p>
+        </p:txBody>
+      </p:sp>
     </p:spTree>
   </p:cSld>
   <p:clrMapOvr>

--- a/course/lectures/act-2-delegation-and-control/02-modeling/2-2-Modeling-2-Degrees-of-Semantic-Commitment.pptx
+++ b/course/lectures/act-2-delegation-and-control/02-modeling/2-2-Modeling-2-Degrees-of-Semantic-Commitment.pptx
@@ -14396,7 +14396,7 @@
                 </a:solidFill>
                 <a:latin typeface="Calibri"/>
               </a:rPr>
-              <a:t>§4 — Reasoning with SysML and KerML</a:t>
+              <a:t>Section 4 — Reasoning with SysML and KerML</a:t>
             </a:r>
           </a:p>
         </p:txBody>
@@ -19439,7 +19439,7 @@
                 </a:solidFill>
                 <a:latin typeface="Calibri"/>
               </a:rPr>
-              <a:t>§3's model named its missing distinction — operating modes. §4 modeled them — and still
+              <a:t>Section 3's model named its missing distinction — operating modes. §4 modeled them — and still
 has a boundary. </a:t>
             </a:r>
             <a:r>
@@ -20936,7 +20936,7 @@
         <p:spPr>
           <a:xfrm>
             <a:off x="548640" y="3017520"/>
-            <a:ext cx="502920" cy="566928"/>
+            <a:ext cx="1051560" cy="566928"/>
           </a:xfrm>
           <a:prstGeom prst="rect">
             <a:avLst/>
@@ -20975,7 +20975,7 @@
                 </a:solidFill>
                 <a:latin typeface="Calibri"/>
               </a:rPr>
-              <a:t>§1</a:t>
+              <a:t>SECTION 1</a:t>
             </a:r>
           </a:p>
         </p:txBody>
@@ -20988,7 +20988,7 @@
         </p:nvSpPr>
         <p:spPr>
           <a:xfrm>
-            <a:off x="1234440" y="3017520"/>
+            <a:off x="1828800" y="3017520"/>
             <a:ext cx="3931920" cy="566928"/>
           </a:xfrm>
           <a:prstGeom prst="rect">
@@ -21063,7 +21063,7 @@
         <p:spPr>
           <a:xfrm>
             <a:off x="548640" y="3749039"/>
-            <a:ext cx="502920" cy="566928"/>
+            <a:ext cx="1051560" cy="566928"/>
           </a:xfrm>
           <a:prstGeom prst="rect">
             <a:avLst/>
@@ -21102,7 +21102,7 @@
                 </a:solidFill>
                 <a:latin typeface="Calibri"/>
               </a:rPr>
-              <a:t>§2</a:t>
+              <a:t>SECTION 2</a:t>
             </a:r>
           </a:p>
         </p:txBody>
@@ -21115,7 +21115,7 @@
         </p:nvSpPr>
         <p:spPr>
           <a:xfrm>
-            <a:off x="1234440" y="3749039"/>
+            <a:off x="1828800" y="3749039"/>
             <a:ext cx="3931920" cy="566928"/>
           </a:xfrm>
           <a:prstGeom prst="rect">
@@ -21190,7 +21190,7 @@
         <p:spPr>
           <a:xfrm>
             <a:off x="548640" y="4480559"/>
-            <a:ext cx="502920" cy="566928"/>
+            <a:ext cx="1051560" cy="566928"/>
           </a:xfrm>
           <a:prstGeom prst="rect">
             <a:avLst/>
@@ -21229,7 +21229,7 @@
                 </a:solidFill>
                 <a:latin typeface="Calibri"/>
               </a:rPr>
-              <a:t>§3</a:t>
+              <a:t>SECTION 3</a:t>
             </a:r>
           </a:p>
         </p:txBody>
@@ -21242,7 +21242,7 @@
         </p:nvSpPr>
         <p:spPr>
           <a:xfrm>
-            <a:off x="1234440" y="4480559"/>
+            <a:off x="1828800" y="4480559"/>
             <a:ext cx="3931920" cy="566928"/>
           </a:xfrm>
           <a:prstGeom prst="rect">
@@ -21333,7 +21333,7 @@
         <p:spPr>
           <a:xfrm>
             <a:off x="548640" y="5212079"/>
-            <a:ext cx="502920" cy="566928"/>
+            <a:ext cx="1051560" cy="566928"/>
           </a:xfrm>
           <a:prstGeom prst="rect">
             <a:avLst/>
@@ -21372,7 +21372,7 @@
                 </a:solidFill>
                 <a:latin typeface="Calibri"/>
               </a:rPr>
-              <a:t>§4</a:t>
+              <a:t>SECTION 4</a:t>
             </a:r>
           </a:p>
         </p:txBody>
@@ -21385,7 +21385,7 @@
         </p:nvSpPr>
         <p:spPr>
           <a:xfrm>
-            <a:off x="1234440" y="5212079"/>
+            <a:off x="1828800" y="5212079"/>
             <a:ext cx="3931920" cy="566928"/>
           </a:xfrm>
           <a:prstGeom prst="rect">

--- a/course/lectures/act-2-delegation-and-control/02-modeling/2-2-Modeling-2-Degrees-of-Semantic-Commitment.pptx
+++ b/course/lectures/act-2-delegation-and-control/02-modeling/2-2-Modeling-2-Degrees-of-Semantic-Commitment.pptx
@@ -670,6 +670,12 @@
               <a:t>The §2 synthesis: machine-operable semantics → generation challenge → the agentic answer. Agents can cross the realization gap a purposeful model deliberately leaves. Don't teach 'agents should extend the language' — teach promotion of recurring consequential knowledge into durable structure.</a:t>
             </a:r>
           </a:p>
+          <a:p/>
+          <a:p>
+            <a:r>
+              <a:t>Some relationships are generation, some delegation, some validation back against the model.</a:t>
+            </a:r>
+          </a:p>
         </p:txBody>
       </p:sp>
       <p:sp>
@@ -948,6 +954,12 @@
           <a:p>
             <a:r>
               <a:t>Release students into the activity. The numbers come from the shipped model: 9 allocations totalling 232 KB against 256 KiB; doubling telemetry-queue breaks the pinned requirement by 8 KB; restoring a 20% margin needs ≤204.8 KB. Largest single allocation: model-weights at 72 KB (31% of budget).</a:t>
+            </a:r>
+          </a:p>
+          <a:p/>
+          <a:p>
+            <a:r>
+              <a:t>The model's KB tokens are binary: 256 KB here is exactly 256 KiB.</a:t>
             </a:r>
           </a:p>
         </p:txBody>
@@ -5185,7 +5197,7 @@
           <a:p>
             <a:pPr algn="ctr"/>
             <a:r>
-              <a:rPr sz="1500" b="1" i="1" spc="200">
+              <a:rPr sz="2400" b="1" i="1" spc="200">
                 <a:solidFill>
                   <a:srgbClr val="353638"/>
                 </a:solidFill>
@@ -5220,7 +5232,7 @@
           <a:p>
             <a:pPr algn="ctr"/>
             <a:r>
-              <a:rPr sz="1100" b="0" i="1" spc="160">
+              <a:rPr sz="1800" b="0" i="1" spc="160">
                 <a:solidFill>
                   <a:srgbClr val="353638"/>
                 </a:solidFill>
@@ -5255,7 +5267,7 @@
           <a:p>
             <a:pPr algn="ctr"/>
             <a:r>
-              <a:rPr sz="3100" b="0" i="0">
+              <a:rPr sz="2000" b="0" i="0">
                 <a:solidFill>
                   <a:srgbClr val="000000"/>
                 </a:solidFill>
@@ -5290,7 +5302,7 @@
           <a:p>
             <a:pPr algn="ctr"/>
             <a:r>
-              <a:rPr sz="1600" b="1" i="1">
+              <a:rPr sz="2000" b="1" i="1">
                 <a:solidFill>
                   <a:srgbClr val="8E6F3E"/>
                 </a:solidFill>
@@ -5325,7 +5337,7 @@
           <a:p>
             <a:pPr algn="ctr"/>
             <a:r>
-              <a:rPr sz="1300" b="0" i="1">
+              <a:rPr sz="1800" b="0" i="1">
                 <a:solidFill>
                   <a:srgbClr val="353638"/>
                 </a:solidFill>
@@ -5337,7 +5349,7 @@
           <a:p>
             <a:pPr algn="ctr"/>
             <a:r>
-              <a:rPr sz="1300" b="0" i="1">
+              <a:rPr sz="1800" b="0" i="1">
                 <a:solidFill>
                   <a:srgbClr val="353638"/>
                 </a:solidFill>
@@ -5392,7 +5404,7 @@
           <a:p>
             <a:pPr algn="ctr"/>
             <a:r>
-              <a:rPr sz="1200" b="0" i="0">
+              <a:rPr sz="1800" b="0" i="0">
                 <a:solidFill>
                   <a:srgbClr val="5C4826"/>
                 </a:solidFill>
@@ -5491,7 +5503,7 @@
           <a:p>
             <a:pPr algn="ctr"/>
             <a:r>
-              <a:rPr sz="1200" b="0" i="0">
+              <a:rPr sz="1800" b="0" i="0">
                 <a:solidFill>
                   <a:srgbClr val="5C4826"/>
                 </a:solidFill>
@@ -5590,7 +5602,7 @@
           <a:p>
             <a:pPr algn="ctr"/>
             <a:r>
-              <a:rPr sz="1200" b="0" i="0">
+              <a:rPr sz="1800" b="0" i="0">
                 <a:solidFill>
                   <a:srgbClr val="5C4826"/>
                 </a:solidFill>
@@ -5689,7 +5701,7 @@
           <a:p>
             <a:pPr algn="ctr"/>
             <a:r>
-              <a:rPr sz="1200" b="1" i="0">
+              <a:rPr sz="1800" b="1" i="0">
                 <a:solidFill>
                   <a:srgbClr val="5C4826"/>
                 </a:solidFill>
@@ -5724,7 +5736,7 @@
           <a:p>
             <a:pPr algn="ctr"/>
             <a:r>
-              <a:rPr sz="1100" b="0" i="1">
+              <a:rPr sz="1800" b="0" i="1">
                 <a:solidFill>
                   <a:srgbClr val="555960"/>
                 </a:solidFill>
@@ -5759,7 +5771,7 @@
           <a:p>
             <a:pPr algn="ctr"/>
             <a:r>
-              <a:rPr sz="1300" b="0" i="0">
+              <a:rPr sz="1800" b="0" i="0">
                 <a:solidFill>
                   <a:srgbClr val="353638"/>
                 </a:solidFill>
@@ -5771,7 +5783,7 @@
           <a:p>
             <a:pPr algn="ctr"/>
             <a:r>
-              <a:rPr sz="1300" b="0" i="0">
+              <a:rPr sz="1800" b="0" i="0">
                 <a:solidFill>
                   <a:srgbClr val="353638"/>
                 </a:solidFill>
@@ -5915,7 +5927,7 @@
           <a:lstStyle/>
           <a:p>
             <a:r>
-              <a:rPr sz="4000" b="0">
+              <a:rPr sz="2000" b="0">
                 <a:solidFill>
                   <a:srgbClr val="000000"/>
                 </a:solidFill>
@@ -5948,7 +5960,7 @@
           <a:lstStyle/>
           <a:p>
             <a:r>
-              <a:rPr sz="2400" b="0">
+              <a:rPr sz="2000" b="0">
                 <a:solidFill>
                   <a:srgbClr val="5C4826"/>
                 </a:solidFill>
@@ -6000,7 +6012,7 @@
           <a:p>
             <a:pPr algn="l"/>
             <a:r>
-              <a:rPr sz="1900" b="0" i="0" spc="140">
+              <a:rPr sz="2400" b="0" i="0" spc="140">
                 <a:solidFill>
                   <a:srgbClr val="353638"/>
                 </a:solidFill>
@@ -6101,7 +6113,7 @@
               </a:lnSpc>
             </a:pPr>
             <a:r>
-              <a:rPr sz="1500" b="1" i="0">
+              <a:rPr sz="2000" b="1" i="0">
                 <a:solidFill>
                   <a:srgbClr val="FFFFFF"/>
                 </a:solidFill>
@@ -6117,7 +6129,7 @@
               </a:lnSpc>
             </a:pPr>
             <a:r>
-              <a:rPr sz="1500" b="1" i="0">
+              <a:rPr sz="2000" b="1" i="0">
                 <a:solidFill>
                   <a:srgbClr val="FFFFFF"/>
                 </a:solidFill>
@@ -6128,43 +6140,6 @@
           </a:p>
         </p:txBody>
       </p:sp>
-      <p:cxnSp>
-        <p:nvCxnSpPr>
-          <p:cNvPr id="5" name="Connector 4"/>
-          <p:cNvCxnSpPr/>
-          <p:nvPr/>
-        </p:nvCxnSpPr>
-        <p:spPr>
-          <a:xfrm flipV="1">
-            <a:off x="2377440" y="1435607"/>
-            <a:ext cx="640080" cy="1719073"/>
-          </a:xfrm>
-          <a:prstGeom prst="line">
-            <a:avLst/>
-          </a:prstGeom>
-          <a:ln w="15875">
-            <a:solidFill>
-              <a:srgbClr val="C9B991"/>
-            </a:solidFill>
-            <a:tailEnd type="triangle" w="med" len="med"/>
-          </a:ln>
-          <a:effectLst/>
-        </p:spPr>
-        <p:style>
-          <a:lnRef idx="2">
-            <a:schemeClr val="accent1"/>
-          </a:lnRef>
-          <a:fillRef idx="0">
-            <a:schemeClr val="accent1"/>
-          </a:fillRef>
-          <a:effectRef idx="1">
-            <a:schemeClr val="accent1"/>
-          </a:effectRef>
-          <a:fontRef idx="minor">
-            <a:schemeClr val="tx1"/>
-          </a:fontRef>
-        </p:style>
-      </p:cxnSp>
       <p:sp>
         <p:nvSpPr>
           <p:cNvPr id="6" name="Rectangle 5"/>
@@ -6207,7 +6182,7 @@
           <a:p>
             <a:pPr algn="ctr"/>
             <a:r>
-              <a:rPr sz="1300" b="1" i="0">
+              <a:rPr sz="2000" b="1" i="0">
                 <a:solidFill>
                   <a:srgbClr val="5C4826"/>
                 </a:solidFill>
@@ -6266,54 +6241,17 @@
               </a:lnSpc>
             </a:pPr>
             <a:r>
-              <a:rPr sz="1150" b="0" i="0">
+              <a:rPr sz="2000" b="0" i="0">
                 <a:solidFill>
                   <a:srgbClr val="353638"/>
                 </a:solidFill>
                 <a:latin typeface="Calibri"/>
               </a:rPr>
-              <a:t>“which buffers does the radio stack own?”</a:t>
-            </a:r>
-          </a:p>
-        </p:txBody>
-      </p:sp>
-      <p:cxnSp>
-        <p:nvCxnSpPr>
-          <p:cNvPr id="8" name="Connector 7"/>
-          <p:cNvCxnSpPr/>
-          <p:nvPr/>
-        </p:nvCxnSpPr>
-        <p:spPr>
-          <a:xfrm flipV="1">
-            <a:off x="2377440" y="2368296"/>
-            <a:ext cx="640080" cy="786384"/>
-          </a:xfrm>
-          <a:prstGeom prst="line">
-            <a:avLst/>
-          </a:prstGeom>
-          <a:ln w="15875">
-            <a:solidFill>
-              <a:srgbClr val="C9B991"/>
-            </a:solidFill>
-            <a:tailEnd type="triangle" w="med" len="med"/>
-          </a:ln>
-          <a:effectLst/>
-        </p:spPr>
-        <p:style>
-          <a:lnRef idx="2">
-            <a:schemeClr val="accent1"/>
-          </a:lnRef>
-          <a:fillRef idx="0">
-            <a:schemeClr val="accent1"/>
-          </a:fillRef>
-          <a:effectRef idx="1">
-            <a:schemeClr val="accent1"/>
-          </a:effectRef>
-          <a:fontRef idx="minor">
-            <a:schemeClr val="tx1"/>
-          </a:fontRef>
-        </p:style>
-      </p:cxnSp>
+              <a:t>“Which buffers does the radio stack own?”</a:t>
+            </a:r>
+          </a:p>
+        </p:txBody>
+      </p:sp>
       <p:sp>
         <p:nvSpPr>
           <p:cNvPr id="9" name="Rectangle 8"/>
@@ -6356,7 +6294,7 @@
           <a:p>
             <a:pPr algn="ctr"/>
             <a:r>
-              <a:rPr sz="1300" b="1" i="0">
+              <a:rPr sz="2000" b="1" i="0">
                 <a:solidFill>
                   <a:srgbClr val="5C4826"/>
                 </a:solidFill>
@@ -6415,54 +6353,17 @@
               </a:lnSpc>
             </a:pPr>
             <a:r>
-              <a:rPr sz="1150" b="0" i="0">
+              <a:rPr sz="2000" b="0" i="0">
                 <a:solidFill>
                   <a:srgbClr val="353638"/>
                 </a:solidFill>
                 <a:latin typeface="Calibri"/>
               </a:rPr>
-              <a:t>join two models: “does an optional component feed an essential one?”</a:t>
-            </a:r>
-          </a:p>
-        </p:txBody>
-      </p:sp>
-      <p:cxnSp>
-        <p:nvCxnSpPr>
-          <p:cNvPr id="11" name="Connector 10"/>
-          <p:cNvCxnSpPr/>
-          <p:nvPr/>
-        </p:nvCxnSpPr>
-        <p:spPr>
-          <a:xfrm>
-            <a:off x="2377440" y="3154680"/>
-            <a:ext cx="640080" cy="146304"/>
-          </a:xfrm>
-          <a:prstGeom prst="line">
-            <a:avLst/>
-          </a:prstGeom>
-          <a:ln w="15875">
-            <a:solidFill>
-              <a:srgbClr val="C9B991"/>
-            </a:solidFill>
-            <a:tailEnd type="triangle" w="med" len="med"/>
-          </a:ln>
-          <a:effectLst/>
-        </p:spPr>
-        <p:style>
-          <a:lnRef idx="2">
-            <a:schemeClr val="accent1"/>
-          </a:lnRef>
-          <a:fillRef idx="0">
-            <a:schemeClr val="accent1"/>
-          </a:fillRef>
-          <a:effectRef idx="1">
-            <a:schemeClr val="accent1"/>
-          </a:effectRef>
-          <a:fontRef idx="minor">
-            <a:schemeClr val="tx1"/>
-          </a:fontRef>
-        </p:style>
-      </p:cxnSp>
+              <a:t>“Does an optional component feed an essential one?”</a:t>
+            </a:r>
+          </a:p>
+        </p:txBody>
+      </p:sp>
       <p:sp>
         <p:nvSpPr>
           <p:cNvPr id="12" name="Rectangle 11"/>
@@ -6505,7 +6406,7 @@
           <a:p>
             <a:pPr algn="ctr"/>
             <a:r>
-              <a:rPr sz="1300" b="1" i="0">
+              <a:rPr sz="2000" b="1" i="0">
                 <a:solidFill>
                   <a:srgbClr val="5C4826"/>
                 </a:solidFill>
@@ -6564,54 +6465,17 @@
               </a:lnSpc>
             </a:pPr>
             <a:r>
-              <a:rPr sz="1150" b="0" i="0">
+              <a:rPr sz="2000" b="0" i="0">
                 <a:solidFill>
                   <a:srgbClr val="353638"/>
                 </a:solidFill>
                 <a:latin typeface="Calibri"/>
               </a:rPr>
-              <a:t>“do the allocations fit the 256 KiB budget — with how much margin?”</a:t>
-            </a:r>
-          </a:p>
-        </p:txBody>
-      </p:sp>
-      <p:cxnSp>
-        <p:nvCxnSpPr>
-          <p:cNvPr id="14" name="Connector 13"/>
-          <p:cNvCxnSpPr/>
-          <p:nvPr/>
-        </p:nvCxnSpPr>
-        <p:spPr>
-          <a:xfrm>
-            <a:off x="2377440" y="3154680"/>
-            <a:ext cx="640080" cy="1078992"/>
-          </a:xfrm>
-          <a:prstGeom prst="line">
-            <a:avLst/>
-          </a:prstGeom>
-          <a:ln w="15875">
-            <a:solidFill>
-              <a:srgbClr val="C9B991"/>
-            </a:solidFill>
-            <a:tailEnd type="triangle" w="med" len="med"/>
-          </a:ln>
-          <a:effectLst/>
-        </p:spPr>
-        <p:style>
-          <a:lnRef idx="2">
-            <a:schemeClr val="accent1"/>
-          </a:lnRef>
-          <a:fillRef idx="0">
-            <a:schemeClr val="accent1"/>
-          </a:fillRef>
-          <a:effectRef idx="1">
-            <a:schemeClr val="accent1"/>
-          </a:effectRef>
-          <a:fontRef idx="minor">
-            <a:schemeClr val="tx1"/>
-          </a:fontRef>
-        </p:style>
-      </p:cxnSp>
+              <a:t>“Do allocations fit the 256 KiB budget?”</a:t>
+            </a:r>
+          </a:p>
+        </p:txBody>
+      </p:sp>
       <p:sp>
         <p:nvSpPr>
           <p:cNvPr id="15" name="Rectangle 14"/>
@@ -6654,7 +6518,7 @@
           <a:p>
             <a:pPr algn="ctr"/>
             <a:r>
-              <a:rPr sz="1300" b="1" i="0">
+              <a:rPr sz="2000" b="1" i="0">
                 <a:solidFill>
                   <a:srgbClr val="5C4826"/>
                 </a:solidFill>
@@ -6713,54 +6577,17 @@
               </a:lnSpc>
             </a:pPr>
             <a:r>
-              <a:rPr sz="1150" b="0" i="0">
+              <a:rPr sz="2000" b="0" i="0">
                 <a:solidFill>
                   <a:srgbClr val="353638"/>
                 </a:solidFill>
                 <a:latin typeface="Calibri"/>
               </a:rPr>
-              <a:t>“is this comparison licensed by a declared ordered domain?”</a:t>
-            </a:r>
-          </a:p>
-        </p:txBody>
-      </p:sp>
-      <p:cxnSp>
-        <p:nvCxnSpPr>
-          <p:cNvPr id="17" name="Connector 16"/>
-          <p:cNvCxnSpPr/>
-          <p:nvPr/>
-        </p:nvCxnSpPr>
-        <p:spPr>
-          <a:xfrm>
-            <a:off x="2377440" y="3154680"/>
-            <a:ext cx="640080" cy="2011680"/>
-          </a:xfrm>
-          <a:prstGeom prst="line">
-            <a:avLst/>
-          </a:prstGeom>
-          <a:ln w="15875">
-            <a:solidFill>
-              <a:srgbClr val="C9B991"/>
-            </a:solidFill>
-            <a:tailEnd type="triangle" w="med" len="med"/>
-          </a:ln>
-          <a:effectLst/>
-        </p:spPr>
-        <p:style>
-          <a:lnRef idx="2">
-            <a:schemeClr val="accent1"/>
-          </a:lnRef>
-          <a:fillRef idx="0">
-            <a:schemeClr val="accent1"/>
-          </a:fillRef>
-          <a:effectRef idx="1">
-            <a:schemeClr val="accent1"/>
-          </a:effectRef>
-          <a:fontRef idx="minor">
-            <a:schemeClr val="tx1"/>
-          </a:fontRef>
-        </p:style>
-      </p:cxnSp>
+              <a:t>“Is this comparison semantically valid?”</a:t>
+            </a:r>
+          </a:p>
+        </p:txBody>
+      </p:sp>
       <p:sp>
         <p:nvSpPr>
           <p:cNvPr id="18" name="Rectangle 17"/>
@@ -6803,7 +6630,7 @@
           <a:p>
             <a:pPr algn="ctr"/>
             <a:r>
-              <a:rPr sz="1300" b="1" i="0">
+              <a:rPr sz="2000" b="1" i="0">
                 <a:solidFill>
                   <a:srgbClr val="5C4826"/>
                 </a:solidFill>
@@ -6862,48 +6689,13 @@
               </a:lnSpc>
             </a:pPr>
             <a:r>
-              <a:rPr sz="1150" b="0" i="0">
+              <a:rPr sz="2000" b="0" i="0">
                 <a:solidFill>
                   <a:srgbClr val="353638"/>
                 </a:solidFill>
                 <a:latin typeface="Calibri"/>
               </a:rPr>
-              <a:t>“emit the interface types from the one declared schema”</a:t>
-            </a:r>
-          </a:p>
-        </p:txBody>
-      </p:sp>
-      <p:sp>
-        <p:nvSpPr>
-          <p:cNvPr id="20" name="TextBox 19"/>
-          <p:cNvSpPr txBox="1"/>
-          <p:nvPr/>
-        </p:nvSpPr>
-        <p:spPr>
-          <a:xfrm>
-            <a:off x="3017520" y="5760720"/>
-            <a:ext cx="5577840" cy="274320"/>
-          </a:xfrm>
-          <a:prstGeom prst="rect">
-            <a:avLst/>
-          </a:prstGeom>
-          <a:noFill/>
-        </p:spPr>
-        <p:txBody>
-          <a:bodyPr wrap="square" anchor="t" lIns="0" rIns="0" tIns="0" bIns="0">
-            <a:spAutoFit/>
-          </a:bodyPr>
-          <a:lstStyle/>
-          <a:p>
-            <a:pPr algn="l"/>
-            <a:r>
-              <a:rPr sz="1100" b="0" i="1">
-                <a:solidFill>
-                  <a:srgbClr val="555960"/>
-                </a:solidFill>
-                <a:latin typeface="Calibri"/>
-              </a:rPr>
-              <a:t>one concrete example each — the first four return as questions in §3's lab</a:t>
+              <a:t>“Emit interface types from the schema.”</a:t>
             </a:r>
           </a:p>
         </p:txBody>
@@ -6950,7 +6742,7 @@
           <a:p>
             <a:pPr algn="ctr"/>
             <a:r>
-              <a:rPr sz="1400" b="1" i="0">
+              <a:rPr sz="1800" b="1" i="0">
                 <a:solidFill>
                   <a:srgbClr val="FFFFFF"/>
                 </a:solidFill>
@@ -7020,6 +6812,263 @@
           </a:prstGeom>
         </p:spPr>
       </p:pic>
+      <p:cxnSp>
+        <p:nvCxnSpPr>
+          <p:cNvPr id="5" name="Connector 4"/>
+          <p:cNvCxnSpPr/>
+          <p:nvPr/>
+        </p:nvCxnSpPr>
+        <p:spPr>
+          <a:xfrm>
+            <a:off x="2377440" y="3168396"/>
+            <a:ext cx="91" cy="0"/>
+          </a:xfrm>
+          <a:prstGeom prst="line">
+            <a:avLst/>
+          </a:prstGeom>
+          <a:ln w="15875">
+            <a:solidFill>
+              <a:srgbClr val="C9B991"/>
+            </a:solidFill>
+          </a:ln>
+          <a:effectLst/>
+        </p:spPr>
+        <p:style>
+          <a:lnRef idx="2">
+            <a:schemeClr val="accent1"/>
+          </a:lnRef>
+          <a:fillRef idx="0">
+            <a:schemeClr val="accent1"/>
+          </a:fillRef>
+          <a:effectRef idx="1">
+            <a:schemeClr val="accent1"/>
+          </a:effectRef>
+          <a:fontRef idx="minor">
+            <a:schemeClr val="tx1"/>
+          </a:fontRef>
+        </p:style>
+      </p:cxnSp>
+      <p:cxnSp>
+        <p:nvCxnSpPr>
+          <p:cNvPr id="5" name="Connector 4"/>
+          <p:cNvCxnSpPr/>
+          <p:nvPr/>
+        </p:nvCxnSpPr>
+        <p:spPr>
+          <a:xfrm>
+            <a:off x="2377440" y="1303020"/>
+            <a:ext cx="0" cy="3730752"/>
+          </a:xfrm>
+          <a:prstGeom prst="line">
+            <a:avLst/>
+          </a:prstGeom>
+          <a:ln w="15875">
+            <a:solidFill>
+              <a:srgbClr val="C9B991"/>
+            </a:solidFill>
+          </a:ln>
+          <a:effectLst/>
+        </p:spPr>
+        <p:style>
+          <a:lnRef idx="2">
+            <a:schemeClr val="accent1"/>
+          </a:lnRef>
+          <a:fillRef idx="0">
+            <a:schemeClr val="accent1"/>
+          </a:fillRef>
+          <a:effectRef idx="1">
+            <a:schemeClr val="accent1"/>
+          </a:effectRef>
+          <a:fontRef idx="minor">
+            <a:schemeClr val="tx1"/>
+          </a:fontRef>
+        </p:style>
+      </p:cxnSp>
+      <p:cxnSp>
+        <p:nvCxnSpPr>
+          <p:cNvPr id="5" name="Connector 4"/>
+          <p:cNvCxnSpPr/>
+          <p:nvPr/>
+        </p:nvCxnSpPr>
+        <p:spPr>
+          <a:xfrm>
+            <a:off x="2377440" y="1303020"/>
+            <a:ext cx="640080" cy="0"/>
+          </a:xfrm>
+          <a:prstGeom prst="line">
+            <a:avLst/>
+          </a:prstGeom>
+          <a:ln w="15875">
+            <a:solidFill>
+              <a:srgbClr val="C9B991"/>
+            </a:solidFill>
+            <a:tailEnd type="triangle" w="med" len="med"/>
+          </a:ln>
+          <a:effectLst/>
+        </p:spPr>
+        <p:style>
+          <a:lnRef idx="2">
+            <a:schemeClr val="accent1"/>
+          </a:lnRef>
+          <a:fillRef idx="0">
+            <a:schemeClr val="accent1"/>
+          </a:fillRef>
+          <a:effectRef idx="1">
+            <a:schemeClr val="accent1"/>
+          </a:effectRef>
+          <a:fontRef idx="minor">
+            <a:schemeClr val="tx1"/>
+          </a:fontRef>
+        </p:style>
+      </p:cxnSp>
+      <p:cxnSp>
+        <p:nvCxnSpPr>
+          <p:cNvPr id="5" name="Connector 4"/>
+          <p:cNvCxnSpPr/>
+          <p:nvPr/>
+        </p:nvCxnSpPr>
+        <p:spPr>
+          <a:xfrm>
+            <a:off x="2377440" y="2235708"/>
+            <a:ext cx="640080" cy="0"/>
+          </a:xfrm>
+          <a:prstGeom prst="line">
+            <a:avLst/>
+          </a:prstGeom>
+          <a:ln w="15875">
+            <a:solidFill>
+              <a:srgbClr val="C9B991"/>
+            </a:solidFill>
+            <a:tailEnd type="triangle" w="med" len="med"/>
+          </a:ln>
+          <a:effectLst/>
+        </p:spPr>
+        <p:style>
+          <a:lnRef idx="2">
+            <a:schemeClr val="accent1"/>
+          </a:lnRef>
+          <a:fillRef idx="0">
+            <a:schemeClr val="accent1"/>
+          </a:fillRef>
+          <a:effectRef idx="1">
+            <a:schemeClr val="accent1"/>
+          </a:effectRef>
+          <a:fontRef idx="minor">
+            <a:schemeClr val="tx1"/>
+          </a:fontRef>
+        </p:style>
+      </p:cxnSp>
+      <p:cxnSp>
+        <p:nvCxnSpPr>
+          <p:cNvPr id="5" name="Connector 4"/>
+          <p:cNvCxnSpPr/>
+          <p:nvPr/>
+        </p:nvCxnSpPr>
+        <p:spPr>
+          <a:xfrm>
+            <a:off x="2377440" y="3168396"/>
+            <a:ext cx="640080" cy="0"/>
+          </a:xfrm>
+          <a:prstGeom prst="line">
+            <a:avLst/>
+          </a:prstGeom>
+          <a:ln w="15875">
+            <a:solidFill>
+              <a:srgbClr val="C9B991"/>
+            </a:solidFill>
+            <a:tailEnd type="triangle" w="med" len="med"/>
+          </a:ln>
+          <a:effectLst/>
+        </p:spPr>
+        <p:style>
+          <a:lnRef idx="2">
+            <a:schemeClr val="accent1"/>
+          </a:lnRef>
+          <a:fillRef idx="0">
+            <a:schemeClr val="accent1"/>
+          </a:fillRef>
+          <a:effectRef idx="1">
+            <a:schemeClr val="accent1"/>
+          </a:effectRef>
+          <a:fontRef idx="minor">
+            <a:schemeClr val="tx1"/>
+          </a:fontRef>
+        </p:style>
+      </p:cxnSp>
+      <p:cxnSp>
+        <p:nvCxnSpPr>
+          <p:cNvPr id="5" name="Connector 4"/>
+          <p:cNvCxnSpPr/>
+          <p:nvPr/>
+        </p:nvCxnSpPr>
+        <p:spPr>
+          <a:xfrm>
+            <a:off x="2377440" y="4101084"/>
+            <a:ext cx="640080" cy="0"/>
+          </a:xfrm>
+          <a:prstGeom prst="line">
+            <a:avLst/>
+          </a:prstGeom>
+          <a:ln w="15875">
+            <a:solidFill>
+              <a:srgbClr val="C9B991"/>
+            </a:solidFill>
+            <a:tailEnd type="triangle" w="med" len="med"/>
+          </a:ln>
+          <a:effectLst/>
+        </p:spPr>
+        <p:style>
+          <a:lnRef idx="2">
+            <a:schemeClr val="accent1"/>
+          </a:lnRef>
+          <a:fillRef idx="0">
+            <a:schemeClr val="accent1"/>
+          </a:fillRef>
+          <a:effectRef idx="1">
+            <a:schemeClr val="accent1"/>
+          </a:effectRef>
+          <a:fontRef idx="minor">
+            <a:schemeClr val="tx1"/>
+          </a:fontRef>
+        </p:style>
+      </p:cxnSp>
+      <p:cxnSp>
+        <p:nvCxnSpPr>
+          <p:cNvPr id="5" name="Connector 4"/>
+          <p:cNvCxnSpPr/>
+          <p:nvPr/>
+        </p:nvCxnSpPr>
+        <p:spPr>
+          <a:xfrm>
+            <a:off x="2377440" y="5033772"/>
+            <a:ext cx="640080" cy="0"/>
+          </a:xfrm>
+          <a:prstGeom prst="line">
+            <a:avLst/>
+          </a:prstGeom>
+          <a:ln w="15875">
+            <a:solidFill>
+              <a:srgbClr val="C9B991"/>
+            </a:solidFill>
+            <a:tailEnd type="triangle" w="med" len="med"/>
+          </a:ln>
+          <a:effectLst/>
+        </p:spPr>
+        <p:style>
+          <a:lnRef idx="2">
+            <a:schemeClr val="accent1"/>
+          </a:lnRef>
+          <a:fillRef idx="0">
+            <a:schemeClr val="accent1"/>
+          </a:fillRef>
+          <a:effectRef idx="1">
+            <a:schemeClr val="accent1"/>
+          </a:effectRef>
+          <a:fontRef idx="minor">
+            <a:schemeClr val="tx1"/>
+          </a:fontRef>
+        </p:style>
+      </p:cxnSp>
     </p:spTree>
   </p:cSld>
   <p:clrMapOvr>
@@ -7047,7 +7096,7 @@
         <p:spPr>
           <a:xfrm>
             <a:off x="320040" y="201168"/>
-            <a:ext cx="8503920" cy="457200"/>
+            <a:ext cx="8503920" cy="743712"/>
           </a:xfrm>
           <a:prstGeom prst="rect">
             <a:avLst/>
@@ -7062,7 +7111,7 @@
           <a:p>
             <a:pPr algn="l"/>
             <a:r>
-              <a:rPr sz="1900" b="0" i="0" spc="140">
+              <a:rPr sz="2400" b="0" i="0" spc="140">
                 <a:solidFill>
                   <a:srgbClr val="353638"/>
                 </a:solidFill>
@@ -7141,7 +7190,7 @@
           <a:p>
             <a:pPr algn="l"/>
             <a:r>
-              <a:rPr sz="2400" b="1" i="0">
+              <a:rPr sz="2000" b="1" i="0">
                 <a:solidFill>
                   <a:srgbClr val="5C4826"/>
                 </a:solidFill>
@@ -7207,7 +7256,7 @@
         <p:spPr>
           <a:xfrm>
             <a:off x="777240" y="1828800"/>
-            <a:ext cx="3474720" cy="274320"/>
+            <a:ext cx="3474720" cy="310895"/>
           </a:xfrm>
           <a:prstGeom prst="rect">
             <a:avLst/>
@@ -7222,7 +7271,7 @@
           <a:p>
             <a:pPr algn="l"/>
             <a:r>
-              <a:rPr sz="1150" b="1" i="0" spc="50">
+              <a:rPr sz="1800" b="1" i="0" spc="50">
                 <a:solidFill>
                   <a:srgbClr val="8E6F3E"/>
                 </a:solidFill>
@@ -7261,7 +7310,7 @@
               </a:lnSpc>
             </a:pPr>
             <a:r>
-              <a:rPr sz="1400" b="0" i="0">
+              <a:rPr sz="2000" b="0" i="0">
                 <a:solidFill>
                   <a:srgbClr val="353638"/>
                 </a:solidFill>
@@ -7277,7 +7326,7 @@
               </a:lnSpc>
             </a:pPr>
             <a:r>
-              <a:rPr sz="1400" b="0" i="0">
+              <a:rPr sz="2000" b="0" i="0">
                 <a:solidFill>
                   <a:srgbClr val="353638"/>
                 </a:solidFill>
@@ -7293,7 +7342,7 @@
               </a:lnSpc>
             </a:pPr>
             <a:r>
-              <a:rPr sz="1400" b="0" i="0">
+              <a:rPr sz="2000" b="0" i="0">
                 <a:solidFill>
                   <a:srgbClr val="353638"/>
                 </a:solidFill>
@@ -7309,7 +7358,7 @@
               </a:lnSpc>
             </a:pPr>
             <a:r>
-              <a:rPr sz="1400" b="0" i="0">
+              <a:rPr sz="2000" b="0" i="0">
                 <a:solidFill>
                   <a:srgbClr val="353638"/>
                 </a:solidFill>
@@ -7325,7 +7374,7 @@
               </a:lnSpc>
             </a:pPr>
             <a:r>
-              <a:rPr sz="1400" b="0" i="0">
+              <a:rPr sz="2000" b="0" i="0">
                 <a:solidFill>
                   <a:srgbClr val="353638"/>
                 </a:solidFill>
@@ -7380,7 +7429,7 @@
           <a:p>
             <a:pPr algn="ctr"/>
             <a:r>
-              <a:rPr sz="1300" b="0" i="0">
+              <a:rPr sz="1800" b="0" i="0">
                 <a:solidFill>
                   <a:srgbClr val="5C4826"/>
                 </a:solidFill>
@@ -7479,7 +7528,7 @@
           <a:p>
             <a:pPr algn="ctr"/>
             <a:r>
-              <a:rPr sz="1300" b="0" i="0">
+              <a:rPr sz="1800" b="0" i="0">
                 <a:solidFill>
                   <a:srgbClr val="5C4826"/>
                 </a:solidFill>
@@ -7578,7 +7627,7 @@
           <a:p>
             <a:pPr algn="ctr"/>
             <a:r>
-              <a:rPr sz="1300" b="0" i="0">
+              <a:rPr sz="1800" b="0" i="0">
                 <a:solidFill>
                   <a:srgbClr val="5C4826"/>
                 </a:solidFill>
@@ -7642,7 +7691,7 @@
         <p:spPr>
           <a:xfrm>
             <a:off x="4846320" y="4169663"/>
-            <a:ext cx="3749039" cy="685800"/>
+            <a:ext cx="3749039" cy="836676"/>
           </a:xfrm>
           <a:prstGeom prst="rect">
             <a:avLst/>
@@ -7679,7 +7728,7 @@
               </a:lnSpc>
             </a:pPr>
             <a:r>
-              <a:rPr sz="1300" b="1" i="0">
+              <a:rPr sz="1800" b="1" i="0">
                 <a:solidFill>
                   <a:srgbClr val="FFFFFF"/>
                 </a:solidFill>
@@ -7695,7 +7744,7 @@
               </a:lnSpc>
             </a:pPr>
             <a:r>
-              <a:rPr sz="1300" b="1" i="0">
+              <a:rPr sz="1800" b="1" i="0">
                 <a:solidFill>
                   <a:srgbClr val="FFFFFF"/>
                 </a:solidFill>
@@ -7715,7 +7764,7 @@
         <p:spPr>
           <a:xfrm>
             <a:off x="548640" y="5074920"/>
-            <a:ext cx="8046720" cy="822960"/>
+            <a:ext cx="8046720" cy="929640"/>
           </a:xfrm>
           <a:prstGeom prst="rect">
             <a:avLst/>
@@ -7734,7 +7783,7 @@
               </a:lnSpc>
             </a:pPr>
             <a:r>
-              <a:rPr sz="1400" b="1" i="0">
+              <a:rPr sz="2000" b="1" i="0">
                 <a:solidFill>
                   <a:srgbClr val="353638"/>
                 </a:solidFill>
@@ -7743,7 +7792,7 @@
               <a:t>Purposeful reduction says: that may not be what we want. </a:t>
             </a:r>
             <a:r>
-              <a:rPr sz="1400" b="0" i="0">
+              <a:rPr sz="2000" b="0" i="0">
                 <a:solidFill>
                   <a:srgbClr val="353638"/>
                 </a:solidFill>
@@ -7797,7 +7846,7 @@
           <a:p>
             <a:pPr algn="ctr"/>
             <a:r>
-              <a:rPr sz="1400" b="1" i="0">
+              <a:rPr sz="1800" b="1" i="0">
                 <a:solidFill>
                   <a:srgbClr val="FFFFFF"/>
                 </a:solidFill>
@@ -7909,7 +7958,7 @@
           <a:p>
             <a:pPr algn="l"/>
             <a:r>
-              <a:rPr sz="1900" b="0" i="0" spc="140">
+              <a:rPr sz="2400" b="0" i="0" spc="140">
                 <a:solidFill>
                   <a:srgbClr val="353638"/>
                 </a:solidFill>
@@ -8006,7 +8055,7 @@
           <a:p>
             <a:pPr algn="ctr"/>
             <a:r>
-              <a:rPr sz="1300" b="1" i="0">
+              <a:rPr sz="1800" b="1" i="0">
                 <a:solidFill>
                   <a:srgbClr val="FFFFFF"/>
                 </a:solidFill>
@@ -8026,7 +8075,7 @@
         <p:spPr>
           <a:xfrm>
             <a:off x="2103120" y="1737360"/>
-            <a:ext cx="2103120" cy="274320"/>
+            <a:ext cx="2103120" cy="310895"/>
           </a:xfrm>
           <a:prstGeom prst="rect">
             <a:avLst/>
@@ -8041,7 +8090,7 @@
           <a:p>
             <a:pPr algn="l"/>
             <a:r>
-              <a:rPr sz="1050" b="0" i="1">
+              <a:rPr sz="1800" b="0" i="1">
                 <a:solidFill>
                   <a:srgbClr val="555960"/>
                 </a:solidFill>
@@ -8140,7 +8189,7 @@
           <a:p>
             <a:pPr algn="ctr"/>
             <a:r>
-              <a:rPr sz="1300" b="1" i="0">
+              <a:rPr sz="1800" b="1" i="0">
                 <a:solidFill>
                   <a:srgbClr val="5C4826"/>
                 </a:solidFill>
@@ -8160,7 +8209,7 @@
         <p:spPr>
           <a:xfrm>
             <a:off x="2103120" y="2743200"/>
-            <a:ext cx="2103120" cy="274320"/>
+            <a:ext cx="2103120" cy="310895"/>
           </a:xfrm>
           <a:prstGeom prst="rect">
             <a:avLst/>
@@ -8175,7 +8224,7 @@
           <a:p>
             <a:pPr algn="l"/>
             <a:r>
-              <a:rPr sz="1050" b="0" i="1">
+              <a:rPr sz="1800" b="0" i="1">
                 <a:solidFill>
                   <a:srgbClr val="555960"/>
                 </a:solidFill>
@@ -8274,7 +8323,7 @@
           <a:p>
             <a:pPr algn="ctr"/>
             <a:r>
-              <a:rPr sz="1300" b="1" i="0">
+              <a:rPr sz="1800" b="1" i="0">
                 <a:solidFill>
                   <a:srgbClr val="353638"/>
                 </a:solidFill>
@@ -8294,7 +8343,7 @@
         <p:spPr>
           <a:xfrm>
             <a:off x="548640" y="3886200"/>
-            <a:ext cx="3749039" cy="1005840"/>
+            <a:ext cx="3977639" cy="1394460"/>
           </a:xfrm>
           <a:prstGeom prst="rect">
             <a:avLst/>
@@ -8313,49 +8362,14 @@
               </a:lnSpc>
             </a:pPr>
             <a:r>
-              <a:rPr sz="1250" b="1" i="0">
-                <a:solidFill>
-                  <a:srgbClr val="353638"/>
-                </a:solidFill>
-                <a:latin typeface="Calibri"/>
-              </a:rPr>
-              <a:t>Traditional generator: </a:t>
-            </a:r>
-            <a:r>
-              <a:rPr sz="1250" b="0" i="0">
-                <a:solidFill>
-                  <a:srgbClr val="353638"/>
-                </a:solidFill>
-                <a:latin typeface="Calibri"/>
-              </a:rPr>
-              <a:t>specify enough to
-determine the transformation.</a:t>
-            </a:r>
-          </a:p>
-          <a:p>
-            <a:pPr algn="l">
-              <a:lnSpc>
-                <a:spcPct val="115000"/>
-              </a:lnSpc>
-            </a:pPr>
-            <a:r>
-              <a:rPr sz="1250" b="1" i="0">
-                <a:solidFill>
-                  <a:srgbClr val="353638"/>
-                </a:solidFill>
-                <a:latin typeface="Calibri"/>
-              </a:rPr>
-              <a:t>Agentic implementation: </a:t>
-            </a:r>
-            <a:r>
-              <a:rPr sz="1250" b="0" i="0">
-                <a:solidFill>
-                  <a:srgbClr val="353638"/>
-                </a:solidFill>
-                <a:latin typeface="Calibri"/>
-              </a:rPr>
-              <a:t>specify what
-matters; delegate the remaining choices.</a:t>
+              <a:rPr sz="1800" b="0" i="0"/>
+              <a:t>Traditional generator: specify enough to determine the transformation.</a:t>
+            </a:r>
+          </a:p>
+          <a:p>
+            <a:r>
+              <a:rPr sz="1800" b="0" i="0"/>
+              <a:t>Agentic implementation: specify what matters; delegate the rest.</a:t>
             </a:r>
           </a:p>
         </p:txBody>
@@ -8402,7 +8416,7 @@
           <a:p>
             <a:pPr algn="ctr"/>
             <a:r>
-              <a:rPr sz="1200" b="1" i="0">
+              <a:rPr sz="1800" b="1" i="0">
                 <a:solidFill>
                   <a:srgbClr val="FFFFFF"/>
                 </a:solidFill>
@@ -8455,7 +8469,7 @@
           <a:p>
             <a:pPr algn="ctr"/>
             <a:r>
-              <a:rPr sz="1200" b="1" i="0">
+              <a:rPr sz="1800" b="1" i="0">
                 <a:solidFill>
                   <a:srgbClr val="FFFFFF"/>
                 </a:solidFill>
@@ -8514,7 +8528,7 @@
               </a:lnSpc>
             </a:pPr>
             <a:r>
-              <a:rPr sz="1150" b="0" i="0">
+              <a:rPr sz="1800" b="0" i="0">
                 <a:solidFill>
                   <a:srgbClr val="353638"/>
                 </a:solidFill>
@@ -8569,7 +8583,7 @@
           <a:p>
             <a:pPr algn="ctr"/>
             <a:r>
-              <a:rPr sz="1150" b="1" i="0">
+              <a:rPr sz="1800" b="1" i="0">
                 <a:solidFill>
                   <a:srgbClr val="5C4826"/>
                 </a:solidFill>
@@ -8628,7 +8642,7 @@
               </a:lnSpc>
             </a:pPr>
             <a:r>
-              <a:rPr sz="1150" b="0" i="0">
+              <a:rPr sz="1800" b="0" i="0">
                 <a:solidFill>
                   <a:srgbClr val="353638"/>
                 </a:solidFill>
@@ -8683,7 +8697,7 @@
           <a:p>
             <a:pPr algn="ctr"/>
             <a:r>
-              <a:rPr sz="1150" b="1" i="0">
+              <a:rPr sz="1800" b="1" i="0">
                 <a:solidFill>
                   <a:srgbClr val="5C4826"/>
                 </a:solidFill>
@@ -8742,7 +8756,7 @@
               </a:lnSpc>
             </a:pPr>
             <a:r>
-              <a:rPr sz="1150" b="0" i="0">
+              <a:rPr sz="1800" b="0" i="0">
                 <a:solidFill>
                   <a:srgbClr val="353638"/>
                 </a:solidFill>
@@ -8797,7 +8811,7 @@
           <a:p>
             <a:pPr algn="ctr"/>
             <a:r>
-              <a:rPr sz="1150" b="1" i="0">
+              <a:rPr sz="1800" b="1" i="0">
                 <a:solidFill>
                   <a:srgbClr val="5C4826"/>
                 </a:solidFill>
@@ -8816,8 +8830,8 @@
         </p:nvSpPr>
         <p:spPr>
           <a:xfrm>
-            <a:off x="4709160" y="3657600"/>
-            <a:ext cx="3931920" cy="868680"/>
+            <a:off x="4709160" y="3886200"/>
+            <a:ext cx="3886200" cy="1234440"/>
           </a:xfrm>
           <a:prstGeom prst="rect">
             <a:avLst/>
@@ -8836,45 +8850,8 @@
               </a:lnSpc>
             </a:pPr>
             <a:r>
-              <a:rPr sz="1150" b="0" i="1">
-                <a:solidFill>
-                  <a:srgbClr val="555960"/>
-                </a:solidFill>
-                <a:latin typeface="Calibri"/>
-              </a:rPr>
-              <a:t>The third row is how recurring, consequential</a:t>
-            </a:r>
-          </a:p>
-          <a:p>
-            <a:pPr algn="l">
-              <a:lnSpc>
-                <a:spcPct val="110000"/>
-              </a:lnSpc>
-            </a:pPr>
-            <a:r>
-              <a:rPr sz="1150" b="0" i="1">
-                <a:solidFill>
-                  <a:srgbClr val="555960"/>
-                </a:solidFill>
-                <a:latin typeface="Calibri"/>
-              </a:rPr>
-              <a:t>knowledge gets promoted into durable structure —</a:t>
-            </a:r>
-          </a:p>
-          <a:p>
-            <a:pPr algn="l">
-              <a:lnSpc>
-                <a:spcPct val="110000"/>
-              </a:lnSpc>
-            </a:pPr>
-            <a:r>
-              <a:rPr sz="1150" b="0" i="1">
-                <a:solidFill>
-                  <a:srgbClr val="555960"/>
-                </a:solidFill>
-                <a:latin typeface="Calibri"/>
-              </a:rPr>
-              <a:t>a library, a domain extension.</a:t>
+              <a:rPr sz="1800" b="0" i="1"/>
+              <a:t>The third row is how recurring, consequential knowledge becomes durable structure.</a:t>
             </a:r>
           </a:p>
         </p:txBody>
@@ -8887,8 +8864,8 @@
         </p:nvSpPr>
         <p:spPr>
           <a:xfrm>
-            <a:off x="548640" y="4892040"/>
-            <a:ext cx="8046720" cy="1005840"/>
+            <a:off x="548640" y="5257800"/>
+            <a:ext cx="8046720" cy="731520"/>
           </a:xfrm>
           <a:prstGeom prst="rect">
             <a:avLst/>
@@ -8933,8 +8910,8 @@
         </p:nvSpPr>
         <p:spPr>
           <a:xfrm>
-            <a:off x="822960" y="5029200"/>
-            <a:ext cx="7498079" cy="777240"/>
+            <a:off x="822960" y="5376672"/>
+            <a:ext cx="7498079" cy="548640"/>
           </a:xfrm>
           <a:prstGeom prst="rect">
             <a:avLst/>
@@ -8953,56 +8930,30 @@
               </a:lnSpc>
             </a:pPr>
             <a:r>
-              <a:rPr sz="1250" b="1" i="0">
+              <a:rPr sz="1800" b="1">
                 <a:solidFill>
                   <a:srgbClr val="8E6F3E"/>
                 </a:solidFill>
-                <a:latin typeface="Calibri"/>
               </a:rPr>
               <a:t>MODEL:</a:t>
             </a:r>
             <a:r>
-              <a:rPr sz="1250" b="0" i="0">
-                <a:solidFill>
-                  <a:srgbClr val="353638"/>
-                </a:solidFill>
-                <a:latin typeface="Calibri"/>
-              </a:rPr>
-              <a:t>  what matters · obligations · properties        </a:t>
-            </a:r>
-            <a:r>
-              <a:rPr sz="1250" b="1" i="0">
+              <a:rPr sz="1800" b="0"/>
+              <a:t> what matters · obligations · properties</a:t>
+            </a:r>
+          </a:p>
+          <a:p>
+            <a:r>
+              <a:rPr sz="1800" b="1">
                 <a:solidFill>
                   <a:srgbClr val="8E6F3E"/>
                 </a:solidFill>
-                <a:latin typeface="Calibri"/>
               </a:rPr>
               <a:t>IMPLEMENTATION:</a:t>
             </a:r>
             <a:r>
-              <a:rPr sz="1250" b="0" i="0">
-                <a:solidFill>
-                  <a:srgbClr val="353638"/>
-                </a:solidFill>
-                <a:latin typeface="Calibri"/>
-              </a:rPr>
-              <a:t>  one realization · many further decisions</a:t>
-            </a:r>
-          </a:p>
-          <a:p>
-            <a:pPr algn="l">
-              <a:lnSpc>
-                <a:spcPct val="130000"/>
-              </a:lnSpc>
-            </a:pPr>
-            <a:r>
-              <a:rPr sz="1250" b="0" i="1">
-                <a:solidFill>
-                  <a:srgbClr val="555960"/>
-                </a:solidFill>
-                <a:latin typeface="Calibri"/>
-              </a:rPr>
-              <a:t>Some relationships are generation, some delegation, some validation back against the model.</a:t>
+              <a:rPr sz="1800" b="0"/>
+              <a:t> one realization · many further decisions</a:t>
             </a:r>
           </a:p>
         </p:txBody>
@@ -9049,7 +9000,7 @@
           <a:p>
             <a:pPr algn="ctr"/>
             <a:r>
-              <a:rPr sz="1400" b="1" i="0">
+              <a:rPr sz="1800" b="1" i="0">
                 <a:solidFill>
                   <a:srgbClr val="FFFFFF"/>
                 </a:solidFill>
@@ -9193,7 +9144,7 @@
           <a:lstStyle/>
           <a:p>
             <a:r>
-              <a:rPr sz="4000" b="0">
+              <a:rPr sz="2000" b="0">
                 <a:solidFill>
                   <a:srgbClr val="000000"/>
                 </a:solidFill>
@@ -9226,7 +9177,7 @@
           <a:lstStyle/>
           <a:p>
             <a:r>
-              <a:rPr sz="2400" b="0">
+              <a:rPr sz="2000" b="0">
                 <a:solidFill>
                   <a:srgbClr val="5C4826"/>
                 </a:solidFill>
@@ -9278,7 +9229,7 @@
           <a:p>
             <a:pPr algn="l"/>
             <a:r>
-              <a:rPr sz="1900" b="0" i="0" spc="140">
+              <a:rPr sz="2400" b="0" i="0" spc="140">
                 <a:solidFill>
                   <a:srgbClr val="353638"/>
                 </a:solidFill>
@@ -9371,7 +9322,7 @@
         <p:spPr>
           <a:xfrm>
             <a:off x="640080" y="5577840"/>
-            <a:ext cx="7863840" cy="274320"/>
+            <a:ext cx="7863840" cy="512064"/>
           </a:xfrm>
           <a:prstGeom prst="rect">
             <a:avLst/>
@@ -9386,7 +9337,7 @@
           <a:p>
             <a:pPr algn="ctr"/>
             <a:r>
-              <a:rPr sz="1200" b="1" i="0">
+              <a:rPr sz="1800" b="1" i="0">
                 <a:solidFill>
                   <a:srgbClr val="8E6F3E"/>
                 </a:solidFill>
@@ -9405,8 +9356,8 @@
         </p:nvSpPr>
         <p:spPr>
           <a:xfrm>
-            <a:off x="320040" y="6144768"/>
-            <a:ext cx="8503920" cy="420624"/>
+            <a:off x="320040" y="6007607"/>
+            <a:ext cx="8503920" cy="557784"/>
           </a:xfrm>
           <a:prstGeom prst="rect">
             <a:avLst/>
@@ -9439,7 +9390,7 @@
           <a:p>
             <a:pPr algn="ctr"/>
             <a:r>
-              <a:rPr sz="1400" b="1" i="0">
+              <a:rPr sz="1800" b="1" i="0">
                 <a:solidFill>
                   <a:srgbClr val="FFFFFF"/>
                 </a:solidFill>
@@ -9551,7 +9502,7 @@
           <a:p>
             <a:pPr algn="l"/>
             <a:r>
-              <a:rPr sz="1900" b="0" i="0" spc="140">
+              <a:rPr sz="2400" b="0" i="0" spc="140">
                 <a:solidFill>
                   <a:srgbClr val="353638"/>
                 </a:solidFill>
@@ -9630,7 +9581,7 @@
           <a:p>
             <a:pPr algn="l"/>
             <a:r>
-              <a:rPr sz="1600" b="1" i="1">
+              <a:rPr sz="2000" b="1" i="1">
                 <a:solidFill>
                   <a:srgbClr val="5C4826"/>
                 </a:solidFill>
@@ -9723,7 +9674,7 @@
           <a:p>
             <a:pPr algn="l"/>
             <a:r>
-              <a:rPr sz="1050" b="0" i="1">
+              <a:rPr sz="1800" b="0" i="1">
                 <a:solidFill>
                   <a:srgbClr val="555960"/>
                 </a:solidFill>
@@ -9762,45 +9713,20 @@
               </a:lnSpc>
             </a:pPr>
             <a:r>
-              <a:rPr sz="1050" b="0" i="1">
-                <a:solidFill>
-                  <a:srgbClr val="555960"/>
-                </a:solidFill>
-                <a:latin typeface="Calibri"/>
-              </a:rPr>
+              <a:rPr sz="1800" i="0"/>
               <a:t>the verdict carries its evidence:</a:t>
             </a:r>
           </a:p>
           <a:p>
-            <a:pPr algn="l">
-              <a:lnSpc>
-                <a:spcPct val="105000"/>
-              </a:lnSpc>
-            </a:pPr>
-            <a:r>
-              <a:rPr sz="1050" b="0" i="1">
-                <a:solidFill>
-                  <a:srgbClr val="555960"/>
-                </a:solidFill>
-                <a:latin typeface="Calibri"/>
-              </a:rPr>
-              <a:t>derived from which models,</a:t>
-            </a:r>
-          </a:p>
-          <a:p>
-            <a:pPr algn="l">
-              <a:lnSpc>
-                <a:spcPct val="105000"/>
-              </a:lnSpc>
-            </a:pPr>
-            <a:r>
-              <a:rPr sz="1050" b="0" i="1">
-                <a:solidFill>
-                  <a:srgbClr val="555960"/>
-                </a:solidFill>
-                <a:latin typeface="Calibri"/>
-              </a:rPr>
-              <a:t>exhaustive over what</a:t>
+            <a:r>
+              <a:rPr sz="1800" i="0"/>
+              <a:t>which models it derives from,</a:t>
+            </a:r>
+          </a:p>
+          <a:p>
+            <a:r>
+              <a:rPr sz="1800" i="0"/>
+              <a:t>what the analysis exhausts</a:t>
             </a:r>
           </a:p>
         </p:txBody>
@@ -9849,7 +9775,7 @@
           <a:p>
             <a:pPr algn="ctr"/>
             <a:r>
-              <a:rPr sz="1250" b="1" i="0">
+              <a:rPr sz="1800" b="1" i="0">
                 <a:solidFill>
                   <a:srgbClr val="5C4826"/>
                 </a:solidFill>
@@ -9913,7 +9839,7 @@
         <p:spPr>
           <a:xfrm>
             <a:off x="2240280" y="4709160"/>
-            <a:ext cx="1828800" cy="457200"/>
+            <a:ext cx="1828800" cy="557784"/>
           </a:xfrm>
           <a:prstGeom prst="rect">
             <a:avLst/>
@@ -9946,7 +9872,7 @@
           <a:p>
             <a:pPr algn="ctr"/>
             <a:r>
-              <a:rPr sz="1250" b="1" i="0">
+              <a:rPr sz="1800" b="1" i="0">
                 <a:solidFill>
                   <a:srgbClr val="FFFFFF"/>
                 </a:solidFill>
@@ -10045,7 +9971,7 @@
           <a:p>
             <a:pPr algn="ctr"/>
             <a:r>
-              <a:rPr sz="1250" b="1" i="0">
+              <a:rPr sz="1800" b="1" i="0">
                 <a:solidFill>
                   <a:srgbClr val="5C4826"/>
                 </a:solidFill>
@@ -10065,7 +9991,7 @@
         <p:spPr>
           <a:xfrm>
             <a:off x="548640" y="5349240"/>
-            <a:ext cx="5394960" cy="548640"/>
+            <a:ext cx="5394960" cy="740664"/>
           </a:xfrm>
           <a:prstGeom prst="rect">
             <a:avLst/>
@@ -10084,7 +10010,7 @@
               </a:lnSpc>
             </a:pPr>
             <a:r>
-              <a:rPr sz="1250" b="1" i="0">
+              <a:rPr sz="1800" b="1" i="0">
                 <a:solidFill>
                   <a:srgbClr val="5C4826"/>
                 </a:solidFill>
@@ -10093,7 +10019,7 @@
               <a:t>No LLM required. </a:t>
             </a:r>
             <a:r>
-              <a:rPr sz="1250" b="0" i="0">
+              <a:rPr sz="1800" b="0" i="0">
                 <a:solidFill>
                   <a:srgbClr val="353638"/>
                 </a:solidFill>
@@ -10147,7 +10073,7 @@
           <a:p>
             <a:pPr algn="ctr"/>
             <a:r>
-              <a:rPr sz="1400" b="1" i="0">
+              <a:rPr sz="1800" b="1" i="0">
                 <a:solidFill>
                   <a:srgbClr val="FFFFFF"/>
                 </a:solidFill>
@@ -10259,7 +10185,7 @@
           <a:p>
             <a:pPr algn="l"/>
             <a:r>
-              <a:rPr sz="1900" b="0" i="0" spc="140">
+              <a:rPr sz="2400" b="0" i="0" spc="140">
                 <a:solidFill>
                   <a:srgbClr val="353638"/>
                 </a:solidFill>
@@ -10338,7 +10264,7 @@
           <a:p>
             <a:pPr algn="l"/>
             <a:r>
-              <a:rPr sz="1600" b="1" i="1">
+              <a:rPr sz="2000" b="1" i="1">
                 <a:solidFill>
                   <a:srgbClr val="5C4826"/>
                 </a:solidFill>
@@ -10358,7 +10284,7 @@
         <p:spPr>
           <a:xfrm>
             <a:off x="548640" y="1371600"/>
-            <a:ext cx="8046720" cy="502920"/>
+            <a:ext cx="8046720" cy="905255"/>
           </a:xfrm>
           <a:prstGeom prst="rect">
             <a:avLst/>
@@ -10377,45 +10303,14 @@
               </a:lnSpc>
             </a:pPr>
             <a:r>
-              <a:rPr sz="1200" b="0" i="0">
-                <a:solidFill>
-                  <a:srgbClr val="353638"/>
-                </a:solidFill>
-                <a:latin typeface="Calibri"/>
-              </a:rPr>
-              <a:t>Interacting with models can be tedious: navigate the model, find the right question form, formulate</a:t>
-            </a:r>
-          </a:p>
-          <a:p>
-            <a:pPr algn="l">
-              <a:lnSpc>
-                <a:spcPct val="115000"/>
-              </a:lnSpc>
-            </a:pPr>
-            <a:r>
-              <a:rPr sz="1200" b="0" i="0">
-                <a:solidFill>
-                  <a:srgbClr val="353638"/>
-                </a:solidFill>
-                <a:latin typeface="Calibri"/>
-              </a:rPr>
-              <a:t>the query. The Workbench's composable ask surface covers graph questions; the rest run as saved</a:t>
-            </a:r>
-          </a:p>
-          <a:p>
-            <a:pPr algn="l">
-              <a:lnSpc>
-                <a:spcPct val="115000"/>
-              </a:lnSpc>
-            </a:pPr>
-            <a:r>
-              <a:rPr sz="1200" b="0" i="0">
-                <a:solidFill>
-                  <a:srgbClr val="353638"/>
-                </a:solidFill>
-                <a:latin typeface="Calibri"/>
-              </a:rPr>
-              <a:t>questions.</a:t>
+              <a:rPr sz="1800" i="0"/>
+              <a:t>Interacting with models can be tedious: navigate the model, select the operation,</a:t>
+            </a:r>
+          </a:p>
+          <a:p>
+            <a:r>
+              <a:rPr sz="1800" i="0"/>
+              <a:t>formulate the query. An agent can mediate that interaction.</a:t>
             </a:r>
           </a:p>
         </p:txBody>
@@ -10464,7 +10359,7 @@
           <a:p>
             <a:pPr algn="ctr"/>
             <a:r>
-              <a:rPr sz="1250" b="1" i="0">
+              <a:rPr sz="1800" b="1" i="0">
                 <a:solidFill>
                   <a:srgbClr val="5C4826"/>
                 </a:solidFill>
@@ -10543,7 +10438,7 @@
           <a:p>
             <a:pPr algn="l"/>
             <a:r>
-              <a:rPr sz="1050" b="0" i="1">
+              <a:rPr sz="1800" b="0" i="1">
                 <a:solidFill>
                   <a:srgbClr val="555960"/>
                 </a:solidFill>
@@ -10596,7 +10491,7 @@
           <a:p>
             <a:pPr algn="ctr"/>
             <a:r>
-              <a:rPr sz="1250" b="1" i="0">
+              <a:rPr sz="1800" b="1" i="0">
                 <a:solidFill>
                   <a:srgbClr val="5C4826"/>
                 </a:solidFill>
@@ -10675,7 +10570,7 @@
           <a:p>
             <a:pPr algn="l"/>
             <a:r>
-              <a:rPr sz="1050" b="0" i="1">
+              <a:rPr sz="1800" b="0" i="1">
                 <a:solidFill>
                   <a:srgbClr val="555960"/>
                 </a:solidFill>
@@ -10728,7 +10623,7 @@
           <a:p>
             <a:pPr algn="ctr"/>
             <a:r>
-              <a:rPr sz="1250" b="1" i="0">
+              <a:rPr sz="1800" b="1" i="0">
                 <a:solidFill>
                   <a:srgbClr val="FFFFFF"/>
                 </a:solidFill>
@@ -10807,7 +10702,7 @@
           <a:p>
             <a:pPr algn="l"/>
             <a:r>
-              <a:rPr sz="1050" b="0" i="1">
+              <a:rPr sz="1800" b="0" i="1">
                 <a:solidFill>
                   <a:srgbClr val="555960"/>
                 </a:solidFill>
@@ -10860,7 +10755,7 @@
           <a:p>
             <a:pPr algn="ctr"/>
             <a:r>
-              <a:rPr sz="1250" b="1" i="0">
+              <a:rPr sz="1800" b="1" i="0">
                 <a:solidFill>
                   <a:srgbClr val="5C4826"/>
                 </a:solidFill>
@@ -10939,7 +10834,7 @@
           <a:p>
             <a:pPr algn="l"/>
             <a:r>
-              <a:rPr sz="1050" b="0" i="1">
+              <a:rPr sz="1800" b="0" i="1">
                 <a:solidFill>
                   <a:srgbClr val="555960"/>
                 </a:solidFill>
@@ -10994,7 +10889,7 @@
           <a:p>
             <a:pPr algn="ctr"/>
             <a:r>
-              <a:rPr sz="1250" b="1" i="0">
+              <a:rPr sz="1800" b="1" i="0">
                 <a:solidFill>
                   <a:srgbClr val="5C4826"/>
                 </a:solidFill>
@@ -11075,7 +10970,7 @@
           <a:p>
             <a:pPr algn="l"/>
             <a:r>
-              <a:rPr sz="1150" b="1" i="0" spc="60">
+              <a:rPr sz="1800" b="1" i="0" spc="60">
                 <a:solidFill>
                   <a:srgbClr val="8E6F3E"/>
                 </a:solidFill>
@@ -11095,7 +10990,7 @@
         <p:spPr>
           <a:xfrm>
             <a:off x="5074920" y="2816352"/>
-            <a:ext cx="3291840" cy="914400"/>
+            <a:ext cx="3291840" cy="1115568"/>
           </a:xfrm>
           <a:prstGeom prst="rect">
             <a:avLst/>
@@ -11114,7 +11009,7 @@
               </a:lnSpc>
             </a:pPr>
             <a:r>
-              <a:rPr sz="1200" b="1" i="0">
+              <a:rPr sz="1800" b="1" i="0">
                 <a:solidFill>
                   <a:srgbClr val="5C4826"/>
                 </a:solidFill>
@@ -11123,7 +11018,7 @@
               <a:t>window.mage</a:t>
             </a:r>
             <a:r>
-              <a:rPr sz="1200" b="0" i="0">
+              <a:rPr sz="1800" b="0" i="0">
                 <a:solidFill>
                   <a:srgbClr val="353638"/>
                 </a:solidFill>
@@ -11206,7 +11101,7 @@
           <a:p>
             <a:pPr algn="l"/>
             <a:r>
-              <a:rPr sz="1150" b="1" i="0" spc="60">
+              <a:rPr sz="1800" b="1" i="0" spc="60">
                 <a:solidFill>
                   <a:srgbClr val="8E6F3E"/>
                 </a:solidFill>
@@ -11226,7 +11121,7 @@
         <p:spPr>
           <a:xfrm>
             <a:off x="5074920" y="4572000"/>
-            <a:ext cx="3291840" cy="1097280"/>
+            <a:ext cx="3291840" cy="1394460"/>
           </a:xfrm>
           <a:prstGeom prst="rect">
             <a:avLst/>
@@ -11245,7 +11140,7 @@
               </a:lnSpc>
             </a:pPr>
             <a:r>
-              <a:rPr sz="1300" b="1" i="0">
+              <a:rPr sz="1800" b="1" i="0">
                 <a:solidFill>
                   <a:srgbClr val="5C4826"/>
                 </a:solidFill>
@@ -11261,7 +11156,7 @@
               </a:lnSpc>
             </a:pPr>
             <a:r>
-              <a:rPr sz="1300" b="1" i="0">
+              <a:rPr sz="1800" b="1" i="0">
                 <a:solidFill>
                   <a:srgbClr val="5C4826"/>
                 </a:solidFill>
@@ -11277,7 +11172,7 @@
               </a:lnSpc>
             </a:pPr>
             <a:r>
-              <a:rPr sz="1300" b="1" i="0">
+              <a:rPr sz="1800" b="1" i="0">
                 <a:solidFill>
                   <a:srgbClr val="5C4826"/>
                 </a:solidFill>
@@ -11330,7 +11225,7 @@
           <a:p>
             <a:pPr algn="ctr"/>
             <a:r>
-              <a:rPr sz="1400" b="1" i="0">
+              <a:rPr sz="1800" b="1" i="0">
                 <a:solidFill>
                   <a:srgbClr val="FFFFFF"/>
                 </a:solidFill>
@@ -11442,7 +11337,7 @@
           <a:p>
             <a:pPr algn="l"/>
             <a:r>
-              <a:rPr sz="1900" b="0" i="0" spc="140">
+              <a:rPr sz="2400" b="0" i="0" spc="140">
                 <a:solidFill>
                   <a:srgbClr val="353638"/>
                 </a:solidFill>
@@ -11539,7 +11434,7 @@
           <a:p>
             <a:pPr algn="ctr"/>
             <a:r>
-              <a:rPr sz="1400" b="1" i="0">
+              <a:rPr sz="2000" b="1" i="0">
                 <a:solidFill>
                   <a:srgbClr val="FFFFFF"/>
                 </a:solidFill>
@@ -11592,7 +11487,7 @@
           <a:p>
             <a:pPr algn="ctr"/>
             <a:r>
-              <a:rPr sz="1400" b="1" i="0">
+              <a:rPr sz="2000" b="1" i="0">
                 <a:solidFill>
                   <a:srgbClr val="FFFFFF"/>
                 </a:solidFill>
@@ -11612,7 +11507,7 @@
         <p:spPr>
           <a:xfrm>
             <a:off x="1097280" y="1051560"/>
-            <a:ext cx="4572000" cy="411480"/>
+            <a:ext cx="4572000" cy="493776"/>
           </a:xfrm>
           <a:prstGeom prst="rect">
             <a:avLst/>
@@ -11627,7 +11522,7 @@
           <a:p>
             <a:pPr algn="l"/>
             <a:r>
-              <a:rPr sz="1350" b="0" i="0">
+              <a:rPr sz="1800" b="0" i="0">
                 <a:solidFill>
                   <a:srgbClr val="353638"/>
                 </a:solidFill>
@@ -11680,7 +11575,7 @@
           <a:p>
             <a:pPr algn="ctr"/>
             <a:r>
-              <a:rPr sz="1400" b="1" i="0">
+              <a:rPr sz="2000" b="1" i="0">
                 <a:solidFill>
                   <a:srgbClr val="FFFFFF"/>
                 </a:solidFill>
@@ -11715,7 +11610,7 @@
           <a:p>
             <a:pPr algn="l"/>
             <a:r>
-              <a:rPr sz="1350" b="0" i="0">
+              <a:rPr sz="1800" b="0" i="0">
                 <a:solidFill>
                   <a:srgbClr val="353638"/>
                 </a:solidFill>
@@ -11768,7 +11663,7 @@
           <a:p>
             <a:pPr algn="ctr"/>
             <a:r>
-              <a:rPr sz="1400" b="1" i="0">
+              <a:rPr sz="2000" b="1" i="0">
                 <a:solidFill>
                   <a:srgbClr val="FFFFFF"/>
                 </a:solidFill>
@@ -11803,7 +11698,7 @@
           <a:p>
             <a:pPr algn="l"/>
             <a:r>
-              <a:rPr sz="1350" b="0" i="0">
+              <a:rPr sz="1800" b="0" i="0">
                 <a:solidFill>
                   <a:srgbClr val="353638"/>
                 </a:solidFill>
@@ -11856,7 +11751,7 @@
           <a:p>
             <a:pPr algn="ctr"/>
             <a:r>
-              <a:rPr sz="1400" b="1" i="0">
+              <a:rPr sz="2000" b="1" i="0">
                 <a:solidFill>
                   <a:srgbClr val="FFFFFF"/>
                 </a:solidFill>
@@ -11891,7 +11786,7 @@
           <a:p>
             <a:pPr algn="l"/>
             <a:r>
-              <a:rPr sz="1350" b="0" i="0">
+              <a:rPr sz="1800" b="0" i="0">
                 <a:solidFill>
                   <a:srgbClr val="353638"/>
                 </a:solidFill>
@@ -11944,7 +11839,7 @@
           <a:p>
             <a:pPr algn="ctr"/>
             <a:r>
-              <a:rPr sz="1400" b="1" i="0">
+              <a:rPr sz="2000" b="1" i="0">
                 <a:solidFill>
                   <a:srgbClr val="FFFFFF"/>
                 </a:solidFill>
@@ -11979,7 +11874,7 @@
           <a:p>
             <a:pPr algn="l"/>
             <a:r>
-              <a:rPr sz="1350" b="0" i="0">
+              <a:rPr sz="1800" b="0" i="0">
                 <a:solidFill>
                   <a:srgbClr val="353638"/>
                 </a:solidFill>
@@ -12014,7 +11909,7 @@
           <a:p>
             <a:pPr algn="l"/>
             <a:r>
-              <a:rPr sz="1200" b="1" i="1">
+              <a:rPr sz="1800" b="1" i="1">
                 <a:solidFill>
                   <a:srgbClr val="5C4826"/>
                 </a:solidFill>
@@ -12034,7 +11929,7 @@
         <p:spPr>
           <a:xfrm>
             <a:off x="548640" y="4343400"/>
-            <a:ext cx="5029200" cy="1463040"/>
+            <a:ext cx="5029200" cy="1673352"/>
           </a:xfrm>
           <a:prstGeom prst="rect">
             <a:avLst/>
@@ -12053,7 +11948,7 @@
               </a:lnSpc>
             </a:pPr>
             <a:r>
-              <a:rPr sz="1200" b="0" i="0">
+              <a:rPr sz="1800" b="0" i="0">
                 <a:solidFill>
                   <a:srgbClr val="353638"/>
                 </a:solidFill>
@@ -12069,7 +11964,7 @@
               </a:lnSpc>
             </a:pPr>
             <a:r>
-              <a:rPr sz="1200" b="0" i="0">
+              <a:rPr sz="1800" b="0" i="0">
                 <a:solidFill>
                   <a:srgbClr val="353638"/>
                 </a:solidFill>
@@ -12085,13 +11980,13 @@
               </a:lnSpc>
             </a:pPr>
             <a:r>
-              <a:rPr sz="1200" b="0" i="0">
+              <a:rPr sz="1800" b="0" i="0">
                 <a:solidFill>
                   <a:srgbClr val="353638"/>
                 </a:solidFill>
                 <a:latin typeface="Calibri"/>
               </a:rPr>
-              <a:t>• edit through the workspace, or through the agent</a:t>
+              <a:t>• edit in the workspace, or via the agent</a:t>
             </a:r>
           </a:p>
           <a:p>
@@ -12101,7 +11996,7 @@
               </a:lnSpc>
             </a:pPr>
             <a:r>
-              <a:rPr sz="1200" b="0" i="0">
+              <a:rPr sz="1800" b="0" i="0">
                 <a:solidFill>
                   <a:srgbClr val="353638"/>
                 </a:solidFill>
@@ -12120,8 +12015,8 @@
         </p:nvSpPr>
         <p:spPr>
           <a:xfrm>
-            <a:off x="5806440" y="1051560"/>
-            <a:ext cx="2788920" cy="4160520"/>
+            <a:off x="5623560" y="1051560"/>
+            <a:ext cx="2971800" cy="4846320"/>
           </a:xfrm>
           <a:prstGeom prst="rect">
             <a:avLst/>
@@ -12166,8 +12061,8 @@
         </p:nvSpPr>
         <p:spPr>
           <a:xfrm>
-            <a:off x="6035040" y="1188720"/>
-            <a:ext cx="2377440" cy="274320"/>
+            <a:off x="5806440" y="1188720"/>
+            <a:ext cx="2606040" cy="310896"/>
           </a:xfrm>
           <a:prstGeom prst="rect">
             <a:avLst/>
@@ -12182,12 +12077,7 @@
           <a:p>
             <a:pPr algn="l"/>
             <a:r>
-              <a:rPr sz="1100" b="1" i="0" spc="50">
-                <a:solidFill>
-                  <a:srgbClr val="8E6F3E"/>
-                </a:solidFill>
-                <a:latin typeface="Calibri"/>
-              </a:rPr>
+              <a:rPr sz="1600" b="0" i="0"/>
               <a:t>WHAT THE MODEL DECLARES</a:t>
             </a:r>
           </a:p>
@@ -12201,8 +12091,8 @@
         </p:nvSpPr>
         <p:spPr>
           <a:xfrm>
-            <a:off x="6035040" y="1536192"/>
-            <a:ext cx="2377440" cy="3566160"/>
+            <a:off x="5806440" y="1920240"/>
+            <a:ext cx="2606040" cy="4169663"/>
           </a:xfrm>
           <a:prstGeom prst="rect">
             <a:avLst/>
@@ -12221,183 +12111,44 @@
               </a:lnSpc>
             </a:pPr>
             <a:r>
-              <a:rPr sz="1150" b="1" i="0">
-                <a:solidFill>
-                  <a:srgbClr val="353638"/>
-                </a:solidFill>
-                <a:latin typeface="Calibri"/>
-              </a:rPr>
-              <a:t>budget: </a:t>
-            </a:r>
-            <a:r>
-              <a:rPr sz="1150" b="0" i="0">
-                <a:solidFill>
-                  <a:srgbClr val="353638"/>
-                </a:solidFill>
-                <a:latin typeface="Calibri"/>
-              </a:rPr>
-              <a:t>256 KiB of SRAM</a:t>
-            </a:r>
-          </a:p>
-          <a:p>
-            <a:pPr algn="l">
-              <a:lnSpc>
-                <a:spcPct val="112000"/>
-              </a:lnSpc>
-            </a:pPr>
-            <a:r>
-              <a:rPr sz="1150" b="1" i="0">
-                <a:solidFill>
-                  <a:srgbClr val="353638"/>
-                </a:solidFill>
-                <a:latin typeface="Calibri"/>
-              </a:rPr>
-              <a:t>total: </a:t>
-            </a:r>
-            <a:r>
-              <a:rPr sz="1150" b="0" i="0">
-                <a:solidFill>
-                  <a:srgbClr val="353638"/>
-                </a:solidFill>
-                <a:latin typeface="Calibri"/>
-              </a:rPr>
-              <a:t>232 KB → 24 KB margin (9.4%)</a:t>
-            </a:r>
-          </a:p>
-          <a:p>
-            <a:pPr algn="l">
-              <a:lnSpc>
-                <a:spcPct val="112000"/>
-              </a:lnSpc>
-            </a:pPr>
-            <a:r>
-              <a:rPr sz="1150" b="1" i="0">
-                <a:solidFill>
-                  <a:srgbClr val="353638"/>
-                </a:solidFill>
-                <a:latin typeface="Calibri"/>
-              </a:rPr>
-              <a:t>pinned requirement: </a:t>
-            </a:r>
-          </a:p>
-          <a:p>
-            <a:pPr algn="l">
-              <a:lnSpc>
-                <a:spcPct val="112000"/>
-              </a:lnSpc>
-            </a:pPr>
-            <a:r>
-              <a:rPr sz="1150" b="0" i="1">
-                <a:solidFill>
-                  <a:srgbClr val="353638"/>
-                </a:solidFill>
-                <a:latin typeface="Calibri"/>
-              </a:rPr>
-              <a:t>“the modeled firmware fits in the
-256 KiB SRAM budget”</a:t>
-            </a:r>
-          </a:p>
-          <a:p>
-            <a:pPr algn="l">
-              <a:lnSpc>
-                <a:spcPct val="112000"/>
-              </a:lnSpc>
-            </a:pPr>
-            <a:r>
-              <a:rPr sz="1150" b="0" i="0">
-                <a:solidFill>
-                  <a:srgbClr val="353638"/>
-                </a:solidFill>
-                <a:latin typeface="Calibri"/>
-              </a:rPr>
+              <a:rPr sz="1800" b="1" i="0"/>
+              <a:t>budget: 256 KiB of SRAM</a:t>
+            </a:r>
+          </a:p>
+          <a:p>
+            <a:r>
+              <a:rPr sz="1800" b="1" i="0"/>
+              <a:t>total: 232 KB → 24 KB margin</a:t>
+            </a:r>
+          </a:p>
+          <a:p>
+            <a:r>
+              <a:rPr sz="1800" b="1" i="0"/>
+              <a:t>pinned: “fits in the 256 KiB SRAM budget”</a:t>
+            </a:r>
+          </a:p>
+          <a:p>
+            <a:r>
+              <a:rPr sz="1800" b="0" i="0"/>
               <a:t/>
             </a:r>
           </a:p>
           <a:p>
-            <a:pPr algn="l">
-              <a:lnSpc>
-                <a:spcPct val="112000"/>
-              </a:lnSpc>
-            </a:pPr>
-            <a:r>
-              <a:rPr sz="1150" b="0" i="0">
-                <a:solidFill>
-                  <a:srgbClr val="353638"/>
-                </a:solidFill>
-                <a:latin typeface="Calibri"/>
-              </a:rPr>
-              <a:t>doubling the telemetry queue
-(32 → 64 KB) takes the total to
-264 KB — the requirement fails
-by 8 KB</a:t>
-            </a:r>
-          </a:p>
-          <a:p>
-            <a:pPr algn="l">
-              <a:lnSpc>
-                <a:spcPct val="112000"/>
-              </a:lnSpc>
-            </a:pPr>
-            <a:r>
-              <a:rPr sz="1150" b="0" i="0">
-                <a:solidFill>
-                  <a:srgbClr val="353638"/>
-                </a:solidFill>
-                <a:latin typeface="Calibri"/>
-              </a:rPr>
+            <a:r>
+              <a:rPr sz="1800" b="0" i="0"/>
+              <a:t>doubling telemetry (32 → 64 KB) → 264 KB: fails by 8 KB</a:t>
+            </a:r>
+          </a:p>
+          <a:p>
+            <a:r>
+              <a:rPr sz="1800" b="0" i="0"/>
               <a:t/>
             </a:r>
           </a:p>
           <a:p>
-            <a:pPr algn="l">
-              <a:lnSpc>
-                <a:spcPct val="112000"/>
-              </a:lnSpc>
-            </a:pPr>
-            <a:r>
-              <a:rPr sz="1150" b="0" i="0">
-                <a:solidFill>
-                  <a:srgbClr val="353638"/>
-                </a:solidFill>
-                <a:latin typeface="Calibri"/>
-              </a:rPr>
-              <a:t>a ≥20% margin needs the total
-at or under 204.8 KB — several
-changes achieve it, several
-near-misses do not</a:t>
-            </a:r>
-          </a:p>
-          <a:p>
-            <a:pPr algn="l">
-              <a:lnSpc>
-                <a:spcPct val="112000"/>
-              </a:lnSpc>
-            </a:pPr>
-            <a:r>
-              <a:rPr sz="1150" b="0" i="0">
-                <a:solidFill>
-                  <a:srgbClr val="353638"/>
-                </a:solidFill>
-                <a:latin typeface="Calibri"/>
-              </a:rPr>
-              <a:t/>
-            </a:r>
-          </a:p>
-          <a:p>
-            <a:pPr algn="l">
-              <a:lnSpc>
-                <a:spcPct val="112000"/>
-              </a:lnSpc>
-            </a:pPr>
-            <a:r>
-              <a:rPr sz="1000" b="0" i="1">
-                <a:solidFill>
-                  <a:srgbClr val="555960"/>
-                </a:solidFill>
-                <a:latin typeface="Calibri"/>
-              </a:rPr>
-              <a:t>the model's KB tokens are binary:
-256 KB here is exactly 256 KiB</a:t>
+            <a:r>
+              <a:rPr sz="1800" b="0" i="0"/>
+              <a:t>a ≥20% margin needs ≤ 204.8 KB — several changes achieve it, several near-misses do not</a:t>
             </a:r>
           </a:p>
         </p:txBody>
@@ -12444,7 +12195,7 @@
           <a:p>
             <a:pPr algn="ctr"/>
             <a:r>
-              <a:rPr sz="1400" b="1" i="0">
+              <a:rPr sz="1800" b="1" i="0">
                 <a:solidFill>
                   <a:srgbClr val="FFFFFF"/>
                 </a:solidFill>
@@ -12556,7 +12307,7 @@
           <a:p>
             <a:pPr algn="l"/>
             <a:r>
-              <a:rPr sz="1900" b="0" i="0" spc="140">
+              <a:rPr sz="2400" b="0" i="0" spc="140">
                 <a:solidFill>
                   <a:srgbClr val="353638"/>
                 </a:solidFill>
@@ -12635,7 +12386,7 @@
           <a:p>
             <a:pPr algn="l"/>
             <a:r>
-              <a:rPr sz="1800" b="1" i="1">
+              <a:rPr sz="2000" b="1" i="1">
                 <a:solidFill>
                   <a:srgbClr val="5C4826"/>
                 </a:solidFill>
@@ -12701,7 +12452,7 @@
         <p:spPr>
           <a:xfrm>
             <a:off x="868680" y="1664208"/>
-            <a:ext cx="7406640" cy="1600200"/>
+            <a:ext cx="7406640" cy="2029967"/>
           </a:xfrm>
           <a:prstGeom prst="rect">
             <a:avLst/>
@@ -12720,7 +12471,7 @@
               </a:lnSpc>
             </a:pPr>
             <a:r>
-              <a:rPr sz="1450" b="0" i="1">
+              <a:rPr sz="2000" b="0" i="1">
                 <a:solidFill>
                   <a:srgbClr val="5C4826"/>
                 </a:solidFill>
@@ -12736,7 +12487,7 @@
               </a:lnSpc>
             </a:pPr>
             <a:r>
-              <a:rPr sz="1100" b="0" i="0">
+              <a:rPr sz="1800" b="0" i="0">
                 <a:solidFill>
                   <a:srgbClr val="555960"/>
                 </a:solidFill>
@@ -12756,7 +12507,7 @@
         <p:spPr>
           <a:xfrm>
             <a:off x="548640" y="3749039"/>
-            <a:ext cx="8046720" cy="685800"/>
+            <a:ext cx="8046720" cy="1088136"/>
           </a:xfrm>
           <a:prstGeom prst="rect">
             <a:avLst/>
@@ -12775,7 +12526,7 @@
               </a:lnSpc>
             </a:pPr>
             <a:r>
-              <a:rPr sz="1350" b="1" i="0">
+              <a:rPr sz="1800" b="1" i="0">
                 <a:solidFill>
                   <a:srgbClr val="5C4826"/>
                 </a:solidFill>
@@ -12791,7 +12542,7 @@
               </a:lnSpc>
             </a:pPr>
             <a:r>
-              <a:rPr sz="1350" b="0" i="0">
+              <a:rPr sz="1800" b="0" i="0">
                 <a:solidFill>
                   <a:srgbClr val="353638"/>
                 </a:solidFill>
@@ -12812,7 +12563,7 @@
         <p:spPr>
           <a:xfrm>
             <a:off x="548640" y="4892040"/>
-            <a:ext cx="8046720" cy="822960"/>
+            <a:ext cx="8046720" cy="1115568"/>
           </a:xfrm>
           <a:prstGeom prst="rect">
             <a:avLst/>
@@ -12831,7 +12582,7 @@
               </a:lnSpc>
             </a:pPr>
             <a:r>
-              <a:rPr sz="1350" b="1" i="0">
+              <a:rPr sz="1800" b="1" i="0">
                 <a:solidFill>
                   <a:srgbClr val="8E6F3E"/>
                 </a:solidFill>
@@ -12840,7 +12591,7 @@
               <a:t>Lab closing question: </a:t>
             </a:r>
             <a:r>
-              <a:rPr sz="1350" b="0" i="1">
+              <a:rPr sz="1800" b="0" i="1">
                 <a:solidFill>
                   <a:srgbClr val="353638"/>
                 </a:solidFill>
@@ -12856,7 +12607,7 @@
               </a:lnSpc>
             </a:pPr>
             <a:r>
-              <a:rPr sz="1200" b="0" i="0">
+              <a:rPr sz="1800" b="0" i="0">
                 <a:solidFill>
                   <a:srgbClr val="555960"/>
                 </a:solidFill>
@@ -12909,7 +12660,7 @@
           <a:p>
             <a:pPr algn="ctr"/>
             <a:r>
-              <a:rPr sz="1400" b="1" i="0">
+              <a:rPr sz="1800" b="1" i="0">
                 <a:solidFill>
                   <a:srgbClr val="FFFFFF"/>
                 </a:solidFill>
@@ -13021,7 +12772,7 @@
           <a:p>
             <a:pPr algn="l"/>
             <a:r>
-              <a:rPr sz="1900" b="0" i="0" spc="140">
+              <a:rPr sz="2400" b="0" i="0" spc="140">
                 <a:solidFill>
                   <a:srgbClr val="353638"/>
                 </a:solidFill>
@@ -13085,7 +12836,7 @@
         <p:spPr>
           <a:xfrm>
             <a:off x="548640" y="1005840"/>
-            <a:ext cx="8046720" cy="777240"/>
+            <a:ext cx="8046720" cy="929640"/>
           </a:xfrm>
           <a:prstGeom prst="rect">
             <a:avLst/>
@@ -13124,7 +12875,7 @@
               </a:lnSpc>
             </a:pPr>
             <a:r>
-              <a:rPr sz="1600" b="0" i="1">
+              <a:rPr sz="2000" b="0" i="1">
                 <a:solidFill>
                   <a:srgbClr val="5C4826"/>
                 </a:solidFill>
@@ -13140,7 +12891,7 @@
               </a:lnSpc>
             </a:pPr>
             <a:r>
-              <a:rPr sz="1600" b="0" i="1">
+              <a:rPr sz="2000" b="0" i="1">
                 <a:solidFill>
                   <a:srgbClr val="5C4826"/>
                 </a:solidFill>
@@ -13193,7 +12944,7 @@
           <a:p>
             <a:pPr algn="ctr"/>
             <a:r>
-              <a:rPr sz="1100" b="1" i="0">
+              <a:rPr sz="1800" b="1" i="0">
                 <a:solidFill>
                   <a:srgbClr val="FFFFFF"/>
                 </a:solidFill>
@@ -13205,7 +12956,7 @@
           <a:p>
             <a:pPr algn="ctr"/>
             <a:r>
-              <a:rPr sz="1100" b="1" i="0">
+              <a:rPr sz="1800" b="1" i="0">
                 <a:solidFill>
                   <a:srgbClr val="FFFFFF"/>
                 </a:solidFill>
@@ -13302,7 +13053,7 @@
           <a:p>
             <a:pPr algn="ctr"/>
             <a:r>
-              <a:rPr sz="1100" b="1" i="0">
+              <a:rPr sz="1800" b="1" i="0">
                 <a:solidFill>
                   <a:srgbClr val="FFFFFF"/>
                 </a:solidFill>
@@ -13399,7 +13150,7 @@
           <a:p>
             <a:pPr algn="ctr"/>
             <a:r>
-              <a:rPr sz="1100" b="1" i="0">
+              <a:rPr sz="1800" b="1" i="0">
                 <a:solidFill>
                   <a:srgbClr val="FFFFFF"/>
                 </a:solidFill>
@@ -13496,7 +13247,7 @@
           <a:p>
             <a:pPr algn="ctr"/>
             <a:r>
-              <a:rPr sz="1100" b="1" i="0">
+              <a:rPr sz="1800" b="1" i="0">
                 <a:solidFill>
                   <a:srgbClr val="FFFFFF"/>
                 </a:solidFill>
@@ -13516,7 +13267,7 @@
         <p:spPr>
           <a:xfrm>
             <a:off x="1051560" y="2788920"/>
-            <a:ext cx="7132320" cy="274320"/>
+            <a:ext cx="7132320" cy="557784"/>
           </a:xfrm>
           <a:prstGeom prst="rect">
             <a:avLst/>
@@ -13531,7 +13282,7 @@
           <a:p>
             <a:pPr algn="ctr"/>
             <a:r>
-              <a:rPr sz="1100" b="0" i="1">
+              <a:rPr sz="1800" b="0" i="1">
                 <a:solidFill>
                   <a:srgbClr val="555960"/>
                 </a:solidFill>
@@ -13612,7 +13363,7 @@
           <a:p>
             <a:pPr algn="l"/>
             <a:r>
-              <a:rPr sz="1200" b="1" i="0" spc="100">
+              <a:rPr sz="1800" b="1" i="0" spc="100">
                 <a:solidFill>
                   <a:srgbClr val="8E6F3E"/>
                 </a:solidFill>
@@ -13632,7 +13383,7 @@
         <p:spPr>
           <a:xfrm>
             <a:off x="777240" y="3931920"/>
-            <a:ext cx="3474720" cy="1554480"/>
+            <a:ext cx="3474720" cy="1673352"/>
           </a:xfrm>
           <a:prstGeom prst="rect">
             <a:avLst/>
@@ -13651,7 +13402,7 @@
               </a:lnSpc>
             </a:pPr>
             <a:r>
-              <a:rPr sz="1300" b="0" i="0">
+              <a:rPr sz="1800" b="0" i="0">
                 <a:solidFill>
                   <a:srgbClr val="353638"/>
                 </a:solidFill>
@@ -13667,7 +13418,7 @@
               </a:lnSpc>
             </a:pPr>
             <a:r>
-              <a:rPr sz="1300" b="0" i="0">
+              <a:rPr sz="1800" b="0" i="0">
                 <a:solidFill>
                   <a:srgbClr val="353638"/>
                 </a:solidFill>
@@ -13683,7 +13434,7 @@
               </a:lnSpc>
             </a:pPr>
             <a:r>
-              <a:rPr sz="1300" b="0" i="0">
+              <a:rPr sz="1800" b="0" i="0">
                 <a:solidFill>
                   <a:srgbClr val="353638"/>
                 </a:solidFill>
@@ -13764,7 +13515,7 @@
           <a:p>
             <a:pPr algn="l"/>
             <a:r>
-              <a:rPr sz="1200" b="1" i="0" spc="100">
+              <a:rPr sz="1800" b="1" i="0" spc="100">
                 <a:solidFill>
                   <a:srgbClr val="8E6F3E"/>
                 </a:solidFill>
@@ -13784,7 +13535,7 @@
         <p:spPr>
           <a:xfrm>
             <a:off x="4892040" y="3931920"/>
-            <a:ext cx="3474720" cy="1554480"/>
+            <a:ext cx="3474720" cy="1952244"/>
           </a:xfrm>
           <a:prstGeom prst="rect">
             <a:avLst/>
@@ -13803,7 +13554,7 @@
               </a:lnSpc>
             </a:pPr>
             <a:r>
-              <a:rPr sz="1300" b="0" i="0">
+              <a:rPr sz="1800" b="0" i="0">
                 <a:solidFill>
                   <a:srgbClr val="353638"/>
                 </a:solidFill>
@@ -13819,7 +13570,7 @@
               </a:lnSpc>
             </a:pPr>
             <a:r>
-              <a:rPr sz="1300" b="0" i="0">
+              <a:rPr sz="1800" b="0" i="0">
                 <a:solidFill>
                   <a:srgbClr val="353638"/>
                 </a:solidFill>
@@ -13835,7 +13586,7 @@
               </a:lnSpc>
             </a:pPr>
             <a:r>
-              <a:rPr sz="1300" b="0" i="0">
+              <a:rPr sz="1800" b="0" i="0">
                 <a:solidFill>
                   <a:srgbClr val="353638"/>
                 </a:solidFill>
@@ -13851,7 +13602,7 @@
               </a:lnSpc>
             </a:pPr>
             <a:r>
-              <a:rPr sz="1300" b="0" i="0">
+              <a:rPr sz="1800" b="0" i="0">
                 <a:solidFill>
                   <a:srgbClr val="353638"/>
                 </a:solidFill>
@@ -13904,7 +13655,7 @@
           <a:p>
             <a:pPr algn="ctr"/>
             <a:r>
-              <a:rPr sz="1400" b="1" i="0">
+              <a:rPr sz="1800" b="1" i="0">
                 <a:solidFill>
                   <a:srgbClr val="FFFFFF"/>
                 </a:solidFill>
@@ -14148,7 +13899,7 @@
           <a:p>
             <a:pPr algn="ctr"/>
             <a:r>
-              <a:rPr sz="1300" b="1" i="0" spc="200">
+              <a:rPr sz="1800" b="1" i="0" spc="200">
                 <a:solidFill>
                   <a:srgbClr val="555960"/>
                 </a:solidFill>
@@ -14187,7 +13938,7 @@
               </a:lnSpc>
             </a:pPr>
             <a:r>
-              <a:rPr sz="2300" b="1" i="0">
+              <a:rPr sz="2000" b="1" i="0">
                 <a:solidFill>
                   <a:srgbClr val="5C4826"/>
                 </a:solidFill>
@@ -14203,7 +13954,7 @@
               </a:lnSpc>
             </a:pPr>
             <a:r>
-              <a:rPr sz="2300" b="1" i="0">
+              <a:rPr sz="2000" b="1" i="0">
                 <a:solidFill>
                   <a:srgbClr val="5C4826"/>
                 </a:solidFill>
@@ -14242,7 +13993,7 @@
               </a:lnSpc>
             </a:pPr>
             <a:r>
-              <a:rPr sz="1400" b="0" i="1">
+              <a:rPr sz="2000" b="0" i="1">
                 <a:solidFill>
                   <a:srgbClr val="353638"/>
                 </a:solidFill>
@@ -14258,7 +14009,7 @@
               </a:lnSpc>
             </a:pPr>
             <a:r>
-              <a:rPr sz="1400" b="0" i="1">
+              <a:rPr sz="2000" b="0" i="1">
                 <a:solidFill>
                   <a:srgbClr val="353638"/>
                 </a:solidFill>
@@ -14355,7 +14106,7 @@
           <a:p>
             <a:pPr algn="ctr"/>
             <a:r>
-              <a:rPr sz="1200" b="1" i="0">
+              <a:rPr sz="1800" b="1" i="0">
                 <a:solidFill>
                   <a:srgbClr val="FFFFFF"/>
                 </a:solidFill>
@@ -14410,7 +14161,7 @@
         <p:spPr>
           <a:xfrm>
             <a:off x="1097280" y="4983480"/>
-            <a:ext cx="6949440" cy="1097280"/>
+            <a:ext cx="6949440" cy="1394460"/>
           </a:xfrm>
           <a:prstGeom prst="rect">
             <a:avLst/>
@@ -14429,7 +14180,7 @@
               </a:lnSpc>
             </a:pPr>
             <a:r>
-              <a:rPr sz="1350" b="0" i="1">
+              <a:rPr sz="1800" b="0" i="1">
                 <a:solidFill>
                   <a:srgbClr val="555960"/>
                 </a:solidFill>
@@ -14445,7 +14196,7 @@
               </a:lnSpc>
             </a:pPr>
             <a:r>
-              <a:rPr sz="1350" b="0" i="1">
+              <a:rPr sz="1800" b="0" i="1">
                 <a:solidFill>
                   <a:srgbClr val="555960"/>
                 </a:solidFill>
@@ -14461,7 +14212,7 @@
               </a:lnSpc>
             </a:pPr>
             <a:r>
-              <a:rPr sz="1350" b="0" i="1">
+              <a:rPr sz="1800" b="0" i="1">
                 <a:solidFill>
                   <a:srgbClr val="555960"/>
                 </a:solidFill>
@@ -14549,7 +14300,7 @@
           <a:p>
             <a:pPr algn="l"/>
             <a:r>
-              <a:rPr sz="1900" b="0" i="0" spc="140">
+              <a:rPr sz="2400" b="0" i="0" spc="140">
                 <a:solidFill>
                   <a:srgbClr val="353638"/>
                 </a:solidFill>
@@ -14613,7 +14364,7 @@
         <p:spPr>
           <a:xfrm>
             <a:off x="548640" y="1005840"/>
-            <a:ext cx="4297680" cy="3931920"/>
+            <a:ext cx="5257800" cy="3931920"/>
           </a:xfrm>
           <a:prstGeom prst="rect">
             <a:avLst/>
@@ -14657,7 +14408,7 @@
         <p:spPr>
           <a:xfrm>
             <a:off x="777240" y="1207008"/>
-            <a:ext cx="3931920" cy="3566160"/>
+            <a:ext cx="4892040" cy="3566160"/>
           </a:xfrm>
           <a:prstGeom prst="rect">
             <a:avLst/>
@@ -14676,7 +14427,7 @@
               </a:lnSpc>
             </a:pPr>
             <a:r>
-              <a:rPr sz="1100" b="0" i="0">
+              <a:rPr sz="1800">
                 <a:solidFill>
                   <a:srgbClr val="ECE2D0"/>
                 </a:solidFill>
@@ -14686,13 +14437,8 @@
             </a:r>
           </a:p>
           <a:p>
-            <a:pPr algn="l">
-              <a:lnSpc>
-                <a:spcPct val="112000"/>
-              </a:lnSpc>
-            </a:pPr>
-            <a:r>
-              <a:rPr sz="1100" b="0" i="0">
+            <a:r>
+              <a:rPr sz="1800">
                 <a:solidFill>
                   <a:srgbClr val="ECE2D0"/>
                 </a:solidFill>
@@ -14702,13 +14448,8 @@
             </a:r>
           </a:p>
           <a:p>
-            <a:pPr algn="l">
-              <a:lnSpc>
-                <a:spcPct val="112000"/>
-              </a:lnSpc>
-            </a:pPr>
-            <a:r>
-              <a:rPr sz="1100" b="0" i="0">
+            <a:r>
+              <a:rPr sz="1800">
                 <a:solidFill>
                   <a:srgbClr val="ECE2D0"/>
                 </a:solidFill>
@@ -14718,13 +14459,8 @@
             </a:r>
           </a:p>
           <a:p>
-            <a:pPr algn="l">
-              <a:lnSpc>
-                <a:spcPct val="112000"/>
-              </a:lnSpc>
-            </a:pPr>
-            <a:r>
-              <a:rPr sz="1100" b="0" i="0">
+            <a:r>
+              <a:rPr sz="1800">
                 <a:solidFill>
                   <a:srgbClr val="ECE2D0"/>
                 </a:solidFill>
@@ -14734,13 +14470,8 @@
             </a:r>
           </a:p>
           <a:p>
-            <a:pPr algn="l">
-              <a:lnSpc>
-                <a:spcPct val="112000"/>
-              </a:lnSpc>
-            </a:pPr>
-            <a:r>
-              <a:rPr sz="1100" b="0" i="0">
+            <a:r>
+              <a:rPr sz="1800">
                 <a:solidFill>
                   <a:srgbClr val="ECE2D0"/>
                 </a:solidFill>
@@ -14750,13 +14481,8 @@
             </a:r>
           </a:p>
           <a:p>
-            <a:pPr algn="l">
-              <a:lnSpc>
-                <a:spcPct val="112000"/>
-              </a:lnSpc>
-            </a:pPr>
-            <a:r>
-              <a:rPr sz="1100" b="0" i="0">
+            <a:r>
+              <a:rPr sz="1800">
                 <a:solidFill>
                   <a:srgbClr val="ECE2D0"/>
                 </a:solidFill>
@@ -14766,13 +14492,8 @@
             </a:r>
           </a:p>
           <a:p>
-            <a:pPr algn="l">
-              <a:lnSpc>
-                <a:spcPct val="112000"/>
-              </a:lnSpc>
-            </a:pPr>
-            <a:r>
-              <a:rPr sz="1100" b="0" i="0">
+            <a:r>
+              <a:rPr sz="1800">
                 <a:solidFill>
                   <a:srgbClr val="ECE2D0"/>
                 </a:solidFill>
@@ -14782,157 +14503,19 @@
             </a:r>
           </a:p>
           <a:p>
-            <a:pPr algn="l">
-              <a:lnSpc>
-                <a:spcPct val="112000"/>
-              </a:lnSpc>
-            </a:pPr>
-            <a:r>
-              <a:rPr sz="1100" b="0" i="0">
+            <a:r>
+              <a:rPr sz="1800">
                 <a:solidFill>
                   <a:srgbClr val="ECE2D0"/>
                 </a:solidFill>
                 <a:latin typeface="Consolas"/>
               </a:rPr>
-              <a:t>  state def Modes {</a:t>
-            </a:r>
-          </a:p>
-          <a:p>
-            <a:pPr algn="l">
-              <a:lnSpc>
-                <a:spcPct val="112000"/>
-              </a:lnSpc>
-            </a:pPr>
-            <a:r>
-              <a:rPr sz="1100" b="0" i="0">
-                <a:solidFill>
-                  <a:srgbClr val="ECE2D0"/>
-                </a:solidFill>
-                <a:latin typeface="Consolas"/>
-              </a:rPr>
-              <a:t>    state Sleep;    // 0.1 mW</a:t>
-            </a:r>
-          </a:p>
-          <a:p>
-            <a:pPr algn="l">
-              <a:lnSpc>
-                <a:spcPct val="112000"/>
-              </a:lnSpc>
-            </a:pPr>
-            <a:r>
-              <a:rPr sz="1100" b="0" i="0">
-                <a:solidFill>
-                  <a:srgbClr val="ECE2D0"/>
-                </a:solidFill>
-                <a:latin typeface="Consolas"/>
-              </a:rPr>
-              <a:t>    state Sample;   // 5 mW, 50 ms</a:t>
-            </a:r>
-          </a:p>
-          <a:p>
-            <a:pPr algn="l">
-              <a:lnSpc>
-                <a:spcPct val="112000"/>
-              </a:lnSpc>
-            </a:pPr>
-            <a:r>
-              <a:rPr sz="1100" b="0" i="0">
-                <a:solidFill>
-                  <a:srgbClr val="ECE2D0"/>
-                </a:solidFill>
-                <a:latin typeface="Consolas"/>
-              </a:rPr>
-              <a:t>    state Transmit; // 60 mW</a:t>
-            </a:r>
-          </a:p>
-          <a:p>
-            <a:pPr algn="l">
-              <a:lnSpc>
-                <a:spcPct val="112000"/>
-              </a:lnSpc>
-            </a:pPr>
-            <a:r>
-              <a:rPr sz="1100" b="0" i="0">
-                <a:solidFill>
-                  <a:srgbClr val="ECE2D0"/>
-                </a:solidFill>
-                <a:latin typeface="Consolas"/>
-              </a:rPr>
-              <a:t>  }</a:t>
-            </a:r>
-          </a:p>
-          <a:p>
-            <a:pPr algn="l">
-              <a:lnSpc>
-                <a:spcPct val="112000"/>
-              </a:lnSpc>
-            </a:pPr>
-            <a:r>
-              <a:rPr sz="1100" b="0" i="0">
-                <a:solidFill>
-                  <a:srgbClr val="ECE2D0"/>
-                </a:solidFill>
-                <a:latin typeface="Consolas"/>
-              </a:rPr>
-              <a:t/>
-            </a:r>
-          </a:p>
-          <a:p>
-            <a:pPr algn="l">
-              <a:lnSpc>
-                <a:spcPct val="112000"/>
-              </a:lnSpc>
-            </a:pPr>
-            <a:r>
-              <a:rPr sz="1100" b="0" i="0">
-                <a:solidFill>
-                  <a:srgbClr val="ECE2D0"/>
-                </a:solidFill>
-                <a:latin typeface="Consolas"/>
-              </a:rPr>
-              <a:t>  requirement avgPowerBudget {</a:t>
-            </a:r>
-          </a:p>
-          <a:p>
-            <a:pPr algn="l">
-              <a:lnSpc>
-                <a:spcPct val="112000"/>
-              </a:lnSpc>
-            </a:pPr>
-            <a:r>
-              <a:rPr sz="1100" b="0" i="0">
-                <a:solidFill>
-                  <a:srgbClr val="ECE2D0"/>
-                </a:solidFill>
-                <a:latin typeface="Consolas"/>
-              </a:rPr>
-              <a:t>    // average power &lt;= 2 [mW]</a:t>
-            </a:r>
-          </a:p>
-          <a:p>
-            <a:pPr algn="l">
-              <a:lnSpc>
-                <a:spcPct val="112000"/>
-              </a:lnSpc>
-            </a:pPr>
-            <a:r>
-              <a:rPr sz="1100" b="0" i="0">
-                <a:solidFill>
-                  <a:srgbClr val="ECE2D0"/>
-                </a:solidFill>
-                <a:latin typeface="Consolas"/>
-              </a:rPr>
-              <a:t>  }</a:t>
-            </a:r>
-          </a:p>
-          <a:p>
-            <a:pPr algn="l">
-              <a:lnSpc>
-                <a:spcPct val="112000"/>
-              </a:lnSpc>
-            </a:pPr>
-            <a:r>
-              <a:rPr sz="1100" b="0" i="0">
+              <a:t>  state def Modes { … }</a:t>
+            </a:r>
+          </a:p>
+          <a:p>
+            <a:r>
+              <a:rPr sz="1800">
                 <a:solidFill>
                   <a:srgbClr val="ECE2D0"/>
                 </a:solidFill>
@@ -14967,12 +14550,7 @@
           <a:p>
             <a:pPr algn="l"/>
             <a:r>
-              <a:rPr sz="1050" b="0" i="1">
-                <a:solidFill>
-                  <a:srgbClr val="555960"/>
-                </a:solidFill>
-                <a:latin typeface="Calibri"/>
-              </a:rPr>
+              <a:rPr sz="1400"/>
               <a:t>SysML v2 textual notation — excerpt, abridged</a:t>
             </a:r>
           </a:p>
@@ -14986,8 +14564,8 @@
         </p:nvSpPr>
         <p:spPr>
           <a:xfrm>
-            <a:off x="5074920" y="1005840"/>
-            <a:ext cx="3520440" cy="3931920"/>
+            <a:off x="5943600" y="1005840"/>
+            <a:ext cx="2651760" cy="3931920"/>
           </a:xfrm>
           <a:prstGeom prst="rect">
             <a:avLst/>
@@ -15032,8 +14610,8 @@
         </p:nvSpPr>
         <p:spPr>
           <a:xfrm>
-            <a:off x="5303520" y="1170432"/>
-            <a:ext cx="3108960" cy="274320"/>
+            <a:off x="6126480" y="1170432"/>
+            <a:ext cx="2331720" cy="310895"/>
           </a:xfrm>
           <a:prstGeom prst="rect">
             <a:avLst/>
@@ -15048,7 +14626,7 @@
           <a:p>
             <a:pPr algn="l"/>
             <a:r>
-              <a:rPr sz="1150" b="1" i="0" spc="50">
+              <a:rPr sz="1800" b="1" i="0" spc="50">
                 <a:solidFill>
                   <a:srgbClr val="8E6F3E"/>
                 </a:solidFill>
@@ -15067,8 +14645,8 @@
         </p:nvSpPr>
         <p:spPr>
           <a:xfrm>
-            <a:off x="5303520" y="1536192"/>
-            <a:ext cx="3108960" cy="3291840"/>
+            <a:off x="6126480" y="1536192"/>
+            <a:ext cx="2331720" cy="3291840"/>
           </a:xfrm>
           <a:prstGeom prst="rect">
             <a:avLst/>
@@ -15087,198 +14665,62 @@
               </a:lnSpc>
             </a:pPr>
             <a:r>
-              <a:rPr sz="1250" b="1" i="0">
-                <a:solidFill>
-                  <a:srgbClr val="5C4826"/>
-                </a:solidFill>
-                <a:latin typeface="Calibri"/>
-              </a:rPr>
-              <a:t>modes  </a:t>
-            </a:r>
-            <a:r>
-              <a:rPr sz="1250" b="0" i="0">
-                <a:solidFill>
-                  <a:srgbClr val="353638"/>
-                </a:solidFill>
-                <a:latin typeface="Calibri"/>
-              </a:rPr>
-              <a:t>Sleep / Sample / Transmit</a:t>
-            </a:r>
-          </a:p>
-          <a:p>
-            <a:pPr algn="l">
-              <a:lnSpc>
-                <a:spcPct val="140000"/>
-              </a:lnSpc>
-            </a:pPr>
-            <a:r>
-              <a:rPr sz="1250" b="1" i="0">
-                <a:solidFill>
-                  <a:srgbClr val="5C4826"/>
-                </a:solidFill>
-                <a:latin typeface="Calibri"/>
-              </a:rPr>
-              <a:t>sampling period  </a:t>
-            </a:r>
-            <a:r>
-              <a:rPr sz="1250" b="0" i="0">
-                <a:solidFill>
-                  <a:srgbClr val="353638"/>
-                </a:solidFill>
-                <a:latin typeface="Calibri"/>
-              </a:rPr>
-              <a:t>5 s</a:t>
-            </a:r>
-          </a:p>
-          <a:p>
-            <a:pPr algn="l">
-              <a:lnSpc>
-                <a:spcPct val="140000"/>
-              </a:lnSpc>
-            </a:pPr>
-            <a:r>
-              <a:rPr sz="1250" b="1" i="0">
-                <a:solidFill>
-                  <a:srgbClr val="5C4826"/>
-                </a:solidFill>
-                <a:latin typeface="Calibri"/>
-              </a:rPr>
-              <a:t>sample size  </a:t>
-            </a:r>
-            <a:r>
-              <a:rPr sz="1250" b="0" i="0">
-                <a:solidFill>
-                  <a:srgbClr val="353638"/>
-                </a:solidFill>
-                <a:latin typeface="Calibri"/>
-              </a:rPr>
-              <a:t>512 B</a:t>
-            </a:r>
-          </a:p>
-          <a:p>
-            <a:pPr algn="l">
-              <a:lnSpc>
-                <a:spcPct val="140000"/>
-              </a:lnSpc>
-            </a:pPr>
-            <a:r>
-              <a:rPr sz="1250" b="1" i="0">
-                <a:solidFill>
-                  <a:srgbClr val="5C4826"/>
-                </a:solidFill>
-                <a:latin typeface="Calibri"/>
-              </a:rPr>
-              <a:t>buffer capacity  </a:t>
-            </a:r>
-            <a:r>
-              <a:rPr sz="1250" b="0" i="0">
-                <a:solidFill>
-                  <a:srgbClr val="353638"/>
-                </a:solidFill>
-                <a:latin typeface="Calibri"/>
-              </a:rPr>
-              <a:t>4 KiB = 8 samples</a:t>
-            </a:r>
-          </a:p>
-          <a:p>
-            <a:pPr algn="l">
-              <a:lnSpc>
-                <a:spcPct val="140000"/>
-              </a:lnSpc>
-            </a:pPr>
-            <a:r>
-              <a:rPr sz="1250" b="1" i="0">
-                <a:solidFill>
-                  <a:srgbClr val="5C4826"/>
-                </a:solidFill>
-                <a:latin typeface="Calibri"/>
-              </a:rPr>
-              <a:t>radio throughput  </a:t>
-            </a:r>
-            <a:r>
-              <a:rPr sz="1250" b="0" i="0">
-                <a:solidFill>
-                  <a:srgbClr val="353638"/>
-                </a:solidFill>
-                <a:latin typeface="Calibri"/>
-              </a:rPr>
-              <a:t>4 KiB/s</a:t>
-            </a:r>
-          </a:p>
-          <a:p>
-            <a:pPr algn="l">
-              <a:lnSpc>
-                <a:spcPct val="140000"/>
-              </a:lnSpc>
-            </a:pPr>
-            <a:r>
-              <a:rPr sz="1250" b="1" i="0">
-                <a:solidFill>
-                  <a:srgbClr val="5C4826"/>
-                </a:solidFill>
-                <a:latin typeface="Calibri"/>
-              </a:rPr>
-              <a:t>transmit timer  </a:t>
-            </a:r>
-            <a:r>
-              <a:rPr sz="1250" b="0" i="0">
-                <a:solidFill>
-                  <a:srgbClr val="353638"/>
-                </a:solidFill>
-                <a:latin typeface="Calibri"/>
-              </a:rPr>
-              <a:t>every 30 s</a:t>
-            </a:r>
-          </a:p>
-          <a:p>
-            <a:pPr algn="l">
-              <a:lnSpc>
-                <a:spcPct val="140000"/>
-              </a:lnSpc>
-            </a:pPr>
-            <a:r>
-              <a:rPr sz="1250" b="1" i="0">
-                <a:solidFill>
-                  <a:srgbClr val="5C4826"/>
-                </a:solidFill>
-                <a:latin typeface="Calibri"/>
-              </a:rPr>
-              <a:t>mode power  </a:t>
-            </a:r>
-            <a:r>
-              <a:rPr sz="1250" b="0" i="0">
-                <a:solidFill>
-                  <a:srgbClr val="353638"/>
-                </a:solidFill>
-                <a:latin typeface="Calibri"/>
-              </a:rPr>
-              <a:t>0.1 / 5 / 60 mW</a:t>
-            </a:r>
-          </a:p>
-          <a:p>
-            <a:pPr algn="l">
-              <a:lnSpc>
-                <a:spcPct val="140000"/>
-              </a:lnSpc>
-            </a:pPr>
-            <a:r>
-              <a:rPr sz="1250" b="1" i="0">
-                <a:solidFill>
-                  <a:srgbClr val="5C4826"/>
-                </a:solidFill>
-                <a:latin typeface="Calibri"/>
-              </a:rPr>
-              <a:t>requirements  </a:t>
-            </a:r>
-            <a:r>
-              <a:rPr sz="1250" b="0" i="0">
-                <a:solidFill>
-                  <a:srgbClr val="353638"/>
-                </a:solidFill>
-                <a:latin typeface="Calibri"/>
-              </a:rPr>
-              <a:t>average power ≤ 2 mW,
-and the buffer must not overflow</a:t>
+              <a:rPr sz="1800"/>
+              <a:t>modes</a:t>
+            </a:r>
+          </a:p>
+          <a:p>
+            <a:r>
+              <a:rPr sz="1800"/>
+              <a:t>  Sleep / Sample / Transmit</a:t>
+            </a:r>
+          </a:p>
+          <a:p>
+            <a:r>
+              <a:rPr sz="1800"/>
+              <a:t>sampling  5 s</a:t>
+            </a:r>
+          </a:p>
+          <a:p>
+            <a:r>
+              <a:rPr sz="1800"/>
+              <a:t>sample  512 B</a:t>
+            </a:r>
+          </a:p>
+          <a:p>
+            <a:r>
+              <a:rPr sz="1800"/>
+              <a:t>buffer  4 KiB = 8</a:t>
+            </a:r>
+          </a:p>
+          <a:p>
+            <a:r>
+              <a:rPr sz="1800"/>
+              <a:t>radio  4 KiB/s</a:t>
+            </a:r>
+          </a:p>
+          <a:p>
+            <a:r>
+              <a:rPr sz="1800"/>
+              <a:t>tx timer  30 s</a:t>
+            </a:r>
+          </a:p>
+          <a:p>
+            <a:r>
+              <a:rPr sz="1800"/>
+              <a:t>power  0.1 / 5 / 60 mW</a:t>
+            </a:r>
+          </a:p>
+          <a:p>
+            <a:r>
+              <a:rPr sz="1800"/>
+              <a:t>avg power ≤ 2 mW</a:t>
+            </a:r>
+          </a:p>
+          <a:p>
+            <a:r>
+              <a:rPr sz="1800"/>
+              <a:t>no buffer overflow</a:t>
             </a:r>
           </a:p>
         </p:txBody>
@@ -15291,8 +14733,8 @@
         </p:nvSpPr>
         <p:spPr>
           <a:xfrm>
-            <a:off x="548640" y="5440680"/>
-            <a:ext cx="8046720" cy="594360"/>
+            <a:off x="548640" y="5394960"/>
+            <a:ext cx="8046720" cy="640080"/>
           </a:xfrm>
           <a:prstGeom prst="rect">
             <a:avLst/>
@@ -15311,29 +14753,14 @@
               </a:lnSpc>
             </a:pPr>
             <a:r>
-              <a:rPr sz="1300" b="0" i="1">
-                <a:solidFill>
-                  <a:srgbClr val="5C4826"/>
-                </a:solidFill>
-                <a:latin typeface="Calibri"/>
-              </a:rPr>
-              <a:t>Exactly the distinctions the sensor node declared as omissions: operating modes, and resource</a:t>
-            </a:r>
-          </a:p>
-          <a:p>
-            <a:pPr algn="l">
-              <a:lnSpc>
-                <a:spcPct val="115000"/>
-              </a:lnSpc>
-            </a:pPr>
-            <a:r>
-              <a:rPr sz="1300" b="0" i="1">
-                <a:solidFill>
-                  <a:srgbClr val="5C4826"/>
-                </a:solidFill>
-                <a:latin typeface="Calibri"/>
-              </a:rPr>
-              <a:t>lifetimes tied to them.</a:t>
+              <a:rPr sz="1800"/>
+              <a:t>Exactly the distinctions the sensor node declared as omissions:</a:t>
+            </a:r>
+          </a:p>
+          <a:p>
+            <a:r>
+              <a:rPr sz="1800"/>
+              <a:t>operating modes, and resource lifetimes tied to them.</a:t>
             </a:r>
           </a:p>
         </p:txBody>
@@ -15346,8 +14773,8 @@
         </p:nvSpPr>
         <p:spPr>
           <a:xfrm>
-            <a:off x="320040" y="6144768"/>
-            <a:ext cx="8503920" cy="420624"/>
+            <a:off x="320040" y="6007607"/>
+            <a:ext cx="8503920" cy="557784"/>
           </a:xfrm>
           <a:prstGeom prst="rect">
             <a:avLst/>
@@ -15380,7 +14807,7 @@
           <a:p>
             <a:pPr algn="ctr"/>
             <a:r>
-              <a:rPr sz="1400" b="1" i="0">
+              <a:rPr sz="1800" b="1" i="0">
                 <a:solidFill>
                   <a:srgbClr val="FFFFFF"/>
                 </a:solidFill>
@@ -15492,7 +14919,7 @@
           <a:p>
             <a:pPr algn="l"/>
             <a:r>
-              <a:rPr sz="1900" b="0" i="0" spc="140">
+              <a:rPr sz="2400" b="0" i="0" spc="140">
                 <a:solidFill>
                   <a:srgbClr val="353638"/>
                 </a:solidFill>
@@ -15602,7 +15029,7 @@
         <p:spPr>
           <a:xfrm>
             <a:off x="822960" y="1097280"/>
-            <a:ext cx="7498079" cy="640080"/>
+            <a:ext cx="7498079" cy="836676"/>
           </a:xfrm>
           <a:prstGeom prst="rect">
             <a:avLst/>
@@ -15621,7 +15048,7 @@
               </a:lnSpc>
             </a:pPr>
             <a:r>
-              <a:rPr sz="1300" b="1" i="0">
+              <a:rPr sz="1800" b="1" i="0">
                 <a:solidFill>
                   <a:srgbClr val="8E6F3E"/>
                 </a:solidFill>
@@ -15630,7 +15057,7 @@
               <a:t>Given:  </a:t>
             </a:r>
             <a:r>
-              <a:rPr sz="1150" b="0" i="0">
+              <a:rPr sz="1800" b="0" i="0">
                 <a:solidFill>
                   <a:srgbClr val="353638"/>
                 </a:solidFill>
@@ -15646,7 +15073,7 @@
               </a:lnSpc>
             </a:pPr>
             <a:r>
-              <a:rPr sz="1200" b="0" i="1">
+              <a:rPr sz="1800" b="0" i="1">
                 <a:solidFill>
                   <a:srgbClr val="555960"/>
                 </a:solidFill>
@@ -15701,7 +15128,7 @@
           <a:p>
             <a:pPr algn="ctr"/>
             <a:r>
-              <a:rPr sz="1400" b="1" i="0">
+              <a:rPr sz="2000" b="1" i="0">
                 <a:solidFill>
                   <a:srgbClr val="5C4826"/>
                 </a:solidFill>
@@ -15756,7 +15183,7 @@
           <a:p>
             <a:pPr algn="ctr"/>
             <a:r>
-              <a:rPr sz="1400" b="1" i="0">
+              <a:rPr sz="2000" b="1" i="0">
                 <a:solidFill>
                   <a:srgbClr val="5C4826"/>
                 </a:solidFill>
@@ -15809,7 +15236,7 @@
           <a:p>
             <a:pPr algn="ctr"/>
             <a:r>
-              <a:rPr sz="1400" b="1" i="0">
+              <a:rPr sz="2000" b="1" i="0">
                 <a:solidFill>
                   <a:srgbClr val="FFFFFF"/>
                 </a:solidFill>
@@ -15866,7 +15293,7 @@
         <p:spPr>
           <a:xfrm>
             <a:off x="2468880" y="2670048"/>
-            <a:ext cx="1280160" cy="228600"/>
+            <a:ext cx="1280160" cy="557784"/>
           </a:xfrm>
           <a:prstGeom prst="rect">
             <a:avLst/>
@@ -15881,7 +15308,7 @@
           <a:p>
             <a:pPr algn="ctr"/>
             <a:r>
-              <a:rPr sz="950" b="0" i="1">
+              <a:rPr sz="1800" b="0" i="1">
                 <a:solidFill>
                   <a:srgbClr val="555960"/>
                 </a:solidFill>
@@ -15953,7 +15380,7 @@
           <a:p>
             <a:pPr algn="ctr"/>
             <a:r>
-              <a:rPr sz="950" b="0" i="1">
+              <a:rPr sz="1800" b="0" i="1">
                 <a:solidFill>
                   <a:srgbClr val="555960"/>
                 </a:solidFill>
@@ -16025,7 +15452,7 @@
           <a:p>
             <a:pPr algn="ctr"/>
             <a:r>
-              <a:rPr sz="950" b="1" i="1">
+              <a:rPr sz="1800" b="1" i="1">
                 <a:solidFill>
                   <a:srgbClr val="C8102E"/>
                 </a:solidFill>
@@ -16169,7 +15596,7 @@
           <a:p>
             <a:pPr algn="ctr"/>
             <a:r>
-              <a:rPr sz="950" b="0" i="1">
+              <a:rPr sz="1800" b="0" i="1">
                 <a:solidFill>
                   <a:srgbClr val="555960"/>
                 </a:solidFill>
@@ -16313,7 +15740,7 @@
           <a:p>
             <a:pPr algn="ctr"/>
             <a:r>
-              <a:rPr sz="950" b="0" i="1">
+              <a:rPr sz="1800" b="0" i="1">
                 <a:solidFill>
                   <a:srgbClr val="555960"/>
                 </a:solidFill>
@@ -16333,7 +15760,7 @@
         <p:spPr>
           <a:xfrm>
             <a:off x="822960" y="4160520"/>
-            <a:ext cx="7772400" cy="274320"/>
+            <a:ext cx="7772400" cy="557783"/>
           </a:xfrm>
           <a:prstGeom prst="rect">
             <a:avLst/>
@@ -16348,7 +15775,7 @@
           <a:p>
             <a:pPr algn="l"/>
             <a:r>
-              <a:rPr sz="1250" b="0" i="1">
+              <a:rPr sz="1800" b="0" i="1">
                 <a:solidFill>
                   <a:srgbClr val="555960"/>
                 </a:solidFill>
@@ -16414,7 +15841,7 @@
         <p:spPr>
           <a:xfrm>
             <a:off x="822960" y="4773168"/>
-            <a:ext cx="7498079" cy="1005840"/>
+            <a:ext cx="7498079" cy="1316736"/>
           </a:xfrm>
           <a:prstGeom prst="rect">
             <a:avLst/>
@@ -16433,7 +15860,7 @@
               </a:lnSpc>
             </a:pPr>
             <a:r>
-              <a:rPr sz="1300" b="1" i="0">
+              <a:rPr sz="1800" b="1" i="0">
                 <a:solidFill>
                   <a:srgbClr val="5C4826"/>
                 </a:solidFill>
@@ -16442,7 +15869,7 @@
               <a:t>Comparing the two rates cannot answer the question. </a:t>
             </a:r>
             <a:r>
-              <a:rPr sz="1300" b="0" i="0">
+              <a:rPr sz="1800" b="0" i="0">
                 <a:solidFill>
                   <a:srgbClr val="353638"/>
                 </a:solidFill>
@@ -16459,7 +15886,7 @@
               </a:lnSpc>
             </a:pPr>
             <a:r>
-              <a:rPr sz="1300" b="0" i="1">
+              <a:rPr sz="1800" b="0" i="1">
                 <a:solidFill>
                   <a:srgbClr val="8E6F3E"/>
                 </a:solidFill>
@@ -16478,8 +15905,8 @@
         </p:nvSpPr>
         <p:spPr>
           <a:xfrm>
-            <a:off x="320040" y="6144768"/>
-            <a:ext cx="8503920" cy="420624"/>
+            <a:off x="320040" y="6007607"/>
+            <a:ext cx="8503920" cy="557784"/>
           </a:xfrm>
           <a:prstGeom prst="rect">
             <a:avLst/>
@@ -16512,7 +15939,7 @@
           <a:p>
             <a:pPr algn="ctr"/>
             <a:r>
-              <a:rPr sz="1400" b="1" i="0">
+              <a:rPr sz="1800" b="1" i="0">
                 <a:solidFill>
                   <a:srgbClr val="FFFFFF"/>
                 </a:solidFill>
@@ -16624,7 +16051,7 @@
           <a:p>
             <a:pPr algn="l"/>
             <a:r>
-              <a:rPr sz="1900" b="0" i="0" spc="140">
+              <a:rPr sz="2400" b="0" i="0" spc="140">
                 <a:solidFill>
                   <a:srgbClr val="353638"/>
                 </a:solidFill>
@@ -16727,7 +16154,7 @@
               </a:lnSpc>
             </a:pPr>
             <a:r>
-              <a:rPr sz="1150" b="0" i="0">
+              <a:rPr sz="1800" b="0" i="0">
                 <a:solidFill>
                   <a:srgbClr val="5C4826"/>
                 </a:solidFill>
@@ -16743,7 +16170,7 @@
               </a:lnSpc>
             </a:pPr>
             <a:r>
-              <a:rPr sz="1150" b="0" i="0">
+              <a:rPr sz="1800" b="0" i="0">
                 <a:solidFill>
                   <a:srgbClr val="5C4826"/>
                 </a:solidFill>
@@ -16778,7 +16205,7 @@
           <a:p>
             <a:pPr algn="ctr"/>
             <a:r>
-              <a:rPr sz="1600" b="1" i="0">
+              <a:rPr sz="2000" b="1" i="0">
                 <a:solidFill>
                   <a:srgbClr val="8E6F3E"/>
                 </a:solidFill>
@@ -16837,7 +16264,7 @@
               </a:lnSpc>
             </a:pPr>
             <a:r>
-              <a:rPr sz="1150" b="0" i="0">
+              <a:rPr sz="1800" b="0" i="0">
                 <a:solidFill>
                   <a:srgbClr val="5C4826"/>
                 </a:solidFill>
@@ -16853,7 +16280,7 @@
               </a:lnSpc>
             </a:pPr>
             <a:r>
-              <a:rPr sz="1150" b="0" i="0">
+              <a:rPr sz="1800" b="0" i="0">
                 <a:solidFill>
                   <a:srgbClr val="5C4826"/>
                 </a:solidFill>
@@ -16888,7 +16315,7 @@
           <a:p>
             <a:pPr algn="ctr"/>
             <a:r>
-              <a:rPr sz="1600" b="1" i="0">
+              <a:rPr sz="2000" b="1" i="0">
                 <a:solidFill>
                   <a:srgbClr val="8E6F3E"/>
                 </a:solidFill>
@@ -16947,7 +16374,7 @@
               </a:lnSpc>
             </a:pPr>
             <a:r>
-              <a:rPr sz="1150" b="0" i="0">
+              <a:rPr sz="1800" b="0" i="0">
                 <a:solidFill>
                   <a:srgbClr val="5C4826"/>
                 </a:solidFill>
@@ -16963,7 +16390,7 @@
               </a:lnSpc>
             </a:pPr>
             <a:r>
-              <a:rPr sz="1150" b="0" i="0">
+              <a:rPr sz="1800" b="0" i="0">
                 <a:solidFill>
                   <a:srgbClr val="5C4826"/>
                 </a:solidFill>
@@ -16998,7 +16425,7 @@
           <a:p>
             <a:pPr algn="ctr"/>
             <a:r>
-              <a:rPr sz="1600" b="1" i="0">
+              <a:rPr sz="2000" b="1" i="0">
                 <a:solidFill>
                   <a:srgbClr val="8E6F3E"/>
                 </a:solidFill>
@@ -17057,7 +16484,7 @@
               </a:lnSpc>
             </a:pPr>
             <a:r>
-              <a:rPr sz="1150" b="0" i="0">
+              <a:rPr sz="1800" b="0" i="0">
                 <a:solidFill>
                   <a:srgbClr val="5C4826"/>
                 </a:solidFill>
@@ -17073,7 +16500,7 @@
               </a:lnSpc>
             </a:pPr>
             <a:r>
-              <a:rPr sz="1150" b="0" i="0">
+              <a:rPr sz="1800" b="0" i="0">
                 <a:solidFill>
                   <a:srgbClr val="5C4826"/>
                 </a:solidFill>
@@ -17108,7 +16535,7 @@
           <a:p>
             <a:pPr algn="ctr"/>
             <a:r>
-              <a:rPr sz="1600" b="1" i="0">
+              <a:rPr sz="2000" b="1" i="0">
                 <a:solidFill>
                   <a:srgbClr val="8E6F3E"/>
                 </a:solidFill>
@@ -17167,7 +16594,7 @@
               </a:lnSpc>
             </a:pPr>
             <a:r>
-              <a:rPr sz="1150" b="0" i="0">
+              <a:rPr sz="1800" b="0" i="0">
                 <a:solidFill>
                   <a:srgbClr val="5C4826"/>
                 </a:solidFill>
@@ -17183,7 +16610,7 @@
               </a:lnSpc>
             </a:pPr>
             <a:r>
-              <a:rPr sz="1150" b="0" i="0">
+              <a:rPr sz="1800" b="0" i="0">
                 <a:solidFill>
                   <a:srgbClr val="5C4826"/>
                 </a:solidFill>
@@ -17280,7 +16707,7 @@
           <a:p>
             <a:pPr algn="ctr"/>
             <a:r>
-              <a:rPr sz="1400" b="1" i="0">
+              <a:rPr sz="2000" b="1" i="0">
                 <a:solidFill>
                   <a:srgbClr val="FFFFFF"/>
                 </a:solidFill>
@@ -17299,8 +16726,8 @@
         </p:nvSpPr>
         <p:spPr>
           <a:xfrm>
-            <a:off x="548640" y="2971800"/>
-            <a:ext cx="8046720" cy="2103120"/>
+            <a:off x="320040" y="2971800"/>
+            <a:ext cx="8503920" cy="2331720"/>
           </a:xfrm>
           <a:prstGeom prst="rect">
             <a:avLst/>
@@ -17345,8 +16772,8 @@
         </p:nvSpPr>
         <p:spPr>
           <a:xfrm>
-            <a:off x="822960" y="3127248"/>
-            <a:ext cx="7498079" cy="274320"/>
+            <a:off x="548640" y="3127248"/>
+            <a:ext cx="8046720" cy="274320"/>
           </a:xfrm>
           <a:prstGeom prst="rect">
             <a:avLst/>
@@ -17361,7 +16788,7 @@
           <a:p>
             <a:pPr algn="l"/>
             <a:r>
-              <a:rPr sz="1150" b="1" i="0" spc="60">
+              <a:rPr sz="1800" b="1" i="0" spc="60">
                 <a:solidFill>
                   <a:srgbClr val="8E6F3E"/>
                 </a:solidFill>
@@ -17380,8 +16807,8 @@
         </p:nvSpPr>
         <p:spPr>
           <a:xfrm>
-            <a:off x="822960" y="3456432"/>
-            <a:ext cx="7498079" cy="1554480"/>
+            <a:off x="548640" y="3456432"/>
+            <a:ext cx="8046720" cy="2355088"/>
           </a:xfrm>
           <a:prstGeom prst="rect">
             <a:avLst/>
@@ -17400,88 +16827,66 @@
               </a:lnSpc>
             </a:pPr>
             <a:r>
-              <a:rPr sz="1250" b="1" i="0">
-                <a:solidFill>
-                  <a:srgbClr val="353638"/>
-                </a:solidFill>
-                <a:latin typeface="Calibri"/>
-              </a:rPr>
-              <a:t>samples per 30 s transmit cycle:   </a:t>
-            </a:r>
-            <a:r>
-              <a:rPr sz="1200" b="0" i="0">
-                <a:solidFill>
-                  <a:srgbClr val="353638"/>
-                </a:solidFill>
+              <a:rPr sz="1800" b="1">
+                <a:latin typeface="Calibri"/>
+              </a:rPr>
+              <a:t>samples per cycle:  </a:t>
+            </a:r>
+            <a:r>
+              <a:rPr sz="1800" b="0">
                 <a:latin typeface="Consolas"/>
               </a:rPr>
-              <a:t>30 s ÷ 5 s = 6  ≤  capacity 8  →  no overflow (6/8)</a:t>
-            </a:r>
-          </a:p>
-          <a:p>
-            <a:pPr algn="l">
-              <a:lnSpc>
-                <a:spcPct val="145000"/>
-              </a:lnSpc>
-            </a:pPr>
-            <a:r>
-              <a:rPr sz="1250" b="1" i="0">
-                <a:solidFill>
-                  <a:srgbClr val="353638"/>
-                </a:solidFill>
-                <a:latin typeface="Calibri"/>
-              </a:rPr>
-              <a:t>transmit time per cycle:   </a:t>
-            </a:r>
-            <a:r>
-              <a:rPr sz="1200" b="0" i="0">
-                <a:solidFill>
-                  <a:srgbClr val="353638"/>
-                </a:solidFill>
+              <a:t>30 s ÷ 5 s = 6  ≤  capacity 8  →  no overflow</a:t>
+            </a:r>
+          </a:p>
+          <a:p>
+            <a:r>
+              <a:rPr sz="1800" b="1">
+                <a:latin typeface="Calibri"/>
+              </a:rPr>
+              <a:t>transmit time:  </a:t>
+            </a:r>
+            <a:r>
+              <a:rPr sz="1800" b="0">
                 <a:latin typeface="Consolas"/>
               </a:rPr>
               <a:t>6 × 512 B ÷ 4096 B/s = 0.75 s</a:t>
             </a:r>
           </a:p>
           <a:p>
-            <a:pPr algn="l">
-              <a:lnSpc>
-                <a:spcPct val="145000"/>
-              </a:lnSpc>
-            </a:pPr>
-            <a:r>
-              <a:rPr sz="1250" b="1" i="0">
-                <a:solidFill>
-                  <a:srgbClr val="353638"/>
-                </a:solidFill>
-                <a:latin typeface="Calibri"/>
-              </a:rPr>
-              <a:t>average power:   </a:t>
-            </a:r>
-            <a:r>
-              <a:rPr sz="1200" b="0" i="0">
-                <a:solidFill>
-                  <a:srgbClr val="353638"/>
-                </a:solidFill>
+            <a:r>
+              <a:rPr sz="1800" b="1">
+                <a:latin typeface="Calibri"/>
+              </a:rPr>
+              <a:t>average power:  </a:t>
+            </a:r>
+            <a:r>
+              <a:rPr sz="1800" b="0">
                 <a:latin typeface="Consolas"/>
               </a:rPr>
-              <a:t>(60·0.75 + 5·6·0.05 + 0.1·29.0) mW·s / 30 s ≈ 1.65 mW  ≤  2 mW  ✓</a:t>
-            </a:r>
-          </a:p>
-          <a:p>
-            <a:pPr algn="l">
-              <a:lnSpc>
-                <a:spcPct val="145000"/>
-              </a:lnSpc>
-            </a:pPr>
-            <a:r>
-              <a:rPr sz="1150" b="0" i="1">
-                <a:solidFill>
-                  <a:srgbClr val="555960"/>
-                </a:solidFill>
-                <a:latin typeface="Calibri"/>
-              </a:rPr>
-              <a:t>every step is licensed by a declared quantity, unit, or state occurrence — nothing is folklore</a:t>
+              <a:t>(60·0.75 + 5·6·0.05 + 0.1·29.0) mW·s / 30 s</a:t>
+            </a:r>
+          </a:p>
+          <a:p>
+            <a:r>
+              <a:rPr sz="1800" b="0">
+                <a:latin typeface="Consolas"/>
+              </a:rPr>
+              <a:t>                    ≈ 1.65 mW  ≤  2 mW  ✓</a:t>
+            </a:r>
+          </a:p>
+          <a:p>
+            <a:r>
+              <a:rPr sz="800"/>
+              <a:t/>
+            </a:r>
+          </a:p>
+          <a:p>
+            <a:r>
+              <a:rPr sz="1800">
+                <a:latin typeface="Calibri"/>
+              </a:rPr>
+              <a:t>Every step is licensed by a declared quantity, unit, or state occurrence.</a:t>
             </a:r>
           </a:p>
         </p:txBody>
@@ -17494,8 +16899,8 @@
         </p:nvSpPr>
         <p:spPr>
           <a:xfrm>
-            <a:off x="548640" y="5349240"/>
-            <a:ext cx="8046720" cy="548640"/>
+            <a:off x="548640" y="5532120"/>
+            <a:ext cx="8046720" cy="411480"/>
           </a:xfrm>
           <a:prstGeom prst="rect">
             <a:avLst/>
@@ -17514,23 +16919,8 @@
               </a:lnSpc>
             </a:pPr>
             <a:r>
-              <a:rPr sz="1300" b="1" i="0">
-                <a:solidFill>
-                  <a:srgbClr val="C8102E"/>
-                </a:solidFill>
-                <a:latin typeface="Calibri"/>
-              </a:rPr>
-              <a:t>Derived by hand from the model. </a:t>
-            </a:r>
-            <a:r>
-              <a:rPr sz="1300" b="0" i="0">
-                <a:solidFill>
-                  <a:srgbClr val="353638"/>
-                </a:solidFill>
-                <a:latin typeface="Calibri"/>
-              </a:rPr>
-              <a:t>The semantics make each step well-defined; no tool computed
-this verdict for us — slide 22 says exactly what tools can and cannot decide today.</a:t>
+              <a:rPr sz="1800" b="0"/>
+              <a:t>Derived by hand from the model. No tool computed this verdict.</a:t>
             </a:r>
           </a:p>
         </p:txBody>
@@ -17543,8 +16933,8 @@
         </p:nvSpPr>
         <p:spPr>
           <a:xfrm>
-            <a:off x="320040" y="6144768"/>
-            <a:ext cx="8503920" cy="420624"/>
+            <a:off x="320040" y="6007607"/>
+            <a:ext cx="8503920" cy="557784"/>
           </a:xfrm>
           <a:prstGeom prst="rect">
             <a:avLst/>
@@ -17577,7 +16967,7 @@
           <a:p>
             <a:pPr algn="ctr"/>
             <a:r>
-              <a:rPr sz="1400" b="1" i="0">
+              <a:rPr sz="1800" b="1" i="0">
                 <a:solidFill>
                   <a:srgbClr val="FFFFFF"/>
                 </a:solidFill>
@@ -17689,7 +17079,7 @@
           <a:p>
             <a:pPr algn="l"/>
             <a:r>
-              <a:rPr sz="1900" b="0" i="0" spc="140">
+              <a:rPr sz="2400" b="0" i="0" spc="140">
                 <a:solidFill>
                   <a:srgbClr val="353638"/>
                 </a:solidFill>
@@ -17768,7 +17158,7 @@
           <a:p>
             <a:pPr algn="l"/>
             <a:r>
-              <a:rPr sz="1500" b="1" i="0">
+              <a:rPr sz="2000" b="1" i="0">
                 <a:solidFill>
                   <a:srgbClr val="8E6F3E"/>
                 </a:solidFill>
@@ -17777,7 +17167,7 @@
               <a:t>Perturbation: </a:t>
             </a:r>
             <a:r>
-              <a:rPr sz="1500" b="0" i="0">
+              <a:rPr sz="2000" b="0" i="0">
                 <a:solidFill>
                   <a:srgbClr val="353638"/>
                 </a:solidFill>
@@ -17812,7 +17202,7 @@
           <a:p>
             <a:pPr algn="l"/>
             <a:r>
-              <a:rPr sz="1400" b="0" i="1">
+              <a:rPr sz="2000" b="0" i="1">
                 <a:solidFill>
                   <a:srgbClr val="555960"/>
                 </a:solidFill>
@@ -17893,7 +17283,7 @@
           <a:p>
             <a:pPr algn="l"/>
             <a:r>
-              <a:rPr sz="1200" b="1" i="0" spc="60">
+              <a:rPr sz="1800" b="1" i="0" spc="60">
                 <a:solidFill>
                   <a:srgbClr val="8E6F3E"/>
                 </a:solidFill>
@@ -17932,7 +17322,7 @@
               </a:lnSpc>
             </a:pPr>
             <a:r>
-              <a:rPr sz="1200" b="0" i="0">
+              <a:rPr sz="1800" b="0" i="0">
                 <a:solidFill>
                   <a:srgbClr val="353638"/>
                 </a:solidFill>
@@ -17948,7 +17338,7 @@
               </a:lnSpc>
             </a:pPr>
             <a:r>
-              <a:rPr sz="1250" b="1" i="0">
+              <a:rPr sz="1800" b="1" i="0">
                 <a:solidFill>
                   <a:srgbClr val="353638"/>
                 </a:solidFill>
@@ -17957,7 +17347,7 @@
               <a:t>Overflow? </a:t>
             </a:r>
             <a:r>
-              <a:rPr sz="1250" b="1" i="0">
+              <a:rPr sz="1800" b="1" i="0">
                 <a:solidFill>
                   <a:srgbClr val="5C4826"/>
                 </a:solidFill>
@@ -17973,7 +17363,7 @@
               </a:lnSpc>
             </a:pPr>
             <a:r>
-              <a:rPr sz="1250" b="0" i="0">
+              <a:rPr sz="1800" b="0" i="0">
                 <a:solidFill>
                   <a:srgbClr val="353638"/>
                 </a:solidFill>
@@ -17991,7 +17381,7 @@
               </a:lnSpc>
             </a:pPr>
             <a:r>
-              <a:rPr sz="1250" b="1" i="0">
+              <a:rPr sz="1800" b="1" i="0">
                 <a:solidFill>
                   <a:srgbClr val="5C4826"/>
                 </a:solidFill>
@@ -18073,7 +17463,7 @@
           <a:p>
             <a:pPr algn="l"/>
             <a:r>
-              <a:rPr sz="1200" b="1" i="0" spc="60">
+              <a:rPr sz="1800" b="1" i="0" spc="60">
                 <a:solidFill>
                   <a:srgbClr val="C8102E"/>
                 </a:solidFill>
@@ -18093,7 +17483,7 @@
         <p:spPr>
           <a:xfrm>
             <a:off x="4892040" y="2286000"/>
-            <a:ext cx="3474720" cy="2103120"/>
+            <a:ext cx="3474720" cy="2459736"/>
           </a:xfrm>
           <a:prstGeom prst="rect">
             <a:avLst/>
@@ -18112,7 +17502,7 @@
               </a:lnSpc>
             </a:pPr>
             <a:r>
-              <a:rPr sz="1200" b="0" i="0">
+              <a:rPr sz="1800" b="0" i="0">
                 <a:solidFill>
                   <a:srgbClr val="353638"/>
                 </a:solidFill>
@@ -18128,7 +17518,7 @@
               </a:lnSpc>
             </a:pPr>
             <a:r>
-              <a:rPr sz="1200" b="0" i="0">
+              <a:rPr sz="1800" b="0" i="0">
                 <a:solidFill>
                   <a:srgbClr val="353638"/>
                 </a:solidFill>
@@ -18144,7 +17534,7 @@
               </a:lnSpc>
             </a:pPr>
             <a:r>
-              <a:rPr sz="1200" b="1" i="0">
+              <a:rPr sz="1800" b="1" i="0">
                 <a:solidFill>
                   <a:srgbClr val="353638"/>
                 </a:solidFill>
@@ -18160,7 +17550,7 @@
               </a:lnSpc>
             </a:pPr>
             <a:r>
-              <a:rPr sz="1250" b="1" i="0">
+              <a:rPr sz="1800" b="1" i="0">
                 <a:solidFill>
                   <a:srgbClr val="C8102E"/>
                 </a:solidFill>
@@ -18182,7 +17572,7 @@
         <p:spPr>
           <a:xfrm>
             <a:off x="548640" y="4800600"/>
-            <a:ext cx="8046720" cy="502920"/>
+            <a:ext cx="8046720" cy="1115568"/>
           </a:xfrm>
           <a:prstGeom prst="rect">
             <a:avLst/>
@@ -18201,7 +17591,7 @@
               </a:lnSpc>
             </a:pPr>
             <a:r>
-              <a:rPr sz="1350" b="1" i="0">
+              <a:rPr sz="1800" b="1" i="0">
                 <a:solidFill>
                   <a:srgbClr val="353638"/>
                 </a:solidFill>
@@ -18217,7 +17607,7 @@
               </a:lnSpc>
             </a:pPr>
             <a:r>
-              <a:rPr sz="1200" b="0" i="1">
+              <a:rPr sz="1800" b="0" i="1">
                 <a:solidFill>
                   <a:srgbClr val="C8102E"/>
                 </a:solidFill>
@@ -18270,7 +17660,7 @@
           <a:p>
             <a:pPr algn="ctr"/>
             <a:r>
-              <a:rPr sz="1400" b="1" i="0">
+              <a:rPr sz="1800" b="1" i="0">
                 <a:solidFill>
                   <a:srgbClr val="FFFFFF"/>
                 </a:solidFill>
@@ -18382,7 +17772,7 @@
           <a:p>
             <a:pPr algn="l"/>
             <a:r>
-              <a:rPr sz="1900" b="0" i="0" spc="140">
+              <a:rPr sz="2400" b="0" i="0" spc="140">
                 <a:solidFill>
                   <a:srgbClr val="353638"/>
                 </a:solidFill>
@@ -18446,7 +17836,7 @@
         <p:spPr>
           <a:xfrm>
             <a:off x="548640" y="960120"/>
-            <a:ext cx="4160520" cy="3383280"/>
+            <a:ext cx="4160520" cy="4846320"/>
           </a:xfrm>
           <a:prstGeom prst="rect">
             <a:avLst/>
@@ -18507,7 +17897,7 @@
           <a:p>
             <a:pPr algn="l"/>
             <a:r>
-              <a:rPr sz="1150" b="1" i="0" spc="50">
+              <a:rPr sz="1800" b="1" i="0" spc="50">
                 <a:solidFill>
                   <a:srgbClr val="8E6F3E"/>
                 </a:solidFill>
@@ -18527,7 +17917,7 @@
         <p:spPr>
           <a:xfrm>
             <a:off x="777240" y="1463040"/>
-            <a:ext cx="3749039" cy="3566160"/>
+            <a:ext cx="3749039" cy="4206240"/>
           </a:xfrm>
           <a:prstGeom prst="rect">
             <a:avLst/>
@@ -18546,114 +17936,50 @@
               </a:lnSpc>
             </a:pPr>
             <a:r>
-              <a:rPr sz="1200" b="1" i="0">
-                <a:solidFill>
-                  <a:srgbClr val="5C4826"/>
-                </a:solidFill>
-                <a:latin typeface="Calibri"/>
-              </a:rPr>
+              <a:rPr sz="1800" b="1" i="0"/>
               <a:t>typed features + units</a:t>
             </a:r>
           </a:p>
           <a:p>
-            <a:pPr algn="l">
-              <a:lnSpc>
-                <a:spcPct val="122000"/>
-              </a:lnSpc>
-            </a:pPr>
-            <a:r>
-              <a:rPr sz="1150" b="0" i="0">
-                <a:solidFill>
-                  <a:srgbClr val="353638"/>
-                </a:solidFill>
-                <a:latin typeface="Calibri"/>
-              </a:rPr>
-              <a:t>512 [B] ÷ 4096 [B/s] is well-defined;
-a magnitude is a number with exactly
-one unit of its dimension</a:t>
-            </a:r>
-          </a:p>
-          <a:p>
-            <a:pPr algn="l">
-              <a:lnSpc>
-                <a:spcPct val="122000"/>
-              </a:lnSpc>
-            </a:pPr>
-            <a:r>
-              <a:rPr sz="1200" b="1" i="0">
-                <a:solidFill>
-                  <a:srgbClr val="5C4826"/>
-                </a:solidFill>
-                <a:latin typeface="Calibri"/>
-              </a:rPr>
+            <a:r>
+              <a:rPr sz="1800" b="0" i="0"/>
+              <a:t>512 [B] ÷ 4096 [B/s] is well-defined</a:t>
+            </a:r>
+          </a:p>
+          <a:p>
+            <a:r>
+              <a:rPr sz="1800" b="1" i="0"/>
               <a:t>state occurrences</a:t>
             </a:r>
           </a:p>
           <a:p>
-            <a:pPr algn="l">
-              <a:lnSpc>
-                <a:spcPct val="122000"/>
-              </a:lnSpc>
-            </a:pPr>
-            <a:r>
-              <a:rPr sz="1150" b="0" i="0">
-                <a:solidFill>
-                  <a:srgbClr val="353638"/>
-                </a:solidFill>
-                <a:latin typeface="Calibri"/>
-              </a:rPr>
-              <a:t>when Transmit is active determines
-when the buffer drains</a:t>
-            </a:r>
-          </a:p>
-          <a:p>
-            <a:pPr algn="l">
-              <a:lnSpc>
-                <a:spcPct val="122000"/>
-              </a:lnSpc>
-            </a:pPr>
-            <a:r>
-              <a:rPr sz="1200" b="1" i="0">
-                <a:solidFill>
-                  <a:srgbClr val="5C4826"/>
-                </a:solidFill>
-                <a:latin typeface="Calibri"/>
-              </a:rPr>
+            <a:r>
+              <a:rPr sz="1800" b="0" i="0"/>
+              <a:t>Transmit being active determines when the buffer drains</a:t>
+            </a:r>
+          </a:p>
+          <a:p>
+            <a:r>
+              <a:rPr sz="1800" b="1" i="0"/>
               <a:t>expressions + constraints</a:t>
             </a:r>
           </a:p>
           <a:p>
-            <a:pPr algn="l">
-              <a:lnSpc>
-                <a:spcPct val="122000"/>
-              </a:lnSpc>
-            </a:pPr>
-            <a:r>
-              <a:rPr sz="1150" b="0" i="0">
-                <a:solidFill>
-                  <a:srgbClr val="353638"/>
-                </a:solidFill>
-                <a:latin typeface="Calibri"/>
-              </a:rPr>
-              <a:t>the requirement is a claim over model
-values, not a comment</a:t>
-            </a:r>
-          </a:p>
-          <a:p>
-            <a:pPr algn="l">
-              <a:lnSpc>
-                <a:spcPct val="122000"/>
-              </a:lnSpc>
-            </a:pPr>
-            <a:r>
-              <a:rPr sz="1150" b="0" i="1">
-                <a:solidFill>
-                  <a:srgbClr val="555960"/>
-                </a:solidFill>
-                <a:latin typeface="Calibri"/>
-              </a:rPr>
-              <a:t>SysML supplies the systems concepts;
-KerML, the semantic foundation beneath.</a:t>
+            <a:r>
+              <a:rPr sz="1800" b="0" i="0"/>
+              <a:t>the requirement is a claim over model values, not a comment</a:t>
+            </a:r>
+          </a:p>
+          <a:p>
+            <a:r>
+              <a:rPr sz="1800" b="0" i="0"/>
+              <a:t/>
+            </a:r>
+          </a:p>
+          <a:p>
+            <a:r>
+              <a:rPr sz="1800" b="0" i="1"/>
+              <a:t>SysML supplies the systems concepts; KerML the semantic foundation.</a:t>
             </a:r>
           </a:p>
         </p:txBody>
@@ -18667,7 +17993,7 @@
         <p:spPr>
           <a:xfrm>
             <a:off x="4892040" y="960120"/>
-            <a:ext cx="3703320" cy="3383280"/>
+            <a:ext cx="3703320" cy="4846320"/>
           </a:xfrm>
           <a:prstGeom prst="rect">
             <a:avLst/>
@@ -18728,7 +18054,7 @@
           <a:p>
             <a:pPr algn="l"/>
             <a:r>
-              <a:rPr sz="1150" b="1" i="0" spc="50">
+              <a:rPr sz="1800" b="1" i="0" spc="50">
                 <a:solidFill>
                   <a:srgbClr val="C8102E"/>
                 </a:solidFill>
@@ -18748,7 +18074,7 @@
         <p:spPr>
           <a:xfrm>
             <a:off x="5120640" y="1444752"/>
-            <a:ext cx="3291840" cy="320040"/>
+            <a:ext cx="3291840" cy="557783"/>
           </a:xfrm>
           <a:prstGeom prst="rect">
             <a:avLst/>
@@ -18767,7 +18093,7 @@
               </a:lnSpc>
             </a:pPr>
             <a:r>
-              <a:rPr sz="1150" b="0" i="1">
+              <a:rPr sz="1800" b="0" i="1">
                 <a:solidFill>
                   <a:srgbClr val="353638"/>
                 </a:solidFill>
@@ -18783,7 +18109,7 @@
               </a:lnSpc>
             </a:pPr>
             <a:r>
-              <a:rPr sz="1150" b="0" i="1">
+              <a:rPr sz="1800" b="0" i="1">
                 <a:solidFill>
                   <a:srgbClr val="353638"/>
                 </a:solidFill>
@@ -18803,7 +18129,7 @@
         <p:spPr>
           <a:xfrm>
             <a:off x="5120640" y="2057400"/>
-            <a:ext cx="3291840" cy="2926080"/>
+            <a:ext cx="3291840" cy="3611880"/>
           </a:xfrm>
           <a:prstGeom prst="rect">
             <a:avLst/>
@@ -18822,149 +18148,32 @@
               </a:lnSpc>
             </a:pPr>
             <a:r>
-              <a:rPr sz="1200" b="0" i="0">
-                <a:solidFill>
-                  <a:srgbClr val="353638"/>
-                </a:solidFill>
-                <a:latin typeface="Calibri"/>
-              </a:rPr>
+              <a:rPr sz="1800" b="0" i="0"/>
               <a:t>✓  parses + validates these models</a:t>
             </a:r>
           </a:p>
           <a:p>
-            <a:pPr algn="l">
-              <a:lnSpc>
-                <a:spcPct val="130000"/>
-              </a:lnSpc>
-            </a:pPr>
-            <a:r>
-              <a:rPr sz="1200" b="0" i="0">
-                <a:solidFill>
-                  <a:srgbClr val="353638"/>
-                </a:solidFill>
-                <a:latin typeface="Calibri"/>
-              </a:rPr>
+            <a:r>
+              <a:rPr sz="1800" b="0" i="0"/>
               <a:t>✓  name resolution, typed structure</a:t>
             </a:r>
           </a:p>
           <a:p>
-            <a:pPr algn="l">
-              <a:lnSpc>
-                <a:spcPct val="130000"/>
-              </a:lnSpc>
-            </a:pPr>
-            <a:r>
-              <a:rPr sz="1200" b="0" i="0">
-                <a:solidFill>
-                  <a:srgbClr val="353638"/>
-                </a:solidFill>
-                <a:latin typeface="Calibri"/>
-              </a:rPr>
+            <a:r>
+              <a:rPr sz="1800" b="0" i="0"/>
               <a:t>✗  cannot execute state machines</a:t>
             </a:r>
           </a:p>
           <a:p>
-            <a:pPr algn="l">
-              <a:lnSpc>
-                <a:spcPct val="130000"/>
-              </a:lnSpc>
-            </a:pPr>
-            <a:r>
-              <a:rPr sz="1200" b="0" i="0">
-                <a:solidFill>
-                  <a:srgbClr val="353638"/>
-                </a:solidFill>
-                <a:latin typeface="Calibri"/>
-              </a:rPr>
-              <a:t>✗  cannot compute a verification
-    verdict</a:t>
-            </a:r>
-          </a:p>
-          <a:p>
-            <a:pPr algn="l">
-              <a:lnSpc>
-                <a:spcPct val="130000"/>
-              </a:lnSpc>
-            </a:pPr>
-            <a:r>
-              <a:rPr sz="1200" b="0" i="0">
-                <a:solidFill>
-                  <a:srgbClr val="353638"/>
-                </a:solidFill>
-                <a:latin typeface="Calibri"/>
-              </a:rPr>
-              <a:t>✗  quantity expressions stay
-    symbolic (d + e unevaluated)</a:t>
-            </a:r>
-          </a:p>
-          <a:p>
-            <a:pPr algn="l">
-              <a:lnSpc>
-                <a:spcPct val="130000"/>
-              </a:lnSpc>
-            </a:pPr>
-            <a:r>
-              <a:rPr sz="1200" b="0" i="0">
-                <a:solidFill>
-                  <a:srgbClr val="353638"/>
-                </a:solidFill>
-                <a:latin typeface="Calibri"/>
-              </a:rPr>
-              <a:t>✗  2 [kg] assigned to a length
-    validates silently</a:t>
-            </a:r>
-          </a:p>
-        </p:txBody>
-      </p:sp>
-      <p:sp>
-        <p:nvSpPr>
-          <p:cNvPr id="11" name="Rectangle 10"/>
-          <p:cNvSpPr/>
-          <p:nvPr/>
-        </p:nvSpPr>
-        <p:spPr>
-          <a:xfrm>
-            <a:off x="548640" y="4709160"/>
-            <a:ext cx="8046720" cy="658368"/>
-          </a:xfrm>
-          <a:prstGeom prst="rect">
-            <a:avLst/>
-          </a:prstGeom>
-          <a:solidFill>
-            <a:srgbClr val="5C4826"/>
-          </a:solidFill>
-          <a:ln>
-            <a:noFill/>
-          </a:ln>
-          <a:effectLst/>
-        </p:spPr>
-        <p:style>
-          <a:lnRef idx="1">
-            <a:schemeClr val="accent1"/>
-          </a:lnRef>
-          <a:fillRef idx="3">
-            <a:schemeClr val="accent1"/>
-          </a:fillRef>
-          <a:effectRef idx="2">
-            <a:schemeClr val="accent1"/>
-          </a:effectRef>
-          <a:fontRef idx="minor">
-            <a:schemeClr val="lt1"/>
-          </a:fontRef>
-        </p:style>
-        <p:txBody>
-          <a:bodyPr rtlCol="0" anchor="ctr" wrap="square" lIns="54864" rIns="54864" tIns="27432" bIns="27432"/>
-          <a:lstStyle/>
-          <a:p>
-            <a:pPr algn="ctr"/>
-            <a:r>
-              <a:rPr sz="1450" b="0" i="1">
-                <a:solidFill>
-                  <a:srgbClr val="FFFFFF"/>
-                </a:solidFill>
-                <a:latin typeface="Calibri"/>
-              </a:rPr>
-              <a:t>“SysML v2 can express far more than its reference implementation can decide.”</a:t>
+            <a:r>
+              <a:rPr sz="1800" b="0" i="0"/>
+              <a:t>✗  cannot compute a verification verdict</a:t>
+            </a:r>
+          </a:p>
+          <a:p>
+            <a:r>
+              <a:rPr sz="1800" b="0" i="0"/>
+              <a:t>✗  quantity expressions stay unevaluated — it validates silently</a:t>
             </a:r>
           </a:p>
         </p:txBody>
@@ -18977,8 +18186,8 @@
         </p:nvSpPr>
         <p:spPr>
           <a:xfrm>
-            <a:off x="320040" y="6144768"/>
-            <a:ext cx="8503920" cy="420624"/>
+            <a:off x="320040" y="6007607"/>
+            <a:ext cx="8503920" cy="557784"/>
           </a:xfrm>
           <a:prstGeom prst="rect">
             <a:avLst/>
@@ -19011,7 +18220,7 @@
           <a:p>
             <a:pPr algn="ctr"/>
             <a:r>
-              <a:rPr sz="1400" b="1" i="0">
+              <a:rPr sz="1800" b="1" i="0">
                 <a:solidFill>
                   <a:srgbClr val="FFFFFF"/>
                 </a:solidFill>
@@ -19123,7 +18332,7 @@
           <a:p>
             <a:pPr algn="l"/>
             <a:r>
-              <a:rPr sz="1900" b="0" i="0" spc="140">
+              <a:rPr sz="2400" b="0" i="0" spc="140">
                 <a:solidFill>
                   <a:srgbClr val="353638"/>
                 </a:solidFill>
@@ -19202,7 +18411,7 @@
           <a:p>
             <a:pPr algn="l"/>
             <a:r>
-              <a:rPr sz="1800" b="1" i="1">
+              <a:rPr sz="2000" b="1" i="1">
                 <a:solidFill>
                   <a:srgbClr val="5C4826"/>
                 </a:solidFill>
@@ -19237,7 +18446,7 @@
           <a:p>
             <a:pPr algn="l"/>
             <a:r>
-              <a:rPr sz="1300" b="0" i="1">
+              <a:rPr sz="1800" b="0" i="1">
                 <a:solidFill>
                   <a:srgbClr val="555960"/>
                 </a:solidFill>
@@ -19303,7 +18512,7 @@
         <p:spPr>
           <a:xfrm>
             <a:off x="822960" y="2057400"/>
-            <a:ext cx="7498079" cy="1097280"/>
+            <a:ext cx="7498079" cy="1394460"/>
           </a:xfrm>
           <a:prstGeom prst="rect">
             <a:avLst/>
@@ -19322,7 +18531,7 @@
               </a:lnSpc>
             </a:pPr>
             <a:r>
-              <a:rPr sz="1350" b="1" i="0">
+              <a:rPr sz="1800" b="1" i="0">
                 <a:solidFill>
                   <a:srgbClr val="8E6F3E"/>
                 </a:solidFill>
@@ -19331,7 +18540,7 @@
               <a:t>Still missing: </a:t>
             </a:r>
             <a:r>
-              <a:rPr sz="1350" b="0" i="0">
+              <a:rPr sz="1800" b="0" i="0">
                 <a:solidFill>
                   <a:srgbClr val="353638"/>
                 </a:solidFill>
@@ -19348,7 +18557,7 @@
               </a:lnSpc>
             </a:pPr>
             <a:r>
-              <a:rPr sz="1350" b="0" i="1">
+              <a:rPr sz="1800" b="0" i="1">
                 <a:solidFill>
                   <a:srgbClr val="5C4826"/>
                 </a:solidFill>
@@ -19414,7 +18623,7 @@
         <p:spPr>
           <a:xfrm>
             <a:off x="822960" y="3657600"/>
-            <a:ext cx="7498079" cy="1188720"/>
+            <a:ext cx="7498079" cy="1545336"/>
           </a:xfrm>
           <a:prstGeom prst="rect">
             <a:avLst/>
@@ -19433,40 +18642,14 @@
               </a:lnSpc>
             </a:pPr>
             <a:r>
-              <a:rPr sz="1350" b="1" i="0">
-                <a:solidFill>
-                  <a:srgbClr val="5C4826"/>
-                </a:solidFill>
-                <a:latin typeface="Calibri"/>
-              </a:rPr>
-              <a:t>Section 3's model named its missing distinction — operating modes. §4 modeled them — and still
-has a boundary. </a:t>
-            </a:r>
-            <a:r>
-              <a:rPr sz="1350" b="1" i="0">
-                <a:solidFill>
-                  <a:srgbClr val="8E6F3E"/>
-                </a:solidFill>
-                <a:latin typeface="Calibri"/>
-              </a:rPr>
-              <a:t>Every purposeful model does.</a:t>
-            </a:r>
-          </a:p>
-          <a:p>
-            <a:pPr algn="l">
-              <a:lnSpc>
-                <a:spcPct val="130000"/>
-              </a:lnSpc>
-            </a:pPr>
-            <a:r>
-              <a:rPr sz="1350" b="0" i="1">
-                <a:solidFill>
-                  <a:srgbClr val="353638"/>
-                </a:solidFill>
-                <a:latin typeface="Calibri"/>
-              </a:rPr>
-              <a:t>The question is never “is the model complete?” It is “does it preserve the distinctions this
-question requires — and is adding more worth the cost?”</a:t>
+              <a:rPr sz="1800" i="0"/>
+              <a:t>Section 3's model named operating modes as a missing distinction. Section 4 modeled them</a:t>
+            </a:r>
+          </a:p>
+          <a:p>
+            <a:r>
+              <a:rPr sz="1800" i="0"/>
+              <a:t>and still has a boundary. Every purposeful model does.</a:t>
             </a:r>
           </a:p>
         </p:txBody>
@@ -19480,7 +18663,7 @@
         <p:spPr>
           <a:xfrm>
             <a:off x="548640" y="5257800"/>
-            <a:ext cx="8046720" cy="685800"/>
+            <a:ext cx="8046720" cy="832103"/>
           </a:xfrm>
           <a:prstGeom prst="rect">
             <a:avLst/>
@@ -19499,7 +18682,7 @@
               </a:lnSpc>
             </a:pPr>
             <a:r>
-              <a:rPr sz="1300" b="0" i="1">
+              <a:rPr sz="1800" b="0" i="1">
                 <a:solidFill>
                   <a:srgbClr val="555960"/>
                 </a:solidFill>
@@ -19515,7 +18698,7 @@
               </a:lnSpc>
             </a:pPr>
             <a:r>
-              <a:rPr sz="1300" b="0" i="1">
+              <a:rPr sz="1800" b="0" i="1">
                 <a:solidFill>
                   <a:srgbClr val="555960"/>
                 </a:solidFill>
@@ -19568,7 +18751,7 @@
           <a:p>
             <a:pPr algn="ctr"/>
             <a:r>
-              <a:rPr sz="1400" b="1" i="0">
+              <a:rPr sz="1800" b="1" i="0">
                 <a:solidFill>
                   <a:srgbClr val="FFFFFF"/>
                 </a:solidFill>
@@ -19680,7 +18863,7 @@
           <a:p>
             <a:pPr algn="l"/>
             <a:r>
-              <a:rPr sz="1900" b="0" i="0" spc="140">
+              <a:rPr sz="2400" b="0" i="0" spc="140">
                 <a:solidFill>
                   <a:srgbClr val="353638"/>
                 </a:solidFill>
@@ -19805,7 +18988,7 @@
           <a:p>
             <a:pPr algn="l"/>
             <a:r>
-              <a:rPr sz="1200" b="1" i="0" spc="80">
+              <a:rPr sz="1800" b="1" i="0" spc="80">
                 <a:solidFill>
                   <a:srgbClr val="8E6F3E"/>
                 </a:solidFill>
@@ -19844,7 +19027,7 @@
               </a:lnSpc>
             </a:pPr>
             <a:r>
-              <a:rPr sz="1300" b="0" i="0">
+              <a:rPr sz="1800" b="0" i="0">
                 <a:solidFill>
                   <a:srgbClr val="353638"/>
                 </a:solidFill>
@@ -19925,7 +19108,7 @@
           <a:p>
             <a:pPr algn="l"/>
             <a:r>
-              <a:rPr sz="1200" b="1" i="0" spc="80">
+              <a:rPr sz="1800" b="1" i="0" spc="80">
                 <a:solidFill>
                   <a:srgbClr val="8E6F3E"/>
                 </a:solidFill>
@@ -19964,7 +19147,7 @@
               </a:lnSpc>
             </a:pPr>
             <a:r>
-              <a:rPr sz="1300" b="0" i="0">
+              <a:rPr sz="1800" b="0" i="0">
                 <a:solidFill>
                   <a:srgbClr val="353638"/>
                 </a:solidFill>
@@ -20045,7 +19228,7 @@
           <a:p>
             <a:pPr algn="l"/>
             <a:r>
-              <a:rPr sz="1200" b="1" i="0" spc="80">
+              <a:rPr sz="1800" b="1" i="0" spc="80">
                 <a:solidFill>
                   <a:srgbClr val="8E6F3E"/>
                 </a:solidFill>
@@ -20084,7 +19267,7 @@
               </a:lnSpc>
             </a:pPr>
             <a:r>
-              <a:rPr sz="1300" b="0" i="0">
+              <a:rPr sz="1800" b="0" i="0">
                 <a:solidFill>
                   <a:srgbClr val="353638"/>
                 </a:solidFill>
@@ -20165,7 +19348,7 @@
           <a:p>
             <a:pPr algn="l"/>
             <a:r>
-              <a:rPr sz="1200" b="1" i="0" spc="80">
+              <a:rPr sz="1800" b="1" i="0" spc="80">
                 <a:solidFill>
                   <a:srgbClr val="8E6F3E"/>
                 </a:solidFill>
@@ -20204,7 +19387,7 @@
               </a:lnSpc>
             </a:pPr>
             <a:r>
-              <a:rPr sz="1300" b="0" i="0">
+              <a:rPr sz="1800" b="0" i="0">
                 <a:solidFill>
                   <a:srgbClr val="353638"/>
                 </a:solidFill>
@@ -20220,7 +19403,7 @@
               </a:lnSpc>
             </a:pPr>
             <a:r>
-              <a:rPr sz="1300" b="0" i="0">
+              <a:rPr sz="1800" b="0" i="0">
                 <a:solidFill>
                   <a:srgbClr val="353638"/>
                 </a:solidFill>
@@ -20255,22 +19438,8 @@
           <a:p>
             <a:pPr algn="l"/>
             <a:r>
-              <a:rPr sz="1300" b="1" i="0">
-                <a:solidFill>
-                  <a:srgbClr val="353638"/>
-                </a:solidFill>
-                <a:latin typeface="Calibri"/>
-              </a:rPr>
-              <a:t>These organizations helped develop SysML v2 </a:t>
-            </a:r>
-            <a:r>
-              <a:rPr sz="1300" b="0" i="0">
-                <a:solidFill>
-                  <a:srgbClr val="353638"/>
-                </a:solidFill>
-                <a:latin typeface="Calibri"/>
-              </a:rPr>
-              <a:t>— the OMG contributor and signatory ecosystem.</a:t>
+              <a:rPr sz="1800" i="0"/>
+              <a:t>These organizations helped develop SysML v2 through the OMG contributor and signatory ecosystem.</a:t>
             </a:r>
           </a:p>
         </p:txBody>
@@ -20284,7 +19453,7 @@
         <p:spPr>
           <a:xfrm>
             <a:off x="548640" y="4233672"/>
-            <a:ext cx="8046720" cy="274320"/>
+            <a:ext cx="8046720" cy="557784"/>
           </a:xfrm>
           <a:prstGeom prst="rect">
             <a:avLst/>
@@ -20299,13 +19468,8 @@
           <a:p>
             <a:pPr algn="l"/>
             <a:r>
-              <a:rPr sz="1200" b="0" i="1">
-                <a:solidFill>
-                  <a:srgbClr val="555960"/>
-                </a:solidFill>
-                <a:latin typeface="Calibri"/>
-              </a:rPr>
-              <a:t>That is the claim — not that every one of them runs SysML v2 in production today.</a:t>
+              <a:rPr sz="1800" i="0"/>
+              <a:t>That does not imply that each uses SysML v2 in production today.</a:t>
             </a:r>
           </a:p>
         </p:txBody>
@@ -20365,7 +19529,7 @@
         <p:spPr>
           <a:xfrm>
             <a:off x="777240" y="4864608"/>
-            <a:ext cx="7589520" cy="868680"/>
+            <a:ext cx="7589520" cy="1225295"/>
           </a:xfrm>
           <a:prstGeom prst="rect">
             <a:avLst/>
@@ -20384,7 +19548,7 @@
               </a:lnSpc>
             </a:pPr>
             <a:r>
-              <a:rPr sz="1400" b="0" i="0">
+              <a:rPr sz="2000" b="0" i="0">
                 <a:solidFill>
                   <a:srgbClr val="5C4826"/>
                 </a:solidFill>
@@ -20400,7 +19564,7 @@
               </a:lnSpc>
             </a:pPr>
             <a:r>
-              <a:rPr sz="1400" b="0" i="0">
+              <a:rPr sz="2000" b="0" i="0">
                 <a:solidFill>
                   <a:srgbClr val="5C4826"/>
                 </a:solidFill>
@@ -20419,8 +19583,8 @@
         </p:nvSpPr>
         <p:spPr>
           <a:xfrm>
-            <a:off x="320040" y="6144768"/>
-            <a:ext cx="8503920" cy="420624"/>
+            <a:off x="320040" y="6007607"/>
+            <a:ext cx="8503920" cy="557784"/>
           </a:xfrm>
           <a:prstGeom prst="rect">
             <a:avLst/>
@@ -20453,7 +19617,7 @@
           <a:p>
             <a:pPr algn="ctr"/>
             <a:r>
-              <a:rPr sz="1400" b="1" i="0">
+              <a:rPr sz="1800" b="1" i="0">
                 <a:solidFill>
                   <a:srgbClr val="FFFFFF"/>
                 </a:solidFill>
@@ -20565,7 +19729,7 @@
           <a:p>
             <a:pPr algn="l"/>
             <a:r>
-              <a:rPr sz="1900" b="0" i="0" spc="140">
+              <a:rPr sz="2400" b="0" i="0" spc="140">
                 <a:solidFill>
                   <a:srgbClr val="353638"/>
                 </a:solidFill>
@@ -20644,7 +19808,7 @@
           <a:p>
             <a:pPr algn="l"/>
             <a:r>
-              <a:rPr sz="1400" b="0" i="0">
+              <a:rPr sz="2000" b="0" i="0">
                 <a:solidFill>
                   <a:srgbClr val="353638"/>
                 </a:solidFill>
@@ -20729,7 +19893,7 @@
               </a:lnSpc>
             </a:pPr>
             <a:r>
-              <a:rPr sz="1400" b="1" i="0">
+              <a:rPr sz="2000" b="1" i="0">
                 <a:solidFill>
                   <a:srgbClr val="5C4826"/>
                 </a:solidFill>
@@ -20745,7 +19909,7 @@
               </a:lnSpc>
             </a:pPr>
             <a:r>
-              <a:rPr sz="1400" b="1" i="0">
+              <a:rPr sz="2000" b="1" i="0">
                 <a:solidFill>
                   <a:srgbClr val="5C4826"/>
                 </a:solidFill>
@@ -20765,7 +19929,7 @@
         <p:spPr>
           <a:xfrm>
             <a:off x="777240" y="2194560"/>
-            <a:ext cx="3474720" cy="365760"/>
+            <a:ext cx="3474720" cy="557784"/>
           </a:xfrm>
           <a:prstGeom prst="rect">
             <a:avLst/>
@@ -20780,7 +19944,7 @@
           <a:p>
             <a:pPr algn="l"/>
             <a:r>
-              <a:rPr sz="1200" b="0" i="1">
+              <a:rPr sz="1800" b="0" i="1">
                 <a:solidFill>
                   <a:srgbClr val="8E6F3E"/>
                 </a:solidFill>
@@ -20846,7 +20010,7 @@
         <p:spPr>
           <a:xfrm>
             <a:off x="4892040" y="1463040"/>
-            <a:ext cx="3474720" cy="548640"/>
+            <a:ext cx="3474720" cy="676655"/>
           </a:xfrm>
           <a:prstGeom prst="rect">
             <a:avLst/>
@@ -20865,7 +20029,7 @@
               </a:lnSpc>
             </a:pPr>
             <a:r>
-              <a:rPr sz="1400" b="1" i="0">
+              <a:rPr sz="2000" b="1" i="0">
                 <a:solidFill>
                   <a:srgbClr val="5C4826"/>
                 </a:solidFill>
@@ -20881,7 +20045,7 @@
               </a:lnSpc>
             </a:pPr>
             <a:r>
-              <a:rPr sz="1400" b="1" i="0">
+              <a:rPr sz="2000" b="1" i="0">
                 <a:solidFill>
                   <a:srgbClr val="5C4826"/>
                 </a:solidFill>
@@ -20916,7 +20080,7 @@
           <a:p>
             <a:pPr algn="l"/>
             <a:r>
-              <a:rPr sz="1200" b="0" i="1">
+              <a:rPr sz="1800" b="0" i="1">
                 <a:solidFill>
                   <a:srgbClr val="8E6F3E"/>
                 </a:solidFill>
@@ -20969,7 +20133,7 @@
           <a:p>
             <a:pPr algn="ctr"/>
             <a:r>
-              <a:rPr sz="1400" b="1" i="0">
+              <a:rPr sz="2000" b="1" i="0">
                 <a:solidFill>
                   <a:srgbClr val="FFFFFF"/>
                 </a:solidFill>
@@ -21004,7 +20168,7 @@
           <a:p>
             <a:pPr algn="l"/>
             <a:r>
-              <a:rPr sz="1400" b="1" i="0">
+              <a:rPr sz="2000" b="1" i="0">
                 <a:solidFill>
                   <a:srgbClr val="353638"/>
                 </a:solidFill>
@@ -21043,7 +20207,7 @@
               </a:lnSpc>
             </a:pPr>
             <a:r>
-              <a:rPr sz="1200" b="0" i="1">
+              <a:rPr sz="1800" b="0" i="1">
                 <a:solidFill>
                   <a:srgbClr val="555960"/>
                 </a:solidFill>
@@ -21096,7 +20260,7 @@
           <a:p>
             <a:pPr algn="ctr"/>
             <a:r>
-              <a:rPr sz="1400" b="1" i="0">
+              <a:rPr sz="2000" b="1" i="0">
                 <a:solidFill>
                   <a:srgbClr val="FFFFFF"/>
                 </a:solidFill>
@@ -21131,7 +20295,7 @@
           <a:p>
             <a:pPr algn="l"/>
             <a:r>
-              <a:rPr sz="1400" b="1" i="0">
+              <a:rPr sz="2000" b="1" i="0">
                 <a:solidFill>
                   <a:srgbClr val="353638"/>
                 </a:solidFill>
@@ -21170,7 +20334,7 @@
               </a:lnSpc>
             </a:pPr>
             <a:r>
-              <a:rPr sz="1200" b="0" i="1">
+              <a:rPr sz="1800" b="0" i="1">
                 <a:solidFill>
                   <a:srgbClr val="555960"/>
                 </a:solidFill>
@@ -21223,7 +20387,7 @@
           <a:p>
             <a:pPr algn="ctr"/>
             <a:r>
-              <a:rPr sz="1400" b="1" i="0">
+              <a:rPr sz="2000" b="1" i="0">
                 <a:solidFill>
                   <a:srgbClr val="FFFFFF"/>
                 </a:solidFill>
@@ -21258,7 +20422,7 @@
           <a:p>
             <a:pPr algn="l"/>
             <a:r>
-              <a:rPr sz="1400" b="1" i="0">
+              <a:rPr sz="2000" b="1" i="0">
                 <a:solidFill>
                   <a:srgbClr val="353638"/>
                 </a:solidFill>
@@ -21278,7 +20442,7 @@
         <p:spPr>
           <a:xfrm>
             <a:off x="5303520" y="4480559"/>
-            <a:ext cx="3291840" cy="566928"/>
+            <a:ext cx="3291840" cy="676655"/>
           </a:xfrm>
           <a:prstGeom prst="rect">
             <a:avLst/>
@@ -21297,7 +20461,7 @@
               </a:lnSpc>
             </a:pPr>
             <a:r>
-              <a:rPr sz="1200" b="0" i="1">
+              <a:rPr sz="1800" b="0" i="1">
                 <a:solidFill>
                   <a:srgbClr val="555960"/>
                 </a:solidFill>
@@ -21313,7 +20477,7 @@
               </a:lnSpc>
             </a:pPr>
             <a:r>
-              <a:rPr sz="1200" b="0" i="1">
+              <a:rPr sz="1800" b="0" i="1">
                 <a:solidFill>
                   <a:srgbClr val="555960"/>
                 </a:solidFill>
@@ -21366,7 +20530,7 @@
           <a:p>
             <a:pPr algn="ctr"/>
             <a:r>
-              <a:rPr sz="1400" b="1" i="0">
+              <a:rPr sz="2000" b="1" i="0">
                 <a:solidFill>
                   <a:srgbClr val="5C4826"/>
                 </a:solidFill>
@@ -21401,7 +20565,7 @@
           <a:p>
             <a:pPr algn="l"/>
             <a:r>
-              <a:rPr sz="1400" b="1" i="0">
+              <a:rPr sz="2000" b="1" i="0">
                 <a:solidFill>
                   <a:srgbClr val="353638"/>
                 </a:solidFill>
@@ -21413,7 +20577,7 @@
           <a:p>
             <a:pPr algn="l"/>
             <a:r>
-              <a:rPr sz="1400" b="1" i="0">
+              <a:rPr sz="2000" b="1" i="0">
                 <a:solidFill>
                   <a:srgbClr val="353638"/>
                 </a:solidFill>
@@ -21433,7 +20597,7 @@
         <p:spPr>
           <a:xfrm>
             <a:off x="5303520" y="5212079"/>
-            <a:ext cx="3291840" cy="566928"/>
+            <a:ext cx="3291840" cy="836676"/>
           </a:xfrm>
           <a:prstGeom prst="rect">
             <a:avLst/>
@@ -21452,7 +20616,7 @@
               </a:lnSpc>
             </a:pPr>
             <a:r>
-              <a:rPr sz="1200" b="0" i="1">
+              <a:rPr sz="1800" b="0" i="1">
                 <a:solidFill>
                   <a:srgbClr val="555960"/>
                 </a:solidFill>
@@ -21468,7 +20632,7 @@
               </a:lnSpc>
             </a:pPr>
             <a:r>
-              <a:rPr sz="1200" b="0" i="1">
+              <a:rPr sz="1800" b="0" i="1">
                 <a:solidFill>
                   <a:srgbClr val="555960"/>
                 </a:solidFill>
@@ -21487,8 +20651,8 @@
         </p:nvSpPr>
         <p:spPr>
           <a:xfrm>
-            <a:off x="320040" y="6144768"/>
-            <a:ext cx="8503920" cy="420624"/>
+            <a:off x="320040" y="6007607"/>
+            <a:ext cx="8503920" cy="557784"/>
           </a:xfrm>
           <a:prstGeom prst="rect">
             <a:avLst/>
@@ -21521,7 +20685,7 @@
           <a:p>
             <a:pPr algn="ctr"/>
             <a:r>
-              <a:rPr sz="1400" b="1" i="0">
+              <a:rPr sz="1800" b="1" i="0">
                 <a:solidFill>
                   <a:srgbClr val="FFFFFF"/>
                 </a:solidFill>
@@ -21665,7 +20829,7 @@
           <a:lstStyle/>
           <a:p>
             <a:r>
-              <a:rPr sz="4000" b="0">
+              <a:rPr sz="2000" b="0">
                 <a:solidFill>
                   <a:srgbClr val="000000"/>
                 </a:solidFill>
@@ -21698,7 +20862,7 @@
           <a:lstStyle/>
           <a:p>
             <a:r>
-              <a:rPr sz="2400" b="0">
+              <a:rPr sz="2000" b="0">
                 <a:solidFill>
                   <a:srgbClr val="5C4826"/>
                 </a:solidFill>
@@ -21750,7 +20914,7 @@
           <a:p>
             <a:pPr algn="l"/>
             <a:r>
-              <a:rPr sz="1900" b="0" i="0" spc="140">
+              <a:rPr sz="2400" b="0" i="0" spc="140">
                 <a:solidFill>
                   <a:srgbClr val="353638"/>
                 </a:solidFill>
@@ -21849,7 +21013,7 @@
           <a:p>
             <a:pPr algn="ctr"/>
             <a:r>
-              <a:rPr sz="2400" b="1" i="0">
+              <a:rPr sz="2000" b="1" i="0">
                 <a:solidFill>
                   <a:srgbClr val="5C4826"/>
                 </a:solidFill>
@@ -21904,7 +21068,7 @@
           <a:p>
             <a:pPr algn="ctr"/>
             <a:r>
-              <a:rPr sz="2400" b="1" i="0">
+              <a:rPr sz="2000" b="1" i="0">
                 <a:solidFill>
                   <a:srgbClr val="5C4826"/>
                 </a:solidFill>
@@ -21994,7 +21158,7 @@
           <a:p>
             <a:pPr algn="ctr"/>
             <a:r>
-              <a:rPr sz="1200" b="1" i="0">
+              <a:rPr sz="1800" b="1" i="0">
                 <a:solidFill>
                   <a:srgbClr val="5C4826"/>
                 </a:solidFill>
@@ -22047,7 +21211,7 @@
           <a:p>
             <a:pPr algn="ctr"/>
             <a:r>
-              <a:rPr sz="1200" b="1" i="0">
+              <a:rPr sz="1800" b="1" i="0">
                 <a:solidFill>
                   <a:srgbClr val="5C4826"/>
                 </a:solidFill>
@@ -22100,7 +21264,7 @@
           <a:p>
             <a:pPr algn="ctr"/>
             <a:r>
-              <a:rPr sz="1200" b="1" i="0">
+              <a:rPr sz="1800" b="1" i="0">
                 <a:solidFill>
                   <a:srgbClr val="5C4826"/>
                 </a:solidFill>
@@ -22153,7 +21317,7 @@
           <a:p>
             <a:pPr algn="ctr"/>
             <a:r>
-              <a:rPr sz="1200" b="1" i="0">
+              <a:rPr sz="1800" b="1" i="0">
                 <a:solidFill>
                   <a:srgbClr val="5C4826"/>
                 </a:solidFill>
@@ -22173,7 +21337,7 @@
         <p:spPr>
           <a:xfrm>
             <a:off x="6373368" y="2606040"/>
-            <a:ext cx="2286000" cy="457200"/>
+            <a:ext cx="2286000" cy="557784"/>
           </a:xfrm>
           <a:prstGeom prst="rect">
             <a:avLst/>
@@ -22206,7 +21370,7 @@
           <a:p>
             <a:pPr algn="ctr"/>
             <a:r>
-              <a:rPr sz="1200" b="1" i="0">
+              <a:rPr sz="1800" b="1" i="0">
                 <a:solidFill>
                   <a:srgbClr val="5C4826"/>
                 </a:solidFill>
@@ -22241,7 +21405,7 @@
           <a:p>
             <a:pPr algn="ctr"/>
             <a:r>
-              <a:rPr sz="1600" b="1" i="0">
+              <a:rPr sz="2000" b="1" i="0">
                 <a:solidFill>
                   <a:srgbClr val="353638"/>
                 </a:solidFill>
@@ -22250,7 +21414,7 @@
               <a:t>Same marks. </a:t>
             </a:r>
             <a:r>
-              <a:rPr sz="1600" b="0" i="0">
+              <a:rPr sz="2000" b="0" i="0">
                 <a:solidFill>
                   <a:srgbClr val="353638"/>
                 </a:solidFill>
@@ -22316,7 +21480,7 @@
         <p:spPr>
           <a:xfrm>
             <a:off x="1463040" y="4279392"/>
-            <a:ext cx="6217920" cy="1143000"/>
+            <a:ext cx="6217920" cy="1239519"/>
           </a:xfrm>
           <a:prstGeom prst="rect">
             <a:avLst/>
@@ -22335,7 +21499,7 @@
               </a:lnSpc>
             </a:pPr>
             <a:r>
-              <a:rPr sz="1400" b="1" i="0">
+              <a:rPr sz="2000" b="1" i="0">
                 <a:solidFill>
                   <a:srgbClr val="5C4826"/>
                 </a:solidFill>
@@ -22351,7 +21515,7 @@
               </a:lnSpc>
             </a:pPr>
             <a:r>
-              <a:rPr sz="1400" b="0" i="0">
+              <a:rPr sz="2000" b="0" i="0">
                 <a:solidFill>
                   <a:srgbClr val="353638"/>
                 </a:solidFill>
@@ -22405,7 +21569,7 @@
           <a:p>
             <a:pPr algn="ctr"/>
             <a:r>
-              <a:rPr sz="1400" b="1" i="0">
+              <a:rPr sz="1800" b="1" i="0">
                 <a:solidFill>
                   <a:srgbClr val="FFFFFF"/>
                 </a:solidFill>
@@ -22517,7 +21681,7 @@
           <a:p>
             <a:pPr algn="l"/>
             <a:r>
-              <a:rPr sz="1900" b="0" i="0" spc="140">
+              <a:rPr sz="2400" b="0" i="0" spc="140">
                 <a:solidFill>
                   <a:srgbClr val="353638"/>
                 </a:solidFill>
@@ -22627,7 +21791,7 @@
         <p:spPr>
           <a:xfrm>
             <a:off x="777240" y="1078992"/>
-            <a:ext cx="7589520" cy="685800"/>
+            <a:ext cx="7589520" cy="1014984"/>
           </a:xfrm>
           <a:prstGeom prst="rect">
             <a:avLst/>
@@ -22646,7 +21810,7 @@
               </a:lnSpc>
             </a:pPr>
             <a:r>
-              <a:rPr sz="1200" b="1" i="0">
+              <a:rPr sz="1800" b="1" i="0">
                 <a:solidFill>
                   <a:srgbClr val="8E6F3E"/>
                 </a:solidFill>
@@ -22662,7 +21826,7 @@
               </a:lnSpc>
             </a:pPr>
             <a:r>
-              <a:rPr sz="1400" b="0" i="1">
+              <a:rPr sz="2000" b="0" i="1">
                 <a:solidFill>
                   <a:srgbClr val="5C4826"/>
                 </a:solidFill>
@@ -22718,7 +21882,7 @@
           <a:p>
             <a:pPr algn="ctr"/>
             <a:r>
-              <a:rPr sz="1200" b="0" i="0">
+              <a:rPr sz="1800" b="0" i="0">
                 <a:solidFill>
                   <a:srgbClr val="5C4826"/>
                 </a:solidFill>
@@ -22817,7 +21981,7 @@
           <a:p>
             <a:pPr algn="ctr"/>
             <a:r>
-              <a:rPr sz="1200" b="0" i="0">
+              <a:rPr sz="1800" b="0" i="0">
                 <a:solidFill>
                   <a:srgbClr val="5C4826"/>
                 </a:solidFill>
@@ -22916,7 +22080,7 @@
           <a:p>
             <a:pPr algn="ctr"/>
             <a:r>
-              <a:rPr sz="1200" b="0" i="0">
+              <a:rPr sz="1800" b="0" i="0">
                 <a:solidFill>
                   <a:srgbClr val="5C4826"/>
                 </a:solidFill>
@@ -23015,7 +22179,7 @@
           <a:p>
             <a:pPr algn="ctr"/>
             <a:r>
-              <a:rPr sz="1200" b="1" i="0">
+              <a:rPr sz="1800" b="1" i="0">
                 <a:solidFill>
                   <a:srgbClr val="5C4826"/>
                 </a:solidFill>
@@ -23050,7 +22214,7 @@
           <a:p>
             <a:pPr algn="ctr"/>
             <a:r>
-              <a:rPr sz="1100" b="0" i="1">
+              <a:rPr sz="1800" b="0" i="1">
                 <a:solidFill>
                   <a:srgbClr val="555960"/>
                 </a:solidFill>
@@ -23070,7 +22234,7 @@
         <p:spPr>
           <a:xfrm>
             <a:off x="548640" y="3154680"/>
-            <a:ext cx="8046720" cy="502920"/>
+            <a:ext cx="8046720" cy="836676"/>
           </a:xfrm>
           <a:prstGeom prst="rect">
             <a:avLst/>
@@ -23089,7 +22253,7 @@
               </a:lnSpc>
             </a:pPr>
             <a:r>
-              <a:rPr sz="1300" b="0" i="1">
+              <a:rPr sz="1800" b="0" i="1">
                 <a:solidFill>
                   <a:srgbClr val="353638"/>
                 </a:solidFill>
@@ -23105,7 +22269,7 @@
               </a:lnSpc>
             </a:pPr>
             <a:r>
-              <a:rPr sz="1300" b="0" i="1">
+              <a:rPr sz="1800" b="0" i="1">
                 <a:solidFill>
                   <a:srgbClr val="353638"/>
                 </a:solidFill>
@@ -23186,7 +22350,7 @@
           <a:p>
             <a:pPr algn="l"/>
             <a:r>
-              <a:rPr sz="1200" b="1" i="0" spc="80">
+              <a:rPr sz="1800" b="1" i="0" spc="80">
                 <a:solidFill>
                   <a:srgbClr val="8E6F3E"/>
                 </a:solidFill>
@@ -23206,7 +22370,7 @@
         <p:spPr>
           <a:xfrm>
             <a:off x="777240" y="4498848"/>
-            <a:ext cx="3474720" cy="822960"/>
+            <a:ext cx="3474720" cy="1115568"/>
           </a:xfrm>
           <a:prstGeom prst="rect">
             <a:avLst/>
@@ -23225,7 +22389,7 @@
               </a:lnSpc>
             </a:pPr>
             <a:r>
-              <a:rPr sz="1300" b="0" i="0">
+              <a:rPr sz="1800" b="0" i="0">
                 <a:solidFill>
                   <a:srgbClr val="353638"/>
                 </a:solidFill>
@@ -23241,7 +22405,7 @@
               </a:lnSpc>
             </a:pPr>
             <a:r>
-              <a:rPr sz="1300" b="0" i="0">
+              <a:rPr sz="1800" b="0" i="0">
                 <a:solidFill>
                   <a:srgbClr val="353638"/>
                 </a:solidFill>
@@ -23322,7 +22486,7 @@
           <a:p>
             <a:pPr algn="l"/>
             <a:r>
-              <a:rPr sz="1200" b="1" i="0" spc="80">
+              <a:rPr sz="1800" b="1" i="0" spc="80">
                 <a:solidFill>
                   <a:srgbClr val="8E6F3E"/>
                 </a:solidFill>
@@ -23342,7 +22506,7 @@
         <p:spPr>
           <a:xfrm>
             <a:off x="4892040" y="4498848"/>
-            <a:ext cx="3474720" cy="822960"/>
+            <a:ext cx="3474720" cy="1115568"/>
           </a:xfrm>
           <a:prstGeom prst="rect">
             <a:avLst/>
@@ -23361,7 +22525,7 @@
               </a:lnSpc>
             </a:pPr>
             <a:r>
-              <a:rPr sz="1300" b="0" i="0">
+              <a:rPr sz="1800" b="0" i="0">
                 <a:solidFill>
                   <a:srgbClr val="353638"/>
                 </a:solidFill>
@@ -23377,7 +22541,7 @@
               </a:lnSpc>
             </a:pPr>
             <a:r>
-              <a:rPr sz="1300" b="0" i="0">
+              <a:rPr sz="1800" b="0" i="0">
                 <a:solidFill>
                   <a:srgbClr val="353638"/>
                 </a:solidFill>
@@ -23430,7 +22594,7 @@
           <a:p>
             <a:pPr algn="ctr"/>
             <a:r>
-              <a:rPr sz="1400" b="1" i="0">
+              <a:rPr sz="1800" b="1" i="0">
                 <a:solidFill>
                   <a:srgbClr val="FFFFFF"/>
                 </a:solidFill>
@@ -23542,7 +22706,7 @@
           <a:p>
             <a:pPr algn="l"/>
             <a:r>
-              <a:rPr sz="1900" b="0" i="0" spc="140">
+              <a:rPr sz="2400" b="0" i="0" spc="140">
                 <a:solidFill>
                   <a:srgbClr val="353638"/>
                 </a:solidFill>
@@ -23695,7 +22859,7 @@
           <a:p>
             <a:pPr algn="l"/>
             <a:r>
-              <a:rPr sz="1100" b="1" i="0" spc="80">
+              <a:rPr sz="1800" b="1" i="0" spc="80">
                 <a:solidFill>
                   <a:srgbClr val="5C4826"/>
                 </a:solidFill>
@@ -23715,7 +22879,7 @@
         <p:spPr>
           <a:xfrm>
             <a:off x="2834640" y="4590288"/>
-            <a:ext cx="2103120" cy="274320"/>
+            <a:ext cx="2103120" cy="429768"/>
           </a:xfrm>
           <a:prstGeom prst="rect">
             <a:avLst/>
@@ -23730,7 +22894,7 @@
           <a:p>
             <a:pPr algn="l"/>
             <a:r>
-              <a:rPr sz="1100" b="1" i="0" spc="80">
+              <a:rPr sz="1800" b="1" i="0" spc="80">
                 <a:solidFill>
                   <a:srgbClr val="5C4826"/>
                 </a:solidFill>
@@ -23750,7 +22914,7 @@
         <p:spPr>
           <a:xfrm>
             <a:off x="1325880" y="1554480"/>
-            <a:ext cx="1737360" cy="777240"/>
+            <a:ext cx="1737360" cy="1115568"/>
           </a:xfrm>
           <a:prstGeom prst="rect">
             <a:avLst/>
@@ -23789,7 +22953,7 @@
               </a:lnSpc>
             </a:pPr>
             <a:r>
-              <a:rPr sz="1100" b="0" i="0">
+              <a:rPr sz="1800" b="0" i="0">
                 <a:solidFill>
                   <a:srgbClr val="353638"/>
                 </a:solidFill>
@@ -23805,7 +22969,7 @@
               </a:lnSpc>
             </a:pPr>
             <a:r>
-              <a:rPr sz="1100" b="0" i="0">
+              <a:rPr sz="1800" b="0" i="0">
                 <a:solidFill>
                   <a:srgbClr val="353638"/>
                 </a:solidFill>
@@ -23821,7 +22985,7 @@
               </a:lnSpc>
             </a:pPr>
             <a:r>
-              <a:rPr sz="1100" b="0" i="0">
+              <a:rPr sz="1800" b="0" i="0">
                 <a:solidFill>
                   <a:srgbClr val="353638"/>
                 </a:solidFill>
@@ -23880,7 +23044,7 @@
               </a:lnSpc>
             </a:pPr>
             <a:r>
-              <a:rPr sz="1100" b="0" i="0">
+              <a:rPr sz="1800" b="0" i="0">
                 <a:solidFill>
                   <a:srgbClr val="5C4826"/>
                 </a:solidFill>
@@ -23896,7 +23060,7 @@
               </a:lnSpc>
             </a:pPr>
             <a:r>
-              <a:rPr sz="1100" b="0" i="0">
+              <a:rPr sz="1800" b="0" i="0">
                 <a:solidFill>
                   <a:srgbClr val="5C4826"/>
                 </a:solidFill>
@@ -23912,7 +23076,7 @@
               </a:lnSpc>
             </a:pPr>
             <a:r>
-              <a:rPr sz="1100" b="0" i="0">
+              <a:rPr sz="1800" b="0" i="0">
                 <a:solidFill>
                   <a:srgbClr val="5C4826"/>
                 </a:solidFill>
@@ -23951,7 +23115,7 @@
               </a:lnSpc>
             </a:pPr>
             <a:r>
-              <a:rPr sz="1200" b="0" i="1">
+              <a:rPr sz="1800" b="0" i="1">
                 <a:solidFill>
                   <a:srgbClr val="555960"/>
                 </a:solidFill>
@@ -23967,7 +23131,7 @@
               </a:lnSpc>
             </a:pPr>
             <a:r>
-              <a:rPr sz="1200" b="0" i="1">
+              <a:rPr sz="1800" b="0" i="1">
                 <a:solidFill>
                   <a:srgbClr val="555960"/>
                 </a:solidFill>
@@ -24052,7 +23216,7 @@
               </a:lnSpc>
             </a:pPr>
             <a:r>
-              <a:rPr sz="1200" b="1" i="0" spc="60">
+              <a:rPr sz="1800" b="1" i="0" spc="60">
                 <a:solidFill>
                   <a:srgbClr val="8E6F3E"/>
                 </a:solidFill>
@@ -24068,7 +23232,7 @@
               </a:lnSpc>
             </a:pPr>
             <a:r>
-              <a:rPr sz="1200" b="1" i="0" spc="60">
+              <a:rPr sz="1800" b="1" i="0" spc="60">
                 <a:solidFill>
                   <a:srgbClr val="8E6F3E"/>
                 </a:solidFill>
@@ -24088,7 +23252,7 @@
         <p:spPr>
           <a:xfrm>
             <a:off x="5212080" y="2057400"/>
-            <a:ext cx="3200400" cy="1188720"/>
+            <a:ext cx="3200400" cy="1394460"/>
           </a:xfrm>
           <a:prstGeom prst="rect">
             <a:avLst/>
@@ -24107,7 +23271,7 @@
               </a:lnSpc>
             </a:pPr>
             <a:r>
-              <a:rPr sz="1300" b="0" i="0">
+              <a:rPr sz="1800" b="0" i="0">
                 <a:solidFill>
                   <a:srgbClr val="353638"/>
                 </a:solidFill>
@@ -24123,7 +23287,7 @@
               </a:lnSpc>
             </a:pPr>
             <a:r>
-              <a:rPr sz="1300" b="0" i="0">
+              <a:rPr sz="1800" b="0" i="0">
                 <a:solidFill>
                   <a:srgbClr val="353638"/>
                 </a:solidFill>
@@ -24139,7 +23303,7 @@
               </a:lnSpc>
             </a:pPr>
             <a:r>
-              <a:rPr sz="1300" b="0" i="0">
+              <a:rPr sz="1800" b="0" i="0">
                 <a:solidFill>
                   <a:srgbClr val="353638"/>
                 </a:solidFill>
@@ -24178,7 +23342,7 @@
               </a:lnSpc>
             </a:pPr>
             <a:r>
-              <a:rPr sz="1300" b="0" i="0">
+              <a:rPr sz="1800" b="0" i="0">
                 <a:solidFill>
                   <a:srgbClr val="353638"/>
                 </a:solidFill>
@@ -24194,7 +23358,7 @@
               </a:lnSpc>
             </a:pPr>
             <a:r>
-              <a:rPr sz="1300" b="0" i="0">
+              <a:rPr sz="1800" b="0" i="0">
                 <a:solidFill>
                   <a:srgbClr val="353638"/>
                 </a:solidFill>
@@ -24210,7 +23374,7 @@
               </a:lnSpc>
             </a:pPr>
             <a:r>
-              <a:rPr sz="1300" b="0" i="0">
+              <a:rPr sz="1800" b="0" i="0">
                 <a:solidFill>
                   <a:srgbClr val="353638"/>
                 </a:solidFill>
@@ -24230,7 +23394,7 @@
         <p:spPr>
           <a:xfrm>
             <a:off x="5212080" y="4572000"/>
-            <a:ext cx="3200400" cy="457200"/>
+            <a:ext cx="3200400" cy="557784"/>
           </a:xfrm>
           <a:prstGeom prst="rect">
             <a:avLst/>
@@ -24249,7 +23413,7 @@
               </a:lnSpc>
             </a:pPr>
             <a:r>
-              <a:rPr sz="1200" b="1" i="1">
+              <a:rPr sz="1800" b="1" i="1">
                 <a:solidFill>
                   <a:srgbClr val="5C4826"/>
                 </a:solidFill>
@@ -24265,7 +23429,7 @@
               </a:lnSpc>
             </a:pPr>
             <a:r>
-              <a:rPr sz="1200" b="1" i="1">
+              <a:rPr sz="1800" b="1" i="1">
                 <a:solidFill>
                   <a:srgbClr val="5C4826"/>
                 </a:solidFill>
@@ -24318,7 +23482,7 @@
           <a:p>
             <a:pPr algn="ctr"/>
             <a:r>
-              <a:rPr sz="1400" b="1" i="0">
+              <a:rPr sz="1800" b="1" i="0">
                 <a:solidFill>
                   <a:srgbClr val="FFFFFF"/>
                 </a:solidFill>
@@ -24430,7 +23594,7 @@
           <a:p>
             <a:pPr algn="l"/>
             <a:r>
-              <a:rPr sz="1900" b="0" i="0" spc="140">
+              <a:rPr sz="2400" b="0" i="0" spc="140">
                 <a:solidFill>
                   <a:srgbClr val="353638"/>
                 </a:solidFill>
@@ -24494,7 +23658,7 @@
         <p:spPr>
           <a:xfrm>
             <a:off x="411480" y="960120"/>
-            <a:ext cx="1371600" cy="566928"/>
+            <a:ext cx="1737360" cy="502920"/>
           </a:xfrm>
           <a:prstGeom prst="rect">
             <a:avLst/>
@@ -24531,13 +23695,13 @@
               </a:lnSpc>
             </a:pPr>
             <a:r>
-              <a:rPr sz="1050" b="1" i="0">
+              <a:rPr sz="2000" b="1" i="0">
                 <a:solidFill>
                   <a:srgbClr val="FFFFFF"/>
                 </a:solidFill>
                 <a:latin typeface="Calibri"/>
               </a:rPr>
-              <a:t>Concrete example</a:t>
+              <a:t>Example</a:t>
             </a:r>
           </a:p>
         </p:txBody>
@@ -24550,8 +23714,8 @@
         </p:nvSpPr>
         <p:spPr>
           <a:xfrm>
-            <a:off x="1783080" y="960120"/>
-            <a:ext cx="1828800" cy="566928"/>
+            <a:off x="2148840" y="960120"/>
+            <a:ext cx="2194560" cy="539495"/>
           </a:xfrm>
           <a:prstGeom prst="rect">
             <a:avLst/>
@@ -24588,13 +23752,13 @@
               </a:lnSpc>
             </a:pPr>
             <a:r>
-              <a:rPr sz="1050" b="1" i="0">
+              <a:rPr sz="2000" b="1" i="0">
                 <a:solidFill>
                   <a:srgbClr val="FFFFFF"/>
                 </a:solidFill>
                 <a:latin typeface="Calibri"/>
               </a:rPr>
-              <a:t>Where the meaning lives</a:t>
+              <a:t>Meaning carried by</a:t>
             </a:r>
           </a:p>
         </p:txBody>
@@ -24607,8 +23771,8 @@
         </p:nvSpPr>
         <p:spPr>
           <a:xfrm>
-            <a:off x="3611880" y="960120"/>
-            <a:ext cx="1828800" cy="566928"/>
+            <a:off x="4343400" y="960120"/>
+            <a:ext cx="2194560" cy="539495"/>
           </a:xfrm>
           <a:prstGeom prst="rect">
             <a:avLst/>
@@ -24645,7 +23809,7 @@
               </a:lnSpc>
             </a:pPr>
             <a:r>
-              <a:rPr sz="1050" b="1" i="0">
+              <a:rPr sz="2000" b="1" i="0">
                 <a:solidFill>
                   <a:srgbClr val="FFFFFF"/>
                 </a:solidFill>
@@ -24664,8 +23828,8 @@
         </p:nvSpPr>
         <p:spPr>
           <a:xfrm>
-            <a:off x="5440680" y="960120"/>
-            <a:ext cx="1645920" cy="566928"/>
+            <a:off x="6537960" y="960120"/>
+            <a:ext cx="2194560" cy="502920"/>
           </a:xfrm>
           <a:prstGeom prst="rect">
             <a:avLst/>
@@ -24702,70 +23866,13 @@
               </a:lnSpc>
             </a:pPr>
             <a:r>
-              <a:rPr sz="1050" b="1" i="0">
+              <a:rPr sz="2000" b="1" i="0">
                 <a:solidFill>
                   <a:srgbClr val="FFFFFF"/>
                 </a:solidFill>
                 <a:latin typeface="Calibri"/>
               </a:rPr>
-              <a:t>What it enables</a:t>
-            </a:r>
-          </a:p>
-        </p:txBody>
-      </p:sp>
-      <p:sp>
-        <p:nvSpPr>
-          <p:cNvPr id="8" name="Rectangle 7"/>
-          <p:cNvSpPr/>
-          <p:nvPr/>
-        </p:nvSpPr>
-        <p:spPr>
-          <a:xfrm>
-            <a:off x="7086600" y="960120"/>
-            <a:ext cx="1645920" cy="566928"/>
-          </a:xfrm>
-          <a:prstGeom prst="rect">
-            <a:avLst/>
-          </a:prstGeom>
-          <a:solidFill>
-            <a:srgbClr val="8E6F3E"/>
-          </a:solidFill>
-          <a:ln>
-            <a:noFill/>
-          </a:ln>
-          <a:effectLst/>
-        </p:spPr>
-        <p:style>
-          <a:lnRef idx="1">
-            <a:schemeClr val="accent1"/>
-          </a:lnRef>
-          <a:fillRef idx="3">
-            <a:schemeClr val="accent1"/>
-          </a:fillRef>
-          <a:effectRef idx="2">
-            <a:schemeClr val="accent1"/>
-          </a:effectRef>
-          <a:fontRef idx="minor">
-            <a:schemeClr val="lt1"/>
-          </a:fontRef>
-        </p:style>
-        <p:txBody>
-          <a:bodyPr rtlCol="0" anchor="ctr" wrap="square" lIns="45720" rIns="45720" tIns="27432" bIns="27432"/>
-          <a:lstStyle/>
-          <a:p>
-            <a:pPr algn="ctr">
-              <a:lnSpc>
-                <a:spcPct val="90000"/>
-              </a:lnSpc>
-            </a:pPr>
-            <a:r>
-              <a:rPr sz="1050" b="1" i="0">
-                <a:solidFill>
-                  <a:srgbClr val="FFFFFF"/>
-                </a:solidFill>
-                <a:latin typeface="Calibri"/>
-              </a:rPr>
-              <a:t>Remaining realization freedom</a:t>
+              <a:t>Enables</a:t>
             </a:r>
           </a:p>
         </p:txBody>
@@ -24778,8 +23885,8 @@
         </p:nvSpPr>
         <p:spPr>
           <a:xfrm>
-            <a:off x="411480" y="1527048"/>
-            <a:ext cx="1371600" cy="987552"/>
+            <a:off x="411480" y="1554480"/>
+            <a:ext cx="1737360" cy="960120"/>
           </a:xfrm>
           <a:prstGeom prst="rect">
             <a:avLst/>
@@ -24818,13 +23925,13 @@
               </a:lnSpc>
             </a:pPr>
             <a:r>
-              <a:rPr sz="950" b="1" i="0">
+              <a:rPr sz="2000" b="1" i="0">
                 <a:solidFill>
                   <a:srgbClr val="5C4826"/>
                 </a:solidFill>
                 <a:latin typeface="Calibri"/>
               </a:rPr>
-              <a:t>Informal box-and-arrow sketch</a:t>
+              <a:t>Informal sketch</a:t>
             </a:r>
           </a:p>
         </p:txBody>
@@ -24837,8 +23944,8 @@
         </p:nvSpPr>
         <p:spPr>
           <a:xfrm>
-            <a:off x="1783080" y="1527048"/>
-            <a:ext cx="1828800" cy="987552"/>
+            <a:off x="2148840" y="1554480"/>
+            <a:ext cx="2194560" cy="960120"/>
           </a:xfrm>
           <a:prstGeom prst="rect">
             <a:avLst/>
@@ -24877,13 +23984,13 @@
               </a:lnSpc>
             </a:pPr>
             <a:r>
-              <a:rPr sz="950" b="0" i="0">
+              <a:rPr sz="2000" b="0" i="0">
                 <a:solidFill>
                   <a:srgbClr val="353638"/>
                 </a:solidFill>
                 <a:latin typeface="Calibri"/>
               </a:rPr>
-              <a:t>Almost none in the marks — the team supplies what boxes and arrows mean</a:t>
+              <a:t>Team context</a:t>
             </a:r>
           </a:p>
         </p:txBody>
@@ -24896,8 +24003,8 @@
         </p:nvSpPr>
         <p:spPr>
           <a:xfrm>
-            <a:off x="3611880" y="1527048"/>
-            <a:ext cx="1828800" cy="987552"/>
+            <a:off x="4343400" y="1554480"/>
+            <a:ext cx="2194560" cy="960120"/>
           </a:xfrm>
           <a:prstGeom prst="rect">
             <a:avLst/>
@@ -24936,13 +24043,13 @@
               </a:lnSpc>
             </a:pPr>
             <a:r>
-              <a:rPr sz="950" b="0" i="0">
+              <a:rPr sz="2000" b="0" i="0">
                 <a:solidFill>
                   <a:srgbClr val="353638"/>
                 </a:solidFill>
                 <a:latin typeface="Calibri"/>
               </a:rPr>
-              <a:t>Low if you share the context; high if you do not</a:t>
+              <a:t>Low if context is shared</a:t>
             </a:r>
           </a:p>
         </p:txBody>
@@ -24955,8 +24062,8 @@
         </p:nvSpPr>
         <p:spPr>
           <a:xfrm>
-            <a:off x="5440680" y="1527048"/>
-            <a:ext cx="1645920" cy="987552"/>
+            <a:off x="6537960" y="1554480"/>
+            <a:ext cx="2194560" cy="960120"/>
           </a:xfrm>
           <a:prstGeom prst="rect">
             <a:avLst/>
@@ -24995,7 +24102,7 @@
               </a:lnSpc>
             </a:pPr>
             <a:r>
-              <a:rPr sz="950" b="0" i="0">
+              <a:rPr sz="2000" b="0" i="0">
                 <a:solidFill>
                   <a:srgbClr val="353638"/>
                 </a:solidFill>
@@ -25008,14 +24115,250 @@
       </p:sp>
       <p:sp>
         <p:nvSpPr>
-          <p:cNvPr id="13" name="Rectangle 12"/>
+          <p:cNvPr id="14" name="Rectangle 13"/>
           <p:cNvSpPr/>
           <p:nvPr/>
         </p:nvSpPr>
         <p:spPr>
           <a:xfrm>
-            <a:off x="7086600" y="1527048"/>
-            <a:ext cx="1645920" cy="987552"/>
+            <a:off x="411480" y="2560320"/>
+            <a:ext cx="1737360" cy="960120"/>
+          </a:xfrm>
+          <a:prstGeom prst="rect">
+            <a:avLst/>
+          </a:prstGeom>
+          <a:solidFill>
+            <a:srgbClr val="FBF8F2"/>
+          </a:solidFill>
+          <a:ln w="6350">
+            <a:solidFill>
+              <a:srgbClr val="C9B991"/>
+            </a:solidFill>
+          </a:ln>
+          <a:effectLst/>
+        </p:spPr>
+        <p:style>
+          <a:lnRef idx="1">
+            <a:schemeClr val="accent1"/>
+          </a:lnRef>
+          <a:fillRef idx="3">
+            <a:schemeClr val="accent1"/>
+          </a:fillRef>
+          <a:effectRef idx="2">
+            <a:schemeClr val="accent1"/>
+          </a:effectRef>
+          <a:fontRef idx="minor">
+            <a:schemeClr val="lt1"/>
+          </a:fontRef>
+        </p:style>
+        <p:txBody>
+          <a:bodyPr rtlCol="0" anchor="ctr" wrap="square" lIns="64008" rIns="64008" tIns="27432" bIns="27432"/>
+          <a:lstStyle/>
+          <a:p>
+            <a:pPr algn="l">
+              <a:lnSpc>
+                <a:spcPct val="92000"/>
+              </a:lnSpc>
+            </a:pPr>
+            <a:r>
+              <a:rPr sz="2000" b="1" i="0">
+                <a:solidFill>
+                  <a:srgbClr val="5C4826"/>
+                </a:solidFill>
+                <a:latin typeface="Calibri"/>
+              </a:rPr>
+              <a:t>UML 2.5.1</a:t>
+            </a:r>
+          </a:p>
+        </p:txBody>
+      </p:sp>
+      <p:sp>
+        <p:nvSpPr>
+          <p:cNvPr id="15" name="Rectangle 14"/>
+          <p:cNvSpPr/>
+          <p:nvPr/>
+        </p:nvSpPr>
+        <p:spPr>
+          <a:xfrm>
+            <a:off x="2148840" y="2560320"/>
+            <a:ext cx="2194560" cy="960120"/>
+          </a:xfrm>
+          <a:prstGeom prst="rect">
+            <a:avLst/>
+          </a:prstGeom>
+          <a:solidFill>
+            <a:srgbClr val="FBF8F2"/>
+          </a:solidFill>
+          <a:ln w="6350">
+            <a:solidFill>
+              <a:srgbClr val="C9B991"/>
+            </a:solidFill>
+          </a:ln>
+          <a:effectLst/>
+        </p:spPr>
+        <p:style>
+          <a:lnRef idx="1">
+            <a:schemeClr val="accent1"/>
+          </a:lnRef>
+          <a:fillRef idx="3">
+            <a:schemeClr val="accent1"/>
+          </a:fillRef>
+          <a:effectRef idx="2">
+            <a:schemeClr val="accent1"/>
+          </a:effectRef>
+          <a:fontRef idx="minor">
+            <a:schemeClr val="lt1"/>
+          </a:fontRef>
+        </p:style>
+        <p:txBody>
+          <a:bodyPr rtlCol="0" anchor="ctr" wrap="square" lIns="64008" rIns="64008" tIns="27432" bIns="27432"/>
+          <a:lstStyle/>
+          <a:p>
+            <a:pPr algn="l">
+              <a:lnSpc>
+                <a:spcPct val="92000"/>
+              </a:lnSpc>
+            </a:pPr>
+            <a:r>
+              <a:rPr sz="2000" b="0" i="0">
+                <a:solidFill>
+                  <a:srgbClr val="353638"/>
+                </a:solidFill>
+                <a:latin typeface="Calibri"/>
+              </a:rPr>
+              <a:t>Standardized elements + relations</a:t>
+            </a:r>
+          </a:p>
+        </p:txBody>
+      </p:sp>
+      <p:sp>
+        <p:nvSpPr>
+          <p:cNvPr id="16" name="Rectangle 15"/>
+          <p:cNvSpPr/>
+          <p:nvPr/>
+        </p:nvSpPr>
+        <p:spPr>
+          <a:xfrm>
+            <a:off x="4343400" y="2560320"/>
+            <a:ext cx="2194560" cy="960120"/>
+          </a:xfrm>
+          <a:prstGeom prst="rect">
+            <a:avLst/>
+          </a:prstGeom>
+          <a:solidFill>
+            <a:srgbClr val="FBF8F2"/>
+          </a:solidFill>
+          <a:ln w="6350">
+            <a:solidFill>
+              <a:srgbClr val="C9B991"/>
+            </a:solidFill>
+          </a:ln>
+          <a:effectLst/>
+        </p:spPr>
+        <p:style>
+          <a:lnRef idx="1">
+            <a:schemeClr val="accent1"/>
+          </a:lnRef>
+          <a:fillRef idx="3">
+            <a:schemeClr val="accent1"/>
+          </a:fillRef>
+          <a:effectRef idx="2">
+            <a:schemeClr val="accent1"/>
+          </a:effectRef>
+          <a:fontRef idx="minor">
+            <a:schemeClr val="lt1"/>
+          </a:fontRef>
+        </p:style>
+        <p:txBody>
+          <a:bodyPr rtlCol="0" anchor="ctr" wrap="square" lIns="64008" rIns="64008" tIns="27432" bIns="27432"/>
+          <a:lstStyle/>
+          <a:p>
+            <a:pPr algn="l">
+              <a:lnSpc>
+                <a:spcPct val="92000"/>
+              </a:lnSpc>
+            </a:pPr>
+            <a:r>
+              <a:rPr sz="2000" b="0" i="0">
+                <a:solidFill>
+                  <a:srgbClr val="353638"/>
+                </a:solidFill>
+                <a:latin typeface="Calibri"/>
+              </a:rPr>
+              <a:t>Notation + project context</a:t>
+            </a:r>
+          </a:p>
+        </p:txBody>
+      </p:sp>
+      <p:sp>
+        <p:nvSpPr>
+          <p:cNvPr id="17" name="Rectangle 16"/>
+          <p:cNvSpPr/>
+          <p:nvPr/>
+        </p:nvSpPr>
+        <p:spPr>
+          <a:xfrm>
+            <a:off x="6537960" y="2560320"/>
+            <a:ext cx="2194560" cy="960120"/>
+          </a:xfrm>
+          <a:prstGeom prst="rect">
+            <a:avLst/>
+          </a:prstGeom>
+          <a:solidFill>
+            <a:srgbClr val="FBF8F2"/>
+          </a:solidFill>
+          <a:ln w="6350">
+            <a:solidFill>
+              <a:srgbClr val="C9B991"/>
+            </a:solidFill>
+          </a:ln>
+          <a:effectLst/>
+        </p:spPr>
+        <p:style>
+          <a:lnRef idx="1">
+            <a:schemeClr val="accent1"/>
+          </a:lnRef>
+          <a:fillRef idx="3">
+            <a:schemeClr val="accent1"/>
+          </a:fillRef>
+          <a:effectRef idx="2">
+            <a:schemeClr val="accent1"/>
+          </a:effectRef>
+          <a:fontRef idx="minor">
+            <a:schemeClr val="lt1"/>
+          </a:fontRef>
+        </p:style>
+        <p:txBody>
+          <a:bodyPr rtlCol="0" anchor="ctr" wrap="square" lIns="64008" rIns="64008" tIns="27432" bIns="27432"/>
+          <a:lstStyle/>
+          <a:p>
+            <a:pPr algn="l">
+              <a:lnSpc>
+                <a:spcPct val="92000"/>
+              </a:lnSpc>
+            </a:pPr>
+            <a:r>
+              <a:rPr sz="2000" b="0" i="0">
+                <a:solidFill>
+                  <a:srgbClr val="353638"/>
+                </a:solidFill>
+                <a:latin typeface="Calibri"/>
+              </a:rPr>
+              <a:t>Shared interpretation</a:t>
+            </a:r>
+          </a:p>
+        </p:txBody>
+      </p:sp>
+      <p:sp>
+        <p:nvSpPr>
+          <p:cNvPr id="19" name="Rectangle 18"/>
+          <p:cNvSpPr/>
+          <p:nvPr/>
+        </p:nvSpPr>
+        <p:spPr>
+          <a:xfrm>
+            <a:off x="411480" y="3566160"/>
+            <a:ext cx="1737360" cy="960120"/>
           </a:xfrm>
           <a:prstGeom prst="rect">
             <a:avLst/>
@@ -25054,27 +24397,204 @@
               </a:lnSpc>
             </a:pPr>
             <a:r>
-              <a:rPr sz="950" b="0" i="0">
+              <a:rPr sz="2000" b="1" i="0">
+                <a:solidFill>
+                  <a:srgbClr val="5C4826"/>
+                </a:solidFill>
+                <a:latin typeface="Calibri"/>
+              </a:rPr>
+              <a:t>OpenAPI / JSON Schema</a:t>
+            </a:r>
+          </a:p>
+        </p:txBody>
+      </p:sp>
+      <p:sp>
+        <p:nvSpPr>
+          <p:cNvPr id="20" name="Rectangle 19"/>
+          <p:cNvSpPr/>
+          <p:nvPr/>
+        </p:nvSpPr>
+        <p:spPr>
+          <a:xfrm>
+            <a:off x="2148840" y="3566160"/>
+            <a:ext cx="2194560" cy="960120"/>
+          </a:xfrm>
+          <a:prstGeom prst="rect">
+            <a:avLst/>
+          </a:prstGeom>
+          <a:solidFill>
+            <a:srgbClr val="F5F1E8"/>
+          </a:solidFill>
+          <a:ln w="6350">
+            <a:solidFill>
+              <a:srgbClr val="C9B991"/>
+            </a:solidFill>
+          </a:ln>
+          <a:effectLst/>
+        </p:spPr>
+        <p:style>
+          <a:lnRef idx="1">
+            <a:schemeClr val="accent1"/>
+          </a:lnRef>
+          <a:fillRef idx="3">
+            <a:schemeClr val="accent1"/>
+          </a:fillRef>
+          <a:effectRef idx="2">
+            <a:schemeClr val="accent1"/>
+          </a:effectRef>
+          <a:fontRef idx="minor">
+            <a:schemeClr val="lt1"/>
+          </a:fontRef>
+        </p:style>
+        <p:txBody>
+          <a:bodyPr rtlCol="0" anchor="ctr" wrap="square" lIns="64008" rIns="64008" tIns="27432" bIns="27432"/>
+          <a:lstStyle/>
+          <a:p>
+            <a:pPr algn="l">
+              <a:lnSpc>
+                <a:spcPct val="92000"/>
+              </a:lnSpc>
+            </a:pPr>
+            <a:r>
+              <a:rPr sz="2000" b="0" i="0">
                 <a:solidFill>
                   <a:srgbClr val="353638"/>
                 </a:solidFill>
                 <a:latin typeface="Calibri"/>
               </a:rPr>
-              <a:t>Very large</a:t>
-            </a:r>
-          </a:p>
-        </p:txBody>
-      </p:sp>
-      <p:sp>
-        <p:nvSpPr>
-          <p:cNvPr id="14" name="Rectangle 13"/>
+              <a:t>Machine-readable structure + constraints</a:t>
+            </a:r>
+          </a:p>
+        </p:txBody>
+      </p:sp>
+      <p:sp>
+        <p:nvSpPr>
+          <p:cNvPr id="21" name="Rectangle 20"/>
           <p:cNvSpPr/>
           <p:nvPr/>
         </p:nvSpPr>
         <p:spPr>
           <a:xfrm>
-            <a:off x="411480" y="2514600"/>
-            <a:ext cx="1371600" cy="804672"/>
+            <a:off x="4343400" y="3566160"/>
+            <a:ext cx="2194560" cy="960120"/>
+          </a:xfrm>
+          <a:prstGeom prst="rect">
+            <a:avLst/>
+          </a:prstGeom>
+          <a:solidFill>
+            <a:srgbClr val="F5F1E8"/>
+          </a:solidFill>
+          <a:ln w="6350">
+            <a:solidFill>
+              <a:srgbClr val="C9B991"/>
+            </a:solidFill>
+          </a:ln>
+          <a:effectLst/>
+        </p:spPr>
+        <p:style>
+          <a:lnRef idx="1">
+            <a:schemeClr val="accent1"/>
+          </a:lnRef>
+          <a:fillRef idx="3">
+            <a:schemeClr val="accent1"/>
+          </a:fillRef>
+          <a:effectRef idx="2">
+            <a:schemeClr val="accent1"/>
+          </a:effectRef>
+          <a:fontRef idx="minor">
+            <a:schemeClr val="lt1"/>
+          </a:fontRef>
+        </p:style>
+        <p:txBody>
+          <a:bodyPr rtlCol="0" anchor="ctr" wrap="square" lIns="64008" rIns="64008" tIns="27432" bIns="27432"/>
+          <a:lstStyle/>
+          <a:p>
+            <a:pPr algn="l">
+              <a:lnSpc>
+                <a:spcPct val="92000"/>
+              </a:lnSpc>
+            </a:pPr>
+            <a:r>
+              <a:rPr sz="2000" b="0" i="0">
+                <a:solidFill>
+                  <a:srgbClr val="353638"/>
+                </a:solidFill>
+                <a:latin typeface="Calibri"/>
+              </a:rPr>
+              <a:t>Domain intent remains contextual</a:t>
+            </a:r>
+          </a:p>
+        </p:txBody>
+      </p:sp>
+      <p:sp>
+        <p:nvSpPr>
+          <p:cNvPr id="22" name="Rectangle 21"/>
+          <p:cNvSpPr/>
+          <p:nvPr/>
+        </p:nvSpPr>
+        <p:spPr>
+          <a:xfrm>
+            <a:off x="6537960" y="3566160"/>
+            <a:ext cx="2194560" cy="960120"/>
+          </a:xfrm>
+          <a:prstGeom prst="rect">
+            <a:avLst/>
+          </a:prstGeom>
+          <a:solidFill>
+            <a:srgbClr val="F5F1E8"/>
+          </a:solidFill>
+          <a:ln w="6350">
+            <a:solidFill>
+              <a:srgbClr val="C9B991"/>
+            </a:solidFill>
+          </a:ln>
+          <a:effectLst/>
+        </p:spPr>
+        <p:style>
+          <a:lnRef idx="1">
+            <a:schemeClr val="accent1"/>
+          </a:lnRef>
+          <a:fillRef idx="3">
+            <a:schemeClr val="accent1"/>
+          </a:fillRef>
+          <a:effectRef idx="2">
+            <a:schemeClr val="accent1"/>
+          </a:effectRef>
+          <a:fontRef idx="minor">
+            <a:schemeClr val="lt1"/>
+          </a:fontRef>
+        </p:style>
+        <p:txBody>
+          <a:bodyPr rtlCol="0" anchor="ctr" wrap="square" lIns="64008" rIns="64008" tIns="27432" bIns="27432"/>
+          <a:lstStyle/>
+          <a:p>
+            <a:pPr algn="l">
+              <a:lnSpc>
+                <a:spcPct val="92000"/>
+              </a:lnSpc>
+            </a:pPr>
+            <a:r>
+              <a:rPr sz="2000" b="0" i="0">
+                <a:solidFill>
+                  <a:srgbClr val="353638"/>
+                </a:solidFill>
+                <a:latin typeface="Calibri"/>
+              </a:rPr>
+              <a:t>Validation + transformation</a:t>
+            </a:r>
+          </a:p>
+        </p:txBody>
+      </p:sp>
+      <p:sp>
+        <p:nvSpPr>
+          <p:cNvPr id="24" name="Rectangle 23"/>
+          <p:cNvSpPr/>
+          <p:nvPr/>
+        </p:nvSpPr>
+        <p:spPr>
+          <a:xfrm>
+            <a:off x="411480" y="4572000"/>
+            <a:ext cx="1737360" cy="914400"/>
           </a:xfrm>
           <a:prstGeom prst="rect">
             <a:avLst/>
@@ -25113,27 +24633,27 @@
               </a:lnSpc>
             </a:pPr>
             <a:r>
-              <a:rPr sz="950" b="1" i="0">
+              <a:rPr sz="2000" b="1" i="0">
                 <a:solidFill>
                   <a:srgbClr val="5C4826"/>
                 </a:solidFill>
                 <a:latin typeface="Calibri"/>
               </a:rPr>
-              <a:t>UML 2.5.1</a:t>
-            </a:r>
-          </a:p>
-        </p:txBody>
-      </p:sp>
-      <p:sp>
-        <p:nvSpPr>
-          <p:cNvPr id="15" name="Rectangle 14"/>
+              <a:t>SysML v2 + KerML</a:t>
+            </a:r>
+          </a:p>
+        </p:txBody>
+      </p:sp>
+      <p:sp>
+        <p:nvSpPr>
+          <p:cNvPr id="25" name="Rectangle 24"/>
           <p:cNvSpPr/>
           <p:nvPr/>
         </p:nvSpPr>
         <p:spPr>
           <a:xfrm>
-            <a:off x="1783080" y="2514600"/>
-            <a:ext cx="1828800" cy="804672"/>
+            <a:off x="2148840" y="4572000"/>
+            <a:ext cx="2194560" cy="914400"/>
           </a:xfrm>
           <a:prstGeom prst="rect">
             <a:avLst/>
@@ -25172,27 +24692,27 @@
               </a:lnSpc>
             </a:pPr>
             <a:r>
-              <a:rPr sz="950" b="0" i="0">
+              <a:rPr sz="2000" b="0" i="0">
                 <a:solidFill>
                   <a:srgbClr val="353638"/>
                 </a:solidFill>
                 <a:latin typeface="Calibri"/>
               </a:rPr>
-              <a:t>Standardized model elements and relationships</a:t>
-            </a:r>
-          </a:p>
-        </p:txBody>
-      </p:sp>
-      <p:sp>
-        <p:nvSpPr>
-          <p:cNvPr id="16" name="Rectangle 15"/>
+              <a:t>Language-defined semantics</a:t>
+            </a:r>
+          </a:p>
+        </p:txBody>
+      </p:sp>
+      <p:sp>
+        <p:nvSpPr>
+          <p:cNvPr id="26" name="Rectangle 25"/>
           <p:cNvSpPr/>
           <p:nvPr/>
         </p:nvSpPr>
         <p:spPr>
           <a:xfrm>
-            <a:off x="3611880" y="2514600"/>
-            <a:ext cx="1828800" cy="804672"/>
+            <a:off x="4343400" y="4572000"/>
+            <a:ext cx="2194560" cy="914400"/>
           </a:xfrm>
           <a:prstGeom prst="rect">
             <a:avLst/>
@@ -25231,27 +24751,27 @@
               </a:lnSpc>
             </a:pPr>
             <a:r>
-              <a:rPr sz="950" b="0" i="0">
+              <a:rPr sz="2000" b="0" i="0">
                 <a:solidFill>
                   <a:srgbClr val="353638"/>
                 </a:solidFill>
                 <a:latin typeface="Calibri"/>
               </a:rPr>
-              <a:t>Requires notation knowledge and project context</a:t>
-            </a:r>
-          </a:p>
-        </p:txBody>
-      </p:sp>
-      <p:sp>
-        <p:nvSpPr>
-          <p:cNvPr id="17" name="Rectangle 16"/>
+              <a:t>Language + tool knowledge</a:t>
+            </a:r>
+          </a:p>
+        </p:txBody>
+      </p:sp>
+      <p:sp>
+        <p:nvSpPr>
+          <p:cNvPr id="27" name="Rectangle 26"/>
           <p:cNvSpPr/>
           <p:nvPr/>
         </p:nvSpPr>
         <p:spPr>
           <a:xfrm>
-            <a:off x="5440680" y="2514600"/>
-            <a:ext cx="1645920" cy="804672"/>
+            <a:off x="6537960" y="4572000"/>
+            <a:ext cx="2194560" cy="914400"/>
           </a:xfrm>
           <a:prstGeom prst="rect">
             <a:avLst/>
@@ -25290,662 +24810,13 @@
               </a:lnSpc>
             </a:pPr>
             <a:r>
-              <a:rPr sz="950" b="0" i="0">
+              <a:rPr sz="2000" b="0" i="0">
                 <a:solidFill>
                   <a:srgbClr val="353638"/>
                 </a:solidFill>
                 <a:latin typeface="Calibri"/>
               </a:rPr>
-              <a:t>More precise shared interpretation</a:t>
-            </a:r>
-          </a:p>
-        </p:txBody>
-      </p:sp>
-      <p:sp>
-        <p:nvSpPr>
-          <p:cNvPr id="18" name="Rectangle 17"/>
-          <p:cNvSpPr/>
-          <p:nvPr/>
-        </p:nvSpPr>
-        <p:spPr>
-          <a:xfrm>
-            <a:off x="7086600" y="2514600"/>
-            <a:ext cx="1645920" cy="804672"/>
-          </a:xfrm>
-          <a:prstGeom prst="rect">
-            <a:avLst/>
-          </a:prstGeom>
-          <a:solidFill>
-            <a:srgbClr val="FBF8F2"/>
-          </a:solidFill>
-          <a:ln w="6350">
-            <a:solidFill>
-              <a:srgbClr val="C9B991"/>
-            </a:solidFill>
-          </a:ln>
-          <a:effectLst/>
-        </p:spPr>
-        <p:style>
-          <a:lnRef idx="1">
-            <a:schemeClr val="accent1"/>
-          </a:lnRef>
-          <a:fillRef idx="3">
-            <a:schemeClr val="accent1"/>
-          </a:fillRef>
-          <a:effectRef idx="2">
-            <a:schemeClr val="accent1"/>
-          </a:effectRef>
-          <a:fontRef idx="minor">
-            <a:schemeClr val="lt1"/>
-          </a:fontRef>
-        </p:style>
-        <p:txBody>
-          <a:bodyPr rtlCol="0" anchor="ctr" wrap="square" lIns="64008" rIns="64008" tIns="27432" bIns="27432"/>
-          <a:lstStyle/>
-          <a:p>
-            <a:pPr algn="l">
-              <a:lnSpc>
-                <a:spcPct val="92000"/>
-              </a:lnSpc>
-            </a:pPr>
-            <a:r>
-              <a:rPr sz="950" b="0" i="0">
-                <a:solidFill>
-                  <a:srgbClr val="353638"/>
-                </a:solidFill>
-                <a:latin typeface="Calibri"/>
-              </a:rPr>
-              <a:t>Large — describes selected aspects</a:t>
-            </a:r>
-          </a:p>
-        </p:txBody>
-      </p:sp>
-      <p:sp>
-        <p:nvSpPr>
-          <p:cNvPr id="19" name="Rectangle 18"/>
-          <p:cNvSpPr/>
-          <p:nvPr/>
-        </p:nvSpPr>
-        <p:spPr>
-          <a:xfrm>
-            <a:off x="411480" y="3319272"/>
-            <a:ext cx="1371600" cy="932688"/>
-          </a:xfrm>
-          <a:prstGeom prst="rect">
-            <a:avLst/>
-          </a:prstGeom>
-          <a:solidFill>
-            <a:srgbClr val="F5F1E8"/>
-          </a:solidFill>
-          <a:ln w="6350">
-            <a:solidFill>
-              <a:srgbClr val="C9B991"/>
-            </a:solidFill>
-          </a:ln>
-          <a:effectLst/>
-        </p:spPr>
-        <p:style>
-          <a:lnRef idx="1">
-            <a:schemeClr val="accent1"/>
-          </a:lnRef>
-          <a:fillRef idx="3">
-            <a:schemeClr val="accent1"/>
-          </a:fillRef>
-          <a:effectRef idx="2">
-            <a:schemeClr val="accent1"/>
-          </a:effectRef>
-          <a:fontRef idx="minor">
-            <a:schemeClr val="lt1"/>
-          </a:fontRef>
-        </p:style>
-        <p:txBody>
-          <a:bodyPr rtlCol="0" anchor="ctr" wrap="square" lIns="64008" rIns="64008" tIns="27432" bIns="27432"/>
-          <a:lstStyle/>
-          <a:p>
-            <a:pPr algn="l">
-              <a:lnSpc>
-                <a:spcPct val="92000"/>
-              </a:lnSpc>
-            </a:pPr>
-            <a:r>
-              <a:rPr sz="950" b="1" i="0">
-                <a:solidFill>
-                  <a:srgbClr val="5C4826"/>
-                </a:solidFill>
-                <a:latin typeface="Calibri"/>
-              </a:rPr>
-              <a:t>OpenAPI 3.1 / JSON Schema</a:t>
-            </a:r>
-          </a:p>
-        </p:txBody>
-      </p:sp>
-      <p:sp>
-        <p:nvSpPr>
-          <p:cNvPr id="20" name="Rectangle 19"/>
-          <p:cNvSpPr/>
-          <p:nvPr/>
-        </p:nvSpPr>
-        <p:spPr>
-          <a:xfrm>
-            <a:off x="1783080" y="3319272"/>
-            <a:ext cx="1828800" cy="932688"/>
-          </a:xfrm>
-          <a:prstGeom prst="rect">
-            <a:avLst/>
-          </a:prstGeom>
-          <a:solidFill>
-            <a:srgbClr val="F5F1E8"/>
-          </a:solidFill>
-          <a:ln w="6350">
-            <a:solidFill>
-              <a:srgbClr val="C9B991"/>
-            </a:solidFill>
-          </a:ln>
-          <a:effectLst/>
-        </p:spPr>
-        <p:style>
-          <a:lnRef idx="1">
-            <a:schemeClr val="accent1"/>
-          </a:lnRef>
-          <a:fillRef idx="3">
-            <a:schemeClr val="accent1"/>
-          </a:fillRef>
-          <a:effectRef idx="2">
-            <a:schemeClr val="accent1"/>
-          </a:effectRef>
-          <a:fontRef idx="minor">
-            <a:schemeClr val="lt1"/>
-          </a:fontRef>
-        </p:style>
-        <p:txBody>
-          <a:bodyPr rtlCol="0" anchor="ctr" wrap="square" lIns="64008" rIns="64008" tIns="27432" bIns="27432"/>
-          <a:lstStyle/>
-          <a:p>
-            <a:pPr algn="l">
-              <a:lnSpc>
-                <a:spcPct val="92000"/>
-              </a:lnSpc>
-            </a:pPr>
-            <a:r>
-              <a:rPr sz="950" b="0" i="0">
-                <a:solidFill>
-                  <a:srgbClr val="353638"/>
-                </a:solidFill>
-                <a:latin typeface="Calibri"/>
-              </a:rPr>
-              <a:t>Explicit machine-readable types, fields, constraints, references</a:t>
-            </a:r>
-          </a:p>
-        </p:txBody>
-      </p:sp>
-      <p:sp>
-        <p:nvSpPr>
-          <p:cNvPr id="21" name="Rectangle 20"/>
-          <p:cNvSpPr/>
-          <p:nvPr/>
-        </p:nvSpPr>
-        <p:spPr>
-          <a:xfrm>
-            <a:off x="3611880" y="3319272"/>
-            <a:ext cx="1828800" cy="932688"/>
-          </a:xfrm>
-          <a:prstGeom prst="rect">
-            <a:avLst/>
-          </a:prstGeom>
-          <a:solidFill>
-            <a:srgbClr val="F5F1E8"/>
-          </a:solidFill>
-          <a:ln w="6350">
-            <a:solidFill>
-              <a:srgbClr val="C9B991"/>
-            </a:solidFill>
-          </a:ln>
-          <a:effectLst/>
-        </p:spPr>
-        <p:style>
-          <a:lnRef idx="1">
-            <a:schemeClr val="accent1"/>
-          </a:lnRef>
-          <a:fillRef idx="3">
-            <a:schemeClr val="accent1"/>
-          </a:fillRef>
-          <a:effectRef idx="2">
-            <a:schemeClr val="accent1"/>
-          </a:effectRef>
-          <a:fontRef idx="minor">
-            <a:schemeClr val="lt1"/>
-          </a:fontRef>
-        </p:style>
-        <p:txBody>
-          <a:bodyPr rtlCol="0" anchor="ctr" wrap="square" lIns="64008" rIns="64008" tIns="27432" bIns="27432"/>
-          <a:lstStyle/>
-          <a:p>
-            <a:pPr algn="l">
-              <a:lnSpc>
-                <a:spcPct val="92000"/>
-              </a:lnSpc>
-            </a:pPr>
-            <a:r>
-              <a:rPr sz="950" b="0" i="0">
-                <a:solidFill>
-                  <a:srgbClr val="353638"/>
-                </a:solidFill>
-                <a:latin typeface="Calibri"/>
-              </a:rPr>
-              <a:t>Structure explicit; domain intent remains contextual</a:t>
-            </a:r>
-          </a:p>
-        </p:txBody>
-      </p:sp>
-      <p:sp>
-        <p:nvSpPr>
-          <p:cNvPr id="22" name="Rectangle 21"/>
-          <p:cNvSpPr/>
-          <p:nvPr/>
-        </p:nvSpPr>
-        <p:spPr>
-          <a:xfrm>
-            <a:off x="5440680" y="3319272"/>
-            <a:ext cx="1645920" cy="932688"/>
-          </a:xfrm>
-          <a:prstGeom prst="rect">
-            <a:avLst/>
-          </a:prstGeom>
-          <a:solidFill>
-            <a:srgbClr val="F5F1E8"/>
-          </a:solidFill>
-          <a:ln w="6350">
-            <a:solidFill>
-              <a:srgbClr val="C9B991"/>
-            </a:solidFill>
-          </a:ln>
-          <a:effectLst/>
-        </p:spPr>
-        <p:style>
-          <a:lnRef idx="1">
-            <a:schemeClr val="accent1"/>
-          </a:lnRef>
-          <a:fillRef idx="3">
-            <a:schemeClr val="accent1"/>
-          </a:fillRef>
-          <a:effectRef idx="2">
-            <a:schemeClr val="accent1"/>
-          </a:effectRef>
-          <a:fontRef idx="minor">
-            <a:schemeClr val="lt1"/>
-          </a:fontRef>
-        </p:style>
-        <p:txBody>
-          <a:bodyPr rtlCol="0" anchor="ctr" wrap="square" lIns="64008" rIns="64008" tIns="27432" bIns="27432"/>
-          <a:lstStyle/>
-          <a:p>
-            <a:pPr algn="l">
-              <a:lnSpc>
-                <a:spcPct val="92000"/>
-              </a:lnSpc>
-            </a:pPr>
-            <a:r>
-              <a:rPr sz="950" b="0" i="0">
-                <a:solidFill>
-                  <a:srgbClr val="353638"/>
-                </a:solidFill>
-                <a:latin typeface="Calibri"/>
-              </a:rPr>
-              <a:t>Inspection, validation, transformation</a:t>
-            </a:r>
-          </a:p>
-        </p:txBody>
-      </p:sp>
-      <p:sp>
-        <p:nvSpPr>
-          <p:cNvPr id="23" name="Rectangle 22"/>
-          <p:cNvSpPr/>
-          <p:nvPr/>
-        </p:nvSpPr>
-        <p:spPr>
-          <a:xfrm>
-            <a:off x="7086600" y="3319272"/>
-            <a:ext cx="1645920" cy="932688"/>
-          </a:xfrm>
-          <a:prstGeom prst="rect">
-            <a:avLst/>
-          </a:prstGeom>
-          <a:solidFill>
-            <a:srgbClr val="F5F1E8"/>
-          </a:solidFill>
-          <a:ln w="6350">
-            <a:solidFill>
-              <a:srgbClr val="C9B991"/>
-            </a:solidFill>
-          </a:ln>
-          <a:effectLst/>
-        </p:spPr>
-        <p:style>
-          <a:lnRef idx="1">
-            <a:schemeClr val="accent1"/>
-          </a:lnRef>
-          <a:fillRef idx="3">
-            <a:schemeClr val="accent1"/>
-          </a:fillRef>
-          <a:effectRef idx="2">
-            <a:schemeClr val="accent1"/>
-          </a:effectRef>
-          <a:fontRef idx="minor">
-            <a:schemeClr val="lt1"/>
-          </a:fontRef>
-        </p:style>
-        <p:txBody>
-          <a:bodyPr rtlCol="0" anchor="ctr" wrap="square" lIns="64008" rIns="64008" tIns="27432" bIns="27432"/>
-          <a:lstStyle/>
-          <a:p>
-            <a:pPr algn="l">
-              <a:lnSpc>
-                <a:spcPct val="92000"/>
-              </a:lnSpc>
-            </a:pPr>
-            <a:r>
-              <a:rPr sz="950" b="0" i="0">
-                <a:solidFill>
-                  <a:srgbClr val="353638"/>
-                </a:solidFill>
-                <a:latin typeface="Calibri"/>
-              </a:rPr>
-              <a:t>Often still large</a:t>
-            </a:r>
-          </a:p>
-        </p:txBody>
-      </p:sp>
-      <p:sp>
-        <p:nvSpPr>
-          <p:cNvPr id="24" name="Rectangle 23"/>
-          <p:cNvSpPr/>
-          <p:nvPr/>
-        </p:nvSpPr>
-        <p:spPr>
-          <a:xfrm>
-            <a:off x="411480" y="4251960"/>
-            <a:ext cx="1371600" cy="1078992"/>
-          </a:xfrm>
-          <a:prstGeom prst="rect">
-            <a:avLst/>
-          </a:prstGeom>
-          <a:solidFill>
-            <a:srgbClr val="FBF8F2"/>
-          </a:solidFill>
-          <a:ln w="6350">
-            <a:solidFill>
-              <a:srgbClr val="C9B991"/>
-            </a:solidFill>
-          </a:ln>
-          <a:effectLst/>
-        </p:spPr>
-        <p:style>
-          <a:lnRef idx="1">
-            <a:schemeClr val="accent1"/>
-          </a:lnRef>
-          <a:fillRef idx="3">
-            <a:schemeClr val="accent1"/>
-          </a:fillRef>
-          <a:effectRef idx="2">
-            <a:schemeClr val="accent1"/>
-          </a:effectRef>
-          <a:fontRef idx="minor">
-            <a:schemeClr val="lt1"/>
-          </a:fontRef>
-        </p:style>
-        <p:txBody>
-          <a:bodyPr rtlCol="0" anchor="ctr" wrap="square" lIns="64008" rIns="64008" tIns="27432" bIns="27432"/>
-          <a:lstStyle/>
-          <a:p>
-            <a:pPr algn="l">
-              <a:lnSpc>
-                <a:spcPct val="92000"/>
-              </a:lnSpc>
-            </a:pPr>
-            <a:r>
-              <a:rPr sz="950" b="1" i="0">
-                <a:solidFill>
-                  <a:srgbClr val="5C4826"/>
-                </a:solidFill>
-                <a:latin typeface="Calibri"/>
-              </a:rPr>
-              <a:t>SysML v2 + KerML</a:t>
-            </a:r>
-          </a:p>
-        </p:txBody>
-      </p:sp>
-      <p:sp>
-        <p:nvSpPr>
-          <p:cNvPr id="25" name="Rectangle 24"/>
-          <p:cNvSpPr/>
-          <p:nvPr/>
-        </p:nvSpPr>
-        <p:spPr>
-          <a:xfrm>
-            <a:off x="1783080" y="4251960"/>
-            <a:ext cx="1828800" cy="1078992"/>
-          </a:xfrm>
-          <a:prstGeom prst="rect">
-            <a:avLst/>
-          </a:prstGeom>
-          <a:solidFill>
-            <a:srgbClr val="FBF8F2"/>
-          </a:solidFill>
-          <a:ln w="6350">
-            <a:solidFill>
-              <a:srgbClr val="C9B991"/>
-            </a:solidFill>
-          </a:ln>
-          <a:effectLst/>
-        </p:spPr>
-        <p:style>
-          <a:lnRef idx="1">
-            <a:schemeClr val="accent1"/>
-          </a:lnRef>
-          <a:fillRef idx="3">
-            <a:schemeClr val="accent1"/>
-          </a:fillRef>
-          <a:effectRef idx="2">
-            <a:schemeClr val="accent1"/>
-          </a:effectRef>
-          <a:fontRef idx="minor">
-            <a:schemeClr val="lt1"/>
-          </a:fontRef>
-        </p:style>
-        <p:txBody>
-          <a:bodyPr rtlCol="0" anchor="ctr" wrap="square" lIns="64008" rIns="64008" tIns="27432" bIns="27432"/>
-          <a:lstStyle/>
-          <a:p>
-            <a:pPr algn="l">
-              <a:lnSpc>
-                <a:spcPct val="92000"/>
-              </a:lnSpc>
-            </a:pPr>
-            <a:r>
-              <a:rPr sz="950" b="0" i="0">
-                <a:solidFill>
-                  <a:srgbClr val="353638"/>
-                </a:solidFill>
-                <a:latin typeface="Calibri"/>
-              </a:rPr>
-              <a:t>Types, relationships, expressions, constraints defined as part of the language</a:t>
-            </a:r>
-          </a:p>
-        </p:txBody>
-      </p:sp>
-      <p:sp>
-        <p:nvSpPr>
-          <p:cNvPr id="26" name="Rectangle 25"/>
-          <p:cNvSpPr/>
-          <p:nvPr/>
-        </p:nvSpPr>
-        <p:spPr>
-          <a:xfrm>
-            <a:off x="3611880" y="4251960"/>
-            <a:ext cx="1828800" cy="1078992"/>
-          </a:xfrm>
-          <a:prstGeom prst="rect">
-            <a:avLst/>
-          </a:prstGeom>
-          <a:solidFill>
-            <a:srgbClr val="FBF8F2"/>
-          </a:solidFill>
-          <a:ln w="6350">
-            <a:solidFill>
-              <a:srgbClr val="C9B991"/>
-            </a:solidFill>
-          </a:ln>
-          <a:effectLst/>
-        </p:spPr>
-        <p:style>
-          <a:lnRef idx="1">
-            <a:schemeClr val="accent1"/>
-          </a:lnRef>
-          <a:fillRef idx="3">
-            <a:schemeClr val="accent1"/>
-          </a:fillRef>
-          <a:effectRef idx="2">
-            <a:schemeClr val="accent1"/>
-          </a:effectRef>
-          <a:fontRef idx="minor">
-            <a:schemeClr val="lt1"/>
-          </a:fontRef>
-        </p:style>
-        <p:txBody>
-          <a:bodyPr rtlCol="0" anchor="ctr" wrap="square" lIns="64008" rIns="64008" tIns="27432" bIns="27432"/>
-          <a:lstStyle/>
-          <a:p>
-            <a:pPr algn="l">
-              <a:lnSpc>
-                <a:spcPct val="92000"/>
-              </a:lnSpc>
-            </a:pPr>
-            <a:r>
-              <a:rPr sz="950" b="0" i="0">
-                <a:solidFill>
-                  <a:srgbClr val="353638"/>
-                </a:solidFill>
-                <a:latin typeface="Calibri"/>
-              </a:rPr>
-              <a:t>Language and tool knowledge up front — less semantics to reconstruct</a:t>
-            </a:r>
-          </a:p>
-        </p:txBody>
-      </p:sp>
-      <p:sp>
-        <p:nvSpPr>
-          <p:cNvPr id="27" name="Rectangle 26"/>
-          <p:cNvSpPr/>
-          <p:nvPr/>
-        </p:nvSpPr>
-        <p:spPr>
-          <a:xfrm>
-            <a:off x="5440680" y="4251960"/>
-            <a:ext cx="1645920" cy="1078992"/>
-          </a:xfrm>
-          <a:prstGeom prst="rect">
-            <a:avLst/>
-          </a:prstGeom>
-          <a:solidFill>
-            <a:srgbClr val="FBF8F2"/>
-          </a:solidFill>
-          <a:ln w="6350">
-            <a:solidFill>
-              <a:srgbClr val="C9B991"/>
-            </a:solidFill>
-          </a:ln>
-          <a:effectLst/>
-        </p:spPr>
-        <p:style>
-          <a:lnRef idx="1">
-            <a:schemeClr val="accent1"/>
-          </a:lnRef>
-          <a:fillRef idx="3">
-            <a:schemeClr val="accent1"/>
-          </a:fillRef>
-          <a:effectRef idx="2">
-            <a:schemeClr val="accent1"/>
-          </a:effectRef>
-          <a:fontRef idx="minor">
-            <a:schemeClr val="lt1"/>
-          </a:fontRef>
-        </p:style>
-        <p:txBody>
-          <a:bodyPr rtlCol="0" anchor="ctr" wrap="square" lIns="64008" rIns="64008" tIns="27432" bIns="27432"/>
-          <a:lstStyle/>
-          <a:p>
-            <a:pPr algn="l">
-              <a:lnSpc>
-                <a:spcPct val="92000"/>
-              </a:lnSpc>
-            </a:pPr>
-            <a:r>
-              <a:rPr sz="950" b="0" i="0">
-                <a:solidFill>
-                  <a:srgbClr val="353638"/>
-                </a:solidFill>
-                <a:latin typeface="Calibri"/>
-              </a:rPr>
-              <a:t>Query, composition, analysis, machine reasoning</a:t>
-            </a:r>
-          </a:p>
-        </p:txBody>
-      </p:sp>
-      <p:sp>
-        <p:nvSpPr>
-          <p:cNvPr id="28" name="Rectangle 27"/>
-          <p:cNvSpPr/>
-          <p:nvPr/>
-        </p:nvSpPr>
-        <p:spPr>
-          <a:xfrm>
-            <a:off x="7086600" y="4251960"/>
-            <a:ext cx="1645920" cy="1078992"/>
-          </a:xfrm>
-          <a:prstGeom prst="rect">
-            <a:avLst/>
-          </a:prstGeom>
-          <a:solidFill>
-            <a:srgbClr val="FBF8F2"/>
-          </a:solidFill>
-          <a:ln w="6350">
-            <a:solidFill>
-              <a:srgbClr val="C9B991"/>
-            </a:solidFill>
-          </a:ln>
-          <a:effectLst/>
-        </p:spPr>
-        <p:style>
-          <a:lnRef idx="1">
-            <a:schemeClr val="accent1"/>
-          </a:lnRef>
-          <a:fillRef idx="3">
-            <a:schemeClr val="accent1"/>
-          </a:fillRef>
-          <a:effectRef idx="2">
-            <a:schemeClr val="accent1"/>
-          </a:effectRef>
-          <a:fontRef idx="minor">
-            <a:schemeClr val="lt1"/>
-          </a:fontRef>
-        </p:style>
-        <p:txBody>
-          <a:bodyPr rtlCol="0" anchor="ctr" wrap="square" lIns="64008" rIns="64008" tIns="27432" bIns="27432"/>
-          <a:lstStyle/>
-          <a:p>
-            <a:pPr algn="l">
-              <a:lnSpc>
-                <a:spcPct val="92000"/>
-              </a:lnSpc>
-            </a:pPr>
-            <a:r>
-              <a:rPr sz="950" b="1" i="0">
-                <a:solidFill>
-                  <a:srgbClr val="C8102E"/>
-                </a:solidFill>
-                <a:latin typeface="Calibri"/>
-              </a:rPr>
-              <a:t>Potentially very large</a:t>
+              <a:t>Query + analysis + composition</a:t>
             </a:r>
           </a:p>
         </p:txBody>
@@ -25958,7 +24829,7 @@
         </p:nvSpPr>
         <p:spPr>
           <a:xfrm>
-            <a:off x="411480" y="5495544"/>
+            <a:off x="411480" y="5623560"/>
             <a:ext cx="8321040" cy="274320"/>
           </a:xfrm>
           <a:prstGeom prst="rect">
@@ -25974,31 +24845,31 @@
           <a:p>
             <a:pPr algn="l"/>
             <a:r>
+              <a:rPr sz="2000" b="1" i="1">
+                <a:solidFill>
+                  <a:srgbClr val="5C4826"/>
+                </a:solidFill>
+                <a:latin typeface="Calibri"/>
+              </a:rPr>
+              <a:t>Semantic commitment does not determine realization freedom.</a:t>
+            </a:r>
+            <a:r>
+              <a:rPr sz="1100" b="0" i="1">
+                <a:solidFill>
+                  <a:srgbClr val="555960"/>
+                </a:solidFill>
+                <a:latin typeface="Calibri"/>
+              </a:rPr>
+              <a:t/>
+            </a:r>
+            <a:r>
               <a:rPr sz="1100" b="1" i="1">
                 <a:solidFill>
-                  <a:srgbClr val="5C4826"/>
-                </a:solidFill>
-                <a:latin typeface="Calibri"/>
-              </a:rPr>
-              <a:t>Interpretation burden is relocated, not removed. </a:t>
-            </a:r>
-            <a:r>
-              <a:rPr sz="1100" b="0" i="1">
-                <a:solidFill>
-                  <a:srgbClr val="555960"/>
-                </a:solidFill>
-                <a:latin typeface="Calibri"/>
-              </a:rPr>
-              <a:t>And realization freedom does not shrink as commitment grows — </a:t>
-            </a:r>
-            <a:r>
-              <a:rPr sz="1100" b="1" i="1">
-                <a:solidFill>
                   <a:srgbClr val="C8102E"/>
                 </a:solidFill>
                 <a:latin typeface="Calibri"/>
               </a:rPr>
-              <a:t>precise semantics do not imply complete specification.</a:t>
+              <a:t/>
             </a:r>
           </a:p>
         </p:txBody>
@@ -26011,8 +24882,8 @@
         </p:nvSpPr>
         <p:spPr>
           <a:xfrm>
-            <a:off x="320040" y="6144768"/>
-            <a:ext cx="8503920" cy="420624"/>
+            <a:off x="320040" y="6007607"/>
+            <a:ext cx="8503920" cy="557784"/>
           </a:xfrm>
           <a:prstGeom prst="rect">
             <a:avLst/>
@@ -26045,7 +24916,7 @@
           <a:p>
             <a:pPr algn="ctr"/>
             <a:r>
-              <a:rPr sz="1250" b="1" i="0">
+              <a:rPr sz="1800" b="1" i="0">
                 <a:solidFill>
                   <a:srgbClr val="FFFFFF"/>
                 </a:solidFill>

--- a/course/lectures/act-2-delegation-and-control/02-modeling/2-2-Modeling-2-Degrees-of-Semantic-Commitment.pptx
+++ b/course/lectures/act-2-delegation-and-control/02-modeling/2-2-Modeling-2-Degrees-of-Semantic-Commitment.pptx
@@ -12743,454 +12743,6 @@
       </p:sp>
       <p:sp>
         <p:nvSpPr>
-          <p:cNvPr id="12" name="Rectangle 11"/>
-          <p:cNvSpPr/>
-          <p:nvPr/>
-        </p:nvSpPr>
-        <p:spPr>
-          <a:xfrm>
-            <a:off x="4709160" y="1097280"/>
-            <a:ext cx="2103120" cy="457200"/>
-          </a:xfrm>
-          <a:prstGeom prst="rect">
-            <a:avLst/>
-          </a:prstGeom>
-          <a:solidFill>
-            <a:srgbClr val="8E6F3E"/>
-          </a:solidFill>
-          <a:ln>
-            <a:noFill/>
-          </a:ln>
-          <a:effectLst/>
-        </p:spPr>
-        <p:style>
-          <a:lnRef idx="1">
-            <a:schemeClr val="accent1"/>
-          </a:lnRef>
-          <a:fillRef idx="3">
-            <a:schemeClr val="accent1"/>
-          </a:fillRef>
-          <a:effectRef idx="2">
-            <a:schemeClr val="accent1"/>
-          </a:effectRef>
-          <a:fontRef idx="minor">
-            <a:schemeClr val="lt1"/>
-          </a:fontRef>
-        </p:style>
-        <p:txBody>
-          <a:bodyPr wrap="square" lIns="54864" tIns="27432" rIns="54864" bIns="27432" rtlCol="0" anchor="ctr"/>
-          <a:lstStyle/>
-          <a:p>
-            <a:pPr algn="ctr"/>
-            <a:r>
-              <a:rPr sz="1800" b="1" i="0">
-                <a:solidFill>
-                  <a:srgbClr val="FFFFFF"/>
-                </a:solidFill>
-                <a:latin typeface="Calibri"/>
-              </a:rPr>
-              <a:t>Kind of decision</a:t>
-            </a:r>
-          </a:p>
-        </p:txBody>
-      </p:sp>
-      <p:sp>
-        <p:nvSpPr>
-          <p:cNvPr id="13" name="Rectangle 12"/>
-          <p:cNvSpPr/>
-          <p:nvPr/>
-        </p:nvSpPr>
-        <p:spPr>
-          <a:xfrm>
-            <a:off x="6812280" y="1097280"/>
-            <a:ext cx="1828800" cy="457200"/>
-          </a:xfrm>
-          <a:prstGeom prst="rect">
-            <a:avLst/>
-          </a:prstGeom>
-          <a:solidFill>
-            <a:srgbClr val="8E6F3E"/>
-          </a:solidFill>
-          <a:ln>
-            <a:noFill/>
-          </a:ln>
-          <a:effectLst/>
-        </p:spPr>
-        <p:style>
-          <a:lnRef idx="1">
-            <a:schemeClr val="accent1"/>
-          </a:lnRef>
-          <a:fillRef idx="3">
-            <a:schemeClr val="accent1"/>
-          </a:fillRef>
-          <a:effectRef idx="2">
-            <a:schemeClr val="accent1"/>
-          </a:effectRef>
-          <a:fontRef idx="minor">
-            <a:schemeClr val="lt1"/>
-          </a:fontRef>
-        </p:style>
-        <p:txBody>
-          <a:bodyPr wrap="square" lIns="54864" tIns="27432" rIns="54864" bIns="27432" rtlCol="0" anchor="ctr"/>
-          <a:lstStyle/>
-          <a:p>
-            <a:pPr algn="ctr"/>
-            <a:r>
-              <a:rPr sz="1800" b="1" i="0">
-                <a:solidFill>
-                  <a:srgbClr val="FFFFFF"/>
-                </a:solidFill>
-                <a:latin typeface="Calibri"/>
-              </a:rPr>
-              <a:t>Response</a:t>
-            </a:r>
-          </a:p>
-        </p:txBody>
-      </p:sp>
-      <p:sp>
-        <p:nvSpPr>
-          <p:cNvPr id="14" name="Rectangle 13"/>
-          <p:cNvSpPr/>
-          <p:nvPr/>
-        </p:nvSpPr>
-        <p:spPr>
-          <a:xfrm>
-            <a:off x="4709160" y="1554480"/>
-            <a:ext cx="2103120" cy="658368"/>
-          </a:xfrm>
-          <a:prstGeom prst="rect">
-            <a:avLst/>
-          </a:prstGeom>
-          <a:solidFill>
-            <a:srgbClr val="F5F1E8"/>
-          </a:solidFill>
-          <a:ln w="6350">
-            <a:solidFill>
-              <a:srgbClr val="C9B991"/>
-            </a:solidFill>
-          </a:ln>
-          <a:effectLst/>
-        </p:spPr>
-        <p:style>
-          <a:lnRef idx="1">
-            <a:schemeClr val="accent1"/>
-          </a:lnRef>
-          <a:fillRef idx="3">
-            <a:schemeClr val="accent1"/>
-          </a:fillRef>
-          <a:effectRef idx="2">
-            <a:schemeClr val="accent1"/>
-          </a:effectRef>
-          <a:fontRef idx="minor">
-            <a:schemeClr val="lt1"/>
-          </a:fontRef>
-        </p:style>
-        <p:txBody>
-          <a:bodyPr wrap="square" lIns="73152" tIns="27432" rIns="73152" bIns="27432" rtlCol="0" anchor="ctr"/>
-          <a:lstStyle/>
-          <a:p>
-            <a:pPr algn="ctr">
-              <a:lnSpc>
-                <a:spcPct val="95000"/>
-              </a:lnSpc>
-            </a:pPr>
-            <a:r>
-              <a:rPr sz="1800" b="0" i="0" dirty="0">
-                <a:solidFill>
-                  <a:srgbClr val="353638"/>
-                </a:solidFill>
-                <a:latin typeface="Calibri"/>
-              </a:rPr>
-              <a:t>Mechanically determined</a:t>
-            </a:r>
-          </a:p>
-        </p:txBody>
-      </p:sp>
-      <p:sp>
-        <p:nvSpPr>
-          <p:cNvPr id="15" name="Rectangle 14"/>
-          <p:cNvSpPr/>
-          <p:nvPr/>
-        </p:nvSpPr>
-        <p:spPr>
-          <a:xfrm>
-            <a:off x="6812280" y="1554480"/>
-            <a:ext cx="1828800" cy="658368"/>
-          </a:xfrm>
-          <a:prstGeom prst="rect">
-            <a:avLst/>
-          </a:prstGeom>
-          <a:solidFill>
-            <a:srgbClr val="F5F1E8"/>
-          </a:solidFill>
-          <a:ln w="6350">
-            <a:solidFill>
-              <a:srgbClr val="C9B991"/>
-            </a:solidFill>
-          </a:ln>
-          <a:effectLst/>
-        </p:spPr>
-        <p:style>
-          <a:lnRef idx="1">
-            <a:schemeClr val="accent1"/>
-          </a:lnRef>
-          <a:fillRef idx="3">
-            <a:schemeClr val="accent1"/>
-          </a:fillRef>
-          <a:effectRef idx="2">
-            <a:schemeClr val="accent1"/>
-          </a:effectRef>
-          <a:fontRef idx="minor">
-            <a:schemeClr val="lt1"/>
-          </a:fontRef>
-        </p:style>
-        <p:txBody>
-          <a:bodyPr wrap="square" lIns="54864" tIns="27432" rIns="54864" bIns="27432" rtlCol="0" anchor="ctr"/>
-          <a:lstStyle/>
-          <a:p>
-            <a:pPr algn="ctr"/>
-            <a:r>
-              <a:rPr sz="1800" b="1" i="0">
-                <a:solidFill>
-                  <a:srgbClr val="5C4826"/>
-                </a:solidFill>
-                <a:latin typeface="Calibri"/>
-              </a:rPr>
-              <a:t>Generate it</a:t>
-            </a:r>
-          </a:p>
-        </p:txBody>
-      </p:sp>
-      <p:sp>
-        <p:nvSpPr>
-          <p:cNvPr id="16" name="Rectangle 15"/>
-          <p:cNvSpPr/>
-          <p:nvPr/>
-        </p:nvSpPr>
-        <p:spPr>
-          <a:xfrm>
-            <a:off x="4709160" y="2212848"/>
-            <a:ext cx="2103120" cy="658368"/>
-          </a:xfrm>
-          <a:prstGeom prst="rect">
-            <a:avLst/>
-          </a:prstGeom>
-          <a:solidFill>
-            <a:srgbClr val="FBF8F2"/>
-          </a:solidFill>
-          <a:ln w="6350">
-            <a:solidFill>
-              <a:srgbClr val="C9B991"/>
-            </a:solidFill>
-          </a:ln>
-          <a:effectLst/>
-        </p:spPr>
-        <p:style>
-          <a:lnRef idx="1">
-            <a:schemeClr val="accent1"/>
-          </a:lnRef>
-          <a:fillRef idx="3">
-            <a:schemeClr val="accent1"/>
-          </a:fillRef>
-          <a:effectRef idx="2">
-            <a:schemeClr val="accent1"/>
-          </a:effectRef>
-          <a:fontRef idx="minor">
-            <a:schemeClr val="lt1"/>
-          </a:fontRef>
-        </p:style>
-        <p:txBody>
-          <a:bodyPr wrap="square" lIns="73152" tIns="27432" rIns="73152" bIns="27432" rtlCol="0" anchor="ctr"/>
-          <a:lstStyle/>
-          <a:p>
-            <a:pPr algn="ctr">
-              <a:lnSpc>
-                <a:spcPct val="95000"/>
-              </a:lnSpc>
-            </a:pPr>
-            <a:r>
-              <a:rPr sz="1800" b="0" i="0" dirty="0">
-                <a:solidFill>
-                  <a:srgbClr val="353638"/>
-                </a:solidFill>
-                <a:latin typeface="Calibri"/>
-              </a:rPr>
-              <a:t>Open within modeled obligations</a:t>
-            </a:r>
-          </a:p>
-        </p:txBody>
-      </p:sp>
-      <p:sp>
-        <p:nvSpPr>
-          <p:cNvPr id="17" name="Rectangle 16"/>
-          <p:cNvSpPr/>
-          <p:nvPr/>
-        </p:nvSpPr>
-        <p:spPr>
-          <a:xfrm>
-            <a:off x="6812280" y="2212848"/>
-            <a:ext cx="1828800" cy="658368"/>
-          </a:xfrm>
-          <a:prstGeom prst="rect">
-            <a:avLst/>
-          </a:prstGeom>
-          <a:solidFill>
-            <a:srgbClr val="FBF8F2"/>
-          </a:solidFill>
-          <a:ln w="6350">
-            <a:solidFill>
-              <a:srgbClr val="C9B991"/>
-            </a:solidFill>
-          </a:ln>
-          <a:effectLst/>
-        </p:spPr>
-        <p:style>
-          <a:lnRef idx="1">
-            <a:schemeClr val="accent1"/>
-          </a:lnRef>
-          <a:fillRef idx="3">
-            <a:schemeClr val="accent1"/>
-          </a:fillRef>
-          <a:effectRef idx="2">
-            <a:schemeClr val="accent1"/>
-          </a:effectRef>
-          <a:fontRef idx="minor">
-            <a:schemeClr val="lt1"/>
-          </a:fontRef>
-        </p:style>
-        <p:txBody>
-          <a:bodyPr wrap="square" lIns="54864" tIns="27432" rIns="54864" bIns="27432" rtlCol="0" anchor="ctr"/>
-          <a:lstStyle/>
-          <a:p>
-            <a:pPr algn="ctr"/>
-            <a:r>
-              <a:rPr sz="1800" b="1" i="0">
-                <a:solidFill>
-                  <a:srgbClr val="5C4826"/>
-                </a:solidFill>
-                <a:latin typeface="Calibri"/>
-              </a:rPr>
-              <a:t>Delegate it</a:t>
-            </a:r>
-          </a:p>
-        </p:txBody>
-      </p:sp>
-      <p:sp>
-        <p:nvSpPr>
-          <p:cNvPr id="18" name="Rectangle 17"/>
-          <p:cNvSpPr/>
-          <p:nvPr/>
-        </p:nvSpPr>
-        <p:spPr>
-          <a:xfrm>
-            <a:off x="4709160" y="2871215"/>
-            <a:ext cx="2103120" cy="658368"/>
-          </a:xfrm>
-          <a:prstGeom prst="rect">
-            <a:avLst/>
-          </a:prstGeom>
-          <a:solidFill>
-            <a:srgbClr val="F5F1E8"/>
-          </a:solidFill>
-          <a:ln w="6350">
-            <a:solidFill>
-              <a:srgbClr val="C9B991"/>
-            </a:solidFill>
-          </a:ln>
-          <a:effectLst/>
-        </p:spPr>
-        <p:style>
-          <a:lnRef idx="1">
-            <a:schemeClr val="accent1"/>
-          </a:lnRef>
-          <a:fillRef idx="3">
-            <a:schemeClr val="accent1"/>
-          </a:fillRef>
-          <a:effectRef idx="2">
-            <a:schemeClr val="accent1"/>
-          </a:effectRef>
-          <a:fontRef idx="minor">
-            <a:schemeClr val="lt1"/>
-          </a:fontRef>
-        </p:style>
-        <p:txBody>
-          <a:bodyPr wrap="square" lIns="73152" tIns="27432" rIns="73152" bIns="27432" rtlCol="0" anchor="ctr"/>
-          <a:lstStyle/>
-          <a:p>
-            <a:pPr algn="ctr">
-              <a:lnSpc>
-                <a:spcPct val="95000"/>
-              </a:lnSpc>
-            </a:pPr>
-            <a:r>
-              <a:rPr sz="1800" b="0" i="0" dirty="0">
-                <a:solidFill>
-                  <a:srgbClr val="353638"/>
-                </a:solidFill>
-                <a:latin typeface="Calibri"/>
-              </a:rPr>
-              <a:t>Recurring and consequential</a:t>
-            </a:r>
-          </a:p>
-        </p:txBody>
-      </p:sp>
-      <p:sp>
-        <p:nvSpPr>
-          <p:cNvPr id="19" name="Rectangle 18"/>
-          <p:cNvSpPr/>
-          <p:nvPr/>
-        </p:nvSpPr>
-        <p:spPr>
-          <a:xfrm>
-            <a:off x="6812280" y="2871215"/>
-            <a:ext cx="1828800" cy="658368"/>
-          </a:xfrm>
-          <a:prstGeom prst="rect">
-            <a:avLst/>
-          </a:prstGeom>
-          <a:solidFill>
-            <a:srgbClr val="F5F1E8"/>
-          </a:solidFill>
-          <a:ln w="6350">
-            <a:solidFill>
-              <a:srgbClr val="C9B991"/>
-            </a:solidFill>
-          </a:ln>
-          <a:effectLst/>
-        </p:spPr>
-        <p:style>
-          <a:lnRef idx="1">
-            <a:schemeClr val="accent1"/>
-          </a:lnRef>
-          <a:fillRef idx="3">
-            <a:schemeClr val="accent1"/>
-          </a:fillRef>
-          <a:effectRef idx="2">
-            <a:schemeClr val="accent1"/>
-          </a:effectRef>
-          <a:fontRef idx="minor">
-            <a:schemeClr val="lt1"/>
-          </a:fontRef>
-        </p:style>
-        <p:txBody>
-          <a:bodyPr wrap="square" lIns="54864" tIns="27432" rIns="54864" bIns="27432" rtlCol="0" anchor="ctr"/>
-          <a:lstStyle/>
-          <a:p>
-            <a:pPr algn="ctr"/>
-            <a:r>
-              <a:rPr sz="1800" b="1" i="0">
-                <a:solidFill>
-                  <a:srgbClr val="5C4826"/>
-                </a:solidFill>
-                <a:latin typeface="Calibri"/>
-              </a:rPr>
-              <a:t>Consider modeling it</a:t>
-            </a:r>
-          </a:p>
-        </p:txBody>
-      </p:sp>
-      <p:sp>
-        <p:nvSpPr>
           <p:cNvPr id="21" name="Rectangle 20"/>
           <p:cNvSpPr/>
           <p:nvPr/>
@@ -13404,6 +12956,208 @@
           </a:prstGeom>
         </p:spPr>
       </p:pic>
+      <p:graphicFrame>
+        <p:nvGraphicFramePr>
+          <p:cNvPr id="26" name="Table 25"/>
+          <p:cNvGraphicFramePr>
+            <a:graphicFrameLocks noGrp="1"/>
+          </p:cNvGraphicFramePr>
+          <p:nvPr/>
+        </p:nvGraphicFramePr>
+        <p:xfrm>
+          <a:off x="4709160" y="1097280"/>
+          <a:ext cx="3931920" cy="2432304"/>
+        </p:xfrm>
+        <a:graphic>
+          <a:graphicData uri="http://schemas.openxmlformats.org/drawingml/2006/table">
+            <a:tbl>
+              <a:tblPr firstRow="1">
+                <a:tableStyleId>{5C22544A-7EE6-4342-B048-85BDC9FD1C3A}</a:tableStyleId>
+              </a:tblPr>
+              <a:tblGrid>
+                <a:gridCol w="2286000"/>
+                <a:gridCol w="1645920"/>
+              </a:tblGrid>
+              <a:tr h="457200">
+                <a:tc>
+                  <a:txBody>
+                    <a:bodyPr/>
+                    <a:lstStyle/>
+                    <a:p>
+                      <a:r>
+                        <a:rPr sz="1800" b="1">
+                          <a:solidFill>
+                            <a:srgbClr val="FFFFFF"/>
+                          </a:solidFill>
+                        </a:rPr>
+                        <a:t>Kind of decision</a:t>
+                      </a:r>
+                    </a:p>
+                  </a:txBody>
+                  <a:tcPr anchor="ctr" marL="118872" marR="82296" marT="54864" marB="54864">
+                    <a:solidFill>
+                      <a:srgbClr val="8E6F3E"/>
+                    </a:solidFill>
+                  </a:tcPr>
+                </a:tc>
+                <a:tc>
+                  <a:txBody>
+                    <a:bodyPr/>
+                    <a:lstStyle/>
+                    <a:p>
+                      <a:r>
+                        <a:rPr sz="1800" b="1">
+                          <a:solidFill>
+                            <a:srgbClr val="FFFFFF"/>
+                          </a:solidFill>
+                        </a:rPr>
+                        <a:t>Response</a:t>
+                      </a:r>
+                    </a:p>
+                  </a:txBody>
+                  <a:tcPr anchor="ctr" marL="118872" marR="82296" marT="54864" marB="54864">
+                    <a:solidFill>
+                      <a:srgbClr val="8E6F3E"/>
+                    </a:solidFill>
+                  </a:tcPr>
+                </a:tc>
+              </a:tr>
+              <a:tr h="658368">
+                <a:tc>
+                  <a:txBody>
+                    <a:bodyPr/>
+                    <a:lstStyle/>
+                    <a:p>
+                      <a:r>
+                        <a:rPr sz="1800" b="0">
+                          <a:solidFill>
+                            <a:srgbClr val="353638"/>
+                          </a:solidFill>
+                        </a:rPr>
+                        <a:t>Mechanically determined</a:t>
+                      </a:r>
+                    </a:p>
+                  </a:txBody>
+                  <a:tcPr anchor="ctr" marL="118872" marR="82296" marT="54864" marB="54864">
+                    <a:solidFill>
+                      <a:srgbClr val="F7F3EC"/>
+                    </a:solidFill>
+                  </a:tcPr>
+                </a:tc>
+                <a:tc>
+                  <a:txBody>
+                    <a:bodyPr/>
+                    <a:lstStyle/>
+                    <a:p>
+                      <a:r>
+                        <a:rPr sz="1800" b="1">
+                          <a:solidFill>
+                            <a:srgbClr val="8E6F3E"/>
+                          </a:solidFill>
+                        </a:rPr>
+                        <a:t>Generate it</a:t>
+                      </a:r>
+                    </a:p>
+                  </a:txBody>
+                  <a:tcPr anchor="ctr" marL="118872" marR="82296" marT="54864" marB="54864">
+                    <a:solidFill>
+                      <a:srgbClr val="F7F3EC"/>
+                    </a:solidFill>
+                  </a:tcPr>
+                </a:tc>
+              </a:tr>
+              <a:tr h="658368">
+                <a:tc>
+                  <a:txBody>
+                    <a:bodyPr/>
+                    <a:lstStyle/>
+                    <a:p>
+                      <a:r>
+                        <a:rPr sz="1800" b="0">
+                          <a:solidFill>
+                            <a:srgbClr val="353638"/>
+                          </a:solidFill>
+                        </a:rPr>
+                        <a:t>Open within modeled obligations</a:t>
+                      </a:r>
+                    </a:p>
+                  </a:txBody>
+                  <a:tcPr anchor="ctr" marL="118872" marR="82296" marT="54864" marB="54864">
+                    <a:solidFill>
+                      <a:srgbClr val="F7F3EC"/>
+                    </a:solidFill>
+                  </a:tcPr>
+                </a:tc>
+                <a:tc>
+                  <a:txBody>
+                    <a:bodyPr/>
+                    <a:lstStyle/>
+                    <a:p>
+                      <a:r>
+                        <a:rPr sz="1800" b="1">
+                          <a:solidFill>
+                            <a:srgbClr val="8E6F3E"/>
+                          </a:solidFill>
+                        </a:rPr>
+                        <a:t>Delegate it</a:t>
+                      </a:r>
+                    </a:p>
+                  </a:txBody>
+                  <a:tcPr anchor="ctr" marL="118872" marR="82296" marT="54864" marB="54864">
+                    <a:solidFill>
+                      <a:srgbClr val="F7F3EC"/>
+                    </a:solidFill>
+                  </a:tcPr>
+                </a:tc>
+              </a:tr>
+              <a:tr h="658368">
+                <a:tc>
+                  <a:txBody>
+                    <a:bodyPr/>
+                    <a:lstStyle/>
+                    <a:p>
+                      <a:r>
+                        <a:rPr sz="1800" b="0">
+                          <a:solidFill>
+                            <a:srgbClr val="353638"/>
+                          </a:solidFill>
+                        </a:rPr>
+                        <a:t>Recurring and consequential</a:t>
+                      </a:r>
+                    </a:p>
+                  </a:txBody>
+                  <a:tcPr anchor="ctr" marL="118872" marR="82296" marT="54864" marB="54864">
+                    <a:solidFill>
+                      <a:srgbClr val="F7F3EC"/>
+                    </a:solidFill>
+                  </a:tcPr>
+                </a:tc>
+                <a:tc>
+                  <a:txBody>
+                    <a:bodyPr/>
+                    <a:lstStyle/>
+                    <a:p>
+                      <a:r>
+                        <a:rPr sz="1800" b="1">
+                          <a:solidFill>
+                            <a:srgbClr val="8E6F3E"/>
+                          </a:solidFill>
+                        </a:rPr>
+                        <a:t>Consider modeling it</a:t>
+                      </a:r>
+                    </a:p>
+                  </a:txBody>
+                  <a:tcPr anchor="ctr" marL="118872" marR="82296" marT="54864" marB="54864">
+                    <a:solidFill>
+                      <a:srgbClr val="F7F3EC"/>
+                    </a:solidFill>
+                  </a:tcPr>
+                </a:tc>
+              </a:tr>
+            </a:tbl>
+          </a:graphicData>
+        </a:graphic>
+      </p:graphicFrame>
     </p:spTree>
   </p:cSld>
   <p:clrMapOvr>
@@ -29030,14 +28784,49 @@
       </p:sp>
       <p:sp>
         <p:nvSpPr>
-          <p:cNvPr id="4" name="Rectangle 3"/>
+          <p:cNvPr id="29" name="TextBox 28"/>
+          <p:cNvSpPr txBox="1"/>
+          <p:nvPr/>
+        </p:nvSpPr>
+        <p:spPr>
+          <a:xfrm>
+            <a:off x="411480" y="5623560"/>
+            <a:ext cx="8321040" cy="274320"/>
+          </a:xfrm>
+          <a:prstGeom prst="rect">
+            <a:avLst/>
+          </a:prstGeom>
+          <a:noFill/>
+        </p:spPr>
+        <p:txBody>
+          <a:bodyPr wrap="square" lIns="0" tIns="0" rIns="0" bIns="0" anchor="t">
+            <a:spAutoFit/>
+          </a:bodyPr>
+          <a:lstStyle/>
+          <a:p>
+            <a:pPr algn="l"/>
+            <a:r>
+              <a:rPr sz="2000" b="1" i="1">
+                <a:solidFill>
+                  <a:srgbClr val="5C4826"/>
+                </a:solidFill>
+                <a:latin typeface="Calibri"/>
+              </a:rPr>
+              <a:t>Semantic commitment does not determine realization freedom.</a:t>
+            </a:r>
+          </a:p>
+        </p:txBody>
+      </p:sp>
+      <p:sp>
+        <p:nvSpPr>
+          <p:cNvPr id="30" name="Rectangle 29"/>
           <p:cNvSpPr/>
           <p:nvPr/>
         </p:nvSpPr>
         <p:spPr>
           <a:xfrm>
-            <a:off x="411480" y="960120"/>
-            <a:ext cx="1737360" cy="502920"/>
+            <a:off x="320040" y="6007607"/>
+            <a:ext cx="8503920" cy="557784"/>
           </a:xfrm>
           <a:prstGeom prst="rect">
             <a:avLst/>
@@ -29065,1213 +28854,6 @@
           </a:fontRef>
         </p:style>
         <p:txBody>
-          <a:bodyPr wrap="square" lIns="45720" tIns="27432" rIns="45720" bIns="27432" rtlCol="0" anchor="ctr"/>
-          <a:lstStyle/>
-          <a:p>
-            <a:pPr algn="ctr">
-              <a:lnSpc>
-                <a:spcPct val="90000"/>
-              </a:lnSpc>
-            </a:pPr>
-            <a:r>
-              <a:rPr sz="2000" b="1" i="0">
-                <a:solidFill>
-                  <a:srgbClr val="FFFFFF"/>
-                </a:solidFill>
-                <a:latin typeface="Calibri"/>
-              </a:rPr>
-              <a:t>Example</a:t>
-            </a:r>
-          </a:p>
-        </p:txBody>
-      </p:sp>
-      <p:sp>
-        <p:nvSpPr>
-          <p:cNvPr id="5" name="Rectangle 4"/>
-          <p:cNvSpPr/>
-          <p:nvPr/>
-        </p:nvSpPr>
-        <p:spPr>
-          <a:xfrm>
-            <a:off x="2148840" y="960120"/>
-            <a:ext cx="2194560" cy="539495"/>
-          </a:xfrm>
-          <a:prstGeom prst="rect">
-            <a:avLst/>
-          </a:prstGeom>
-          <a:solidFill>
-            <a:srgbClr val="8E6F3E"/>
-          </a:solidFill>
-          <a:ln>
-            <a:noFill/>
-          </a:ln>
-          <a:effectLst/>
-        </p:spPr>
-        <p:style>
-          <a:lnRef idx="1">
-            <a:schemeClr val="accent1"/>
-          </a:lnRef>
-          <a:fillRef idx="3">
-            <a:schemeClr val="accent1"/>
-          </a:fillRef>
-          <a:effectRef idx="2">
-            <a:schemeClr val="accent1"/>
-          </a:effectRef>
-          <a:fontRef idx="minor">
-            <a:schemeClr val="lt1"/>
-          </a:fontRef>
-        </p:style>
-        <p:txBody>
-          <a:bodyPr wrap="square" lIns="45720" tIns="27432" rIns="45720" bIns="27432" rtlCol="0" anchor="ctr"/>
-          <a:lstStyle/>
-          <a:p>
-            <a:pPr algn="ctr">
-              <a:lnSpc>
-                <a:spcPct val="90000"/>
-              </a:lnSpc>
-            </a:pPr>
-            <a:r>
-              <a:rPr sz="2000" b="1" i="0">
-                <a:solidFill>
-                  <a:srgbClr val="FFFFFF"/>
-                </a:solidFill>
-                <a:latin typeface="Calibri"/>
-              </a:rPr>
-              <a:t>Meaning carried by</a:t>
-            </a:r>
-          </a:p>
-        </p:txBody>
-      </p:sp>
-      <p:sp>
-        <p:nvSpPr>
-          <p:cNvPr id="6" name="Rectangle 5"/>
-          <p:cNvSpPr/>
-          <p:nvPr/>
-        </p:nvSpPr>
-        <p:spPr>
-          <a:xfrm>
-            <a:off x="4343400" y="960120"/>
-            <a:ext cx="2194560" cy="539495"/>
-          </a:xfrm>
-          <a:prstGeom prst="rect">
-            <a:avLst/>
-          </a:prstGeom>
-          <a:solidFill>
-            <a:srgbClr val="8E6F3E"/>
-          </a:solidFill>
-          <a:ln>
-            <a:noFill/>
-          </a:ln>
-          <a:effectLst/>
-        </p:spPr>
-        <p:style>
-          <a:lnRef idx="1">
-            <a:schemeClr val="accent1"/>
-          </a:lnRef>
-          <a:fillRef idx="3">
-            <a:schemeClr val="accent1"/>
-          </a:fillRef>
-          <a:effectRef idx="2">
-            <a:schemeClr val="accent1"/>
-          </a:effectRef>
-          <a:fontRef idx="minor">
-            <a:schemeClr val="lt1"/>
-          </a:fontRef>
-        </p:style>
-        <p:txBody>
-          <a:bodyPr wrap="square" lIns="45720" tIns="27432" rIns="45720" bIns="27432" rtlCol="0" anchor="ctr"/>
-          <a:lstStyle/>
-          <a:p>
-            <a:pPr algn="ctr">
-              <a:lnSpc>
-                <a:spcPct val="90000"/>
-              </a:lnSpc>
-            </a:pPr>
-            <a:r>
-              <a:rPr sz="2000" b="1" i="0">
-                <a:solidFill>
-                  <a:srgbClr val="FFFFFF"/>
-                </a:solidFill>
-                <a:latin typeface="Calibri"/>
-              </a:rPr>
-              <a:t>Interpretation burden</a:t>
-            </a:r>
-          </a:p>
-        </p:txBody>
-      </p:sp>
-      <p:sp>
-        <p:nvSpPr>
-          <p:cNvPr id="7" name="Rectangle 6"/>
-          <p:cNvSpPr/>
-          <p:nvPr/>
-        </p:nvSpPr>
-        <p:spPr>
-          <a:xfrm>
-            <a:off x="6537960" y="960120"/>
-            <a:ext cx="2194560" cy="502920"/>
-          </a:xfrm>
-          <a:prstGeom prst="rect">
-            <a:avLst/>
-          </a:prstGeom>
-          <a:solidFill>
-            <a:srgbClr val="8E6F3E"/>
-          </a:solidFill>
-          <a:ln>
-            <a:noFill/>
-          </a:ln>
-          <a:effectLst/>
-        </p:spPr>
-        <p:style>
-          <a:lnRef idx="1">
-            <a:schemeClr val="accent1"/>
-          </a:lnRef>
-          <a:fillRef idx="3">
-            <a:schemeClr val="accent1"/>
-          </a:fillRef>
-          <a:effectRef idx="2">
-            <a:schemeClr val="accent1"/>
-          </a:effectRef>
-          <a:fontRef idx="minor">
-            <a:schemeClr val="lt1"/>
-          </a:fontRef>
-        </p:style>
-        <p:txBody>
-          <a:bodyPr wrap="square" lIns="45720" tIns="27432" rIns="45720" bIns="27432" rtlCol="0" anchor="ctr"/>
-          <a:lstStyle/>
-          <a:p>
-            <a:pPr algn="ctr">
-              <a:lnSpc>
-                <a:spcPct val="90000"/>
-              </a:lnSpc>
-            </a:pPr>
-            <a:r>
-              <a:rPr sz="2000" b="1" i="0">
-                <a:solidFill>
-                  <a:srgbClr val="FFFFFF"/>
-                </a:solidFill>
-                <a:latin typeface="Calibri"/>
-              </a:rPr>
-              <a:t>Enables</a:t>
-            </a:r>
-          </a:p>
-        </p:txBody>
-      </p:sp>
-      <p:sp>
-        <p:nvSpPr>
-          <p:cNvPr id="9" name="Rectangle 8"/>
-          <p:cNvSpPr/>
-          <p:nvPr/>
-        </p:nvSpPr>
-        <p:spPr>
-          <a:xfrm>
-            <a:off x="411480" y="1554480"/>
-            <a:ext cx="1737360" cy="960120"/>
-          </a:xfrm>
-          <a:prstGeom prst="rect">
-            <a:avLst/>
-          </a:prstGeom>
-          <a:solidFill>
-            <a:srgbClr val="F5F1E8"/>
-          </a:solidFill>
-          <a:ln w="6350">
-            <a:solidFill>
-              <a:srgbClr val="C9B991"/>
-            </a:solidFill>
-          </a:ln>
-          <a:effectLst/>
-        </p:spPr>
-        <p:style>
-          <a:lnRef idx="1">
-            <a:schemeClr val="accent1"/>
-          </a:lnRef>
-          <a:fillRef idx="3">
-            <a:schemeClr val="accent1"/>
-          </a:fillRef>
-          <a:effectRef idx="2">
-            <a:schemeClr val="accent1"/>
-          </a:effectRef>
-          <a:fontRef idx="minor">
-            <a:schemeClr val="lt1"/>
-          </a:fontRef>
-        </p:style>
-        <p:txBody>
-          <a:bodyPr wrap="square" lIns="64008" tIns="27432" rIns="64008" bIns="27432" rtlCol="0" anchor="ctr"/>
-          <a:lstStyle/>
-          <a:p>
-            <a:pPr algn="l">
-              <a:lnSpc>
-                <a:spcPct val="92000"/>
-              </a:lnSpc>
-            </a:pPr>
-            <a:r>
-              <a:rPr sz="2000" b="1" i="0">
-                <a:solidFill>
-                  <a:srgbClr val="5C4826"/>
-                </a:solidFill>
-                <a:latin typeface="Calibri"/>
-              </a:rPr>
-              <a:t>Informal sketch</a:t>
-            </a:r>
-          </a:p>
-        </p:txBody>
-      </p:sp>
-      <p:sp>
-        <p:nvSpPr>
-          <p:cNvPr id="10" name="Rectangle 9"/>
-          <p:cNvSpPr/>
-          <p:nvPr/>
-        </p:nvSpPr>
-        <p:spPr>
-          <a:xfrm>
-            <a:off x="2148840" y="1554480"/>
-            <a:ext cx="2194560" cy="960120"/>
-          </a:xfrm>
-          <a:prstGeom prst="rect">
-            <a:avLst/>
-          </a:prstGeom>
-          <a:solidFill>
-            <a:srgbClr val="F5F1E8"/>
-          </a:solidFill>
-          <a:ln w="6350">
-            <a:solidFill>
-              <a:srgbClr val="C9B991"/>
-            </a:solidFill>
-          </a:ln>
-          <a:effectLst/>
-        </p:spPr>
-        <p:style>
-          <a:lnRef idx="1">
-            <a:schemeClr val="accent1"/>
-          </a:lnRef>
-          <a:fillRef idx="3">
-            <a:schemeClr val="accent1"/>
-          </a:fillRef>
-          <a:effectRef idx="2">
-            <a:schemeClr val="accent1"/>
-          </a:effectRef>
-          <a:fontRef idx="minor">
-            <a:schemeClr val="lt1"/>
-          </a:fontRef>
-        </p:style>
-        <p:txBody>
-          <a:bodyPr wrap="square" lIns="64008" tIns="27432" rIns="64008" bIns="27432" rtlCol="0" anchor="ctr"/>
-          <a:lstStyle/>
-          <a:p>
-            <a:pPr algn="l">
-              <a:lnSpc>
-                <a:spcPct val="92000"/>
-              </a:lnSpc>
-            </a:pPr>
-            <a:r>
-              <a:rPr sz="2000" b="0" i="0">
-                <a:solidFill>
-                  <a:srgbClr val="353638"/>
-                </a:solidFill>
-                <a:latin typeface="Calibri"/>
-              </a:rPr>
-              <a:t>Team context</a:t>
-            </a:r>
-          </a:p>
-        </p:txBody>
-      </p:sp>
-      <p:sp>
-        <p:nvSpPr>
-          <p:cNvPr id="11" name="Rectangle 10"/>
-          <p:cNvSpPr/>
-          <p:nvPr/>
-        </p:nvSpPr>
-        <p:spPr>
-          <a:xfrm>
-            <a:off x="4343400" y="1554480"/>
-            <a:ext cx="2194560" cy="960120"/>
-          </a:xfrm>
-          <a:prstGeom prst="rect">
-            <a:avLst/>
-          </a:prstGeom>
-          <a:solidFill>
-            <a:srgbClr val="F5F1E8"/>
-          </a:solidFill>
-          <a:ln w="6350">
-            <a:solidFill>
-              <a:srgbClr val="C9B991"/>
-            </a:solidFill>
-          </a:ln>
-          <a:effectLst/>
-        </p:spPr>
-        <p:style>
-          <a:lnRef idx="1">
-            <a:schemeClr val="accent1"/>
-          </a:lnRef>
-          <a:fillRef idx="3">
-            <a:schemeClr val="accent1"/>
-          </a:fillRef>
-          <a:effectRef idx="2">
-            <a:schemeClr val="accent1"/>
-          </a:effectRef>
-          <a:fontRef idx="minor">
-            <a:schemeClr val="lt1"/>
-          </a:fontRef>
-        </p:style>
-        <p:txBody>
-          <a:bodyPr wrap="square" lIns="64008" tIns="27432" rIns="64008" bIns="27432" rtlCol="0" anchor="ctr"/>
-          <a:lstStyle/>
-          <a:p>
-            <a:pPr algn="l">
-              <a:lnSpc>
-                <a:spcPct val="92000"/>
-              </a:lnSpc>
-            </a:pPr>
-            <a:r>
-              <a:rPr sz="2000" b="0" i="0">
-                <a:solidFill>
-                  <a:srgbClr val="353638"/>
-                </a:solidFill>
-                <a:latin typeface="Calibri"/>
-              </a:rPr>
-              <a:t>Low if context is shared</a:t>
-            </a:r>
-          </a:p>
-        </p:txBody>
-      </p:sp>
-      <p:sp>
-        <p:nvSpPr>
-          <p:cNvPr id="12" name="Rectangle 11"/>
-          <p:cNvSpPr/>
-          <p:nvPr/>
-        </p:nvSpPr>
-        <p:spPr>
-          <a:xfrm>
-            <a:off x="6537960" y="1554480"/>
-            <a:ext cx="2194560" cy="960120"/>
-          </a:xfrm>
-          <a:prstGeom prst="rect">
-            <a:avLst/>
-          </a:prstGeom>
-          <a:solidFill>
-            <a:srgbClr val="F5F1E8"/>
-          </a:solidFill>
-          <a:ln w="6350">
-            <a:solidFill>
-              <a:srgbClr val="C9B991"/>
-            </a:solidFill>
-          </a:ln>
-          <a:effectLst/>
-        </p:spPr>
-        <p:style>
-          <a:lnRef idx="1">
-            <a:schemeClr val="accent1"/>
-          </a:lnRef>
-          <a:fillRef idx="3">
-            <a:schemeClr val="accent1"/>
-          </a:fillRef>
-          <a:effectRef idx="2">
-            <a:schemeClr val="accent1"/>
-          </a:effectRef>
-          <a:fontRef idx="minor">
-            <a:schemeClr val="lt1"/>
-          </a:fontRef>
-        </p:style>
-        <p:txBody>
-          <a:bodyPr wrap="square" lIns="64008" tIns="27432" rIns="64008" bIns="27432" rtlCol="0" anchor="ctr"/>
-          <a:lstStyle/>
-          <a:p>
-            <a:pPr algn="l">
-              <a:lnSpc>
-                <a:spcPct val="92000"/>
-              </a:lnSpc>
-            </a:pPr>
-            <a:r>
-              <a:rPr sz="2000" b="0" i="0">
-                <a:solidFill>
-                  <a:srgbClr val="353638"/>
-                </a:solidFill>
-                <a:latin typeface="Calibri"/>
-              </a:rPr>
-              <a:t>Fast communication</a:t>
-            </a:r>
-          </a:p>
-        </p:txBody>
-      </p:sp>
-      <p:sp>
-        <p:nvSpPr>
-          <p:cNvPr id="14" name="Rectangle 13"/>
-          <p:cNvSpPr/>
-          <p:nvPr/>
-        </p:nvSpPr>
-        <p:spPr>
-          <a:xfrm>
-            <a:off x="411480" y="2560320"/>
-            <a:ext cx="1737360" cy="960120"/>
-          </a:xfrm>
-          <a:prstGeom prst="rect">
-            <a:avLst/>
-          </a:prstGeom>
-          <a:solidFill>
-            <a:srgbClr val="FBF8F2"/>
-          </a:solidFill>
-          <a:ln w="6350">
-            <a:solidFill>
-              <a:srgbClr val="C9B991"/>
-            </a:solidFill>
-          </a:ln>
-          <a:effectLst/>
-        </p:spPr>
-        <p:style>
-          <a:lnRef idx="1">
-            <a:schemeClr val="accent1"/>
-          </a:lnRef>
-          <a:fillRef idx="3">
-            <a:schemeClr val="accent1"/>
-          </a:fillRef>
-          <a:effectRef idx="2">
-            <a:schemeClr val="accent1"/>
-          </a:effectRef>
-          <a:fontRef idx="minor">
-            <a:schemeClr val="lt1"/>
-          </a:fontRef>
-        </p:style>
-        <p:txBody>
-          <a:bodyPr wrap="square" lIns="64008" tIns="27432" rIns="64008" bIns="27432" rtlCol="0" anchor="ctr"/>
-          <a:lstStyle/>
-          <a:p>
-            <a:pPr algn="l">
-              <a:lnSpc>
-                <a:spcPct val="92000"/>
-              </a:lnSpc>
-            </a:pPr>
-            <a:r>
-              <a:rPr sz="2000" b="1" i="0">
-                <a:solidFill>
-                  <a:srgbClr val="5C4826"/>
-                </a:solidFill>
-                <a:latin typeface="Calibri"/>
-              </a:rPr>
-              <a:t>UML 2.5.1</a:t>
-            </a:r>
-          </a:p>
-        </p:txBody>
-      </p:sp>
-      <p:sp>
-        <p:nvSpPr>
-          <p:cNvPr id="15" name="Rectangle 14"/>
-          <p:cNvSpPr/>
-          <p:nvPr/>
-        </p:nvSpPr>
-        <p:spPr>
-          <a:xfrm>
-            <a:off x="2148840" y="2560320"/>
-            <a:ext cx="2194560" cy="960120"/>
-          </a:xfrm>
-          <a:prstGeom prst="rect">
-            <a:avLst/>
-          </a:prstGeom>
-          <a:solidFill>
-            <a:srgbClr val="FBF8F2"/>
-          </a:solidFill>
-          <a:ln w="6350">
-            <a:solidFill>
-              <a:srgbClr val="C9B991"/>
-            </a:solidFill>
-          </a:ln>
-          <a:effectLst/>
-        </p:spPr>
-        <p:style>
-          <a:lnRef idx="1">
-            <a:schemeClr val="accent1"/>
-          </a:lnRef>
-          <a:fillRef idx="3">
-            <a:schemeClr val="accent1"/>
-          </a:fillRef>
-          <a:effectRef idx="2">
-            <a:schemeClr val="accent1"/>
-          </a:effectRef>
-          <a:fontRef idx="minor">
-            <a:schemeClr val="lt1"/>
-          </a:fontRef>
-        </p:style>
-        <p:txBody>
-          <a:bodyPr wrap="square" lIns="64008" tIns="27432" rIns="64008" bIns="27432" rtlCol="0" anchor="ctr"/>
-          <a:lstStyle/>
-          <a:p>
-            <a:pPr algn="l">
-              <a:lnSpc>
-                <a:spcPct val="92000"/>
-              </a:lnSpc>
-            </a:pPr>
-            <a:r>
-              <a:rPr sz="2000" b="0" i="0">
-                <a:solidFill>
-                  <a:srgbClr val="353638"/>
-                </a:solidFill>
-                <a:latin typeface="Calibri"/>
-              </a:rPr>
-              <a:t>Standardized elements + relations</a:t>
-            </a:r>
-          </a:p>
-        </p:txBody>
-      </p:sp>
-      <p:sp>
-        <p:nvSpPr>
-          <p:cNvPr id="16" name="Rectangle 15"/>
-          <p:cNvSpPr/>
-          <p:nvPr/>
-        </p:nvSpPr>
-        <p:spPr>
-          <a:xfrm>
-            <a:off x="4343400" y="2560320"/>
-            <a:ext cx="2194560" cy="960120"/>
-          </a:xfrm>
-          <a:prstGeom prst="rect">
-            <a:avLst/>
-          </a:prstGeom>
-          <a:solidFill>
-            <a:srgbClr val="FBF8F2"/>
-          </a:solidFill>
-          <a:ln w="6350">
-            <a:solidFill>
-              <a:srgbClr val="C9B991"/>
-            </a:solidFill>
-          </a:ln>
-          <a:effectLst/>
-        </p:spPr>
-        <p:style>
-          <a:lnRef idx="1">
-            <a:schemeClr val="accent1"/>
-          </a:lnRef>
-          <a:fillRef idx="3">
-            <a:schemeClr val="accent1"/>
-          </a:fillRef>
-          <a:effectRef idx="2">
-            <a:schemeClr val="accent1"/>
-          </a:effectRef>
-          <a:fontRef idx="minor">
-            <a:schemeClr val="lt1"/>
-          </a:fontRef>
-        </p:style>
-        <p:txBody>
-          <a:bodyPr wrap="square" lIns="64008" tIns="27432" rIns="64008" bIns="27432" rtlCol="0" anchor="ctr"/>
-          <a:lstStyle/>
-          <a:p>
-            <a:pPr algn="l">
-              <a:lnSpc>
-                <a:spcPct val="92000"/>
-              </a:lnSpc>
-            </a:pPr>
-            <a:r>
-              <a:rPr sz="2000" b="0" i="0">
-                <a:solidFill>
-                  <a:srgbClr val="353638"/>
-                </a:solidFill>
-                <a:latin typeface="Calibri"/>
-              </a:rPr>
-              <a:t>Notation + project context</a:t>
-            </a:r>
-          </a:p>
-        </p:txBody>
-      </p:sp>
-      <p:sp>
-        <p:nvSpPr>
-          <p:cNvPr id="17" name="Rectangle 16"/>
-          <p:cNvSpPr/>
-          <p:nvPr/>
-        </p:nvSpPr>
-        <p:spPr>
-          <a:xfrm>
-            <a:off x="6537960" y="2560320"/>
-            <a:ext cx="2194560" cy="960120"/>
-          </a:xfrm>
-          <a:prstGeom prst="rect">
-            <a:avLst/>
-          </a:prstGeom>
-          <a:solidFill>
-            <a:srgbClr val="FBF8F2"/>
-          </a:solidFill>
-          <a:ln w="6350">
-            <a:solidFill>
-              <a:srgbClr val="C9B991"/>
-            </a:solidFill>
-          </a:ln>
-          <a:effectLst/>
-        </p:spPr>
-        <p:style>
-          <a:lnRef idx="1">
-            <a:schemeClr val="accent1"/>
-          </a:lnRef>
-          <a:fillRef idx="3">
-            <a:schemeClr val="accent1"/>
-          </a:fillRef>
-          <a:effectRef idx="2">
-            <a:schemeClr val="accent1"/>
-          </a:effectRef>
-          <a:fontRef idx="minor">
-            <a:schemeClr val="lt1"/>
-          </a:fontRef>
-        </p:style>
-        <p:txBody>
-          <a:bodyPr wrap="square" lIns="64008" tIns="27432" rIns="64008" bIns="27432" rtlCol="0" anchor="ctr"/>
-          <a:lstStyle/>
-          <a:p>
-            <a:pPr algn="l">
-              <a:lnSpc>
-                <a:spcPct val="92000"/>
-              </a:lnSpc>
-            </a:pPr>
-            <a:r>
-              <a:rPr sz="2000" b="0" i="0">
-                <a:solidFill>
-                  <a:srgbClr val="353638"/>
-                </a:solidFill>
-                <a:latin typeface="Calibri"/>
-              </a:rPr>
-              <a:t>Shared interpretation</a:t>
-            </a:r>
-          </a:p>
-        </p:txBody>
-      </p:sp>
-      <p:sp>
-        <p:nvSpPr>
-          <p:cNvPr id="19" name="Rectangle 18"/>
-          <p:cNvSpPr/>
-          <p:nvPr/>
-        </p:nvSpPr>
-        <p:spPr>
-          <a:xfrm>
-            <a:off x="411480" y="3566160"/>
-            <a:ext cx="1737360" cy="960120"/>
-          </a:xfrm>
-          <a:prstGeom prst="rect">
-            <a:avLst/>
-          </a:prstGeom>
-          <a:solidFill>
-            <a:srgbClr val="F5F1E8"/>
-          </a:solidFill>
-          <a:ln w="6350">
-            <a:solidFill>
-              <a:srgbClr val="C9B991"/>
-            </a:solidFill>
-          </a:ln>
-          <a:effectLst/>
-        </p:spPr>
-        <p:style>
-          <a:lnRef idx="1">
-            <a:schemeClr val="accent1"/>
-          </a:lnRef>
-          <a:fillRef idx="3">
-            <a:schemeClr val="accent1"/>
-          </a:fillRef>
-          <a:effectRef idx="2">
-            <a:schemeClr val="accent1"/>
-          </a:effectRef>
-          <a:fontRef idx="minor">
-            <a:schemeClr val="lt1"/>
-          </a:fontRef>
-        </p:style>
-        <p:txBody>
-          <a:bodyPr wrap="square" lIns="64008" tIns="27432" rIns="64008" bIns="27432" rtlCol="0" anchor="ctr"/>
-          <a:lstStyle/>
-          <a:p>
-            <a:pPr algn="l">
-              <a:lnSpc>
-                <a:spcPct val="92000"/>
-              </a:lnSpc>
-            </a:pPr>
-            <a:r>
-              <a:rPr sz="2000" b="1" i="0">
-                <a:solidFill>
-                  <a:srgbClr val="5C4826"/>
-                </a:solidFill>
-                <a:latin typeface="Calibri"/>
-              </a:rPr>
-              <a:t>OpenAPI / JSON Schema</a:t>
-            </a:r>
-          </a:p>
-        </p:txBody>
-      </p:sp>
-      <p:sp>
-        <p:nvSpPr>
-          <p:cNvPr id="20" name="Rectangle 19"/>
-          <p:cNvSpPr/>
-          <p:nvPr/>
-        </p:nvSpPr>
-        <p:spPr>
-          <a:xfrm>
-            <a:off x="2148840" y="3566160"/>
-            <a:ext cx="2194560" cy="960120"/>
-          </a:xfrm>
-          <a:prstGeom prst="rect">
-            <a:avLst/>
-          </a:prstGeom>
-          <a:solidFill>
-            <a:srgbClr val="F5F1E8"/>
-          </a:solidFill>
-          <a:ln w="6350">
-            <a:solidFill>
-              <a:srgbClr val="C9B991"/>
-            </a:solidFill>
-          </a:ln>
-          <a:effectLst/>
-        </p:spPr>
-        <p:style>
-          <a:lnRef idx="1">
-            <a:schemeClr val="accent1"/>
-          </a:lnRef>
-          <a:fillRef idx="3">
-            <a:schemeClr val="accent1"/>
-          </a:fillRef>
-          <a:effectRef idx="2">
-            <a:schemeClr val="accent1"/>
-          </a:effectRef>
-          <a:fontRef idx="minor">
-            <a:schemeClr val="lt1"/>
-          </a:fontRef>
-        </p:style>
-        <p:txBody>
-          <a:bodyPr wrap="square" lIns="64008" tIns="27432" rIns="64008" bIns="27432" rtlCol="0" anchor="ctr"/>
-          <a:lstStyle/>
-          <a:p>
-            <a:pPr algn="l">
-              <a:lnSpc>
-                <a:spcPct val="92000"/>
-              </a:lnSpc>
-            </a:pPr>
-            <a:r>
-              <a:rPr sz="2000" b="0" i="0">
-                <a:solidFill>
-                  <a:srgbClr val="353638"/>
-                </a:solidFill>
-                <a:latin typeface="Calibri"/>
-              </a:rPr>
-              <a:t>Machine-readable structure + constraints</a:t>
-            </a:r>
-          </a:p>
-        </p:txBody>
-      </p:sp>
-      <p:sp>
-        <p:nvSpPr>
-          <p:cNvPr id="21" name="Rectangle 20"/>
-          <p:cNvSpPr/>
-          <p:nvPr/>
-        </p:nvSpPr>
-        <p:spPr>
-          <a:xfrm>
-            <a:off x="4343400" y="3566160"/>
-            <a:ext cx="2194560" cy="960120"/>
-          </a:xfrm>
-          <a:prstGeom prst="rect">
-            <a:avLst/>
-          </a:prstGeom>
-          <a:solidFill>
-            <a:srgbClr val="F5F1E8"/>
-          </a:solidFill>
-          <a:ln w="6350">
-            <a:solidFill>
-              <a:srgbClr val="C9B991"/>
-            </a:solidFill>
-          </a:ln>
-          <a:effectLst/>
-        </p:spPr>
-        <p:style>
-          <a:lnRef idx="1">
-            <a:schemeClr val="accent1"/>
-          </a:lnRef>
-          <a:fillRef idx="3">
-            <a:schemeClr val="accent1"/>
-          </a:fillRef>
-          <a:effectRef idx="2">
-            <a:schemeClr val="accent1"/>
-          </a:effectRef>
-          <a:fontRef idx="minor">
-            <a:schemeClr val="lt1"/>
-          </a:fontRef>
-        </p:style>
-        <p:txBody>
-          <a:bodyPr wrap="square" lIns="64008" tIns="27432" rIns="64008" bIns="27432" rtlCol="0" anchor="ctr"/>
-          <a:lstStyle/>
-          <a:p>
-            <a:pPr algn="l">
-              <a:lnSpc>
-                <a:spcPct val="92000"/>
-              </a:lnSpc>
-            </a:pPr>
-            <a:r>
-              <a:rPr sz="2000" b="0" i="0">
-                <a:solidFill>
-                  <a:srgbClr val="353638"/>
-                </a:solidFill>
-                <a:latin typeface="Calibri"/>
-              </a:rPr>
-              <a:t>Domain intent remains contextual</a:t>
-            </a:r>
-          </a:p>
-        </p:txBody>
-      </p:sp>
-      <p:sp>
-        <p:nvSpPr>
-          <p:cNvPr id="22" name="Rectangle 21"/>
-          <p:cNvSpPr/>
-          <p:nvPr/>
-        </p:nvSpPr>
-        <p:spPr>
-          <a:xfrm>
-            <a:off x="6537960" y="3566160"/>
-            <a:ext cx="2194560" cy="960120"/>
-          </a:xfrm>
-          <a:prstGeom prst="rect">
-            <a:avLst/>
-          </a:prstGeom>
-          <a:solidFill>
-            <a:srgbClr val="F5F1E8"/>
-          </a:solidFill>
-          <a:ln w="6350">
-            <a:solidFill>
-              <a:srgbClr val="C9B991"/>
-            </a:solidFill>
-          </a:ln>
-          <a:effectLst/>
-        </p:spPr>
-        <p:style>
-          <a:lnRef idx="1">
-            <a:schemeClr val="accent1"/>
-          </a:lnRef>
-          <a:fillRef idx="3">
-            <a:schemeClr val="accent1"/>
-          </a:fillRef>
-          <a:effectRef idx="2">
-            <a:schemeClr val="accent1"/>
-          </a:effectRef>
-          <a:fontRef idx="minor">
-            <a:schemeClr val="lt1"/>
-          </a:fontRef>
-        </p:style>
-        <p:txBody>
-          <a:bodyPr wrap="square" lIns="64008" tIns="27432" rIns="64008" bIns="27432" rtlCol="0" anchor="ctr"/>
-          <a:lstStyle/>
-          <a:p>
-            <a:pPr algn="l">
-              <a:lnSpc>
-                <a:spcPct val="92000"/>
-              </a:lnSpc>
-            </a:pPr>
-            <a:r>
-              <a:rPr sz="2000" b="0" i="0">
-                <a:solidFill>
-                  <a:srgbClr val="353638"/>
-                </a:solidFill>
-                <a:latin typeface="Calibri"/>
-              </a:rPr>
-              <a:t>Validation + transformation</a:t>
-            </a:r>
-          </a:p>
-        </p:txBody>
-      </p:sp>
-      <p:sp>
-        <p:nvSpPr>
-          <p:cNvPr id="24" name="Rectangle 23"/>
-          <p:cNvSpPr/>
-          <p:nvPr/>
-        </p:nvSpPr>
-        <p:spPr>
-          <a:xfrm>
-            <a:off x="411480" y="4572000"/>
-            <a:ext cx="1737360" cy="914400"/>
-          </a:xfrm>
-          <a:prstGeom prst="rect">
-            <a:avLst/>
-          </a:prstGeom>
-          <a:solidFill>
-            <a:srgbClr val="FBF8F2"/>
-          </a:solidFill>
-          <a:ln w="6350">
-            <a:solidFill>
-              <a:srgbClr val="C9B991"/>
-            </a:solidFill>
-          </a:ln>
-          <a:effectLst/>
-        </p:spPr>
-        <p:style>
-          <a:lnRef idx="1">
-            <a:schemeClr val="accent1"/>
-          </a:lnRef>
-          <a:fillRef idx="3">
-            <a:schemeClr val="accent1"/>
-          </a:fillRef>
-          <a:effectRef idx="2">
-            <a:schemeClr val="accent1"/>
-          </a:effectRef>
-          <a:fontRef idx="minor">
-            <a:schemeClr val="lt1"/>
-          </a:fontRef>
-        </p:style>
-        <p:txBody>
-          <a:bodyPr wrap="square" lIns="64008" tIns="27432" rIns="64008" bIns="27432" rtlCol="0" anchor="ctr"/>
-          <a:lstStyle/>
-          <a:p>
-            <a:pPr algn="l">
-              <a:lnSpc>
-                <a:spcPct val="92000"/>
-              </a:lnSpc>
-            </a:pPr>
-            <a:r>
-              <a:rPr sz="2000" b="1" i="0">
-                <a:solidFill>
-                  <a:srgbClr val="5C4826"/>
-                </a:solidFill>
-                <a:latin typeface="Calibri"/>
-              </a:rPr>
-              <a:t>SysML v2 + KerML</a:t>
-            </a:r>
-          </a:p>
-        </p:txBody>
-      </p:sp>
-      <p:sp>
-        <p:nvSpPr>
-          <p:cNvPr id="25" name="Rectangle 24"/>
-          <p:cNvSpPr/>
-          <p:nvPr/>
-        </p:nvSpPr>
-        <p:spPr>
-          <a:xfrm>
-            <a:off x="2148840" y="4572000"/>
-            <a:ext cx="2194560" cy="914400"/>
-          </a:xfrm>
-          <a:prstGeom prst="rect">
-            <a:avLst/>
-          </a:prstGeom>
-          <a:solidFill>
-            <a:srgbClr val="FBF8F2"/>
-          </a:solidFill>
-          <a:ln w="6350">
-            <a:solidFill>
-              <a:srgbClr val="C9B991"/>
-            </a:solidFill>
-          </a:ln>
-          <a:effectLst/>
-        </p:spPr>
-        <p:style>
-          <a:lnRef idx="1">
-            <a:schemeClr val="accent1"/>
-          </a:lnRef>
-          <a:fillRef idx="3">
-            <a:schemeClr val="accent1"/>
-          </a:fillRef>
-          <a:effectRef idx="2">
-            <a:schemeClr val="accent1"/>
-          </a:effectRef>
-          <a:fontRef idx="minor">
-            <a:schemeClr val="lt1"/>
-          </a:fontRef>
-        </p:style>
-        <p:txBody>
-          <a:bodyPr wrap="square" lIns="64008" tIns="27432" rIns="64008" bIns="27432" rtlCol="0" anchor="ctr"/>
-          <a:lstStyle/>
-          <a:p>
-            <a:pPr algn="l">
-              <a:lnSpc>
-                <a:spcPct val="92000"/>
-              </a:lnSpc>
-            </a:pPr>
-            <a:r>
-              <a:rPr sz="2000" b="0" i="0">
-                <a:solidFill>
-                  <a:srgbClr val="353638"/>
-                </a:solidFill>
-                <a:latin typeface="Calibri"/>
-              </a:rPr>
-              <a:t>Language-defined semantics</a:t>
-            </a:r>
-          </a:p>
-        </p:txBody>
-      </p:sp>
-      <p:sp>
-        <p:nvSpPr>
-          <p:cNvPr id="26" name="Rectangle 25"/>
-          <p:cNvSpPr/>
-          <p:nvPr/>
-        </p:nvSpPr>
-        <p:spPr>
-          <a:xfrm>
-            <a:off x="4343400" y="4572000"/>
-            <a:ext cx="2194560" cy="914400"/>
-          </a:xfrm>
-          <a:prstGeom prst="rect">
-            <a:avLst/>
-          </a:prstGeom>
-          <a:solidFill>
-            <a:srgbClr val="FBF8F2"/>
-          </a:solidFill>
-          <a:ln w="6350">
-            <a:solidFill>
-              <a:srgbClr val="C9B991"/>
-            </a:solidFill>
-          </a:ln>
-          <a:effectLst/>
-        </p:spPr>
-        <p:style>
-          <a:lnRef idx="1">
-            <a:schemeClr val="accent1"/>
-          </a:lnRef>
-          <a:fillRef idx="3">
-            <a:schemeClr val="accent1"/>
-          </a:fillRef>
-          <a:effectRef idx="2">
-            <a:schemeClr val="accent1"/>
-          </a:effectRef>
-          <a:fontRef idx="minor">
-            <a:schemeClr val="lt1"/>
-          </a:fontRef>
-        </p:style>
-        <p:txBody>
-          <a:bodyPr wrap="square" lIns="64008" tIns="27432" rIns="64008" bIns="27432" rtlCol="0" anchor="ctr"/>
-          <a:lstStyle/>
-          <a:p>
-            <a:pPr algn="l">
-              <a:lnSpc>
-                <a:spcPct val="92000"/>
-              </a:lnSpc>
-            </a:pPr>
-            <a:r>
-              <a:rPr sz="2000" b="0" i="0">
-                <a:solidFill>
-                  <a:srgbClr val="353638"/>
-                </a:solidFill>
-                <a:latin typeface="Calibri"/>
-              </a:rPr>
-              <a:t>Language + tool knowledge</a:t>
-            </a:r>
-          </a:p>
-        </p:txBody>
-      </p:sp>
-      <p:sp>
-        <p:nvSpPr>
-          <p:cNvPr id="27" name="Rectangle 26"/>
-          <p:cNvSpPr/>
-          <p:nvPr/>
-        </p:nvSpPr>
-        <p:spPr>
-          <a:xfrm>
-            <a:off x="6537960" y="4572000"/>
-            <a:ext cx="2194560" cy="914400"/>
-          </a:xfrm>
-          <a:prstGeom prst="rect">
-            <a:avLst/>
-          </a:prstGeom>
-          <a:solidFill>
-            <a:srgbClr val="FBF8F2"/>
-          </a:solidFill>
-          <a:ln w="6350">
-            <a:solidFill>
-              <a:srgbClr val="C9B991"/>
-            </a:solidFill>
-          </a:ln>
-          <a:effectLst/>
-        </p:spPr>
-        <p:style>
-          <a:lnRef idx="1">
-            <a:schemeClr val="accent1"/>
-          </a:lnRef>
-          <a:fillRef idx="3">
-            <a:schemeClr val="accent1"/>
-          </a:fillRef>
-          <a:effectRef idx="2">
-            <a:schemeClr val="accent1"/>
-          </a:effectRef>
-          <a:fontRef idx="minor">
-            <a:schemeClr val="lt1"/>
-          </a:fontRef>
-        </p:style>
-        <p:txBody>
-          <a:bodyPr wrap="square" lIns="64008" tIns="27432" rIns="64008" bIns="27432" rtlCol="0" anchor="ctr"/>
-          <a:lstStyle/>
-          <a:p>
-            <a:pPr algn="l">
-              <a:lnSpc>
-                <a:spcPct val="92000"/>
-              </a:lnSpc>
-            </a:pPr>
-            <a:r>
-              <a:rPr sz="2000" b="0" i="0">
-                <a:solidFill>
-                  <a:srgbClr val="353638"/>
-                </a:solidFill>
-                <a:latin typeface="Calibri"/>
-              </a:rPr>
-              <a:t>Query + analysis + composition</a:t>
-            </a:r>
-          </a:p>
-        </p:txBody>
-      </p:sp>
-      <p:sp>
-        <p:nvSpPr>
-          <p:cNvPr id="29" name="TextBox 28"/>
-          <p:cNvSpPr txBox="1"/>
-          <p:nvPr/>
-        </p:nvSpPr>
-        <p:spPr>
-          <a:xfrm>
-            <a:off x="411480" y="5623560"/>
-            <a:ext cx="8321040" cy="274320"/>
-          </a:xfrm>
-          <a:prstGeom prst="rect">
-            <a:avLst/>
-          </a:prstGeom>
-          <a:noFill/>
-        </p:spPr>
-        <p:txBody>
-          <a:bodyPr wrap="square" lIns="0" tIns="0" rIns="0" bIns="0" anchor="t">
-            <a:spAutoFit/>
-          </a:bodyPr>
-          <a:lstStyle/>
-          <a:p>
-            <a:pPr algn="l"/>
-            <a:r>
-              <a:rPr sz="2000" b="1" i="1">
-                <a:solidFill>
-                  <a:srgbClr val="5C4826"/>
-                </a:solidFill>
-                <a:latin typeface="Calibri"/>
-              </a:rPr>
-              <a:t>Semantic commitment does not determine realization freedom.</a:t>
-            </a:r>
-          </a:p>
-        </p:txBody>
-      </p:sp>
-      <p:sp>
-        <p:nvSpPr>
-          <p:cNvPr id="30" name="Rectangle 29"/>
-          <p:cNvSpPr/>
-          <p:nvPr/>
-        </p:nvSpPr>
-        <p:spPr>
-          <a:xfrm>
-            <a:off x="320040" y="6007607"/>
-            <a:ext cx="8503920" cy="557784"/>
-          </a:xfrm>
-          <a:prstGeom prst="rect">
-            <a:avLst/>
-          </a:prstGeom>
-          <a:solidFill>
-            <a:srgbClr val="8E6F3E"/>
-          </a:solidFill>
-          <a:ln>
-            <a:noFill/>
-          </a:ln>
-          <a:effectLst/>
-        </p:spPr>
-        <p:style>
-          <a:lnRef idx="1">
-            <a:schemeClr val="accent1"/>
-          </a:lnRef>
-          <a:fillRef idx="3">
-            <a:schemeClr val="accent1"/>
-          </a:fillRef>
-          <a:effectRef idx="2">
-            <a:schemeClr val="accent1"/>
-          </a:effectRef>
-          <a:fontRef idx="minor">
-            <a:schemeClr val="lt1"/>
-          </a:fontRef>
-        </p:style>
-        <p:txBody>
           <a:bodyPr wrap="square" lIns="54864" tIns="27432" rIns="54864" bIns="27432" rtlCol="0" anchor="ctr"/>
           <a:lstStyle/>
           <a:p>
@@ -30347,6 +28929,464 @@
           </a:prstGeom>
         </p:spPr>
       </p:pic>
+      <p:graphicFrame>
+        <p:nvGraphicFramePr>
+          <p:cNvPr id="33" name="Table 32"/>
+          <p:cNvGraphicFramePr>
+            <a:graphicFrameLocks noGrp="1"/>
+          </p:cNvGraphicFramePr>
+          <p:nvPr/>
+        </p:nvGraphicFramePr>
+        <p:xfrm>
+          <a:off x="411480" y="960120"/>
+          <a:ext cx="8321040" cy="4498848"/>
+        </p:xfrm>
+        <a:graphic>
+          <a:graphicData uri="http://schemas.openxmlformats.org/drawingml/2006/table">
+            <a:tbl>
+              <a:tblPr firstRow="1">
+                <a:tableStyleId>{5C22544A-7EE6-4342-B048-85BDC9FD1C3A}</a:tableStyleId>
+              </a:tblPr>
+              <a:tblGrid>
+                <a:gridCol w="1737360"/>
+                <a:gridCol w="2194560"/>
+                <a:gridCol w="2194560"/>
+                <a:gridCol w="2194560"/>
+              </a:tblGrid>
+              <a:tr h="548640">
+                <a:tc>
+                  <a:txBody>
+                    <a:bodyPr/>
+                    <a:lstStyle/>
+                    <a:p>
+                      <a:r>
+                        <a:rPr sz="1800" b="1">
+                          <a:solidFill>
+                            <a:srgbClr val="FFFFFF"/>
+                          </a:solidFill>
+                        </a:rPr>
+                        <a:t>Example</a:t>
+                      </a:r>
+                    </a:p>
+                  </a:txBody>
+                  <a:tcPr anchor="ctr" marL="118872" marR="82296" marT="54864" marB="54864">
+                    <a:solidFill>
+                      <a:srgbClr val="8E6F3E"/>
+                    </a:solidFill>
+                  </a:tcPr>
+                </a:tc>
+                <a:tc>
+                  <a:txBody>
+                    <a:bodyPr/>
+                    <a:lstStyle/>
+                    <a:p>
+                      <a:r>
+                        <a:rPr sz="1800" b="1">
+                          <a:solidFill>
+                            <a:srgbClr val="FFFFFF"/>
+                          </a:solidFill>
+                        </a:rPr>
+                        <a:t>Meaning carried by</a:t>
+                      </a:r>
+                    </a:p>
+                  </a:txBody>
+                  <a:tcPr anchor="ctr" marL="118872" marR="82296" marT="54864" marB="54864">
+                    <a:solidFill>
+                      <a:srgbClr val="8E6F3E"/>
+                    </a:solidFill>
+                  </a:tcPr>
+                </a:tc>
+                <a:tc>
+                  <a:txBody>
+                    <a:bodyPr/>
+                    <a:lstStyle/>
+                    <a:p>
+                      <a:r>
+                        <a:rPr sz="1800" b="1">
+                          <a:solidFill>
+                            <a:srgbClr val="FFFFFF"/>
+                          </a:solidFill>
+                        </a:rPr>
+                        <a:t>Interpretation burden</a:t>
+                      </a:r>
+                    </a:p>
+                  </a:txBody>
+                  <a:tcPr anchor="ctr" marL="118872" marR="82296" marT="54864" marB="54864">
+                    <a:solidFill>
+                      <a:srgbClr val="8E6F3E"/>
+                    </a:solidFill>
+                  </a:tcPr>
+                </a:tc>
+                <a:tc>
+                  <a:txBody>
+                    <a:bodyPr/>
+                    <a:lstStyle/>
+                    <a:p>
+                      <a:r>
+                        <a:rPr sz="1800" b="1">
+                          <a:solidFill>
+                            <a:srgbClr val="FFFFFF"/>
+                          </a:solidFill>
+                        </a:rPr>
+                        <a:t>Enables</a:t>
+                      </a:r>
+                    </a:p>
+                  </a:txBody>
+                  <a:tcPr anchor="ctr" marL="118872" marR="82296" marT="54864" marB="54864">
+                    <a:solidFill>
+                      <a:srgbClr val="8E6F3E"/>
+                    </a:solidFill>
+                  </a:tcPr>
+                </a:tc>
+              </a:tr>
+              <a:tr h="987552">
+                <a:tc>
+                  <a:txBody>
+                    <a:bodyPr/>
+                    <a:lstStyle/>
+                    <a:p>
+                      <a:r>
+                        <a:rPr sz="1800" b="1">
+                          <a:solidFill>
+                            <a:srgbClr val="8E6F3E"/>
+                          </a:solidFill>
+                        </a:rPr>
+                        <a:t>Informal sketch</a:t>
+                      </a:r>
+                    </a:p>
+                  </a:txBody>
+                  <a:tcPr anchor="ctr" marL="118872" marR="82296" marT="54864" marB="54864">
+                    <a:solidFill>
+                      <a:srgbClr val="F7F3EC"/>
+                    </a:solidFill>
+                  </a:tcPr>
+                </a:tc>
+                <a:tc>
+                  <a:txBody>
+                    <a:bodyPr/>
+                    <a:lstStyle/>
+                    <a:p>
+                      <a:r>
+                        <a:rPr sz="1800" b="0">
+                          <a:solidFill>
+                            <a:srgbClr val="353638"/>
+                          </a:solidFill>
+                        </a:rPr>
+                        <a:t>Team context</a:t>
+                      </a:r>
+                    </a:p>
+                  </a:txBody>
+                  <a:tcPr anchor="ctr" marL="118872" marR="82296" marT="54864" marB="54864">
+                    <a:solidFill>
+                      <a:srgbClr val="F7F3EC"/>
+                    </a:solidFill>
+                  </a:tcPr>
+                </a:tc>
+                <a:tc>
+                  <a:txBody>
+                    <a:bodyPr/>
+                    <a:lstStyle/>
+                    <a:p>
+                      <a:r>
+                        <a:rPr sz="1800" b="0">
+                          <a:solidFill>
+                            <a:srgbClr val="353638"/>
+                          </a:solidFill>
+                        </a:rPr>
+                        <a:t>Low if context is shared</a:t>
+                      </a:r>
+                    </a:p>
+                  </a:txBody>
+                  <a:tcPr anchor="ctr" marL="118872" marR="82296" marT="54864" marB="54864">
+                    <a:solidFill>
+                      <a:srgbClr val="F7F3EC"/>
+                    </a:solidFill>
+                  </a:tcPr>
+                </a:tc>
+                <a:tc>
+                  <a:txBody>
+                    <a:bodyPr/>
+                    <a:lstStyle/>
+                    <a:p>
+                      <a:r>
+                        <a:rPr sz="1800" b="0">
+                          <a:solidFill>
+                            <a:srgbClr val="353638"/>
+                          </a:solidFill>
+                        </a:rPr>
+                        <a:t>Fast communication</a:t>
+                      </a:r>
+                    </a:p>
+                  </a:txBody>
+                  <a:tcPr anchor="ctr" marL="118872" marR="82296" marT="54864" marB="54864">
+                    <a:solidFill>
+                      <a:srgbClr val="F7F3EC"/>
+                    </a:solidFill>
+                  </a:tcPr>
+                </a:tc>
+              </a:tr>
+              <a:tr h="987552">
+                <a:tc>
+                  <a:txBody>
+                    <a:bodyPr/>
+                    <a:lstStyle/>
+                    <a:p>
+                      <a:r>
+                        <a:rPr sz="1800" b="1">
+                          <a:solidFill>
+                            <a:srgbClr val="8E6F3E"/>
+                          </a:solidFill>
+                        </a:rPr>
+                        <a:t>UML 2.5.1</a:t>
+                      </a:r>
+                    </a:p>
+                  </a:txBody>
+                  <a:tcPr anchor="ctr" marL="118872" marR="82296" marT="54864" marB="54864">
+                    <a:solidFill>
+                      <a:srgbClr val="F7F3EC"/>
+                    </a:solidFill>
+                  </a:tcPr>
+                </a:tc>
+                <a:tc>
+                  <a:txBody>
+                    <a:bodyPr/>
+                    <a:lstStyle/>
+                    <a:p>
+                      <a:r>
+                        <a:rPr sz="1800" b="0">
+                          <a:solidFill>
+                            <a:srgbClr val="353638"/>
+                          </a:solidFill>
+                        </a:rPr>
+                        <a:t>Standardized elements + relations</a:t>
+                      </a:r>
+                    </a:p>
+                  </a:txBody>
+                  <a:tcPr anchor="ctr" marL="118872" marR="82296" marT="54864" marB="54864">
+                    <a:solidFill>
+                      <a:srgbClr val="F7F3EC"/>
+                    </a:solidFill>
+                  </a:tcPr>
+                </a:tc>
+                <a:tc>
+                  <a:txBody>
+                    <a:bodyPr/>
+                    <a:lstStyle/>
+                    <a:p>
+                      <a:r>
+                        <a:rPr sz="1800" b="0">
+                          <a:solidFill>
+                            <a:srgbClr val="353638"/>
+                          </a:solidFill>
+                        </a:rPr>
+                        <a:t>Notation + project context</a:t>
+                      </a:r>
+                    </a:p>
+                  </a:txBody>
+                  <a:tcPr anchor="ctr" marL="118872" marR="82296" marT="54864" marB="54864">
+                    <a:solidFill>
+                      <a:srgbClr val="F7F3EC"/>
+                    </a:solidFill>
+                  </a:tcPr>
+                </a:tc>
+                <a:tc>
+                  <a:txBody>
+                    <a:bodyPr/>
+                    <a:lstStyle/>
+                    <a:p>
+                      <a:r>
+                        <a:rPr sz="1800" b="0">
+                          <a:solidFill>
+                            <a:srgbClr val="353638"/>
+                          </a:solidFill>
+                        </a:rPr>
+                        <a:t>Shared interpretation</a:t>
+                      </a:r>
+                    </a:p>
+                  </a:txBody>
+                  <a:tcPr anchor="ctr" marL="118872" marR="82296" marT="54864" marB="54864">
+                    <a:solidFill>
+                      <a:srgbClr val="F7F3EC"/>
+                    </a:solidFill>
+                  </a:tcPr>
+                </a:tc>
+              </a:tr>
+              <a:tr h="987552">
+                <a:tc>
+                  <a:txBody>
+                    <a:bodyPr/>
+                    <a:lstStyle/>
+                    <a:p>
+                      <a:r>
+                        <a:rPr sz="1800" b="1">
+                          <a:solidFill>
+                            <a:srgbClr val="8E6F3E"/>
+                          </a:solidFill>
+                        </a:rPr>
+                        <a:t>OpenAPI / JSON Schema</a:t>
+                      </a:r>
+                    </a:p>
+                  </a:txBody>
+                  <a:tcPr anchor="ctr" marL="118872" marR="82296" marT="54864" marB="54864">
+                    <a:solidFill>
+                      <a:srgbClr val="F7F3EC"/>
+                    </a:solidFill>
+                  </a:tcPr>
+                </a:tc>
+                <a:tc>
+                  <a:txBody>
+                    <a:bodyPr/>
+                    <a:lstStyle/>
+                    <a:p>
+                      <a:r>
+                        <a:rPr sz="1800" b="0">
+                          <a:solidFill>
+                            <a:srgbClr val="353638"/>
+                          </a:solidFill>
+                        </a:rPr>
+                        <a:t>Machine-readable structure + constraints</a:t>
+                      </a:r>
+                    </a:p>
+                  </a:txBody>
+                  <a:tcPr anchor="ctr" marL="118872" marR="82296" marT="54864" marB="54864">
+                    <a:solidFill>
+                      <a:srgbClr val="F7F3EC"/>
+                    </a:solidFill>
+                  </a:tcPr>
+                </a:tc>
+                <a:tc>
+                  <a:txBody>
+                    <a:bodyPr/>
+                    <a:lstStyle/>
+                    <a:p>
+                      <a:r>
+                        <a:rPr sz="1800" b="0">
+                          <a:solidFill>
+                            <a:srgbClr val="353638"/>
+                          </a:solidFill>
+                        </a:rPr>
+                        <a:t>Domain intent remains contextual</a:t>
+                      </a:r>
+                    </a:p>
+                  </a:txBody>
+                  <a:tcPr anchor="ctr" marL="118872" marR="82296" marT="54864" marB="54864">
+                    <a:solidFill>
+                      <a:srgbClr val="F7F3EC"/>
+                    </a:solidFill>
+                  </a:tcPr>
+                </a:tc>
+                <a:tc>
+                  <a:txBody>
+                    <a:bodyPr/>
+                    <a:lstStyle/>
+                    <a:p>
+                      <a:r>
+                        <a:rPr sz="1800" b="0">
+                          <a:solidFill>
+                            <a:srgbClr val="353638"/>
+                          </a:solidFill>
+                        </a:rPr>
+                        <a:t>Validation + transformation</a:t>
+                      </a:r>
+                    </a:p>
+                  </a:txBody>
+                  <a:tcPr anchor="ctr" marL="118872" marR="82296" marT="54864" marB="54864">
+                    <a:solidFill>
+                      <a:srgbClr val="F7F3EC"/>
+                    </a:solidFill>
+                  </a:tcPr>
+                </a:tc>
+              </a:tr>
+              <a:tr h="987552">
+                <a:tc>
+                  <a:txBody>
+                    <a:bodyPr/>
+                    <a:lstStyle/>
+                    <a:p>
+                      <a:r>
+                        <a:rPr sz="1800" b="1">
+                          <a:solidFill>
+                            <a:srgbClr val="8E6F3E"/>
+                          </a:solidFill>
+                        </a:rPr>
+                        <a:t>SysML v2 + KerML</a:t>
+                      </a:r>
+                    </a:p>
+                  </a:txBody>
+                  <a:tcPr anchor="ctr" marL="118872" marR="82296" marT="54864" marB="54864">
+                    <a:solidFill>
+                      <a:srgbClr val="F7F3EC"/>
+                    </a:solidFill>
+                  </a:tcPr>
+                </a:tc>
+                <a:tc>
+                  <a:txBody>
+                    <a:bodyPr/>
+                    <a:lstStyle/>
+                    <a:p>
+                      <a:r>
+                        <a:rPr sz="1800" b="0">
+                          <a:solidFill>
+                            <a:srgbClr val="353638"/>
+                          </a:solidFill>
+                        </a:rPr>
+                        <a:t>Language-defined semantics</a:t>
+                      </a:r>
+                    </a:p>
+                  </a:txBody>
+                  <a:tcPr anchor="ctr" marL="118872" marR="82296" marT="54864" marB="54864">
+                    <a:solidFill>
+                      <a:srgbClr val="F7F3EC"/>
+                    </a:solidFill>
+                  </a:tcPr>
+                </a:tc>
+                <a:tc>
+                  <a:txBody>
+                    <a:bodyPr/>
+                    <a:lstStyle/>
+                    <a:p>
+                      <a:r>
+                        <a:rPr sz="1800" b="0">
+                          <a:solidFill>
+                            <a:srgbClr val="353638"/>
+                          </a:solidFill>
+                        </a:rPr>
+                        <a:t>Language + tool knowledge</a:t>
+                      </a:r>
+                    </a:p>
+                  </a:txBody>
+                  <a:tcPr anchor="ctr" marL="118872" marR="82296" marT="54864" marB="54864">
+                    <a:solidFill>
+                      <a:srgbClr val="F7F3EC"/>
+                    </a:solidFill>
+                  </a:tcPr>
+                </a:tc>
+                <a:tc>
+                  <a:txBody>
+                    <a:bodyPr/>
+                    <a:lstStyle/>
+                    <a:p>
+                      <a:r>
+                        <a:rPr sz="1800" b="0">
+                          <a:solidFill>
+                            <a:srgbClr val="353638"/>
+                          </a:solidFill>
+                        </a:rPr>
+                        <a:t>Query + analysis + composition</a:t>
+                      </a:r>
+                    </a:p>
+                  </a:txBody>
+                  <a:tcPr anchor="ctr" marL="118872" marR="82296" marT="54864" marB="54864">
+                    <a:solidFill>
+                      <a:srgbClr val="F7F3EC"/>
+                    </a:solidFill>
+                  </a:tcPr>
+                </a:tc>
+              </a:tr>
+            </a:tbl>
+          </a:graphicData>
+        </a:graphic>
+      </p:graphicFrame>
     </p:spTree>
   </p:cSld>
   <p:clrMapOvr>

--- a/course/lectures/act-2-delegation-and-control/02-modeling/2-2-Modeling-2-Degrees-of-Semantic-Commitment.pptx
+++ b/course/lectures/act-2-delegation-and-control/02-modeling/2-2-Modeling-2-Degrees-of-Semantic-Commitment.pptx
@@ -19,6 +19,8 @@
     <p:sldId id="262" r:id="rId10"/>
     <p:sldId id="263" r:id="rId11"/>
     <p:sldId id="1292" r:id="rId12"/>
+    <p:sldId id="1294" r:id="rId34"/>
+    <p:sldId id="1295" r:id="rId35"/>
     <p:sldId id="264" r:id="rId13"/>
     <p:sldId id="265" r:id="rId14"/>
     <p:sldId id="266" r:id="rId15"/>
@@ -1860,6 +1862,143 @@
           </p:nvPr>
         </p:nvSpPr>
         <p:spPr/>
+      </p:sp>
+    </p:spTree>
+  </p:cSld>
+  <p:clrMapOvr>
+    <a:masterClrMapping/>
+  </p:clrMapOvr>
+</p:notes>
+</file>
+
+<file path=ppt/notesSlides/notesSlide27.xml><?xml version="1.0" encoding="utf-8"?>
+<p:notes xmlns:a="http://schemas.openxmlformats.org/drawingml/2006/main" xmlns:p="http://schemas.openxmlformats.org/presentationml/2006/main" xmlns:r="http://schemas.openxmlformats.org/officeDocument/2006/relationships">
+  <p:cSld>
+    <p:spTree>
+      <p:nvGrpSpPr>
+        <p:cNvPr id="1" name=""/>
+        <p:cNvGrpSpPr/>
+        <p:nvPr/>
+      </p:nvGrpSpPr>
+      <p:grpSpPr>
+        <a:xfrm>
+          <a:off x="0" y="0"/>
+          <a:ext cx="0" cy="0"/>
+          <a:chOff x="0" y="0"/>
+          <a:chExt cx="0" cy="0"/>
+        </a:xfrm>
+      </p:grpSpPr>
+      <p:sp>
+        <p:nvSpPr>
+          <p:cNvPr id="3" name="Notes Placeholder 2"/>
+          <p:cNvSpPr>
+            <a:spLocks noGrp="1"/>
+          </p:cNvSpPr>
+          <p:nvPr>
+            <p:ph type="body" sz="quarter" idx="3"/>
+          </p:nvPr>
+        </p:nvSpPr>
+        <p:spPr/>
+        <p:txBody>
+          <a:bodyPr/>
+          <a:lstStyle/>
+          <a:p>
+            <a:r>
+              <a:t>BUILDS (author these by hand in PowerPoint; shapes are named B1/B2/B3 by build group):</a:t>
+            </a:r>
+          </a:p>
+          <a:p>
+            <a:r>
+              <a:t>1. Informal column only. “Here's our sensor system. What can I learn?” Then: can I tell whether the buffer is large enough? No. Can I tell when the radio runs? No. Do NOT say “because semantics” — they should experience the limit first.</a:t>
+            </a:r>
+          </a:p>
+          <a:p>
+            <a:r>
+              <a:t>2. Resource model appears. “Same components. What did I add?” (quantities, units, typed meaning on relationships.) “What question became answerable?” -&gt; How much data can we buffer? Lecture-1 callback: “Did I need to tell you anything about Sleep, Sample or Transmit to answer that?” No. That is purposeful reduction.</a:t>
+            </a:r>
+          </a:p>
+          <a:p>
+            <a:r>
+              <a:t>3. Behavioral model appears. “Is this model more complete?” Someone may say yes — answer with a question: “Does it tell me the buffer capacity?” No. “So it isn't simply more complete. It preserves a DIFFERENT SET of distinctions.” Then “What can I ask now?” -&gt; When can the radio transmit?</a:t>
+            </a:r>
+          </a:p>
+          <a:p>
+            <a:r>
+              <a:t/>
+            </a:r>
+          </a:p>
+          <a:p>
+            <a:r>
+              <a:t>CLOSE: These aren't three stages on the way to the One True Model. They're three representations of the same system constructed for different engineering questions. The resource model knows things the behavioral model doesn't. The behavioral model knows things the resource model doesn't. That is purposeful reduction, now with explicit semantics.</a:t>
+            </a:r>
+          </a:p>
+        </p:txBody>
+      </p:sp>
+    </p:spTree>
+  </p:cSld>
+  <p:clrMapOvr>
+    <a:masterClrMapping/>
+  </p:clrMapOvr>
+</p:notes>
+</file>
+
+<file path=ppt/notesSlides/notesSlide28.xml><?xml version="1.0" encoding="utf-8"?>
+<p:notes xmlns:a="http://schemas.openxmlformats.org/drawingml/2006/main" xmlns:p="http://schemas.openxmlformats.org/presentationml/2006/main" xmlns:r="http://schemas.openxmlformats.org/officeDocument/2006/relationships">
+  <p:cSld>
+    <p:spTree>
+      <p:nvGrpSpPr>
+        <p:cNvPr id="1" name=""/>
+        <p:cNvGrpSpPr/>
+        <p:nvPr/>
+      </p:nvGrpSpPr>
+      <p:grpSpPr>
+        <a:xfrm>
+          <a:off x="0" y="0"/>
+          <a:ext cx="0" cy="0"/>
+          <a:chOff x="0" y="0"/>
+          <a:chExt cx="0" cy="0"/>
+        </a:xfrm>
+      </p:grpSpPr>
+      <p:sp>
+        <p:nvSpPr>
+          <p:cNvPr id="3" name="Notes Placeholder 2"/>
+          <p:cNvSpPr>
+            <a:spLocks noGrp="1"/>
+          </p:cNvSpPr>
+          <p:nvPr>
+            <p:ph type="body" sz="quarter" idx="3"/>
+          </p:nvPr>
+        </p:nvSpPr>
+        <p:spPr/>
+        <p:txBody>
+          <a:bodyPr/>
+          <a:lstStyle/>
+          <a:p>
+            <a:r>
+              <a:t>TEACHING MOVE: “Which model answers this?” Wait. Someone nominates the resource model (it has rates and capacity). Challenge: “It knows the sensor produces 512 bytes every five seconds and the radio can transmit 4096 bytes per second. Is that enough?” If needed: “What if the radio isn't transmitting?” Now point at the behavioral model: “Does THIS answer it?” No — it knows when things happen but lacks capacity/rate quantities. Then: “So do we need to throw these away and build one giant complete model?” NO. Animate the arrows from both models into COMPOSED REASONING.</a:t>
+            </a:r>
+          </a:p>
+          <a:p>
+            <a:r>
+              <a:t/>
+            </a:r>
+          </a:p>
+          <a:p>
+            <a:r>
+              <a:t>After establishing “neither”: Notice what just happened. Purposeful reduction gave us two useful models. Neither is defective. Each preserves the distinctions needed for a different question. Then: Our new question crosses their boundaries. Animate composition. If those meanings are explicit enough, we can compose them. We don't need every model to become a complete description. Callback: This is why stronger semantics matter. If these arrows and quantities mean whatever a reader happens to think they mean, composition is something the human does in their head. Once selected meanings are explicit, machinery can participate.</a:t>
+            </a:r>
+          </a:p>
+          <a:p>
+            <a:r>
+              <a:t/>
+            </a:r>
+          </a:p>
+          <a:p>
+            <a:r>
+              <a:t>Do NOT calculate the answer here — the optional SysML section does it properly later, including why the average-rate comparison is insufficient.</a:t>
+            </a:r>
+          </a:p>
+        </p:txBody>
       </p:sp>
     </p:spTree>
   </p:cSld>
@@ -23429,6 +23568,3697 @@
         </p:nvPicPr>
         <p:blipFill>
           <a:blip r:embed="rId3"/>
+          <a:stretch>
+            <a:fillRect/>
+          </a:stretch>
+        </p:blipFill>
+        <p:spPr>
+          <a:xfrm>
+            <a:off x="8759952" y="6638544"/>
+            <a:ext cx="325247" cy="173736"/>
+          </a:xfrm>
+          <a:prstGeom prst="rect">
+            <a:avLst/>
+          </a:prstGeom>
+        </p:spPr>
+      </p:pic>
+    </p:spTree>
+  </p:cSld>
+  <p:clrMapOvr>
+    <a:masterClrMapping/>
+  </p:clrMapOvr>
+</p:sld>
+</file>
+
+<file path=ppt/slides/slide27.xml><?xml version="1.0" encoding="utf-8"?>
+<p:sld xmlns:a="http://schemas.openxmlformats.org/drawingml/2006/main" xmlns:p="http://schemas.openxmlformats.org/presentationml/2006/main" xmlns:r="http://schemas.openxmlformats.org/officeDocument/2006/relationships">
+  <p:cSld>
+    <p:spTree>
+      <p:nvGrpSpPr>
+        <p:cNvPr id="1" name=""/>
+        <p:cNvGrpSpPr/>
+        <p:nvPr/>
+      </p:nvGrpSpPr>
+      <p:grpSpPr/>
+      <p:sp>
+        <p:nvSpPr>
+          <p:cNvPr id="2" name="Title"/>
+          <p:cNvSpPr txBox="1"/>
+          <p:nvPr/>
+        </p:nvSpPr>
+        <p:spPr>
+          <a:xfrm>
+            <a:off x="320040" y="201168"/>
+            <a:ext cx="8503920" cy="457200"/>
+          </a:xfrm>
+          <a:prstGeom prst="rect">
+            <a:avLst/>
+          </a:prstGeom>
+          <a:noFill/>
+        </p:spPr>
+        <p:txBody>
+          <a:bodyPr wrap="square" lIns="0" tIns="0" rIns="0" bIns="0" anchor="ctr">
+            <a:spAutoFit/>
+          </a:bodyPr>
+          <a:lstStyle/>
+          <a:p>
+            <a:pPr algn="l"/>
+            <a:r>
+              <a:rPr sz="2400" b="0" i="0" spc="140">
+                <a:solidFill>
+                  <a:srgbClr val="353638"/>
+                </a:solidFill>
+                <a:latin typeface="Calibri"/>
+              </a:rPr>
+              <a:t>Same system, different questions</a:t>
+            </a:r>
+          </a:p>
+        </p:txBody>
+      </p:sp>
+      <p:sp>
+        <p:nvSpPr>
+          <p:cNvPr id="3" name="Title rule"/>
+          <p:cNvSpPr/>
+          <p:nvPr/>
+        </p:nvSpPr>
+        <p:spPr>
+          <a:xfrm>
+            <a:off x="320040" y="731520"/>
+            <a:ext cx="8503920" cy="41148"/>
+          </a:xfrm>
+          <a:prstGeom prst="rect">
+            <a:avLst/>
+          </a:prstGeom>
+          <a:solidFill>
+            <a:srgbClr val="8E6F3E"/>
+          </a:solidFill>
+          <a:ln>
+            <a:noFill/>
+          </a:ln>
+          <a:effectLst/>
+        </p:spPr>
+        <p:style>
+          <a:lnRef idx="1">
+            <a:schemeClr val="accent1"/>
+          </a:lnRef>
+          <a:fillRef idx="3">
+            <a:schemeClr val="accent1"/>
+          </a:fillRef>
+          <a:effectRef idx="2">
+            <a:schemeClr val="accent1"/>
+          </a:effectRef>
+          <a:fontRef idx="minor">
+            <a:schemeClr val="lt1"/>
+          </a:fontRef>
+        </p:style>
+        <p:txBody>
+          <a:bodyPr wrap="square" lIns="54864" tIns="27432" rIns="54864" bIns="27432" rtlCol="0" anchor="ctr"/>
+          <a:lstStyle/>
+          <a:p>
+            <a:pPr algn="ctr"/>
+            <a:endParaRPr/>
+          </a:p>
+        </p:txBody>
+      </p:sp>
+      <p:sp>
+        <p:nvSpPr>
+          <p:cNvPr id="4" name="Footer takeaway"/>
+          <p:cNvSpPr/>
+          <p:nvPr/>
+        </p:nvSpPr>
+        <p:spPr>
+          <a:xfrm>
+            <a:off x="320040" y="6144768"/>
+            <a:ext cx="8503920" cy="420624"/>
+          </a:xfrm>
+          <a:prstGeom prst="rect">
+            <a:avLst/>
+          </a:prstGeom>
+          <a:solidFill>
+            <a:srgbClr val="8E6F3E"/>
+          </a:solidFill>
+          <a:ln>
+            <a:noFill/>
+          </a:ln>
+          <a:effectLst/>
+        </p:spPr>
+        <p:style>
+          <a:lnRef idx="1">
+            <a:schemeClr val="accent1"/>
+          </a:lnRef>
+          <a:fillRef idx="3">
+            <a:schemeClr val="accent1"/>
+          </a:fillRef>
+          <a:effectRef idx="2">
+            <a:schemeClr val="accent1"/>
+          </a:effectRef>
+          <a:fontRef idx="minor">
+            <a:schemeClr val="lt1"/>
+          </a:fontRef>
+        </p:style>
+        <p:txBody>
+          <a:bodyPr wrap="square" lIns="54864" tIns="27432" rIns="54864" bIns="27432" rtlCol="0" anchor="ctr"/>
+          <a:lstStyle/>
+          <a:p>
+            <a:pPr algn="ctr"/>
+            <a:r>
+              <a:rPr sz="1800" b="1" i="0">
+                <a:solidFill>
+                  <a:srgbClr val="FFFFFF"/>
+                </a:solidFill>
+                <a:latin typeface="Calibri"/>
+              </a:rPr>
+              <a:t>Same components. Different distinctions. Different questions become answerable.</a:t>
+            </a:r>
+          </a:p>
+        </p:txBody>
+      </p:sp>
+      <p:sp>
+        <p:nvSpPr>
+          <p:cNvPr id="5" name="Page number"/>
+          <p:cNvSpPr txBox="1"/>
+          <p:nvPr/>
+        </p:nvSpPr>
+        <p:spPr>
+          <a:xfrm>
+            <a:off x="8229600" y="6647688"/>
+            <a:ext cx="457200" cy="228600"/>
+          </a:xfrm>
+          <a:prstGeom prst="rect">
+            <a:avLst/>
+          </a:prstGeom>
+          <a:noFill/>
+        </p:spPr>
+        <p:txBody>
+          <a:bodyPr wrap="square" lIns="0" tIns="0" rIns="0" bIns="0" anchor="t">
+            <a:spAutoFit/>
+          </a:bodyPr>
+          <a:lstStyle/>
+          <a:p>
+            <a:pPr algn="r"/>
+            <a:r>
+              <a:rPr sz="900" b="0" i="0">
+                <a:solidFill>
+                  <a:srgbClr val="555960"/>
+                </a:solidFill>
+                <a:latin typeface="Calibri"/>
+              </a:rPr>
+              <a:t>11</a:t>
+            </a:r>
+          </a:p>
+        </p:txBody>
+      </p:sp>
+      <p:sp>
+        <p:nvSpPr>
+          <p:cNvPr id="6" name="Header INFORMAL SKETCH"/>
+          <p:cNvSpPr txBox="1"/>
+          <p:nvPr/>
+        </p:nvSpPr>
+        <p:spPr>
+          <a:xfrm>
+            <a:off x="320040" y="888000"/>
+            <a:ext cx="2286000" cy="274320"/>
+          </a:xfrm>
+          <a:prstGeom prst="rect">
+            <a:avLst/>
+          </a:prstGeom>
+          <a:noFill/>
+        </p:spPr>
+        <p:txBody>
+          <a:bodyPr wrap="square" lIns="0" tIns="0" rIns="0" bIns="0" anchor="t">
+            <a:spAutoFit/>
+          </a:bodyPr>
+          <a:lstStyle/>
+          <a:p>
+            <a:pPr algn="ctr"/>
+            <a:r>
+              <a:rPr sz="1800" b="1" i="0" spc="100">
+                <a:solidFill>
+                  <a:srgbClr val="8E6F3E"/>
+                </a:solidFill>
+                <a:latin typeface="Calibri"/>
+              </a:rPr>
+              <a:t>INFORMAL SKETCH</a:t>
+            </a:r>
+          </a:p>
+        </p:txBody>
+      </p:sp>
+      <p:sp>
+        <p:nvSpPr>
+          <p:cNvPr id="7" name="Header RESOURCE MODEL"/>
+          <p:cNvSpPr txBox="1"/>
+          <p:nvPr/>
+        </p:nvSpPr>
+        <p:spPr>
+          <a:xfrm>
+            <a:off x="2788920" y="888000"/>
+            <a:ext cx="2926080" cy="274320"/>
+          </a:xfrm>
+          <a:prstGeom prst="rect">
+            <a:avLst/>
+          </a:prstGeom>
+          <a:noFill/>
+        </p:spPr>
+        <p:txBody>
+          <a:bodyPr wrap="square" lIns="0" tIns="0" rIns="0" bIns="0" anchor="t">
+            <a:spAutoFit/>
+          </a:bodyPr>
+          <a:lstStyle/>
+          <a:p>
+            <a:pPr algn="ctr"/>
+            <a:r>
+              <a:rPr sz="1800" b="1" i="0" spc="100">
+                <a:solidFill>
+                  <a:srgbClr val="8E6F3E"/>
+                </a:solidFill>
+                <a:latin typeface="Calibri"/>
+              </a:rPr>
+              <a:t>RESOURCE MODEL</a:t>
+            </a:r>
+          </a:p>
+        </p:txBody>
+      </p:sp>
+      <p:sp>
+        <p:nvSpPr>
+          <p:cNvPr id="8" name="Header BEHAVIOR MODEL"/>
+          <p:cNvSpPr txBox="1"/>
+          <p:nvPr/>
+        </p:nvSpPr>
+        <p:spPr>
+          <a:xfrm>
+            <a:off x="5897880" y="888000"/>
+            <a:ext cx="2926080" cy="274320"/>
+          </a:xfrm>
+          <a:prstGeom prst="rect">
+            <a:avLst/>
+          </a:prstGeom>
+          <a:noFill/>
+        </p:spPr>
+        <p:txBody>
+          <a:bodyPr wrap="square" lIns="0" tIns="0" rIns="0" bIns="0" anchor="t">
+            <a:spAutoFit/>
+          </a:bodyPr>
+          <a:lstStyle/>
+          <a:p>
+            <a:pPr algn="ctr"/>
+            <a:r>
+              <a:rPr sz="1800" b="1" i="0" spc="100">
+                <a:solidFill>
+                  <a:srgbClr val="8E6F3E"/>
+                </a:solidFill>
+                <a:latin typeface="Calibri"/>
+              </a:rPr>
+              <a:t>BEHAVIOR MODEL</a:t>
+            </a:r>
+          </a:p>
+        </p:txBody>
+      </p:sp>
+      <p:sp>
+        <p:nvSpPr>
+          <p:cNvPr id="9" name="B1 Informal Sensor"/>
+          <p:cNvSpPr/>
+          <p:nvPr/>
+        </p:nvSpPr>
+        <p:spPr>
+          <a:xfrm>
+            <a:off x="685800" y="1280160"/>
+            <a:ext cx="1554480" cy="640080"/>
+          </a:xfrm>
+          <a:prstGeom prst="rect">
+            <a:avLst/>
+          </a:prstGeom>
+          <a:solidFill>
+            <a:srgbClr val="FFFFFF"/>
+          </a:solidFill>
+          <a:ln w="12700">
+            <a:solidFill>
+              <a:srgbClr val="555960"/>
+            </a:solidFill>
+          </a:ln>
+          <a:effectLst/>
+        </p:spPr>
+        <p:style>
+          <a:lnRef idx="1">
+            <a:schemeClr val="accent1"/>
+          </a:lnRef>
+          <a:fillRef idx="3">
+            <a:schemeClr val="accent1"/>
+          </a:fillRef>
+          <a:effectRef idx="2">
+            <a:schemeClr val="accent1"/>
+          </a:effectRef>
+          <a:fontRef idx="minor">
+            <a:schemeClr val="lt1"/>
+          </a:fontRef>
+        </p:style>
+        <p:txBody>
+          <a:bodyPr wrap="square" lIns="54864" tIns="27432" rIns="54864" bIns="27432" rtlCol="0" anchor="ctr"/>
+          <a:lstStyle/>
+          <a:p>
+            <a:pPr algn="ctr"/>
+            <a:r>
+              <a:rPr sz="2000" b="0" i="0">
+                <a:solidFill>
+                  <a:srgbClr val="353638"/>
+                </a:solidFill>
+                <a:latin typeface="Calibri"/>
+              </a:rPr>
+              <a:t>Sensor</a:t>
+            </a:r>
+          </a:p>
+        </p:txBody>
+      </p:sp>
+      <p:sp>
+        <p:nvSpPr>
+          <p:cNvPr id="10" name="B1 Informal Buffer"/>
+          <p:cNvSpPr/>
+          <p:nvPr/>
+        </p:nvSpPr>
+        <p:spPr>
+          <a:xfrm>
+            <a:off x="685800" y="2560320"/>
+            <a:ext cx="1554480" cy="640080"/>
+          </a:xfrm>
+          <a:prstGeom prst="rect">
+            <a:avLst/>
+          </a:prstGeom>
+          <a:solidFill>
+            <a:srgbClr val="FFFFFF"/>
+          </a:solidFill>
+          <a:ln w="12700">
+            <a:solidFill>
+              <a:srgbClr val="555960"/>
+            </a:solidFill>
+          </a:ln>
+          <a:effectLst/>
+        </p:spPr>
+        <p:style>
+          <a:lnRef idx="1">
+            <a:schemeClr val="accent1"/>
+          </a:lnRef>
+          <a:fillRef idx="3">
+            <a:schemeClr val="accent1"/>
+          </a:fillRef>
+          <a:effectRef idx="2">
+            <a:schemeClr val="accent1"/>
+          </a:effectRef>
+          <a:fontRef idx="minor">
+            <a:schemeClr val="lt1"/>
+          </a:fontRef>
+        </p:style>
+        <p:txBody>
+          <a:bodyPr wrap="square" lIns="54864" tIns="27432" rIns="54864" bIns="27432" rtlCol="0" anchor="ctr"/>
+          <a:lstStyle/>
+          <a:p>
+            <a:pPr algn="ctr"/>
+            <a:r>
+              <a:rPr sz="2000" b="0" i="0">
+                <a:solidFill>
+                  <a:srgbClr val="353638"/>
+                </a:solidFill>
+                <a:latin typeface="Calibri"/>
+              </a:rPr>
+              <a:t>Buffer</a:t>
+            </a:r>
+          </a:p>
+        </p:txBody>
+      </p:sp>
+      <p:sp>
+        <p:nvSpPr>
+          <p:cNvPr id="11" name="B1 Informal Radio"/>
+          <p:cNvSpPr/>
+          <p:nvPr/>
+        </p:nvSpPr>
+        <p:spPr>
+          <a:xfrm>
+            <a:off x="685800" y="3840480"/>
+            <a:ext cx="1554480" cy="640080"/>
+          </a:xfrm>
+          <a:prstGeom prst="rect">
+            <a:avLst/>
+          </a:prstGeom>
+          <a:solidFill>
+            <a:srgbClr val="FFFFFF"/>
+          </a:solidFill>
+          <a:ln w="12700">
+            <a:solidFill>
+              <a:srgbClr val="555960"/>
+            </a:solidFill>
+          </a:ln>
+          <a:effectLst/>
+        </p:spPr>
+        <p:style>
+          <a:lnRef idx="1">
+            <a:schemeClr val="accent1"/>
+          </a:lnRef>
+          <a:fillRef idx="3">
+            <a:schemeClr val="accent1"/>
+          </a:fillRef>
+          <a:effectRef idx="2">
+            <a:schemeClr val="accent1"/>
+          </a:effectRef>
+          <a:fontRef idx="minor">
+            <a:schemeClr val="lt1"/>
+          </a:fontRef>
+        </p:style>
+        <p:txBody>
+          <a:bodyPr wrap="square" lIns="54864" tIns="27432" rIns="54864" bIns="27432" rtlCol="0" anchor="ctr"/>
+          <a:lstStyle/>
+          <a:p>
+            <a:pPr algn="ctr"/>
+            <a:r>
+              <a:rPr sz="2000" b="0" i="0">
+                <a:solidFill>
+                  <a:srgbClr val="353638"/>
+                </a:solidFill>
+                <a:latin typeface="Calibri"/>
+              </a:rPr>
+              <a:t>Radio</a:t>
+            </a:r>
+          </a:p>
+        </p:txBody>
+      </p:sp>
+      <p:cxnSp>
+        <p:nvCxnSpPr>
+          <p:cNvPr id="12" name="B1 Informal arrow 1"/>
+          <p:cNvCxnSpPr/>
+          <p:nvPr/>
+        </p:nvCxnSpPr>
+        <p:spPr>
+          <a:xfrm>
+            <a:off x="1463040" y="1920240"/>
+            <a:ext cx="0" cy="640080"/>
+          </a:xfrm>
+          <a:prstGeom prst="line">
+            <a:avLst/>
+          </a:prstGeom>
+          <a:ln w="12700">
+            <a:solidFill>
+              <a:srgbClr val="555960"/>
+            </a:solidFill>
+            <a:tailEnd type="triangle" w="med" len="med"/>
+          </a:ln>
+          <a:effectLst/>
+        </p:spPr>
+        <p:style>
+          <a:lnRef idx="2">
+            <a:schemeClr val="accent1"/>
+          </a:lnRef>
+          <a:fillRef idx="0">
+            <a:schemeClr val="accent1"/>
+          </a:fillRef>
+          <a:effectRef idx="1">
+            <a:schemeClr val="accent1"/>
+          </a:effectRef>
+          <a:fontRef idx="minor">
+            <a:schemeClr val="tx1"/>
+          </a:fontRef>
+        </p:style>
+      </p:cxnSp>
+      <p:cxnSp>
+        <p:nvCxnSpPr>
+          <p:cNvPr id="13" name="B1 Informal arrow 2"/>
+          <p:cNvCxnSpPr/>
+          <p:nvPr/>
+        </p:nvCxnSpPr>
+        <p:spPr>
+          <a:xfrm>
+            <a:off x="1463040" y="3200400"/>
+            <a:ext cx="0" cy="640080"/>
+          </a:xfrm>
+          <a:prstGeom prst="line">
+            <a:avLst/>
+          </a:prstGeom>
+          <a:ln w="12700">
+            <a:solidFill>
+              <a:srgbClr val="555960"/>
+            </a:solidFill>
+            <a:tailEnd type="triangle" w="med" len="med"/>
+          </a:ln>
+          <a:effectLst/>
+        </p:spPr>
+        <p:style>
+          <a:lnRef idx="2">
+            <a:schemeClr val="accent1"/>
+          </a:lnRef>
+          <a:fillRef idx="0">
+            <a:schemeClr val="accent1"/>
+          </a:fillRef>
+          <a:effectRef idx="1">
+            <a:schemeClr val="accent1"/>
+          </a:effectRef>
+          <a:fontRef idx="minor">
+            <a:schemeClr val="tx1"/>
+          </a:fontRef>
+        </p:style>
+      </p:cxnSp>
+      <p:sp>
+        <p:nvSpPr>
+          <p:cNvPr id="14" name="B2 Resource Sensor"/>
+          <p:cNvSpPr/>
+          <p:nvPr/>
+        </p:nvSpPr>
+        <p:spPr>
+          <a:xfrm>
+            <a:off x="3474720" y="1280160"/>
+            <a:ext cx="1554480" cy="640080"/>
+          </a:xfrm>
+          <a:prstGeom prst="rect">
+            <a:avLst/>
+          </a:prstGeom>
+          <a:solidFill>
+            <a:srgbClr val="C9B991"/>
+          </a:solidFill>
+          <a:ln>
+            <a:noFill/>
+          </a:ln>
+          <a:effectLst/>
+        </p:spPr>
+        <p:style>
+          <a:lnRef idx="1">
+            <a:schemeClr val="accent1"/>
+          </a:lnRef>
+          <a:fillRef idx="3">
+            <a:schemeClr val="accent1"/>
+          </a:fillRef>
+          <a:effectRef idx="2">
+            <a:schemeClr val="accent1"/>
+          </a:effectRef>
+          <a:fontRef idx="minor">
+            <a:schemeClr val="lt1"/>
+          </a:fontRef>
+        </p:style>
+        <p:txBody>
+          <a:bodyPr wrap="square" lIns="54864" tIns="27432" rIns="54864" bIns="27432" rtlCol="0" anchor="ctr"/>
+          <a:lstStyle/>
+          <a:p>
+            <a:pPr algn="ctr"/>
+            <a:r>
+              <a:rPr sz="2000" b="1" i="0">
+                <a:solidFill>
+                  <a:srgbClr val="5C4826"/>
+                </a:solidFill>
+                <a:latin typeface="Calibri"/>
+              </a:rPr>
+              <a:t>Sensor</a:t>
+            </a:r>
+          </a:p>
+        </p:txBody>
+      </p:sp>
+      <p:sp>
+        <p:nvSpPr>
+          <p:cNvPr id="15" name="B2 Resource Buffer"/>
+          <p:cNvSpPr/>
+          <p:nvPr/>
+        </p:nvSpPr>
+        <p:spPr>
+          <a:xfrm>
+            <a:off x="3474720" y="2560320"/>
+            <a:ext cx="1554480" cy="640080"/>
+          </a:xfrm>
+          <a:prstGeom prst="rect">
+            <a:avLst/>
+          </a:prstGeom>
+          <a:solidFill>
+            <a:srgbClr val="C9B991"/>
+          </a:solidFill>
+          <a:ln>
+            <a:noFill/>
+          </a:ln>
+          <a:effectLst/>
+        </p:spPr>
+        <p:style>
+          <a:lnRef idx="1">
+            <a:schemeClr val="accent1"/>
+          </a:lnRef>
+          <a:fillRef idx="3">
+            <a:schemeClr val="accent1"/>
+          </a:fillRef>
+          <a:effectRef idx="2">
+            <a:schemeClr val="accent1"/>
+          </a:effectRef>
+          <a:fontRef idx="minor">
+            <a:schemeClr val="lt1"/>
+          </a:fontRef>
+        </p:style>
+        <p:txBody>
+          <a:bodyPr wrap="square" lIns="54864" tIns="27432" rIns="54864" bIns="27432" rtlCol="0" anchor="ctr"/>
+          <a:lstStyle/>
+          <a:p>
+            <a:pPr algn="ctr"/>
+            <a:r>
+              <a:rPr sz="2000" b="1" i="0">
+                <a:solidFill>
+                  <a:srgbClr val="5C4826"/>
+                </a:solidFill>
+                <a:latin typeface="Calibri"/>
+              </a:rPr>
+              <a:t>Buffer</a:t>
+            </a:r>
+          </a:p>
+          <a:p>
+            <a:pPr algn="ctr"/>
+            <a:r>
+              <a:rPr sz="1800" b="0" i="0">
+                <a:solidFill>
+                  <a:srgbClr val="5C4826"/>
+                </a:solidFill>
+                <a:latin typeface="Consolas"/>
+              </a:rPr>
+              <a:t>cap 4 KiB</a:t>
+            </a:r>
+          </a:p>
+        </p:txBody>
+      </p:sp>
+      <p:sp>
+        <p:nvSpPr>
+          <p:cNvPr id="16" name="B2 Resource Radio"/>
+          <p:cNvSpPr/>
+          <p:nvPr/>
+        </p:nvSpPr>
+        <p:spPr>
+          <a:xfrm>
+            <a:off x="3474720" y="3840480"/>
+            <a:ext cx="1554480" cy="640080"/>
+          </a:xfrm>
+          <a:prstGeom prst="rect">
+            <a:avLst/>
+          </a:prstGeom>
+          <a:solidFill>
+            <a:srgbClr val="C9B991"/>
+          </a:solidFill>
+          <a:ln>
+            <a:noFill/>
+          </a:ln>
+          <a:effectLst/>
+        </p:spPr>
+        <p:style>
+          <a:lnRef idx="1">
+            <a:schemeClr val="accent1"/>
+          </a:lnRef>
+          <a:fillRef idx="3">
+            <a:schemeClr val="accent1"/>
+          </a:fillRef>
+          <a:effectRef idx="2">
+            <a:schemeClr val="accent1"/>
+          </a:effectRef>
+          <a:fontRef idx="minor">
+            <a:schemeClr val="lt1"/>
+          </a:fontRef>
+        </p:style>
+        <p:txBody>
+          <a:bodyPr wrap="square" lIns="54864" tIns="27432" rIns="54864" bIns="27432" rtlCol="0" anchor="ctr"/>
+          <a:lstStyle/>
+          <a:p>
+            <a:pPr algn="ctr"/>
+            <a:r>
+              <a:rPr sz="2000" b="1" i="0">
+                <a:solidFill>
+                  <a:srgbClr val="5C4826"/>
+                </a:solidFill>
+                <a:latin typeface="Calibri"/>
+              </a:rPr>
+              <a:t>Radio</a:t>
+            </a:r>
+          </a:p>
+        </p:txBody>
+      </p:sp>
+      <p:cxnSp>
+        <p:nvCxnSpPr>
+          <p:cNvPr id="17" name="B2 Resource arrow 1"/>
+          <p:cNvCxnSpPr/>
+          <p:nvPr/>
+        </p:nvCxnSpPr>
+        <p:spPr>
+          <a:xfrm>
+            <a:off x="4251960" y="1920240"/>
+            <a:ext cx="0" cy="640080"/>
+          </a:xfrm>
+          <a:prstGeom prst="line">
+            <a:avLst/>
+          </a:prstGeom>
+          <a:ln w="19050">
+            <a:solidFill>
+              <a:srgbClr val="5C4826"/>
+            </a:solidFill>
+            <a:tailEnd type="triangle" w="med" len="med"/>
+          </a:ln>
+          <a:effectLst/>
+        </p:spPr>
+        <p:style>
+          <a:lnRef idx="2">
+            <a:schemeClr val="accent1"/>
+          </a:lnRef>
+          <a:fillRef idx="0">
+            <a:schemeClr val="accent1"/>
+          </a:fillRef>
+          <a:effectRef idx="1">
+            <a:schemeClr val="accent1"/>
+          </a:effectRef>
+          <a:fontRef idx="minor">
+            <a:schemeClr val="tx1"/>
+          </a:fontRef>
+        </p:style>
+      </p:cxnSp>
+      <p:cxnSp>
+        <p:nvCxnSpPr>
+          <p:cNvPr id="18" name="B2 Resource arrow 2"/>
+          <p:cNvCxnSpPr/>
+          <p:nvPr/>
+        </p:nvCxnSpPr>
+        <p:spPr>
+          <a:xfrm>
+            <a:off x="4251960" y="3200400"/>
+            <a:ext cx="0" cy="640080"/>
+          </a:xfrm>
+          <a:prstGeom prst="line">
+            <a:avLst/>
+          </a:prstGeom>
+          <a:ln w="19050">
+            <a:solidFill>
+              <a:srgbClr val="5C4826"/>
+            </a:solidFill>
+            <a:tailEnd type="triangle" w="med" len="med"/>
+          </a:ln>
+          <a:effectLst/>
+        </p:spPr>
+        <p:style>
+          <a:lnRef idx="2">
+            <a:schemeClr val="accent1"/>
+          </a:lnRef>
+          <a:fillRef idx="0">
+            <a:schemeClr val="accent1"/>
+          </a:fillRef>
+          <a:effectRef idx="1">
+            <a:schemeClr val="accent1"/>
+          </a:effectRef>
+          <a:fontRef idx="minor">
+            <a:schemeClr val="tx1"/>
+          </a:fontRef>
+        </p:style>
+      </p:cxnSp>
+      <p:sp>
+        <p:nvSpPr>
+          <p:cNvPr id="19" name="B2 Resource label produces"/>
+          <p:cNvSpPr txBox="1"/>
+          <p:nvPr/>
+        </p:nvSpPr>
+        <p:spPr>
+          <a:xfrm>
+            <a:off x="4321960" y="2010280"/>
+            <a:ext cx="1550000" cy="460000"/>
+          </a:xfrm>
+          <a:prstGeom prst="rect">
+            <a:avLst/>
+          </a:prstGeom>
+          <a:noFill/>
+        </p:spPr>
+        <p:txBody>
+          <a:bodyPr wrap="square" lIns="0" tIns="0" rIns="0" bIns="0" anchor="t">
+            <a:spAutoFit/>
+          </a:bodyPr>
+          <a:lstStyle/>
+          <a:p>
+            <a:pPr algn="l"/>
+            <a:r>
+              <a:rPr sz="1800" b="0" i="1">
+                <a:solidFill>
+                  <a:srgbClr val="555960"/>
+                </a:solidFill>
+                <a:latin typeface="Calibri"/>
+              </a:rPr>
+              <a:t>produces</a:t>
+            </a:r>
+          </a:p>
+          <a:p>
+            <a:pPr algn="l"/>
+            <a:r>
+              <a:rPr sz="1800" b="0" i="0">
+                <a:solidFill>
+                  <a:srgbClr val="353638"/>
+                </a:solidFill>
+                <a:latin typeface="Consolas"/>
+              </a:rPr>
+              <a:t>512 B / 5 s</a:t>
+            </a:r>
+          </a:p>
+        </p:txBody>
+      </p:sp>
+      <p:sp>
+        <p:nvSpPr>
+          <p:cNvPr id="20" name="B2 Resource label drained"/>
+          <p:cNvSpPr txBox="1"/>
+          <p:nvPr/>
+        </p:nvSpPr>
+        <p:spPr>
+          <a:xfrm>
+            <a:off x="4321960" y="3290440"/>
+            <a:ext cx="1550000" cy="460000"/>
+          </a:xfrm>
+          <a:prstGeom prst="rect">
+            <a:avLst/>
+          </a:prstGeom>
+          <a:noFill/>
+        </p:spPr>
+        <p:txBody>
+          <a:bodyPr wrap="square" lIns="0" tIns="0" rIns="0" bIns="0" anchor="t">
+            <a:spAutoFit/>
+          </a:bodyPr>
+          <a:lstStyle/>
+          <a:p>
+            <a:pPr algn="l"/>
+            <a:r>
+              <a:rPr sz="1800" b="0" i="1">
+                <a:solidFill>
+                  <a:srgbClr val="555960"/>
+                </a:solidFill>
+                <a:latin typeface="Calibri"/>
+              </a:rPr>
+              <a:t>drained by</a:t>
+            </a:r>
+          </a:p>
+          <a:p>
+            <a:pPr algn="l"/>
+            <a:r>
+              <a:rPr sz="1800" b="0" i="0">
+                <a:solidFill>
+                  <a:srgbClr val="353638"/>
+                </a:solidFill>
+                <a:latin typeface="Consolas"/>
+              </a:rPr>
+              <a:t>4096 B/s</a:t>
+            </a:r>
+          </a:p>
+        </p:txBody>
+      </p:sp>
+      <p:sp>
+        <p:nvSpPr>
+          <p:cNvPr id="21" name="B3 Behavior Sleep"/>
+          <p:cNvSpPr/>
+          <p:nvPr/>
+        </p:nvSpPr>
+        <p:spPr>
+          <a:xfrm>
+            <a:off x="6720840" y="1280160"/>
+            <a:ext cx="1280160" cy="640080"/>
+          </a:xfrm>
+          <a:prstGeom prst="rect">
+            <a:avLst/>
+          </a:prstGeom>
+          <a:solidFill>
+            <a:srgbClr val="FBF8F2"/>
+          </a:solidFill>
+          <a:ln w="15875">
+            <a:solidFill>
+              <a:srgbClr val="5C4826"/>
+            </a:solidFill>
+          </a:ln>
+          <a:effectLst/>
+        </p:spPr>
+        <p:style>
+          <a:lnRef idx="1">
+            <a:schemeClr val="accent1"/>
+          </a:lnRef>
+          <a:fillRef idx="3">
+            <a:schemeClr val="accent1"/>
+          </a:fillRef>
+          <a:effectRef idx="2">
+            <a:schemeClr val="accent1"/>
+          </a:effectRef>
+          <a:fontRef idx="minor">
+            <a:schemeClr val="lt1"/>
+          </a:fontRef>
+        </p:style>
+        <p:txBody>
+          <a:bodyPr wrap="square" lIns="54864" tIns="27432" rIns="54864" bIns="27432" rtlCol="0" anchor="ctr"/>
+          <a:lstStyle/>
+          <a:p>
+            <a:pPr algn="ctr"/>
+            <a:r>
+              <a:rPr sz="2000" b="1" i="0">
+                <a:solidFill>
+                  <a:srgbClr val="5C4826"/>
+                </a:solidFill>
+                <a:latin typeface="Calibri"/>
+              </a:rPr>
+              <a:t>Sleep</a:t>
+            </a:r>
+          </a:p>
+        </p:txBody>
+      </p:sp>
+      <p:sp>
+        <p:nvSpPr>
+          <p:cNvPr id="22" name="B3 Behavior Sample"/>
+          <p:cNvSpPr/>
+          <p:nvPr/>
+        </p:nvSpPr>
+        <p:spPr>
+          <a:xfrm>
+            <a:off x="6720840" y="2560320"/>
+            <a:ext cx="1280160" cy="640080"/>
+          </a:xfrm>
+          <a:prstGeom prst="rect">
+            <a:avLst/>
+          </a:prstGeom>
+          <a:solidFill>
+            <a:srgbClr val="FBF8F2"/>
+          </a:solidFill>
+          <a:ln w="15875">
+            <a:solidFill>
+              <a:srgbClr val="5C4826"/>
+            </a:solidFill>
+          </a:ln>
+          <a:effectLst/>
+        </p:spPr>
+        <p:style>
+          <a:lnRef idx="1">
+            <a:schemeClr val="accent1"/>
+          </a:lnRef>
+          <a:fillRef idx="3">
+            <a:schemeClr val="accent1"/>
+          </a:fillRef>
+          <a:effectRef idx="2">
+            <a:schemeClr val="accent1"/>
+          </a:effectRef>
+          <a:fontRef idx="minor">
+            <a:schemeClr val="lt1"/>
+          </a:fontRef>
+        </p:style>
+        <p:txBody>
+          <a:bodyPr wrap="square" lIns="54864" tIns="27432" rIns="54864" bIns="27432" rtlCol="0" anchor="ctr"/>
+          <a:lstStyle/>
+          <a:p>
+            <a:pPr algn="ctr"/>
+            <a:r>
+              <a:rPr sz="2000" b="1" i="0">
+                <a:solidFill>
+                  <a:srgbClr val="5C4826"/>
+                </a:solidFill>
+                <a:latin typeface="Calibri"/>
+              </a:rPr>
+              <a:t>Sample</a:t>
+            </a:r>
+          </a:p>
+        </p:txBody>
+      </p:sp>
+      <p:sp>
+        <p:nvSpPr>
+          <p:cNvPr id="23" name="B3 Behavior Transmit"/>
+          <p:cNvSpPr/>
+          <p:nvPr/>
+        </p:nvSpPr>
+        <p:spPr>
+          <a:xfrm>
+            <a:off x="6720840" y="3840480"/>
+            <a:ext cx="1280160" cy="640080"/>
+          </a:xfrm>
+          <a:prstGeom prst="rect">
+            <a:avLst/>
+          </a:prstGeom>
+          <a:solidFill>
+            <a:srgbClr val="8E6F3E"/>
+          </a:solidFill>
+          <a:ln>
+            <a:noFill/>
+          </a:ln>
+          <a:effectLst/>
+        </p:spPr>
+        <p:style>
+          <a:lnRef idx="1">
+            <a:schemeClr val="accent1"/>
+          </a:lnRef>
+          <a:fillRef idx="3">
+            <a:schemeClr val="accent1"/>
+          </a:fillRef>
+          <a:effectRef idx="2">
+            <a:schemeClr val="accent1"/>
+          </a:effectRef>
+          <a:fontRef idx="minor">
+            <a:schemeClr val="lt1"/>
+          </a:fontRef>
+        </p:style>
+        <p:txBody>
+          <a:bodyPr wrap="square" lIns="54864" tIns="27432" rIns="54864" bIns="27432" rtlCol="0" anchor="ctr"/>
+          <a:lstStyle/>
+          <a:p>
+            <a:pPr algn="ctr"/>
+            <a:r>
+              <a:rPr sz="2000" b="1" i="0">
+                <a:solidFill>
+                  <a:srgbClr val="FFFFFF"/>
+                </a:solidFill>
+                <a:latin typeface="Calibri"/>
+              </a:rPr>
+              <a:t>Transmit</a:t>
+            </a:r>
+          </a:p>
+        </p:txBody>
+      </p:sp>
+      <p:cxnSp>
+        <p:nvCxnSpPr>
+          <p:cNvPr id="24" name="B3 Behavior t sample-timer"/>
+          <p:cNvCxnSpPr/>
+          <p:nvPr/>
+        </p:nvCxnSpPr>
+        <p:spPr>
+          <a:xfrm>
+            <a:off x="7180920" y="1920240"/>
+            <a:ext cx="0" cy="640080"/>
+          </a:xfrm>
+          <a:prstGeom prst="line">
+            <a:avLst/>
+          </a:prstGeom>
+          <a:ln w="19050">
+            <a:solidFill>
+              <a:srgbClr val="5C4826"/>
+            </a:solidFill>
+            <a:tailEnd type="triangle" w="med" len="med"/>
+          </a:ln>
+          <a:effectLst/>
+        </p:spPr>
+        <p:style>
+          <a:lnRef idx="2">
+            <a:schemeClr val="accent1"/>
+          </a:lnRef>
+          <a:fillRef idx="0">
+            <a:schemeClr val="accent1"/>
+          </a:fillRef>
+          <a:effectRef idx="1">
+            <a:schemeClr val="accent1"/>
+          </a:effectRef>
+          <a:fontRef idx="minor">
+            <a:schemeClr val="tx1"/>
+          </a:fontRef>
+        </p:style>
+      </p:cxnSp>
+      <p:cxnSp>
+        <p:nvCxnSpPr>
+          <p:cNvPr id="25" name="B3 Behavior t done"/>
+          <p:cNvCxnSpPr/>
+          <p:nvPr/>
+        </p:nvCxnSpPr>
+        <p:spPr>
+          <a:xfrm flipV="1">
+            <a:off x="7540920" y="1920240"/>
+            <a:ext cx="0" cy="640080"/>
+          </a:xfrm>
+          <a:prstGeom prst="line">
+            <a:avLst/>
+          </a:prstGeom>
+          <a:ln w="19050">
+            <a:solidFill>
+              <a:srgbClr val="5C4826"/>
+            </a:solidFill>
+            <a:tailEnd type="triangle" w="med" len="med"/>
+          </a:ln>
+          <a:effectLst/>
+        </p:spPr>
+        <p:style>
+          <a:lnRef idx="2">
+            <a:schemeClr val="accent1"/>
+          </a:lnRef>
+          <a:fillRef idx="0">
+            <a:schemeClr val="accent1"/>
+          </a:fillRef>
+          <a:effectRef idx="1">
+            <a:schemeClr val="accent1"/>
+          </a:effectRef>
+          <a:fontRef idx="minor">
+            <a:schemeClr val="tx1"/>
+          </a:fontRef>
+        </p:style>
+      </p:cxnSp>
+      <p:sp>
+        <p:nvSpPr>
+          <p:cNvPr id="26" name="B3 Behavior lbl sample timer"/>
+          <p:cNvSpPr txBox="1"/>
+          <p:nvPr/>
+        </p:nvSpPr>
+        <p:spPr>
+          <a:xfrm>
+            <a:off x="6200920" y="2010280"/>
+            <a:ext cx="900000" cy="460000"/>
+          </a:xfrm>
+          <a:prstGeom prst="rect">
+            <a:avLst/>
+          </a:prstGeom>
+          <a:noFill/>
+        </p:spPr>
+        <p:txBody>
+          <a:bodyPr wrap="square" lIns="0" tIns="0" rIns="0" bIns="0" anchor="t">
+            <a:spAutoFit/>
+          </a:bodyPr>
+          <a:lstStyle/>
+          <a:p>
+            <a:pPr algn="r"/>
+            <a:r>
+              <a:rPr sz="1800" b="0" i="1">
+                <a:solidFill>
+                  <a:srgbClr val="555960"/>
+                </a:solidFill>
+                <a:latin typeface="Calibri"/>
+              </a:rPr>
+              <a:t>sample</a:t>
+            </a:r>
+          </a:p>
+          <a:p>
+            <a:pPr algn="r"/>
+            <a:r>
+              <a:rPr sz="1800" b="0" i="1">
+                <a:solidFill>
+                  <a:srgbClr val="555960"/>
+                </a:solidFill>
+                <a:latin typeface="Calibri"/>
+              </a:rPr>
+              <a:t>timer</a:t>
+            </a:r>
+          </a:p>
+        </p:txBody>
+      </p:sp>
+      <p:sp>
+        <p:nvSpPr>
+          <p:cNvPr id="27" name="B3 Behavior lbl done"/>
+          <p:cNvSpPr txBox="1"/>
+          <p:nvPr/>
+        </p:nvSpPr>
+        <p:spPr>
+          <a:xfrm>
+            <a:off x="7610920" y="2125280"/>
+            <a:ext cx="500000" cy="230000"/>
+          </a:xfrm>
+          <a:prstGeom prst="rect">
+            <a:avLst/>
+          </a:prstGeom>
+          <a:noFill/>
+        </p:spPr>
+        <p:txBody>
+          <a:bodyPr wrap="square" lIns="0" tIns="0" rIns="0" bIns="0" anchor="t">
+            <a:spAutoFit/>
+          </a:bodyPr>
+          <a:lstStyle/>
+          <a:p>
+            <a:pPr algn="l"/>
+            <a:r>
+              <a:rPr sz="1800" b="0" i="1">
+                <a:solidFill>
+                  <a:srgbClr val="555960"/>
+                </a:solidFill>
+                <a:latin typeface="Calibri"/>
+              </a:rPr>
+              <a:t>done</a:t>
+            </a:r>
+          </a:p>
+        </p:txBody>
+      </p:sp>
+      <p:cxnSp>
+        <p:nvCxnSpPr>
+          <p:cNvPr id="28" name="B3 Behavior t buffer-full"/>
+          <p:cNvCxnSpPr/>
+          <p:nvPr/>
+        </p:nvCxnSpPr>
+        <p:spPr>
+          <a:xfrm>
+            <a:off x="7360920" y="3200400"/>
+            <a:ext cx="0" cy="640080"/>
+          </a:xfrm>
+          <a:prstGeom prst="line">
+            <a:avLst/>
+          </a:prstGeom>
+          <a:ln w="25400">
+            <a:solidFill>
+              <a:srgbClr val="C8102E"/>
+            </a:solidFill>
+            <a:tailEnd type="triangle" w="med" len="med"/>
+          </a:ln>
+          <a:effectLst/>
+        </p:spPr>
+        <p:style>
+          <a:lnRef idx="2">
+            <a:schemeClr val="accent1"/>
+          </a:lnRef>
+          <a:fillRef idx="0">
+            <a:schemeClr val="accent1"/>
+          </a:fillRef>
+          <a:effectRef idx="1">
+            <a:schemeClr val="accent1"/>
+          </a:effectRef>
+          <a:fontRef idx="minor">
+            <a:schemeClr val="tx1"/>
+          </a:fontRef>
+        </p:style>
+      </p:cxnSp>
+      <p:sp>
+        <p:nvSpPr>
+          <p:cNvPr id="29" name="B3 Behavior lbl buffer full"/>
+          <p:cNvSpPr txBox="1"/>
+          <p:nvPr/>
+        </p:nvSpPr>
+        <p:spPr>
+          <a:xfrm>
+            <a:off x="6330920" y="3405440"/>
+            <a:ext cx="960000" cy="230000"/>
+          </a:xfrm>
+          <a:prstGeom prst="rect">
+            <a:avLst/>
+          </a:prstGeom>
+          <a:noFill/>
+        </p:spPr>
+        <p:txBody>
+          <a:bodyPr wrap="square" lIns="0" tIns="0" rIns="0" bIns="0" anchor="t">
+            <a:spAutoFit/>
+          </a:bodyPr>
+          <a:lstStyle/>
+          <a:p>
+            <a:pPr algn="r"/>
+            <a:r>
+              <a:rPr sz="1800" b="1" i="1">
+                <a:solidFill>
+                  <a:srgbClr val="C8102E"/>
+                </a:solidFill>
+                <a:latin typeface="Calibri"/>
+              </a:rPr>
+              <a:t>buffer full</a:t>
+            </a:r>
+          </a:p>
+        </p:txBody>
+      </p:sp>
+      <p:cxnSp>
+        <p:nvCxnSpPr>
+          <p:cNvPr id="30" name="B3 Behavior rail-r top-h"/>
+          <p:cNvCxnSpPr/>
+          <p:nvPr/>
+        </p:nvCxnSpPr>
+        <p:spPr>
+          <a:xfrm>
+            <a:off x="8001000" y="1600200"/>
+            <a:ext cx="419000" cy="0"/>
+          </a:xfrm>
+          <a:prstGeom prst="line">
+            <a:avLst/>
+          </a:prstGeom>
+          <a:ln w="19050">
+            <a:solidFill>
+              <a:srgbClr val="5C4826"/>
+            </a:solidFill>
+          </a:ln>
+          <a:effectLst/>
+        </p:spPr>
+        <p:style>
+          <a:lnRef idx="2">
+            <a:schemeClr val="accent1"/>
+          </a:lnRef>
+          <a:fillRef idx="0">
+            <a:schemeClr val="accent1"/>
+          </a:fillRef>
+          <a:effectRef idx="1">
+            <a:schemeClr val="accent1"/>
+          </a:effectRef>
+          <a:fontRef idx="minor">
+            <a:schemeClr val="tx1"/>
+          </a:fontRef>
+        </p:style>
+      </p:cxnSp>
+      <p:cxnSp>
+        <p:nvCxnSpPr>
+          <p:cNvPr id="31" name="B3 Behavior rail-r v1"/>
+          <p:cNvCxnSpPr/>
+          <p:nvPr/>
+        </p:nvCxnSpPr>
+        <p:spPr>
+          <a:xfrm>
+            <a:off x="8420000" y="1600200"/>
+            <a:ext cx="0" cy="1050160"/>
+          </a:xfrm>
+          <a:prstGeom prst="line">
+            <a:avLst/>
+          </a:prstGeom>
+          <a:ln w="19050">
+            <a:solidFill>
+              <a:srgbClr val="5C4826"/>
+            </a:solidFill>
+          </a:ln>
+          <a:effectLst/>
+        </p:spPr>
+        <p:style>
+          <a:lnRef idx="2">
+            <a:schemeClr val="accent1"/>
+          </a:lnRef>
+          <a:fillRef idx="0">
+            <a:schemeClr val="accent1"/>
+          </a:fillRef>
+          <a:effectRef idx="1">
+            <a:schemeClr val="accent1"/>
+          </a:effectRef>
+          <a:fontRef idx="minor">
+            <a:schemeClr val="tx1"/>
+          </a:fontRef>
+        </p:style>
+      </p:cxnSp>
+      <p:sp>
+        <p:nvSpPr>
+          <p:cNvPr id="32" name="B3 Behavior lbl tx timer"/>
+          <p:cNvSpPr txBox="1"/>
+          <p:nvPr/>
+        </p:nvSpPr>
+        <p:spPr>
+          <a:xfrm>
+            <a:off x="7990000" y="2660360"/>
+            <a:ext cx="860000" cy="460000"/>
+          </a:xfrm>
+          <a:prstGeom prst="rect">
+            <a:avLst/>
+          </a:prstGeom>
+          <a:noFill/>
+        </p:spPr>
+        <p:txBody>
+          <a:bodyPr wrap="square" lIns="0" tIns="0" rIns="0" bIns="0" anchor="t">
+            <a:spAutoFit/>
+          </a:bodyPr>
+          <a:lstStyle/>
+          <a:p>
+            <a:pPr algn="ctr"/>
+            <a:r>
+              <a:rPr sz="1800" b="0" i="1">
+                <a:solidFill>
+                  <a:srgbClr val="555960"/>
+                </a:solidFill>
+                <a:latin typeface="Calibri"/>
+              </a:rPr>
+              <a:t>tx timer</a:t>
+            </a:r>
+          </a:p>
+          <a:p>
+            <a:pPr algn="ctr"/>
+            <a:r>
+              <a:rPr sz="1800" b="0" i="1">
+                <a:solidFill>
+                  <a:srgbClr val="555960"/>
+                </a:solidFill>
+                <a:latin typeface="Calibri"/>
+              </a:rPr>
+              <a:t>(30 s)</a:t>
+            </a:r>
+          </a:p>
+        </p:txBody>
+      </p:sp>
+      <p:cxnSp>
+        <p:nvCxnSpPr>
+          <p:cNvPr id="33" name="B3 Behavior rail-r v2"/>
+          <p:cNvCxnSpPr/>
+          <p:nvPr/>
+        </p:nvCxnSpPr>
+        <p:spPr>
+          <a:xfrm>
+            <a:off x="8420000" y="3130360"/>
+            <a:ext cx="0" cy="1030160"/>
+          </a:xfrm>
+          <a:prstGeom prst="line">
+            <a:avLst/>
+          </a:prstGeom>
+          <a:ln w="19050">
+            <a:solidFill>
+              <a:srgbClr val="5C4826"/>
+            </a:solidFill>
+          </a:ln>
+          <a:effectLst/>
+        </p:spPr>
+        <p:style>
+          <a:lnRef idx="2">
+            <a:schemeClr val="accent1"/>
+          </a:lnRef>
+          <a:fillRef idx="0">
+            <a:schemeClr val="accent1"/>
+          </a:fillRef>
+          <a:effectRef idx="1">
+            <a:schemeClr val="accent1"/>
+          </a:effectRef>
+          <a:fontRef idx="minor">
+            <a:schemeClr val="tx1"/>
+          </a:fontRef>
+        </p:style>
+      </p:cxnSp>
+      <p:cxnSp>
+        <p:nvCxnSpPr>
+          <p:cNvPr id="34" name="B3 Behavior rail-r bot-h"/>
+          <p:cNvCxnSpPr/>
+          <p:nvPr/>
+        </p:nvCxnSpPr>
+        <p:spPr>
+          <a:xfrm flipH="1">
+            <a:off x="8001000" y="4160520"/>
+            <a:ext cx="419000" cy="0"/>
+          </a:xfrm>
+          <a:prstGeom prst="line">
+            <a:avLst/>
+          </a:prstGeom>
+          <a:ln w="19050">
+            <a:solidFill>
+              <a:srgbClr val="5C4826"/>
+            </a:solidFill>
+            <a:tailEnd type="triangle" w="med" len="med"/>
+          </a:ln>
+          <a:effectLst/>
+        </p:spPr>
+        <p:style>
+          <a:lnRef idx="2">
+            <a:schemeClr val="accent1"/>
+          </a:lnRef>
+          <a:fillRef idx="0">
+            <a:schemeClr val="accent1"/>
+          </a:fillRef>
+          <a:effectRef idx="1">
+            <a:schemeClr val="accent1"/>
+          </a:effectRef>
+          <a:fontRef idx="minor">
+            <a:schemeClr val="tx1"/>
+          </a:fontRef>
+        </p:style>
+      </p:cxnSp>
+      <p:cxnSp>
+        <p:nvCxnSpPr>
+          <p:cNvPr id="35" name="B3 Behavior rail-l bot-h"/>
+          <p:cNvCxnSpPr/>
+          <p:nvPr/>
+        </p:nvCxnSpPr>
+        <p:spPr>
+          <a:xfrm>
+            <a:off x="6180000" y="4160520"/>
+            <a:ext cx="540840" cy="0"/>
+          </a:xfrm>
+          <a:prstGeom prst="line">
+            <a:avLst/>
+          </a:prstGeom>
+          <a:ln w="19050">
+            <a:solidFill>
+              <a:srgbClr val="5C4826"/>
+            </a:solidFill>
+          </a:ln>
+          <a:effectLst/>
+        </p:spPr>
+        <p:style>
+          <a:lnRef idx="2">
+            <a:schemeClr val="accent1"/>
+          </a:lnRef>
+          <a:fillRef idx="0">
+            <a:schemeClr val="accent1"/>
+          </a:fillRef>
+          <a:effectRef idx="1">
+            <a:schemeClr val="accent1"/>
+          </a:effectRef>
+          <a:fontRef idx="minor">
+            <a:schemeClr val="tx1"/>
+          </a:fontRef>
+        </p:style>
+      </p:cxnSp>
+      <p:cxnSp>
+        <p:nvCxnSpPr>
+          <p:cNvPr id="36" name="B3 Behavior rail-l v2"/>
+          <p:cNvCxnSpPr/>
+          <p:nvPr/>
+        </p:nvCxnSpPr>
+        <p:spPr>
+          <a:xfrm>
+            <a:off x="6180000" y="3015360"/>
+            <a:ext cx="0" cy="1145160"/>
+          </a:xfrm>
+          <a:prstGeom prst="line">
+            <a:avLst/>
+          </a:prstGeom>
+          <a:ln w="19050">
+            <a:solidFill>
+              <a:srgbClr val="5C4826"/>
+            </a:solidFill>
+          </a:ln>
+          <a:effectLst/>
+        </p:spPr>
+        <p:style>
+          <a:lnRef idx="2">
+            <a:schemeClr val="accent1"/>
+          </a:lnRef>
+          <a:fillRef idx="0">
+            <a:schemeClr val="accent1"/>
+          </a:fillRef>
+          <a:effectRef idx="1">
+            <a:schemeClr val="accent1"/>
+          </a:effectRef>
+          <a:fontRef idx="minor">
+            <a:schemeClr val="tx1"/>
+          </a:fontRef>
+        </p:style>
+      </p:cxnSp>
+      <p:sp>
+        <p:nvSpPr>
+          <p:cNvPr id="37" name="B3 Behavior lbl tx done"/>
+          <p:cNvSpPr txBox="1"/>
+          <p:nvPr/>
+        </p:nvSpPr>
+        <p:spPr>
+          <a:xfrm>
+            <a:off x="5830000" y="2765360"/>
+            <a:ext cx="700000" cy="230000"/>
+          </a:xfrm>
+          <a:prstGeom prst="rect">
+            <a:avLst/>
+          </a:prstGeom>
+          <a:noFill/>
+        </p:spPr>
+        <p:txBody>
+          <a:bodyPr wrap="square" lIns="0" tIns="0" rIns="0" bIns="0" anchor="t">
+            <a:spAutoFit/>
+          </a:bodyPr>
+          <a:lstStyle/>
+          <a:p>
+            <a:pPr algn="ctr"/>
+            <a:r>
+              <a:rPr sz="1800" b="0" i="1">
+                <a:solidFill>
+                  <a:srgbClr val="555960"/>
+                </a:solidFill>
+                <a:latin typeface="Calibri"/>
+              </a:rPr>
+              <a:t>tx done</a:t>
+            </a:r>
+          </a:p>
+        </p:txBody>
+      </p:sp>
+      <p:cxnSp>
+        <p:nvCxnSpPr>
+          <p:cNvPr id="38" name="B3 Behavior rail-l v1"/>
+          <p:cNvCxnSpPr/>
+          <p:nvPr/>
+        </p:nvCxnSpPr>
+        <p:spPr>
+          <a:xfrm>
+            <a:off x="6180000" y="1600200"/>
+            <a:ext cx="0" cy="1145160"/>
+          </a:xfrm>
+          <a:prstGeom prst="line">
+            <a:avLst/>
+          </a:prstGeom>
+          <a:ln w="19050">
+            <a:solidFill>
+              <a:srgbClr val="5C4826"/>
+            </a:solidFill>
+          </a:ln>
+          <a:effectLst/>
+        </p:spPr>
+        <p:style>
+          <a:lnRef idx="2">
+            <a:schemeClr val="accent1"/>
+          </a:lnRef>
+          <a:fillRef idx="0">
+            <a:schemeClr val="accent1"/>
+          </a:fillRef>
+          <a:effectRef idx="1">
+            <a:schemeClr val="accent1"/>
+          </a:effectRef>
+          <a:fontRef idx="minor">
+            <a:schemeClr val="tx1"/>
+          </a:fontRef>
+        </p:style>
+      </p:cxnSp>
+      <p:cxnSp>
+        <p:nvCxnSpPr>
+          <p:cNvPr id="39" name="B3 Behavior rail-l top-h"/>
+          <p:cNvCxnSpPr/>
+          <p:nvPr/>
+        </p:nvCxnSpPr>
+        <p:spPr>
+          <a:xfrm>
+            <a:off x="6180000" y="1600200"/>
+            <a:ext cx="540840" cy="0"/>
+          </a:xfrm>
+          <a:prstGeom prst="line">
+            <a:avLst/>
+          </a:prstGeom>
+          <a:ln w="19050">
+            <a:solidFill>
+              <a:srgbClr val="5C4826"/>
+            </a:solidFill>
+            <a:tailEnd type="triangle" w="med" len="med"/>
+          </a:ln>
+          <a:effectLst/>
+        </p:spPr>
+        <p:style>
+          <a:lnRef idx="2">
+            <a:schemeClr val="accent1"/>
+          </a:lnRef>
+          <a:fillRef idx="0">
+            <a:schemeClr val="accent1"/>
+          </a:fillRef>
+          <a:effectRef idx="1">
+            <a:schemeClr val="accent1"/>
+          </a:effectRef>
+          <a:fontRef idx="minor">
+            <a:schemeClr val="tx1"/>
+          </a:fontRef>
+        </p:style>
+      </p:cxnSp>
+      <p:sp>
+        <p:nvSpPr>
+          <p:cNvPr id="40" name="B1 Question"/>
+          <p:cNvSpPr/>
+          <p:nvPr/>
+        </p:nvSpPr>
+        <p:spPr>
+          <a:xfrm>
+            <a:off x="320040" y="5257800"/>
+            <a:ext cx="2286000" cy="640080"/>
+          </a:xfrm>
+          <a:prstGeom prst="rect">
+            <a:avLst/>
+          </a:prstGeom>
+          <a:solidFill>
+            <a:srgbClr val="FBF8F2"/>
+          </a:solidFill>
+          <a:ln w="9525">
+            <a:solidFill>
+              <a:srgbClr val="C9B991"/>
+            </a:solidFill>
+          </a:ln>
+          <a:effectLst/>
+        </p:spPr>
+        <p:style>
+          <a:lnRef idx="1">
+            <a:schemeClr val="accent1"/>
+          </a:lnRef>
+          <a:fillRef idx="3">
+            <a:schemeClr val="accent1"/>
+          </a:fillRef>
+          <a:effectRef idx="2">
+            <a:schemeClr val="accent1"/>
+          </a:effectRef>
+          <a:fontRef idx="minor">
+            <a:schemeClr val="lt1"/>
+          </a:fontRef>
+        </p:style>
+        <p:txBody>
+          <a:bodyPr wrap="square" lIns="54864" tIns="27432" rIns="54864" bIns="27432" rtlCol="0" anchor="ctr"/>
+          <a:lstStyle/>
+          <a:p>
+            <a:pPr algn="ctr">
+              <a:lnSpc>
+                <a:spcPct val="95000"/>
+              </a:lnSpc>
+            </a:pPr>
+            <a:r>
+              <a:rPr sz="2000" b="0" i="1">
+                <a:solidFill>
+                  <a:srgbClr val="353638"/>
+                </a:solidFill>
+                <a:latin typeface="Calibri"/>
+              </a:rPr>
+              <a:t>“What components interact?”</a:t>
+            </a:r>
+          </a:p>
+        </p:txBody>
+      </p:sp>
+      <p:sp>
+        <p:nvSpPr>
+          <p:cNvPr id="41" name="B2 Question"/>
+          <p:cNvSpPr/>
+          <p:nvPr/>
+        </p:nvSpPr>
+        <p:spPr>
+          <a:xfrm>
+            <a:off x="2788920" y="5257800"/>
+            <a:ext cx="2926080" cy="640080"/>
+          </a:xfrm>
+          <a:prstGeom prst="rect">
+            <a:avLst/>
+          </a:prstGeom>
+          <a:solidFill>
+            <a:srgbClr val="FBF8F2"/>
+          </a:solidFill>
+          <a:ln w="9525">
+            <a:solidFill>
+              <a:srgbClr val="C9B991"/>
+            </a:solidFill>
+          </a:ln>
+          <a:effectLst/>
+        </p:spPr>
+        <p:style>
+          <a:lnRef idx="1">
+            <a:schemeClr val="accent1"/>
+          </a:lnRef>
+          <a:fillRef idx="3">
+            <a:schemeClr val="accent1"/>
+          </a:fillRef>
+          <a:effectRef idx="2">
+            <a:schemeClr val="accent1"/>
+          </a:effectRef>
+          <a:fontRef idx="minor">
+            <a:schemeClr val="lt1"/>
+          </a:fontRef>
+        </p:style>
+        <p:txBody>
+          <a:bodyPr wrap="square" lIns="54864" tIns="27432" rIns="54864" bIns="27432" rtlCol="0" anchor="ctr"/>
+          <a:lstStyle/>
+          <a:p>
+            <a:pPr algn="ctr">
+              <a:lnSpc>
+                <a:spcPct val="95000"/>
+              </a:lnSpc>
+            </a:pPr>
+            <a:r>
+              <a:rPr sz="2000" b="0" i="1">
+                <a:solidFill>
+                  <a:srgbClr val="353638"/>
+                </a:solidFill>
+                <a:latin typeface="Calibri"/>
+              </a:rPr>
+              <a:t>“How much data can we buffer?”</a:t>
+            </a:r>
+          </a:p>
+        </p:txBody>
+      </p:sp>
+      <p:sp>
+        <p:nvSpPr>
+          <p:cNvPr id="42" name="B3 Question"/>
+          <p:cNvSpPr/>
+          <p:nvPr/>
+        </p:nvSpPr>
+        <p:spPr>
+          <a:xfrm>
+            <a:off x="5897880" y="5257800"/>
+            <a:ext cx="2926080" cy="640080"/>
+          </a:xfrm>
+          <a:prstGeom prst="rect">
+            <a:avLst/>
+          </a:prstGeom>
+          <a:solidFill>
+            <a:srgbClr val="FBF8F2"/>
+          </a:solidFill>
+          <a:ln w="9525">
+            <a:solidFill>
+              <a:srgbClr val="C9B991"/>
+            </a:solidFill>
+          </a:ln>
+          <a:effectLst/>
+        </p:spPr>
+        <p:style>
+          <a:lnRef idx="1">
+            <a:schemeClr val="accent1"/>
+          </a:lnRef>
+          <a:fillRef idx="3">
+            <a:schemeClr val="accent1"/>
+          </a:fillRef>
+          <a:effectRef idx="2">
+            <a:schemeClr val="accent1"/>
+          </a:effectRef>
+          <a:fontRef idx="minor">
+            <a:schemeClr val="lt1"/>
+          </a:fontRef>
+        </p:style>
+        <p:txBody>
+          <a:bodyPr wrap="square" lIns="54864" tIns="27432" rIns="54864" bIns="27432" rtlCol="0" anchor="ctr"/>
+          <a:lstStyle/>
+          <a:p>
+            <a:pPr algn="ctr">
+              <a:lnSpc>
+                <a:spcPct val="95000"/>
+              </a:lnSpc>
+            </a:pPr>
+            <a:r>
+              <a:rPr sz="2000" b="0" i="1">
+                <a:solidFill>
+                  <a:srgbClr val="353638"/>
+                </a:solidFill>
+                <a:latin typeface="Calibri"/>
+              </a:rPr>
+              <a:t>“When can the radio transmit?”</a:t>
+            </a:r>
+          </a:p>
+        </p:txBody>
+      </p:sp>
+      <p:pic>
+        <p:nvPicPr>
+          <p:cNvPr id="43" name="Picture 43" descr="image1.png"/>
+          <p:cNvPicPr>
+            <a:picLocks noChangeAspect="1"/>
+          </p:cNvPicPr>
+          <p:nvPr/>
+        </p:nvPicPr>
+        <p:blipFill>
+          <a:blip r:embed="rId2"/>
+          <a:stretch>
+            <a:fillRect/>
+          </a:stretch>
+        </p:blipFill>
+        <p:spPr>
+          <a:xfrm>
+            <a:off x="8759952" y="6638544"/>
+            <a:ext cx="325247" cy="173736"/>
+          </a:xfrm>
+          <a:prstGeom prst="rect">
+            <a:avLst/>
+          </a:prstGeom>
+        </p:spPr>
+      </p:pic>
+    </p:spTree>
+  </p:cSld>
+  <p:clrMapOvr>
+    <a:masterClrMapping/>
+  </p:clrMapOvr>
+</p:sld>
+</file>
+
+<file path=ppt/slides/slide28.xml><?xml version="1.0" encoding="utf-8"?>
+<p:sld xmlns:a="http://schemas.openxmlformats.org/drawingml/2006/main" xmlns:p="http://schemas.openxmlformats.org/presentationml/2006/main" xmlns:r="http://schemas.openxmlformats.org/officeDocument/2006/relationships">
+  <p:cSld>
+    <p:spTree>
+      <p:nvGrpSpPr>
+        <p:cNvPr id="1" name=""/>
+        <p:cNvGrpSpPr/>
+        <p:nvPr/>
+      </p:nvGrpSpPr>
+      <p:grpSpPr/>
+      <p:sp>
+        <p:nvSpPr>
+          <p:cNvPr id="2" name="Title"/>
+          <p:cNvSpPr txBox="1"/>
+          <p:nvPr/>
+        </p:nvSpPr>
+        <p:spPr>
+          <a:xfrm>
+            <a:off x="320040" y="201168"/>
+            <a:ext cx="8503920" cy="457200"/>
+          </a:xfrm>
+          <a:prstGeom prst="rect">
+            <a:avLst/>
+          </a:prstGeom>
+          <a:noFill/>
+        </p:spPr>
+        <p:txBody>
+          <a:bodyPr wrap="square" lIns="0" tIns="0" rIns="0" bIns="0" anchor="ctr">
+            <a:spAutoFit/>
+          </a:bodyPr>
+          <a:lstStyle/>
+          <a:p>
+            <a:pPr algn="l"/>
+            <a:r>
+              <a:rPr sz="2400" b="0" i="0" spc="140">
+                <a:solidFill>
+                  <a:srgbClr val="353638"/>
+                </a:solidFill>
+                <a:latin typeface="Calibri"/>
+              </a:rPr>
+              <a:t>Some questions cross models</a:t>
+            </a:r>
+          </a:p>
+        </p:txBody>
+      </p:sp>
+      <p:sp>
+        <p:nvSpPr>
+          <p:cNvPr id="3" name="Title rule"/>
+          <p:cNvSpPr/>
+          <p:nvPr/>
+        </p:nvSpPr>
+        <p:spPr>
+          <a:xfrm>
+            <a:off x="320040" y="731520"/>
+            <a:ext cx="8503920" cy="41148"/>
+          </a:xfrm>
+          <a:prstGeom prst="rect">
+            <a:avLst/>
+          </a:prstGeom>
+          <a:solidFill>
+            <a:srgbClr val="8E6F3E"/>
+          </a:solidFill>
+          <a:ln>
+            <a:noFill/>
+          </a:ln>
+          <a:effectLst/>
+        </p:spPr>
+        <p:style>
+          <a:lnRef idx="1">
+            <a:schemeClr val="accent1"/>
+          </a:lnRef>
+          <a:fillRef idx="3">
+            <a:schemeClr val="accent1"/>
+          </a:fillRef>
+          <a:effectRef idx="2">
+            <a:schemeClr val="accent1"/>
+          </a:effectRef>
+          <a:fontRef idx="minor">
+            <a:schemeClr val="lt1"/>
+          </a:fontRef>
+        </p:style>
+        <p:txBody>
+          <a:bodyPr wrap="square" lIns="54864" tIns="27432" rIns="54864" bIns="27432" rtlCol="0" anchor="ctr"/>
+          <a:lstStyle/>
+          <a:p>
+            <a:pPr algn="ctr"/>
+            <a:endParaRPr/>
+          </a:p>
+        </p:txBody>
+      </p:sp>
+      <p:sp>
+        <p:nvSpPr>
+          <p:cNvPr id="4" name="Footer takeaway"/>
+          <p:cNvSpPr/>
+          <p:nvPr/>
+        </p:nvSpPr>
+        <p:spPr>
+          <a:xfrm>
+            <a:off x="320040" y="6144768"/>
+            <a:ext cx="8503920" cy="420624"/>
+          </a:xfrm>
+          <a:prstGeom prst="rect">
+            <a:avLst/>
+          </a:prstGeom>
+          <a:solidFill>
+            <a:srgbClr val="8E6F3E"/>
+          </a:solidFill>
+          <a:ln>
+            <a:noFill/>
+          </a:ln>
+          <a:effectLst/>
+        </p:spPr>
+        <p:style>
+          <a:lnRef idx="1">
+            <a:schemeClr val="accent1"/>
+          </a:lnRef>
+          <a:fillRef idx="3">
+            <a:schemeClr val="accent1"/>
+          </a:fillRef>
+          <a:effectRef idx="2">
+            <a:schemeClr val="accent1"/>
+          </a:effectRef>
+          <a:fontRef idx="minor">
+            <a:schemeClr val="lt1"/>
+          </a:fontRef>
+        </p:style>
+        <p:txBody>
+          <a:bodyPr wrap="square" lIns="54864" tIns="27432" rIns="54864" bIns="27432" rtlCol="0" anchor="ctr"/>
+          <a:lstStyle/>
+          <a:p>
+            <a:pPr algn="ctr"/>
+            <a:r>
+              <a:rPr sz="1800" b="1" i="0">
+                <a:solidFill>
+                  <a:srgbClr val="FFFFFF"/>
+                </a:solidFill>
+                <a:latin typeface="Calibri"/>
+              </a:rPr>
+              <a:t>Composition combines meanings without requiring one model to say everything.</a:t>
+            </a:r>
+          </a:p>
+        </p:txBody>
+      </p:sp>
+      <p:sp>
+        <p:nvSpPr>
+          <p:cNvPr id="5" name="Page number"/>
+          <p:cNvSpPr txBox="1"/>
+          <p:nvPr/>
+        </p:nvSpPr>
+        <p:spPr>
+          <a:xfrm>
+            <a:off x="8229600" y="6647688"/>
+            <a:ext cx="457200" cy="228600"/>
+          </a:xfrm>
+          <a:prstGeom prst="rect">
+            <a:avLst/>
+          </a:prstGeom>
+          <a:noFill/>
+        </p:spPr>
+        <p:txBody>
+          <a:bodyPr wrap="square" lIns="0" tIns="0" rIns="0" bIns="0" anchor="t">
+            <a:spAutoFit/>
+          </a:bodyPr>
+          <a:lstStyle/>
+          <a:p>
+            <a:pPr algn="r"/>
+            <a:r>
+              <a:rPr sz="900" b="0" i="0">
+                <a:solidFill>
+                  <a:srgbClr val="555960"/>
+                </a:solidFill>
+                <a:latin typeface="Calibri"/>
+              </a:rPr>
+              <a:t>12</a:t>
+            </a:r>
+          </a:p>
+        </p:txBody>
+      </p:sp>
+      <p:sp>
+        <p:nvSpPr>
+          <p:cNvPr id="6" name="The question"/>
+          <p:cNvSpPr/>
+          <p:nvPr/>
+        </p:nvSpPr>
+        <p:spPr>
+          <a:xfrm>
+            <a:off x="2472000" y="871728"/>
+            <a:ext cx="4200000" cy="480060"/>
+          </a:xfrm>
+          <a:prstGeom prst="rect">
+            <a:avLst/>
+          </a:prstGeom>
+          <a:solidFill>
+            <a:srgbClr val="F5F1E8"/>
+          </a:solidFill>
+          <a:ln w="12700">
+            <a:solidFill>
+              <a:srgbClr val="C9B991"/>
+            </a:solidFill>
+          </a:ln>
+          <a:effectLst/>
+        </p:spPr>
+        <p:style>
+          <a:lnRef idx="1">
+            <a:schemeClr val="accent1"/>
+          </a:lnRef>
+          <a:fillRef idx="3">
+            <a:schemeClr val="accent1"/>
+          </a:fillRef>
+          <a:effectRef idx="2">
+            <a:schemeClr val="accent1"/>
+          </a:effectRef>
+          <a:fontRef idx="minor">
+            <a:schemeClr val="lt1"/>
+          </a:fontRef>
+        </p:style>
+        <p:txBody>
+          <a:bodyPr wrap="square" lIns="54864" tIns="27432" rIns="54864" bIns="27432" rtlCol="0" anchor="ctr"/>
+          <a:lstStyle/>
+          <a:p>
+            <a:pPr algn="ctr"/>
+            <a:r>
+              <a:rPr sz="2000" b="1" i="1">
+                <a:solidFill>
+                  <a:srgbClr val="353638"/>
+                </a:solidFill>
+                <a:latin typeface="Calibri"/>
+              </a:rPr>
+              <a:t>“Can the buffer overflow?”</a:t>
+            </a:r>
+          </a:p>
+        </p:txBody>
+      </p:sp>
+      <p:sp>
+        <p:nvSpPr>
+          <p:cNvPr id="7" name="Header RESOURCE MODEL"/>
+          <p:cNvSpPr txBox="1"/>
+          <p:nvPr/>
+        </p:nvSpPr>
+        <p:spPr>
+          <a:xfrm>
+            <a:off x="320040" y="1500000"/>
+            <a:ext cx="4114800" cy="274320"/>
+          </a:xfrm>
+          <a:prstGeom prst="rect">
+            <a:avLst/>
+          </a:prstGeom>
+          <a:noFill/>
+        </p:spPr>
+        <p:txBody>
+          <a:bodyPr wrap="square" lIns="0" tIns="0" rIns="0" bIns="0" anchor="t">
+            <a:spAutoFit/>
+          </a:bodyPr>
+          <a:lstStyle/>
+          <a:p>
+            <a:pPr algn="ctr"/>
+            <a:r>
+              <a:rPr sz="1800" b="1" i="0" spc="100">
+                <a:solidFill>
+                  <a:srgbClr val="8E6F3E"/>
+                </a:solidFill>
+                <a:latin typeface="Calibri"/>
+              </a:rPr>
+              <a:t>RESOURCE MODEL</a:t>
+            </a:r>
+          </a:p>
+        </p:txBody>
+      </p:sp>
+      <p:sp>
+        <p:nvSpPr>
+          <p:cNvPr id="8" name="Header BEHAVIOR MODEL"/>
+          <p:cNvSpPr txBox="1"/>
+          <p:nvPr/>
+        </p:nvSpPr>
+        <p:spPr>
+          <a:xfrm>
+            <a:off x="4709160" y="1500000"/>
+            <a:ext cx="4114800" cy="274320"/>
+          </a:xfrm>
+          <a:prstGeom prst="rect">
+            <a:avLst/>
+          </a:prstGeom>
+          <a:noFill/>
+        </p:spPr>
+        <p:txBody>
+          <a:bodyPr wrap="square" lIns="0" tIns="0" rIns="0" bIns="0" anchor="t">
+            <a:spAutoFit/>
+          </a:bodyPr>
+          <a:lstStyle/>
+          <a:p>
+            <a:pPr algn="ctr"/>
+            <a:r>
+              <a:rPr sz="1800" b="1" i="0" spc="100">
+                <a:solidFill>
+                  <a:srgbClr val="8E6F3E"/>
+                </a:solidFill>
+                <a:latin typeface="Calibri"/>
+              </a:rPr>
+              <a:t>BEHAVIOR MODEL</a:t>
+            </a:r>
+          </a:p>
+        </p:txBody>
+      </p:sp>
+      <p:sp>
+        <p:nvSpPr>
+          <p:cNvPr id="9" name="Resource Sensor"/>
+          <p:cNvSpPr/>
+          <p:nvPr/>
+        </p:nvSpPr>
+        <p:spPr>
+          <a:xfrm>
+            <a:off x="1600200" y="1874520"/>
+            <a:ext cx="1554480" cy="548640"/>
+          </a:xfrm>
+          <a:prstGeom prst="rect">
+            <a:avLst/>
+          </a:prstGeom>
+          <a:solidFill>
+            <a:srgbClr val="C9B991"/>
+          </a:solidFill>
+          <a:ln>
+            <a:noFill/>
+          </a:ln>
+          <a:effectLst/>
+        </p:spPr>
+        <p:style>
+          <a:lnRef idx="1">
+            <a:schemeClr val="accent1"/>
+          </a:lnRef>
+          <a:fillRef idx="3">
+            <a:schemeClr val="accent1"/>
+          </a:fillRef>
+          <a:effectRef idx="2">
+            <a:schemeClr val="accent1"/>
+          </a:effectRef>
+          <a:fontRef idx="minor">
+            <a:schemeClr val="lt1"/>
+          </a:fontRef>
+        </p:style>
+        <p:txBody>
+          <a:bodyPr wrap="square" lIns="54864" tIns="27432" rIns="54864" bIns="27432" rtlCol="0" anchor="ctr"/>
+          <a:lstStyle/>
+          <a:p>
+            <a:pPr algn="ctr"/>
+            <a:r>
+              <a:rPr sz="2000" b="1" i="0">
+                <a:solidFill>
+                  <a:srgbClr val="5C4826"/>
+                </a:solidFill>
+                <a:latin typeface="Calibri"/>
+              </a:rPr>
+              <a:t>Sensor</a:t>
+            </a:r>
+          </a:p>
+        </p:txBody>
+      </p:sp>
+      <p:sp>
+        <p:nvSpPr>
+          <p:cNvPr id="10" name="Resource Buffer"/>
+          <p:cNvSpPr/>
+          <p:nvPr/>
+        </p:nvSpPr>
+        <p:spPr>
+          <a:xfrm>
+            <a:off x="1600200" y="2971800"/>
+            <a:ext cx="1554480" cy="548640"/>
+          </a:xfrm>
+          <a:prstGeom prst="rect">
+            <a:avLst/>
+          </a:prstGeom>
+          <a:solidFill>
+            <a:srgbClr val="C9B991"/>
+          </a:solidFill>
+          <a:ln>
+            <a:noFill/>
+          </a:ln>
+          <a:effectLst/>
+        </p:spPr>
+        <p:style>
+          <a:lnRef idx="1">
+            <a:schemeClr val="accent1"/>
+          </a:lnRef>
+          <a:fillRef idx="3">
+            <a:schemeClr val="accent1"/>
+          </a:fillRef>
+          <a:effectRef idx="2">
+            <a:schemeClr val="accent1"/>
+          </a:effectRef>
+          <a:fontRef idx="minor">
+            <a:schemeClr val="lt1"/>
+          </a:fontRef>
+        </p:style>
+        <p:txBody>
+          <a:bodyPr wrap="square" lIns="54864" tIns="27432" rIns="54864" bIns="27432" rtlCol="0" anchor="ctr"/>
+          <a:lstStyle/>
+          <a:p>
+            <a:pPr algn="ctr"/>
+            <a:r>
+              <a:rPr sz="2000" b="1" i="0">
+                <a:solidFill>
+                  <a:srgbClr val="5C4826"/>
+                </a:solidFill>
+                <a:latin typeface="Calibri"/>
+              </a:rPr>
+              <a:t>Buffer</a:t>
+            </a:r>
+          </a:p>
+          <a:p>
+            <a:pPr algn="ctr"/>
+            <a:r>
+              <a:rPr sz="1800" b="0" i="0">
+                <a:solidFill>
+                  <a:srgbClr val="5C4826"/>
+                </a:solidFill>
+                <a:latin typeface="Consolas"/>
+              </a:rPr>
+              <a:t>cap 4 KiB</a:t>
+            </a:r>
+          </a:p>
+        </p:txBody>
+      </p:sp>
+      <p:sp>
+        <p:nvSpPr>
+          <p:cNvPr id="11" name="Resource Radio"/>
+          <p:cNvSpPr/>
+          <p:nvPr/>
+        </p:nvSpPr>
+        <p:spPr>
+          <a:xfrm>
+            <a:off x="1600200" y="4069080"/>
+            <a:ext cx="1554480" cy="548640"/>
+          </a:xfrm>
+          <a:prstGeom prst="rect">
+            <a:avLst/>
+          </a:prstGeom>
+          <a:solidFill>
+            <a:srgbClr val="C9B991"/>
+          </a:solidFill>
+          <a:ln>
+            <a:noFill/>
+          </a:ln>
+          <a:effectLst/>
+        </p:spPr>
+        <p:style>
+          <a:lnRef idx="1">
+            <a:schemeClr val="accent1"/>
+          </a:lnRef>
+          <a:fillRef idx="3">
+            <a:schemeClr val="accent1"/>
+          </a:fillRef>
+          <a:effectRef idx="2">
+            <a:schemeClr val="accent1"/>
+          </a:effectRef>
+          <a:fontRef idx="minor">
+            <a:schemeClr val="lt1"/>
+          </a:fontRef>
+        </p:style>
+        <p:txBody>
+          <a:bodyPr wrap="square" lIns="54864" tIns="27432" rIns="54864" bIns="27432" rtlCol="0" anchor="ctr"/>
+          <a:lstStyle/>
+          <a:p>
+            <a:pPr algn="ctr"/>
+            <a:r>
+              <a:rPr sz="2000" b="1" i="0">
+                <a:solidFill>
+                  <a:srgbClr val="5C4826"/>
+                </a:solidFill>
+                <a:latin typeface="Calibri"/>
+              </a:rPr>
+              <a:t>Radio</a:t>
+            </a:r>
+          </a:p>
+        </p:txBody>
+      </p:sp>
+      <p:cxnSp>
+        <p:nvCxnSpPr>
+          <p:cNvPr id="12" name="Resource arrow 1"/>
+          <p:cNvCxnSpPr/>
+          <p:nvPr/>
+        </p:nvCxnSpPr>
+        <p:spPr>
+          <a:xfrm>
+            <a:off x="2377440" y="2423160"/>
+            <a:ext cx="0" cy="548640"/>
+          </a:xfrm>
+          <a:prstGeom prst="line">
+            <a:avLst/>
+          </a:prstGeom>
+          <a:ln w="19050">
+            <a:solidFill>
+              <a:srgbClr val="5C4826"/>
+            </a:solidFill>
+            <a:tailEnd type="triangle" w="med" len="med"/>
+          </a:ln>
+          <a:effectLst/>
+        </p:spPr>
+        <p:style>
+          <a:lnRef idx="2">
+            <a:schemeClr val="accent1"/>
+          </a:lnRef>
+          <a:fillRef idx="0">
+            <a:schemeClr val="accent1"/>
+          </a:fillRef>
+          <a:effectRef idx="1">
+            <a:schemeClr val="accent1"/>
+          </a:effectRef>
+          <a:fontRef idx="minor">
+            <a:schemeClr val="tx1"/>
+          </a:fontRef>
+        </p:style>
+      </p:cxnSp>
+      <p:cxnSp>
+        <p:nvCxnSpPr>
+          <p:cNvPr id="13" name="Resource arrow 2"/>
+          <p:cNvCxnSpPr/>
+          <p:nvPr/>
+        </p:nvCxnSpPr>
+        <p:spPr>
+          <a:xfrm>
+            <a:off x="2377440" y="3520440"/>
+            <a:ext cx="0" cy="548640"/>
+          </a:xfrm>
+          <a:prstGeom prst="line">
+            <a:avLst/>
+          </a:prstGeom>
+          <a:ln w="19050">
+            <a:solidFill>
+              <a:srgbClr val="5C4826"/>
+            </a:solidFill>
+            <a:tailEnd type="triangle" w="med" len="med"/>
+          </a:ln>
+          <a:effectLst/>
+        </p:spPr>
+        <p:style>
+          <a:lnRef idx="2">
+            <a:schemeClr val="accent1"/>
+          </a:lnRef>
+          <a:fillRef idx="0">
+            <a:schemeClr val="accent1"/>
+          </a:fillRef>
+          <a:effectRef idx="1">
+            <a:schemeClr val="accent1"/>
+          </a:effectRef>
+          <a:fontRef idx="minor">
+            <a:schemeClr val="tx1"/>
+          </a:fontRef>
+        </p:style>
+      </p:cxnSp>
+      <p:sp>
+        <p:nvSpPr>
+          <p:cNvPr id="14" name="Resource label produces"/>
+          <p:cNvSpPr txBox="1"/>
+          <p:nvPr/>
+        </p:nvSpPr>
+        <p:spPr>
+          <a:xfrm>
+            <a:off x="2447440" y="2467480"/>
+            <a:ext cx="1550000" cy="460000"/>
+          </a:xfrm>
+          <a:prstGeom prst="rect">
+            <a:avLst/>
+          </a:prstGeom>
+          <a:noFill/>
+        </p:spPr>
+        <p:txBody>
+          <a:bodyPr wrap="square" lIns="0" tIns="0" rIns="0" bIns="0" anchor="t">
+            <a:spAutoFit/>
+          </a:bodyPr>
+          <a:lstStyle/>
+          <a:p>
+            <a:pPr algn="l"/>
+            <a:r>
+              <a:rPr sz="1800" b="0" i="1">
+                <a:solidFill>
+                  <a:srgbClr val="555960"/>
+                </a:solidFill>
+                <a:latin typeface="Calibri"/>
+              </a:rPr>
+              <a:t>produces</a:t>
+            </a:r>
+          </a:p>
+          <a:p>
+            <a:pPr algn="l"/>
+            <a:r>
+              <a:rPr sz="1800" b="0" i="0">
+                <a:solidFill>
+                  <a:srgbClr val="353638"/>
+                </a:solidFill>
+                <a:latin typeface="Consolas"/>
+              </a:rPr>
+              <a:t>512 B / 5 s</a:t>
+            </a:r>
+          </a:p>
+        </p:txBody>
+      </p:sp>
+      <p:sp>
+        <p:nvSpPr>
+          <p:cNvPr id="15" name="Resource label drained"/>
+          <p:cNvSpPr txBox="1"/>
+          <p:nvPr/>
+        </p:nvSpPr>
+        <p:spPr>
+          <a:xfrm>
+            <a:off x="2447440" y="3564760"/>
+            <a:ext cx="1550000" cy="460000"/>
+          </a:xfrm>
+          <a:prstGeom prst="rect">
+            <a:avLst/>
+          </a:prstGeom>
+          <a:noFill/>
+        </p:spPr>
+        <p:txBody>
+          <a:bodyPr wrap="square" lIns="0" tIns="0" rIns="0" bIns="0" anchor="t">
+            <a:spAutoFit/>
+          </a:bodyPr>
+          <a:lstStyle/>
+          <a:p>
+            <a:pPr algn="l"/>
+            <a:r>
+              <a:rPr sz="1800" b="0" i="1">
+                <a:solidFill>
+                  <a:srgbClr val="555960"/>
+                </a:solidFill>
+                <a:latin typeface="Calibri"/>
+              </a:rPr>
+              <a:t>drained by</a:t>
+            </a:r>
+          </a:p>
+          <a:p>
+            <a:pPr algn="l"/>
+            <a:r>
+              <a:rPr sz="1800" b="0" i="0">
+                <a:solidFill>
+                  <a:srgbClr val="353638"/>
+                </a:solidFill>
+                <a:latin typeface="Consolas"/>
+              </a:rPr>
+              <a:t>4096 B/s</a:t>
+            </a:r>
+          </a:p>
+        </p:txBody>
+      </p:sp>
+      <p:sp>
+        <p:nvSpPr>
+          <p:cNvPr id="16" name="Behavior Sleep"/>
+          <p:cNvSpPr/>
+          <p:nvPr/>
+        </p:nvSpPr>
+        <p:spPr>
+          <a:xfrm>
+            <a:off x="6126480" y="1874520"/>
+            <a:ext cx="1280160" cy="548640"/>
+          </a:xfrm>
+          <a:prstGeom prst="rect">
+            <a:avLst/>
+          </a:prstGeom>
+          <a:solidFill>
+            <a:srgbClr val="FBF8F2"/>
+          </a:solidFill>
+          <a:ln w="15875">
+            <a:solidFill>
+              <a:srgbClr val="5C4826"/>
+            </a:solidFill>
+          </a:ln>
+          <a:effectLst/>
+        </p:spPr>
+        <p:style>
+          <a:lnRef idx="1">
+            <a:schemeClr val="accent1"/>
+          </a:lnRef>
+          <a:fillRef idx="3">
+            <a:schemeClr val="accent1"/>
+          </a:fillRef>
+          <a:effectRef idx="2">
+            <a:schemeClr val="accent1"/>
+          </a:effectRef>
+          <a:fontRef idx="minor">
+            <a:schemeClr val="lt1"/>
+          </a:fontRef>
+        </p:style>
+        <p:txBody>
+          <a:bodyPr wrap="square" lIns="54864" tIns="27432" rIns="54864" bIns="27432" rtlCol="0" anchor="ctr"/>
+          <a:lstStyle/>
+          <a:p>
+            <a:pPr algn="ctr"/>
+            <a:r>
+              <a:rPr sz="2000" b="1" i="0">
+                <a:solidFill>
+                  <a:srgbClr val="5C4826"/>
+                </a:solidFill>
+                <a:latin typeface="Calibri"/>
+              </a:rPr>
+              <a:t>Sleep</a:t>
+            </a:r>
+          </a:p>
+        </p:txBody>
+      </p:sp>
+      <p:sp>
+        <p:nvSpPr>
+          <p:cNvPr id="17" name="Behavior Sample"/>
+          <p:cNvSpPr/>
+          <p:nvPr/>
+        </p:nvSpPr>
+        <p:spPr>
+          <a:xfrm>
+            <a:off x="6126480" y="2971800"/>
+            <a:ext cx="1280160" cy="548640"/>
+          </a:xfrm>
+          <a:prstGeom prst="rect">
+            <a:avLst/>
+          </a:prstGeom>
+          <a:solidFill>
+            <a:srgbClr val="FBF8F2"/>
+          </a:solidFill>
+          <a:ln w="15875">
+            <a:solidFill>
+              <a:srgbClr val="5C4826"/>
+            </a:solidFill>
+          </a:ln>
+          <a:effectLst/>
+        </p:spPr>
+        <p:style>
+          <a:lnRef idx="1">
+            <a:schemeClr val="accent1"/>
+          </a:lnRef>
+          <a:fillRef idx="3">
+            <a:schemeClr val="accent1"/>
+          </a:fillRef>
+          <a:effectRef idx="2">
+            <a:schemeClr val="accent1"/>
+          </a:effectRef>
+          <a:fontRef idx="minor">
+            <a:schemeClr val="lt1"/>
+          </a:fontRef>
+        </p:style>
+        <p:txBody>
+          <a:bodyPr wrap="square" lIns="54864" tIns="27432" rIns="54864" bIns="27432" rtlCol="0" anchor="ctr"/>
+          <a:lstStyle/>
+          <a:p>
+            <a:pPr algn="ctr"/>
+            <a:r>
+              <a:rPr sz="2000" b="1" i="0">
+                <a:solidFill>
+                  <a:srgbClr val="5C4826"/>
+                </a:solidFill>
+                <a:latin typeface="Calibri"/>
+              </a:rPr>
+              <a:t>Sample</a:t>
+            </a:r>
+          </a:p>
+        </p:txBody>
+      </p:sp>
+      <p:sp>
+        <p:nvSpPr>
+          <p:cNvPr id="18" name="Behavior Transmit"/>
+          <p:cNvSpPr/>
+          <p:nvPr/>
+        </p:nvSpPr>
+        <p:spPr>
+          <a:xfrm>
+            <a:off x="6126480" y="4069080"/>
+            <a:ext cx="1280160" cy="548640"/>
+          </a:xfrm>
+          <a:prstGeom prst="rect">
+            <a:avLst/>
+          </a:prstGeom>
+          <a:solidFill>
+            <a:srgbClr val="8E6F3E"/>
+          </a:solidFill>
+          <a:ln>
+            <a:noFill/>
+          </a:ln>
+          <a:effectLst/>
+        </p:spPr>
+        <p:style>
+          <a:lnRef idx="1">
+            <a:schemeClr val="accent1"/>
+          </a:lnRef>
+          <a:fillRef idx="3">
+            <a:schemeClr val="accent1"/>
+          </a:fillRef>
+          <a:effectRef idx="2">
+            <a:schemeClr val="accent1"/>
+          </a:effectRef>
+          <a:fontRef idx="minor">
+            <a:schemeClr val="lt1"/>
+          </a:fontRef>
+        </p:style>
+        <p:txBody>
+          <a:bodyPr wrap="square" lIns="54864" tIns="27432" rIns="54864" bIns="27432" rtlCol="0" anchor="ctr"/>
+          <a:lstStyle/>
+          <a:p>
+            <a:pPr algn="ctr"/>
+            <a:r>
+              <a:rPr sz="2000" b="1" i="0">
+                <a:solidFill>
+                  <a:srgbClr val="FFFFFF"/>
+                </a:solidFill>
+                <a:latin typeface="Calibri"/>
+              </a:rPr>
+              <a:t>Transmit</a:t>
+            </a:r>
+          </a:p>
+        </p:txBody>
+      </p:sp>
+      <p:cxnSp>
+        <p:nvCxnSpPr>
+          <p:cNvPr id="19" name="Behavior t sample-timer"/>
+          <p:cNvCxnSpPr/>
+          <p:nvPr/>
+        </p:nvCxnSpPr>
+        <p:spPr>
+          <a:xfrm>
+            <a:off x="6586560" y="2423160"/>
+            <a:ext cx="0" cy="548640"/>
+          </a:xfrm>
+          <a:prstGeom prst="line">
+            <a:avLst/>
+          </a:prstGeom>
+          <a:ln w="19050">
+            <a:solidFill>
+              <a:srgbClr val="5C4826"/>
+            </a:solidFill>
+            <a:tailEnd type="triangle" w="med" len="med"/>
+          </a:ln>
+          <a:effectLst/>
+        </p:spPr>
+        <p:style>
+          <a:lnRef idx="2">
+            <a:schemeClr val="accent1"/>
+          </a:lnRef>
+          <a:fillRef idx="0">
+            <a:schemeClr val="accent1"/>
+          </a:fillRef>
+          <a:effectRef idx="1">
+            <a:schemeClr val="accent1"/>
+          </a:effectRef>
+          <a:fontRef idx="minor">
+            <a:schemeClr val="tx1"/>
+          </a:fontRef>
+        </p:style>
+      </p:cxnSp>
+      <p:cxnSp>
+        <p:nvCxnSpPr>
+          <p:cNvPr id="20" name="Behavior t done"/>
+          <p:cNvCxnSpPr/>
+          <p:nvPr/>
+        </p:nvCxnSpPr>
+        <p:spPr>
+          <a:xfrm flipV="1">
+            <a:off x="6946560" y="2423160"/>
+            <a:ext cx="0" cy="548640"/>
+          </a:xfrm>
+          <a:prstGeom prst="line">
+            <a:avLst/>
+          </a:prstGeom>
+          <a:ln w="19050">
+            <a:solidFill>
+              <a:srgbClr val="5C4826"/>
+            </a:solidFill>
+            <a:tailEnd type="triangle" w="med" len="med"/>
+          </a:ln>
+          <a:effectLst/>
+        </p:spPr>
+        <p:style>
+          <a:lnRef idx="2">
+            <a:schemeClr val="accent1"/>
+          </a:lnRef>
+          <a:fillRef idx="0">
+            <a:schemeClr val="accent1"/>
+          </a:fillRef>
+          <a:effectRef idx="1">
+            <a:schemeClr val="accent1"/>
+          </a:effectRef>
+          <a:fontRef idx="minor">
+            <a:schemeClr val="tx1"/>
+          </a:fontRef>
+        </p:style>
+      </p:cxnSp>
+      <p:sp>
+        <p:nvSpPr>
+          <p:cNvPr id="21" name="Behavior lbl sample timer"/>
+          <p:cNvSpPr txBox="1"/>
+          <p:nvPr/>
+        </p:nvSpPr>
+        <p:spPr>
+          <a:xfrm>
+            <a:off x="5606560" y="2467480"/>
+            <a:ext cx="900000" cy="460000"/>
+          </a:xfrm>
+          <a:prstGeom prst="rect">
+            <a:avLst/>
+          </a:prstGeom>
+          <a:noFill/>
+        </p:spPr>
+        <p:txBody>
+          <a:bodyPr wrap="square" lIns="0" tIns="0" rIns="0" bIns="0" anchor="t">
+            <a:spAutoFit/>
+          </a:bodyPr>
+          <a:lstStyle/>
+          <a:p>
+            <a:pPr algn="r"/>
+            <a:r>
+              <a:rPr sz="1800" b="0" i="1">
+                <a:solidFill>
+                  <a:srgbClr val="555960"/>
+                </a:solidFill>
+                <a:latin typeface="Calibri"/>
+              </a:rPr>
+              <a:t>sample</a:t>
+            </a:r>
+          </a:p>
+          <a:p>
+            <a:pPr algn="r"/>
+            <a:r>
+              <a:rPr sz="1800" b="0" i="1">
+                <a:solidFill>
+                  <a:srgbClr val="555960"/>
+                </a:solidFill>
+                <a:latin typeface="Calibri"/>
+              </a:rPr>
+              <a:t>timer</a:t>
+            </a:r>
+          </a:p>
+        </p:txBody>
+      </p:sp>
+      <p:sp>
+        <p:nvSpPr>
+          <p:cNvPr id="22" name="Behavior lbl done"/>
+          <p:cNvSpPr txBox="1"/>
+          <p:nvPr/>
+        </p:nvSpPr>
+        <p:spPr>
+          <a:xfrm>
+            <a:off x="7016560" y="2582480"/>
+            <a:ext cx="500000" cy="230000"/>
+          </a:xfrm>
+          <a:prstGeom prst="rect">
+            <a:avLst/>
+          </a:prstGeom>
+          <a:noFill/>
+        </p:spPr>
+        <p:txBody>
+          <a:bodyPr wrap="square" lIns="0" tIns="0" rIns="0" bIns="0" anchor="t">
+            <a:spAutoFit/>
+          </a:bodyPr>
+          <a:lstStyle/>
+          <a:p>
+            <a:pPr algn="l"/>
+            <a:r>
+              <a:rPr sz="1800" b="0" i="1">
+                <a:solidFill>
+                  <a:srgbClr val="555960"/>
+                </a:solidFill>
+                <a:latin typeface="Calibri"/>
+              </a:rPr>
+              <a:t>done</a:t>
+            </a:r>
+          </a:p>
+        </p:txBody>
+      </p:sp>
+      <p:cxnSp>
+        <p:nvCxnSpPr>
+          <p:cNvPr id="23" name="Behavior t buffer-full"/>
+          <p:cNvCxnSpPr/>
+          <p:nvPr/>
+        </p:nvCxnSpPr>
+        <p:spPr>
+          <a:xfrm>
+            <a:off x="6766560" y="3520440"/>
+            <a:ext cx="0" cy="548640"/>
+          </a:xfrm>
+          <a:prstGeom prst="line">
+            <a:avLst/>
+          </a:prstGeom>
+          <a:ln w="25400">
+            <a:solidFill>
+              <a:srgbClr val="C8102E"/>
+            </a:solidFill>
+            <a:tailEnd type="triangle" w="med" len="med"/>
+          </a:ln>
+          <a:effectLst/>
+        </p:spPr>
+        <p:style>
+          <a:lnRef idx="2">
+            <a:schemeClr val="accent1"/>
+          </a:lnRef>
+          <a:fillRef idx="0">
+            <a:schemeClr val="accent1"/>
+          </a:fillRef>
+          <a:effectRef idx="1">
+            <a:schemeClr val="accent1"/>
+          </a:effectRef>
+          <a:fontRef idx="minor">
+            <a:schemeClr val="tx1"/>
+          </a:fontRef>
+        </p:style>
+      </p:cxnSp>
+      <p:sp>
+        <p:nvSpPr>
+          <p:cNvPr id="24" name="Behavior lbl buffer full"/>
+          <p:cNvSpPr txBox="1"/>
+          <p:nvPr/>
+        </p:nvSpPr>
+        <p:spPr>
+          <a:xfrm>
+            <a:off x="5736560" y="3679760"/>
+            <a:ext cx="960000" cy="230000"/>
+          </a:xfrm>
+          <a:prstGeom prst="rect">
+            <a:avLst/>
+          </a:prstGeom>
+          <a:noFill/>
+        </p:spPr>
+        <p:txBody>
+          <a:bodyPr wrap="square" lIns="0" tIns="0" rIns="0" bIns="0" anchor="t">
+            <a:spAutoFit/>
+          </a:bodyPr>
+          <a:lstStyle/>
+          <a:p>
+            <a:pPr algn="r"/>
+            <a:r>
+              <a:rPr sz="1800" b="1" i="1">
+                <a:solidFill>
+                  <a:srgbClr val="C8102E"/>
+                </a:solidFill>
+                <a:latin typeface="Calibri"/>
+              </a:rPr>
+              <a:t>buffer full</a:t>
+            </a:r>
+          </a:p>
+        </p:txBody>
+      </p:sp>
+      <p:cxnSp>
+        <p:nvCxnSpPr>
+          <p:cNvPr id="25" name="Behavior rail-r top-h"/>
+          <p:cNvCxnSpPr/>
+          <p:nvPr/>
+        </p:nvCxnSpPr>
+        <p:spPr>
+          <a:xfrm>
+            <a:off x="7406640" y="2148840"/>
+            <a:ext cx="419000" cy="0"/>
+          </a:xfrm>
+          <a:prstGeom prst="line">
+            <a:avLst/>
+          </a:prstGeom>
+          <a:ln w="19050">
+            <a:solidFill>
+              <a:srgbClr val="5C4826"/>
+            </a:solidFill>
+          </a:ln>
+          <a:effectLst/>
+        </p:spPr>
+        <p:style>
+          <a:lnRef idx="2">
+            <a:schemeClr val="accent1"/>
+          </a:lnRef>
+          <a:fillRef idx="0">
+            <a:schemeClr val="accent1"/>
+          </a:fillRef>
+          <a:effectRef idx="1">
+            <a:schemeClr val="accent1"/>
+          </a:effectRef>
+          <a:fontRef idx="minor">
+            <a:schemeClr val="tx1"/>
+          </a:fontRef>
+        </p:style>
+      </p:cxnSp>
+      <p:cxnSp>
+        <p:nvCxnSpPr>
+          <p:cNvPr id="26" name="Behavior rail-r v1"/>
+          <p:cNvCxnSpPr/>
+          <p:nvPr/>
+        </p:nvCxnSpPr>
+        <p:spPr>
+          <a:xfrm>
+            <a:off x="7825640" y="2148840"/>
+            <a:ext cx="0" cy="867280"/>
+          </a:xfrm>
+          <a:prstGeom prst="line">
+            <a:avLst/>
+          </a:prstGeom>
+          <a:ln w="19050">
+            <a:solidFill>
+              <a:srgbClr val="5C4826"/>
+            </a:solidFill>
+          </a:ln>
+          <a:effectLst/>
+        </p:spPr>
+        <p:style>
+          <a:lnRef idx="2">
+            <a:schemeClr val="accent1"/>
+          </a:lnRef>
+          <a:fillRef idx="0">
+            <a:schemeClr val="accent1"/>
+          </a:fillRef>
+          <a:effectRef idx="1">
+            <a:schemeClr val="accent1"/>
+          </a:effectRef>
+          <a:fontRef idx="minor">
+            <a:schemeClr val="tx1"/>
+          </a:fontRef>
+        </p:style>
+      </p:cxnSp>
+      <p:sp>
+        <p:nvSpPr>
+          <p:cNvPr id="27" name="Behavior lbl tx timer"/>
+          <p:cNvSpPr txBox="1"/>
+          <p:nvPr/>
+        </p:nvSpPr>
+        <p:spPr>
+          <a:xfrm>
+            <a:off x="7395640" y="3026120"/>
+            <a:ext cx="860000" cy="460000"/>
+          </a:xfrm>
+          <a:prstGeom prst="rect">
+            <a:avLst/>
+          </a:prstGeom>
+          <a:noFill/>
+        </p:spPr>
+        <p:txBody>
+          <a:bodyPr wrap="square" lIns="0" tIns="0" rIns="0" bIns="0" anchor="t">
+            <a:spAutoFit/>
+          </a:bodyPr>
+          <a:lstStyle/>
+          <a:p>
+            <a:pPr algn="ctr"/>
+            <a:r>
+              <a:rPr sz="1800" b="0" i="1">
+                <a:solidFill>
+                  <a:srgbClr val="555960"/>
+                </a:solidFill>
+                <a:latin typeface="Calibri"/>
+              </a:rPr>
+              <a:t>tx timer</a:t>
+            </a:r>
+          </a:p>
+          <a:p>
+            <a:pPr algn="ctr"/>
+            <a:r>
+              <a:rPr sz="1800" b="0" i="1">
+                <a:solidFill>
+                  <a:srgbClr val="555960"/>
+                </a:solidFill>
+                <a:latin typeface="Calibri"/>
+              </a:rPr>
+              <a:t>(30 s)</a:t>
+            </a:r>
+          </a:p>
+        </p:txBody>
+      </p:sp>
+      <p:cxnSp>
+        <p:nvCxnSpPr>
+          <p:cNvPr id="28" name="Behavior rail-r v2"/>
+          <p:cNvCxnSpPr/>
+          <p:nvPr/>
+        </p:nvCxnSpPr>
+        <p:spPr>
+          <a:xfrm>
+            <a:off x="7825640" y="3496120"/>
+            <a:ext cx="0" cy="847280"/>
+          </a:xfrm>
+          <a:prstGeom prst="line">
+            <a:avLst/>
+          </a:prstGeom>
+          <a:ln w="19050">
+            <a:solidFill>
+              <a:srgbClr val="5C4826"/>
+            </a:solidFill>
+          </a:ln>
+          <a:effectLst/>
+        </p:spPr>
+        <p:style>
+          <a:lnRef idx="2">
+            <a:schemeClr val="accent1"/>
+          </a:lnRef>
+          <a:fillRef idx="0">
+            <a:schemeClr val="accent1"/>
+          </a:fillRef>
+          <a:effectRef idx="1">
+            <a:schemeClr val="accent1"/>
+          </a:effectRef>
+          <a:fontRef idx="minor">
+            <a:schemeClr val="tx1"/>
+          </a:fontRef>
+        </p:style>
+      </p:cxnSp>
+      <p:cxnSp>
+        <p:nvCxnSpPr>
+          <p:cNvPr id="29" name="Behavior rail-r bot-h"/>
+          <p:cNvCxnSpPr/>
+          <p:nvPr/>
+        </p:nvCxnSpPr>
+        <p:spPr>
+          <a:xfrm flipH="1">
+            <a:off x="7406640" y="4343400"/>
+            <a:ext cx="419000" cy="0"/>
+          </a:xfrm>
+          <a:prstGeom prst="line">
+            <a:avLst/>
+          </a:prstGeom>
+          <a:ln w="19050">
+            <a:solidFill>
+              <a:srgbClr val="5C4826"/>
+            </a:solidFill>
+            <a:tailEnd type="triangle" w="med" len="med"/>
+          </a:ln>
+          <a:effectLst/>
+        </p:spPr>
+        <p:style>
+          <a:lnRef idx="2">
+            <a:schemeClr val="accent1"/>
+          </a:lnRef>
+          <a:fillRef idx="0">
+            <a:schemeClr val="accent1"/>
+          </a:fillRef>
+          <a:effectRef idx="1">
+            <a:schemeClr val="accent1"/>
+          </a:effectRef>
+          <a:fontRef idx="minor">
+            <a:schemeClr val="tx1"/>
+          </a:fontRef>
+        </p:style>
+      </p:cxnSp>
+      <p:cxnSp>
+        <p:nvCxnSpPr>
+          <p:cNvPr id="30" name="Behavior rail-l bot-h"/>
+          <p:cNvCxnSpPr/>
+          <p:nvPr/>
+        </p:nvCxnSpPr>
+        <p:spPr>
+          <a:xfrm>
+            <a:off x="5585640" y="4343400"/>
+            <a:ext cx="540840" cy="0"/>
+          </a:xfrm>
+          <a:prstGeom prst="line">
+            <a:avLst/>
+          </a:prstGeom>
+          <a:ln w="19050">
+            <a:solidFill>
+              <a:srgbClr val="5C4826"/>
+            </a:solidFill>
+          </a:ln>
+          <a:effectLst/>
+        </p:spPr>
+        <p:style>
+          <a:lnRef idx="2">
+            <a:schemeClr val="accent1"/>
+          </a:lnRef>
+          <a:fillRef idx="0">
+            <a:schemeClr val="accent1"/>
+          </a:fillRef>
+          <a:effectRef idx="1">
+            <a:schemeClr val="accent1"/>
+          </a:effectRef>
+          <a:fontRef idx="minor">
+            <a:schemeClr val="tx1"/>
+          </a:fontRef>
+        </p:style>
+      </p:cxnSp>
+      <p:cxnSp>
+        <p:nvCxnSpPr>
+          <p:cNvPr id="31" name="Behavior rail-l v2"/>
+          <p:cNvCxnSpPr/>
+          <p:nvPr/>
+        </p:nvCxnSpPr>
+        <p:spPr>
+          <a:xfrm>
+            <a:off x="5585640" y="3381120"/>
+            <a:ext cx="0" cy="962280"/>
+          </a:xfrm>
+          <a:prstGeom prst="line">
+            <a:avLst/>
+          </a:prstGeom>
+          <a:ln w="19050">
+            <a:solidFill>
+              <a:srgbClr val="5C4826"/>
+            </a:solidFill>
+          </a:ln>
+          <a:effectLst/>
+        </p:spPr>
+        <p:style>
+          <a:lnRef idx="2">
+            <a:schemeClr val="accent1"/>
+          </a:lnRef>
+          <a:fillRef idx="0">
+            <a:schemeClr val="accent1"/>
+          </a:fillRef>
+          <a:effectRef idx="1">
+            <a:schemeClr val="accent1"/>
+          </a:effectRef>
+          <a:fontRef idx="minor">
+            <a:schemeClr val="tx1"/>
+          </a:fontRef>
+        </p:style>
+      </p:cxnSp>
+      <p:sp>
+        <p:nvSpPr>
+          <p:cNvPr id="32" name="Behavior lbl tx done"/>
+          <p:cNvSpPr txBox="1"/>
+          <p:nvPr/>
+        </p:nvSpPr>
+        <p:spPr>
+          <a:xfrm>
+            <a:off x="5235640" y="3131120"/>
+            <a:ext cx="700000" cy="230000"/>
+          </a:xfrm>
+          <a:prstGeom prst="rect">
+            <a:avLst/>
+          </a:prstGeom>
+          <a:noFill/>
+        </p:spPr>
+        <p:txBody>
+          <a:bodyPr wrap="square" lIns="0" tIns="0" rIns="0" bIns="0" anchor="t">
+            <a:spAutoFit/>
+          </a:bodyPr>
+          <a:lstStyle/>
+          <a:p>
+            <a:pPr algn="ctr"/>
+            <a:r>
+              <a:rPr sz="1800" b="0" i="1">
+                <a:solidFill>
+                  <a:srgbClr val="555960"/>
+                </a:solidFill>
+                <a:latin typeface="Calibri"/>
+              </a:rPr>
+              <a:t>tx done</a:t>
+            </a:r>
+          </a:p>
+        </p:txBody>
+      </p:sp>
+      <p:cxnSp>
+        <p:nvCxnSpPr>
+          <p:cNvPr id="33" name="Behavior rail-l v1"/>
+          <p:cNvCxnSpPr/>
+          <p:nvPr/>
+        </p:nvCxnSpPr>
+        <p:spPr>
+          <a:xfrm>
+            <a:off x="5585640" y="2148840"/>
+            <a:ext cx="0" cy="962280"/>
+          </a:xfrm>
+          <a:prstGeom prst="line">
+            <a:avLst/>
+          </a:prstGeom>
+          <a:ln w="19050">
+            <a:solidFill>
+              <a:srgbClr val="5C4826"/>
+            </a:solidFill>
+          </a:ln>
+          <a:effectLst/>
+        </p:spPr>
+        <p:style>
+          <a:lnRef idx="2">
+            <a:schemeClr val="accent1"/>
+          </a:lnRef>
+          <a:fillRef idx="0">
+            <a:schemeClr val="accent1"/>
+          </a:fillRef>
+          <a:effectRef idx="1">
+            <a:schemeClr val="accent1"/>
+          </a:effectRef>
+          <a:fontRef idx="minor">
+            <a:schemeClr val="tx1"/>
+          </a:fontRef>
+        </p:style>
+      </p:cxnSp>
+      <p:cxnSp>
+        <p:nvCxnSpPr>
+          <p:cNvPr id="34" name="Behavior rail-l top-h"/>
+          <p:cNvCxnSpPr/>
+          <p:nvPr/>
+        </p:nvCxnSpPr>
+        <p:spPr>
+          <a:xfrm>
+            <a:off x="5585640" y="2148840"/>
+            <a:ext cx="540840" cy="0"/>
+          </a:xfrm>
+          <a:prstGeom prst="line">
+            <a:avLst/>
+          </a:prstGeom>
+          <a:ln w="19050">
+            <a:solidFill>
+              <a:srgbClr val="5C4826"/>
+            </a:solidFill>
+            <a:tailEnd type="triangle" w="med" len="med"/>
+          </a:ln>
+          <a:effectLst/>
+        </p:spPr>
+        <p:style>
+          <a:lnRef idx="2">
+            <a:schemeClr val="accent1"/>
+          </a:lnRef>
+          <a:fillRef idx="0">
+            <a:schemeClr val="accent1"/>
+          </a:fillRef>
+          <a:effectRef idx="1">
+            <a:schemeClr val="accent1"/>
+          </a:effectRef>
+          <a:fontRef idx="minor">
+            <a:schemeClr val="tx1"/>
+          </a:fontRef>
+        </p:style>
+      </p:cxnSp>
+      <p:sp>
+        <p:nvSpPr>
+          <p:cNvPr id="35" name="Resource facts"/>
+          <p:cNvSpPr/>
+          <p:nvPr/>
+        </p:nvSpPr>
+        <p:spPr>
+          <a:xfrm>
+            <a:off x="320040" y="4800000"/>
+            <a:ext cx="4114800" cy="548640"/>
+          </a:xfrm>
+          <a:prstGeom prst="rect">
+            <a:avLst/>
+          </a:prstGeom>
+          <a:solidFill>
+            <a:srgbClr val="FBF8F2"/>
+          </a:solidFill>
+          <a:ln w="9525">
+            <a:solidFill>
+              <a:srgbClr val="C9B991"/>
+            </a:solidFill>
+          </a:ln>
+          <a:effectLst/>
+        </p:spPr>
+        <p:style>
+          <a:lnRef idx="1">
+            <a:schemeClr val="accent1"/>
+          </a:lnRef>
+          <a:fillRef idx="3">
+            <a:schemeClr val="accent1"/>
+          </a:fillRef>
+          <a:effectRef idx="2">
+            <a:schemeClr val="accent1"/>
+          </a:effectRef>
+          <a:fontRef idx="minor">
+            <a:schemeClr val="lt1"/>
+          </a:fontRef>
+        </p:style>
+        <p:txBody>
+          <a:bodyPr wrap="square" lIns="54864" tIns="27432" rIns="54864" bIns="27432" rtlCol="0" anchor="ctr"/>
+          <a:lstStyle/>
+          <a:p>
+            <a:pPr algn="ctr">
+              <a:lnSpc>
+                <a:spcPct val="100000"/>
+              </a:lnSpc>
+            </a:pPr>
+            <a:r>
+              <a:rPr sz="1800" b="0" i="0">
+                <a:solidFill>
+                  <a:srgbClr val="353638"/>
+                </a:solidFill>
+                <a:latin typeface="Calibri"/>
+              </a:rPr>
+              <a:t>capacity = 4 KiB · sample = 512 B</a:t>
+            </a:r>
+          </a:p>
+          <a:p>
+            <a:pPr algn="ctr">
+              <a:lnSpc>
+                <a:spcPct val="100000"/>
+              </a:lnSpc>
+            </a:pPr>
+            <a:r>
+              <a:rPr sz="1800" b="0" i="0">
+                <a:solidFill>
+                  <a:srgbClr val="353638"/>
+                </a:solidFill>
+                <a:latin typeface="Calibri"/>
+              </a:rPr>
+              <a:t>radio = 4096 B/s</a:t>
+            </a:r>
+          </a:p>
+        </p:txBody>
+      </p:sp>
+      <p:sp>
+        <p:nvSpPr>
+          <p:cNvPr id="36" name="Behavior facts"/>
+          <p:cNvSpPr/>
+          <p:nvPr/>
+        </p:nvSpPr>
+        <p:spPr>
+          <a:xfrm>
+            <a:off x="4709160" y="4800000"/>
+            <a:ext cx="4114800" cy="548640"/>
+          </a:xfrm>
+          <a:prstGeom prst="rect">
+            <a:avLst/>
+          </a:prstGeom>
+          <a:solidFill>
+            <a:srgbClr val="FBF8F2"/>
+          </a:solidFill>
+          <a:ln w="9525">
+            <a:solidFill>
+              <a:srgbClr val="C9B991"/>
+            </a:solidFill>
+          </a:ln>
+          <a:effectLst/>
+        </p:spPr>
+        <p:style>
+          <a:lnRef idx="1">
+            <a:schemeClr val="accent1"/>
+          </a:lnRef>
+          <a:fillRef idx="3">
+            <a:schemeClr val="accent1"/>
+          </a:fillRef>
+          <a:effectRef idx="2">
+            <a:schemeClr val="accent1"/>
+          </a:effectRef>
+          <a:fontRef idx="minor">
+            <a:schemeClr val="lt1"/>
+          </a:fontRef>
+        </p:style>
+        <p:txBody>
+          <a:bodyPr wrap="square" lIns="54864" tIns="27432" rIns="54864" bIns="27432" rtlCol="0" anchor="ctr"/>
+          <a:lstStyle/>
+          <a:p>
+            <a:pPr algn="ctr">
+              <a:lnSpc>
+                <a:spcPct val="100000"/>
+              </a:lnSpc>
+            </a:pPr>
+            <a:r>
+              <a:rPr sz="1800" b="0" i="0">
+                <a:solidFill>
+                  <a:srgbClr val="353638"/>
+                </a:solidFill>
+                <a:latin typeface="Calibri"/>
+              </a:rPr>
+              <a:t>sample every 5 s · Transmit drains buffer</a:t>
+            </a:r>
+          </a:p>
+          <a:p>
+            <a:pPr algn="ctr">
+              <a:lnSpc>
+                <a:spcPct val="100000"/>
+              </a:lnSpc>
+            </a:pPr>
+            <a:r>
+              <a:rPr sz="1800" b="0" i="0">
+                <a:solidFill>
+                  <a:srgbClr val="353638"/>
+                </a:solidFill>
+                <a:latin typeface="Calibri"/>
+              </a:rPr>
+              <a:t>Transmit depends on state</a:t>
+            </a:r>
+          </a:p>
+        </p:txBody>
+      </p:sp>
+      <p:sp>
+        <p:nvSpPr>
+          <p:cNvPr id="37" name="Composed reasoning"/>
+          <p:cNvSpPr/>
+          <p:nvPr/>
+        </p:nvSpPr>
+        <p:spPr>
+          <a:xfrm>
+            <a:off x="2972000" y="5530000"/>
+            <a:ext cx="3200000" cy="430000"/>
+          </a:xfrm>
+          <a:prstGeom prst="rect">
+            <a:avLst/>
+          </a:prstGeom>
+          <a:solidFill>
+            <a:srgbClr val="8E6F3E"/>
+          </a:solidFill>
+          <a:ln>
+            <a:noFill/>
+          </a:ln>
+          <a:effectLst/>
+        </p:spPr>
+        <p:style>
+          <a:lnRef idx="1">
+            <a:schemeClr val="accent1"/>
+          </a:lnRef>
+          <a:fillRef idx="3">
+            <a:schemeClr val="accent1"/>
+          </a:fillRef>
+          <a:effectRef idx="2">
+            <a:schemeClr val="accent1"/>
+          </a:effectRef>
+          <a:fontRef idx="minor">
+            <a:schemeClr val="lt1"/>
+          </a:fontRef>
+        </p:style>
+        <p:txBody>
+          <a:bodyPr wrap="square" lIns="54864" tIns="27432" rIns="54864" bIns="27432" rtlCol="0" anchor="ctr"/>
+          <a:lstStyle/>
+          <a:p>
+            <a:pPr algn="ctr"/>
+            <a:r>
+              <a:rPr sz="1800" b="1" i="0" spc="100">
+                <a:solidFill>
+                  <a:srgbClr val="FFFFFF"/>
+                </a:solidFill>
+                <a:latin typeface="Calibri"/>
+              </a:rPr>
+              <a:t>COMPOSED REASONING</a:t>
+            </a:r>
+          </a:p>
+        </p:txBody>
+      </p:sp>
+      <p:cxnSp>
+        <p:nvCxnSpPr>
+          <p:cNvPr id="38" name="Compose arrow L v1"/>
+          <p:cNvCxnSpPr/>
+          <p:nvPr/>
+        </p:nvCxnSpPr>
+        <p:spPr>
+          <a:xfrm>
+            <a:off x="2377440" y="5348640"/>
+            <a:ext cx="0" cy="90680"/>
+          </a:xfrm>
+          <a:prstGeom prst="line">
+            <a:avLst/>
+          </a:prstGeom>
+          <a:ln w="19050">
+            <a:solidFill>
+              <a:srgbClr val="5C4826"/>
+            </a:solidFill>
+          </a:ln>
+          <a:effectLst/>
+        </p:spPr>
+        <p:style>
+          <a:lnRef idx="2">
+            <a:schemeClr val="accent1"/>
+          </a:lnRef>
+          <a:fillRef idx="0">
+            <a:schemeClr val="accent1"/>
+          </a:fillRef>
+          <a:effectRef idx="1">
+            <a:schemeClr val="accent1"/>
+          </a:effectRef>
+          <a:fontRef idx="minor">
+            <a:schemeClr val="tx1"/>
+          </a:fontRef>
+        </p:style>
+      </p:cxnSp>
+      <p:cxnSp>
+        <p:nvCxnSpPr>
+          <p:cNvPr id="39" name="Compose arrow L h"/>
+          <p:cNvCxnSpPr/>
+          <p:nvPr/>
+        </p:nvCxnSpPr>
+        <p:spPr>
+          <a:xfrm>
+            <a:off x="2377440" y="5439320"/>
+            <a:ext cx="1394560" cy="0"/>
+          </a:xfrm>
+          <a:prstGeom prst="line">
+            <a:avLst/>
+          </a:prstGeom>
+          <a:ln w="19050">
+            <a:solidFill>
+              <a:srgbClr val="5C4826"/>
+            </a:solidFill>
+          </a:ln>
+          <a:effectLst/>
+        </p:spPr>
+        <p:style>
+          <a:lnRef idx="2">
+            <a:schemeClr val="accent1"/>
+          </a:lnRef>
+          <a:fillRef idx="0">
+            <a:schemeClr val="accent1"/>
+          </a:fillRef>
+          <a:effectRef idx="1">
+            <a:schemeClr val="accent1"/>
+          </a:effectRef>
+          <a:fontRef idx="minor">
+            <a:schemeClr val="tx1"/>
+          </a:fontRef>
+        </p:style>
+      </p:cxnSp>
+      <p:cxnSp>
+        <p:nvCxnSpPr>
+          <p:cNvPr id="40" name="Compose arrow L v2"/>
+          <p:cNvCxnSpPr/>
+          <p:nvPr/>
+        </p:nvCxnSpPr>
+        <p:spPr>
+          <a:xfrm>
+            <a:off x="3772000" y="5439320"/>
+            <a:ext cx="0" cy="90680"/>
+          </a:xfrm>
+          <a:prstGeom prst="line">
+            <a:avLst/>
+          </a:prstGeom>
+          <a:ln w="19050">
+            <a:solidFill>
+              <a:srgbClr val="5C4826"/>
+            </a:solidFill>
+            <a:tailEnd type="triangle" w="med" len="med"/>
+          </a:ln>
+          <a:effectLst/>
+        </p:spPr>
+        <p:style>
+          <a:lnRef idx="2">
+            <a:schemeClr val="accent1"/>
+          </a:lnRef>
+          <a:fillRef idx="0">
+            <a:schemeClr val="accent1"/>
+          </a:fillRef>
+          <a:effectRef idx="1">
+            <a:schemeClr val="accent1"/>
+          </a:effectRef>
+          <a:fontRef idx="minor">
+            <a:schemeClr val="tx1"/>
+          </a:fontRef>
+        </p:style>
+      </p:cxnSp>
+      <p:cxnSp>
+        <p:nvCxnSpPr>
+          <p:cNvPr id="41" name="Compose arrow R v1"/>
+          <p:cNvCxnSpPr/>
+          <p:nvPr/>
+        </p:nvCxnSpPr>
+        <p:spPr>
+          <a:xfrm>
+            <a:off x="6766560" y="5348640"/>
+            <a:ext cx="0" cy="90680"/>
+          </a:xfrm>
+          <a:prstGeom prst="line">
+            <a:avLst/>
+          </a:prstGeom>
+          <a:ln w="19050">
+            <a:solidFill>
+              <a:srgbClr val="5C4826"/>
+            </a:solidFill>
+          </a:ln>
+          <a:effectLst/>
+        </p:spPr>
+        <p:style>
+          <a:lnRef idx="2">
+            <a:schemeClr val="accent1"/>
+          </a:lnRef>
+          <a:fillRef idx="0">
+            <a:schemeClr val="accent1"/>
+          </a:fillRef>
+          <a:effectRef idx="1">
+            <a:schemeClr val="accent1"/>
+          </a:effectRef>
+          <a:fontRef idx="minor">
+            <a:schemeClr val="tx1"/>
+          </a:fontRef>
+        </p:style>
+      </p:cxnSp>
+      <p:cxnSp>
+        <p:nvCxnSpPr>
+          <p:cNvPr id="42" name="Compose arrow R h"/>
+          <p:cNvCxnSpPr/>
+          <p:nvPr/>
+        </p:nvCxnSpPr>
+        <p:spPr>
+          <a:xfrm>
+            <a:off x="5372000" y="5439320"/>
+            <a:ext cx="1394560" cy="0"/>
+          </a:xfrm>
+          <a:prstGeom prst="line">
+            <a:avLst/>
+          </a:prstGeom>
+          <a:ln w="19050">
+            <a:solidFill>
+              <a:srgbClr val="5C4826"/>
+            </a:solidFill>
+          </a:ln>
+          <a:effectLst/>
+        </p:spPr>
+        <p:style>
+          <a:lnRef idx="2">
+            <a:schemeClr val="accent1"/>
+          </a:lnRef>
+          <a:fillRef idx="0">
+            <a:schemeClr val="accent1"/>
+          </a:fillRef>
+          <a:effectRef idx="1">
+            <a:schemeClr val="accent1"/>
+          </a:effectRef>
+          <a:fontRef idx="minor">
+            <a:schemeClr val="tx1"/>
+          </a:fontRef>
+        </p:style>
+      </p:cxnSp>
+      <p:cxnSp>
+        <p:nvCxnSpPr>
+          <p:cNvPr id="43" name="Compose arrow R v2"/>
+          <p:cNvCxnSpPr/>
+          <p:nvPr/>
+        </p:nvCxnSpPr>
+        <p:spPr>
+          <a:xfrm>
+            <a:off x="5372000" y="5439320"/>
+            <a:ext cx="0" cy="90680"/>
+          </a:xfrm>
+          <a:prstGeom prst="line">
+            <a:avLst/>
+          </a:prstGeom>
+          <a:ln w="19050">
+            <a:solidFill>
+              <a:srgbClr val="5C4826"/>
+            </a:solidFill>
+            <a:tailEnd type="triangle" w="med" len="med"/>
+          </a:ln>
+          <a:effectLst/>
+        </p:spPr>
+        <p:style>
+          <a:lnRef idx="2">
+            <a:schemeClr val="accent1"/>
+          </a:lnRef>
+          <a:fillRef idx="0">
+            <a:schemeClr val="accent1"/>
+          </a:fillRef>
+          <a:effectRef idx="1">
+            <a:schemeClr val="accent1"/>
+          </a:effectRef>
+          <a:fontRef idx="minor">
+            <a:schemeClr val="tx1"/>
+          </a:fontRef>
+        </p:style>
+      </p:cxnSp>
+      <p:pic>
+        <p:nvPicPr>
+          <p:cNvPr id="44" name="Picture 44" descr="image1.png"/>
+          <p:cNvPicPr>
+            <a:picLocks noChangeAspect="1"/>
+          </p:cNvPicPr>
+          <p:nvPr/>
+        </p:nvPicPr>
+        <p:blipFill>
+          <a:blip r:embed="rId2"/>
           <a:stretch>
             <a:fillRect/>
           </a:stretch>
